--- a/output/wordlabs-able-suffix-3day.pptx
+++ b/output/wordlabs-able-suffix-3day.pptx
@@ -4240,7 +4240,7 @@
                 <a:ea typeface="Calibri" pitchFamily="34" charset="-122"/>
                 <a:cs typeface="Calibri" pitchFamily="34" charset="-120"/>
               </a:rPr>
-              <a:t>"able to be done"</a:t>
+              <a:t>"can be done; capable of"</a:t>
             </a:r>
             <a:endParaRPr lang="en-US" sz="2200" dirty="0"/>
           </a:p>
@@ -5288,7 +5288,7 @@
                 <a:ea typeface="Calibri" pitchFamily="34" charset="-122"/>
                 <a:cs typeface="Calibri" pitchFamily="34" charset="-120"/>
               </a:rPr>
-              <a:t>Word Labs  •  wordlabs.app  •  Suffix: '-able' = able to be done</a:t>
+              <a:t>Word Labs  •  wordlabs.app  •  Suffix: '-able' = can be done; capable of</a:t>
             </a:r>
             <a:endParaRPr lang="en-US" sz="800" dirty="0"/>
           </a:p>
@@ -5928,7 +5928,7 @@
                 <a:ea typeface="Calibri" pitchFamily="34" charset="-122"/>
                 <a:cs typeface="Calibri" pitchFamily="34" charset="-120"/>
               </a:rPr>
-              <a:t>Word Labs  •  wordlabs.app  •  Suffix: '-able' = able to be done</a:t>
+              <a:t>Word Labs  •  wordlabs.app  •  Suffix: '-able' = can be done; capable of</a:t>
             </a:r>
             <a:endParaRPr lang="en-US" sz="800" dirty="0"/>
           </a:p>
@@ -6040,7 +6040,7 @@
                 <a:ea typeface="Calibri" pitchFamily="34" charset="-122"/>
                 <a:cs typeface="Calibri" pitchFamily="34" charset="-120"/>
               </a:rPr>
-              <a:t>The teacher said the work was </a:t>
+              <a:t>The weather this week has been very </a:t>
             </a:r>
             <a:pPr algn="l" indent="0" marL="0">
               <a:buNone/>
@@ -6057,7 +6057,7 @@
                 <a:ea typeface="Calibri" pitchFamily="34" charset="-122"/>
                 <a:cs typeface="Calibri" pitchFamily="34" charset="-120"/>
               </a:rPr>
-              <a:t>manageable</a:t>
+              <a:t>changeable</a:t>
             </a:r>
             <a:pPr algn="l" indent="0" marL="0">
               <a:buNone/>
@@ -6071,7 +6071,7 @@
                 <a:ea typeface="Calibri" pitchFamily="34" charset="-122"/>
                 <a:cs typeface="Calibri" pitchFamily="34" charset="-120"/>
               </a:rPr>
-              <a:t>, and everyone found the activity </a:t>
+              <a:t>, but we still had an </a:t>
             </a:r>
             <a:pPr algn="l" indent="0" marL="0">
               <a:buNone/>
@@ -6102,7 +6102,7 @@
                 <a:ea typeface="Calibri" pitchFamily="34" charset="-122"/>
                 <a:cs typeface="Calibri" pitchFamily="34" charset="-120"/>
               </a:rPr>
-              <a:t>.</a:t>
+              <a:t> picnic in the park.</a:t>
             </a:r>
             <a:endParaRPr lang="en-US" sz="1800" dirty="0"/>
           </a:p>
@@ -6257,7 +6257,7 @@
                 <a:ea typeface="Trebuchet MS" pitchFamily="34" charset="-122"/>
                 <a:cs typeface="Trebuchet MS" pitchFamily="34" charset="-120"/>
               </a:rPr>
-              <a:t>manageable</a:t>
+              <a:t>changeable</a:t>
             </a:r>
             <a:endParaRPr lang="en-US" sz="1400" dirty="0"/>
           </a:p>
@@ -6716,7 +6716,7 @@
                 <a:ea typeface="Calibri" pitchFamily="34" charset="-122"/>
                 <a:cs typeface="Calibri" pitchFamily="34" charset="-120"/>
               </a:rPr>
-              <a:t>Word Labs  •  wordlabs.app  •  Suffix: '-able' = able to be done</a:t>
+              <a:t>Word Labs  •  wordlabs.app  •  Suffix: '-able' = can be done; capable of</a:t>
             </a:r>
             <a:endParaRPr lang="en-US" sz="800" dirty="0"/>
           </a:p>
@@ -6855,7 +6855,7 @@
                 <a:ea typeface="Trebuchet MS" pitchFamily="34" charset="-122"/>
                 <a:cs typeface="Trebuchet MS" pitchFamily="34" charset="-120"/>
               </a:rPr>
-              <a:t>manageable</a:t>
+              <a:t>changeable</a:t>
             </a:r>
             <a:endParaRPr lang="en-US" sz="2800" dirty="0"/>
           </a:p>
@@ -7543,7 +7543,7 @@
                 <a:ea typeface="Calibri" pitchFamily="34" charset="-122"/>
                 <a:cs typeface="Calibri" pitchFamily="34" charset="-120"/>
               </a:rPr>
-              <a:t>Word Labs  •  wordlabs.app  •  Suffix: '-able' = able to be done</a:t>
+              <a:t>Word Labs  •  wordlabs.app  •  Suffix: '-able' = can be done; capable of</a:t>
             </a:r>
             <a:endParaRPr lang="en-US" sz="800" dirty="0"/>
           </a:p>
@@ -7682,7 +7682,7 @@
                 <a:ea typeface="Trebuchet MS" pitchFamily="34" charset="-122"/>
                 <a:cs typeface="Trebuchet MS" pitchFamily="34" charset="-120"/>
               </a:rPr>
-              <a:t>manageable</a:t>
+              <a:t>changeable</a:t>
             </a:r>
             <a:endParaRPr lang="en-US" sz="2800" dirty="0"/>
           </a:p>
@@ -7821,7 +7821,7 @@
                 <a:ea typeface="Trebuchet MS" pitchFamily="34" charset="-122"/>
                 <a:cs typeface="Trebuchet MS" pitchFamily="34" charset="-120"/>
               </a:rPr>
-              <a:t>manage</a:t>
+              <a:t>change</a:t>
             </a:r>
             <a:endParaRPr lang="en-US" sz="1300" dirty="0"/>
           </a:p>
@@ -7860,7 +7860,7 @@
                 <a:ea typeface="Calibri" pitchFamily="34" charset="-122"/>
                 <a:cs typeface="Calibri" pitchFamily="34" charset="-120"/>
               </a:rPr>
-              <a:t>to handle or control</a:t>
+              <a:t>to alter or vary</a:t>
             </a:r>
             <a:endParaRPr lang="en-US" sz="850" dirty="0"/>
           </a:p>
@@ -7972,7 +7972,7 @@
                 <a:ea typeface="Calibri" pitchFamily="34" charset="-122"/>
                 <a:cs typeface="Calibri" pitchFamily="34" charset="-120"/>
               </a:rPr>
-              <a:t>able to be done</a:t>
+              <a:t>can be done; capable of</a:t>
             </a:r>
             <a:endParaRPr lang="en-US" sz="850" dirty="0"/>
           </a:p>
@@ -8011,7 +8011,7 @@
                 <a:ea typeface="Calibri" pitchFamily="34" charset="-122"/>
                 <a:cs typeface="Calibri" pitchFamily="34" charset="-120"/>
               </a:rPr>
-              <a:t>'e' kept before consonant suffix</a:t>
+              <a:t>'e' kept before '-able' here to preserve the /j/ sound of 'g'</a:t>
             </a:r>
             <a:endParaRPr lang="en-US" sz="700" dirty="0"/>
           </a:p>
@@ -8567,7 +8567,7 @@
                 <a:ea typeface="Calibri" pitchFamily="34" charset="-122"/>
                 <a:cs typeface="Calibri" pitchFamily="34" charset="-120"/>
               </a:rPr>
-              <a:t>Word Labs  •  wordlabs.app  •  Suffix: '-able' = able to be done</a:t>
+              <a:t>Word Labs  •  wordlabs.app  •  Suffix: '-able' = can be done; capable of</a:t>
             </a:r>
             <a:endParaRPr lang="en-US" sz="800" dirty="0"/>
           </a:p>
@@ -8706,7 +8706,7 @@
                 <a:ea typeface="Trebuchet MS" pitchFamily="34" charset="-122"/>
                 <a:cs typeface="Trebuchet MS" pitchFamily="34" charset="-120"/>
               </a:rPr>
-              <a:t>manageable</a:t>
+              <a:t>changeable</a:t>
             </a:r>
             <a:endParaRPr lang="en-US" sz="2800" dirty="0"/>
           </a:p>
@@ -8845,7 +8845,7 @@
                 <a:ea typeface="Trebuchet MS" pitchFamily="34" charset="-122"/>
                 <a:cs typeface="Trebuchet MS" pitchFamily="34" charset="-120"/>
               </a:rPr>
-              <a:t>manage</a:t>
+              <a:t>change</a:t>
             </a:r>
             <a:endParaRPr lang="en-US" sz="1300" dirty="0"/>
           </a:p>
@@ -8884,7 +8884,7 @@
                 <a:ea typeface="Calibri" pitchFamily="34" charset="-122"/>
                 <a:cs typeface="Calibri" pitchFamily="34" charset="-120"/>
               </a:rPr>
-              <a:t>to handle or control</a:t>
+              <a:t>to alter or vary</a:t>
             </a:r>
             <a:endParaRPr lang="en-US" sz="850" dirty="0"/>
           </a:p>
@@ -8996,7 +8996,7 @@
                 <a:ea typeface="Calibri" pitchFamily="34" charset="-122"/>
                 <a:cs typeface="Calibri" pitchFamily="34" charset="-120"/>
               </a:rPr>
-              <a:t>able to be done</a:t>
+              <a:t>can be done; capable of</a:t>
             </a:r>
             <a:endParaRPr lang="en-US" sz="850" dirty="0"/>
           </a:p>
@@ -9035,7 +9035,7 @@
                 <a:ea typeface="Calibri" pitchFamily="34" charset="-122"/>
                 <a:cs typeface="Calibri" pitchFamily="34" charset="-120"/>
               </a:rPr>
-              <a:t>'e' kept before consonant suffix</a:t>
+              <a:t>'e' kept before '-able' here to preserve the /j/ sound of 'g'</a:t>
             </a:r>
             <a:endParaRPr lang="en-US" sz="700" dirty="0"/>
           </a:p>
@@ -9142,8 +9142,8 @@
         </p:nvSpPr>
         <p:spPr>
           <a:xfrm>
-            <a:off x="1975104" y="3364992"/>
-            <a:ext cx="1554480" cy="475488"/>
+            <a:off x="2313432" y="3364992"/>
+            <a:ext cx="1645920" cy="475488"/>
           </a:xfrm>
           <a:prstGeom prst="rect">
             <a:avLst>
@@ -9169,8 +9169,8 @@
         </p:nvSpPr>
         <p:spPr>
           <a:xfrm>
-            <a:off x="1975104" y="3364992"/>
-            <a:ext cx="1554480" cy="475488"/>
+            <a:off x="2313432" y="3364992"/>
+            <a:ext cx="1645920" cy="475488"/>
           </a:xfrm>
           <a:prstGeom prst="rect">
             <a:avLst/>
@@ -9194,7 +9194,7 @@
                 <a:ea typeface="Trebuchet MS" pitchFamily="34" charset="-122"/>
                 <a:cs typeface="Trebuchet MS" pitchFamily="34" charset="-120"/>
               </a:rPr>
-              <a:t>man</a:t>
+              <a:t>change</a:t>
             </a:r>
             <a:endParaRPr lang="en-US" sz="1400" dirty="0"/>
           </a:p>
@@ -9208,8 +9208,8 @@
         </p:nvSpPr>
         <p:spPr>
           <a:xfrm>
-            <a:off x="3529584" y="3364992"/>
-            <a:ext cx="73152" cy="475488"/>
+            <a:off x="3959352" y="3364992"/>
+            <a:ext cx="411480" cy="475488"/>
           </a:xfrm>
           <a:prstGeom prst="rect">
             <a:avLst/>
@@ -9247,8 +9247,8 @@
         </p:nvSpPr>
         <p:spPr>
           <a:xfrm>
-            <a:off x="3602736" y="3364992"/>
-            <a:ext cx="1554480" cy="475488"/>
+            <a:off x="4370832" y="3364992"/>
+            <a:ext cx="1645920" cy="475488"/>
           </a:xfrm>
           <a:prstGeom prst="rect">
             <a:avLst>
@@ -9274,8 +9274,8 @@
         </p:nvSpPr>
         <p:spPr>
           <a:xfrm>
-            <a:off x="3602736" y="3364992"/>
-            <a:ext cx="1554480" cy="475488"/>
+            <a:off x="4370832" y="3364992"/>
+            <a:ext cx="1645920" cy="475488"/>
           </a:xfrm>
           <a:prstGeom prst="rect">
             <a:avLst/>
@@ -9299,7 +9299,7 @@
                 <a:ea typeface="Trebuchet MS" pitchFamily="34" charset="-122"/>
                 <a:cs typeface="Trebuchet MS" pitchFamily="34" charset="-120"/>
               </a:rPr>
-              <a:t>age</a:t>
+              <a:t>a</a:t>
             </a:r>
             <a:endParaRPr lang="en-US" sz="1400" dirty="0"/>
           </a:p>
@@ -9313,8 +9313,8 @@
         </p:nvSpPr>
         <p:spPr>
           <a:xfrm>
-            <a:off x="5157216" y="3364992"/>
-            <a:ext cx="73152" cy="475488"/>
+            <a:off x="6016752" y="3364992"/>
+            <a:ext cx="411480" cy="475488"/>
           </a:xfrm>
           <a:prstGeom prst="rect">
             <a:avLst/>
@@ -9352,8 +9352,8 @@
         </p:nvSpPr>
         <p:spPr>
           <a:xfrm>
-            <a:off x="5230368" y="3364992"/>
-            <a:ext cx="1554480" cy="475488"/>
+            <a:off x="6428232" y="3364992"/>
+            <a:ext cx="1645920" cy="475488"/>
           </a:xfrm>
           <a:prstGeom prst="rect">
             <a:avLst>
@@ -9379,8 +9379,8 @@
         </p:nvSpPr>
         <p:spPr>
           <a:xfrm>
-            <a:off x="5230368" y="3364992"/>
-            <a:ext cx="1554480" cy="475488"/>
+            <a:off x="6428232" y="3364992"/>
+            <a:ext cx="1645920" cy="475488"/>
           </a:xfrm>
           <a:prstGeom prst="rect">
             <a:avLst/>
@@ -9404,7 +9404,7 @@
                 <a:ea typeface="Trebuchet MS" pitchFamily="34" charset="-122"/>
                 <a:cs typeface="Trebuchet MS" pitchFamily="34" charset="-120"/>
               </a:rPr>
-              <a:t>a</a:t>
+              <a:t>ble</a:t>
             </a:r>
             <a:endParaRPr lang="en-US" sz="1400" dirty="0"/>
           </a:p>
@@ -9412,119 +9412,80 @@
       </p:sp>
       <p:sp>
         <p:nvSpPr>
-          <p:cNvPr id="34" name="Text 32"/>
-          <p:cNvSpPr/>
-          <p:nvPr/>
-        </p:nvSpPr>
-        <p:spPr>
-          <a:xfrm>
-            <a:off x="6784848" y="3364992"/>
-            <a:ext cx="73152" cy="475488"/>
-          </a:xfrm>
-          <a:prstGeom prst="rect">
-            <a:avLst/>
-          </a:prstGeom>
-          <a:noFill/>
-          <a:ln/>
-        </p:spPr>
-        <p:txBody>
-          <a:bodyPr wrap="square" lIns="0" tIns="0" rIns="0" bIns="0" rtlCol="0" anchor="ctr"/>
-          <a:lstStyle/>
-          <a:p>
-            <a:pPr algn="ctr" indent="0" marL="0">
-              <a:buNone/>
-            </a:pPr>
-            <a:r>
-              <a:rPr lang="en-US" sz="1600" b="1" dirty="0">
-                <a:solidFill>
-                  <a:srgbClr val="0D9488"/>
+          <p:cNvPr id="34" name="Shape 32"/>
+          <p:cNvSpPr/>
+          <p:nvPr/>
+        </p:nvSpPr>
+        <p:spPr>
+          <a:xfrm>
+            <a:off x="365760" y="4096512"/>
+            <a:ext cx="1371600" cy="804672"/>
+          </a:xfrm>
+          <a:prstGeom prst="rect">
+            <a:avLst>
+              <a:gd name="adj" fmla="val 6818"/>
+            </a:avLst>
+          </a:prstGeom>
+          <a:solidFill>
+            <a:srgbClr val="E2E8F0"/>
+          </a:solidFill>
+          <a:ln w="12700">
+            <a:solidFill>
+              <a:srgbClr val="E2E8F0"/>
+            </a:solidFill>
+            <a:prstDash val="solid"/>
+          </a:ln>
+        </p:spPr>
+      </p:sp>
+      <p:sp>
+        <p:nvSpPr>
+          <p:cNvPr id="35" name="Text 33"/>
+          <p:cNvSpPr/>
+          <p:nvPr/>
+        </p:nvSpPr>
+        <p:spPr>
+          <a:xfrm>
+            <a:off x="365760" y="4096512"/>
+            <a:ext cx="1371600" cy="804672"/>
+          </a:xfrm>
+          <a:prstGeom prst="rect">
+            <a:avLst/>
+          </a:prstGeom>
+          <a:noFill/>
+          <a:ln/>
+        </p:spPr>
+        <p:txBody>
+          <a:bodyPr wrap="square" lIns="0" tIns="0" rIns="0" bIns="0" rtlCol="0" anchor="ctr"/>
+          <a:lstStyle/>
+          <a:p>
+            <a:pPr algn="ctr" indent="0" marL="0">
+              <a:buNone/>
+            </a:pPr>
+            <a:r>
+              <a:rPr lang="en-US" sz="1100" b="1" dirty="0">
+                <a:solidFill>
+                  <a:srgbClr val="475569"/>
                 </a:solidFill>
                 <a:latin typeface="Trebuchet MS" pitchFamily="34" charset="0"/>
                 <a:ea typeface="Trebuchet MS" pitchFamily="34" charset="-122"/>
                 <a:cs typeface="Trebuchet MS" pitchFamily="34" charset="-120"/>
               </a:rPr>
-              <a:t>·</a:t>
-            </a:r>
-            <a:endParaRPr lang="en-US" sz="1600" dirty="0"/>
-          </a:p>
-        </p:txBody>
-      </p:sp>
-      <p:sp>
-        <p:nvSpPr>
-          <p:cNvPr id="35" name="Shape 33"/>
-          <p:cNvSpPr/>
-          <p:nvPr/>
-        </p:nvSpPr>
-        <p:spPr>
-          <a:xfrm>
-            <a:off x="6858000" y="3364992"/>
-            <a:ext cx="1554480" cy="475488"/>
-          </a:xfrm>
-          <a:prstGeom prst="rect">
-            <a:avLst>
-              <a:gd name="adj" fmla="val 9615"/>
-            </a:avLst>
-          </a:prstGeom>
-          <a:solidFill>
-            <a:srgbClr val="FFFFFF"/>
-          </a:solidFill>
-          <a:ln w="12700">
-            <a:solidFill>
-              <a:srgbClr val="0D9488"/>
-            </a:solidFill>
-            <a:prstDash val="solid"/>
-          </a:ln>
-        </p:spPr>
-      </p:sp>
-      <p:sp>
-        <p:nvSpPr>
-          <p:cNvPr id="36" name="Text 34"/>
-          <p:cNvSpPr/>
-          <p:nvPr/>
-        </p:nvSpPr>
-        <p:spPr>
-          <a:xfrm>
-            <a:off x="6858000" y="3364992"/>
-            <a:ext cx="1554480" cy="475488"/>
-          </a:xfrm>
-          <a:prstGeom prst="rect">
-            <a:avLst/>
-          </a:prstGeom>
-          <a:noFill/>
-          <a:ln/>
-        </p:spPr>
-        <p:txBody>
-          <a:bodyPr wrap="square" lIns="0" tIns="0" rIns="0" bIns="0" rtlCol="0" anchor="ctr"/>
-          <a:lstStyle/>
-          <a:p>
-            <a:pPr algn="ctr" indent="0" marL="0">
-              <a:buNone/>
-            </a:pPr>
-            <a:r>
-              <a:rPr lang="en-US" sz="1400" b="1" dirty="0">
-                <a:solidFill>
-                  <a:srgbClr val="0D9488"/>
-                </a:solidFill>
-                <a:latin typeface="Trebuchet MS" pitchFamily="34" charset="0"/>
-                <a:ea typeface="Trebuchet MS" pitchFamily="34" charset="-122"/>
-                <a:cs typeface="Trebuchet MS" pitchFamily="34" charset="-120"/>
-              </a:rPr>
-              <a:t>ble</a:t>
-            </a:r>
-            <a:endParaRPr lang="en-US" sz="1400" dirty="0"/>
-          </a:p>
-        </p:txBody>
-      </p:sp>
-      <p:sp>
-        <p:nvSpPr>
-          <p:cNvPr id="37" name="Shape 35"/>
-          <p:cNvSpPr/>
-          <p:nvPr/>
-        </p:nvSpPr>
-        <p:spPr>
-          <a:xfrm>
-            <a:off x="365760" y="4096512"/>
-            <a:ext cx="1371600" cy="804672"/>
+              <a:t>Phonemes</a:t>
+            </a:r>
+            <a:endParaRPr lang="en-US" sz="1100" dirty="0"/>
+          </a:p>
+        </p:txBody>
+      </p:sp>
+      <p:sp>
+        <p:nvSpPr>
+          <p:cNvPr id="36" name="Shape 34"/>
+          <p:cNvSpPr/>
+          <p:nvPr/>
+        </p:nvSpPr>
+        <p:spPr>
+          <a:xfrm>
+            <a:off x="1874520" y="4096512"/>
+            <a:ext cx="6903720" cy="804672"/>
           </a:xfrm>
           <a:prstGeom prst="rect">
             <a:avLst>
@@ -9532,85 +9493,19 @@
             </a:avLst>
           </a:prstGeom>
           <a:solidFill>
-            <a:srgbClr val="E2E8F0"/>
+            <a:srgbClr val="F8FAFC"/>
           </a:solidFill>
           <a:ln w="12700">
             <a:solidFill>
               <a:srgbClr val="E2E8F0"/>
             </a:solidFill>
-            <a:prstDash val="solid"/>
-          </a:ln>
-        </p:spPr>
-      </p:sp>
-      <p:sp>
-        <p:nvSpPr>
-          <p:cNvPr id="38" name="Text 36"/>
-          <p:cNvSpPr/>
-          <p:nvPr/>
-        </p:nvSpPr>
-        <p:spPr>
-          <a:xfrm>
-            <a:off x="365760" y="4096512"/>
-            <a:ext cx="1371600" cy="804672"/>
-          </a:xfrm>
-          <a:prstGeom prst="rect">
-            <a:avLst/>
-          </a:prstGeom>
-          <a:noFill/>
-          <a:ln/>
-        </p:spPr>
-        <p:txBody>
-          <a:bodyPr wrap="square" lIns="0" tIns="0" rIns="0" bIns="0" rtlCol="0" anchor="ctr"/>
-          <a:lstStyle/>
-          <a:p>
-            <a:pPr algn="ctr" indent="0" marL="0">
-              <a:buNone/>
-            </a:pPr>
-            <a:r>
-              <a:rPr lang="en-US" sz="1100" b="1" dirty="0">
-                <a:solidFill>
-                  <a:srgbClr val="475569"/>
-                </a:solidFill>
-                <a:latin typeface="Trebuchet MS" pitchFamily="34" charset="0"/>
-                <a:ea typeface="Trebuchet MS" pitchFamily="34" charset="-122"/>
-                <a:cs typeface="Trebuchet MS" pitchFamily="34" charset="-120"/>
-              </a:rPr>
-              <a:t>Phonemes</a:t>
-            </a:r>
-            <a:endParaRPr lang="en-US" sz="1100" dirty="0"/>
-          </a:p>
-        </p:txBody>
-      </p:sp>
-      <p:sp>
-        <p:nvSpPr>
-          <p:cNvPr id="39" name="Shape 37"/>
-          <p:cNvSpPr/>
-          <p:nvPr/>
-        </p:nvSpPr>
-        <p:spPr>
-          <a:xfrm>
-            <a:off x="1874520" y="4096512"/>
-            <a:ext cx="6903720" cy="804672"/>
-          </a:xfrm>
-          <a:prstGeom prst="rect">
-            <a:avLst>
-              <a:gd name="adj" fmla="val 6818"/>
-            </a:avLst>
-          </a:prstGeom>
-          <a:solidFill>
-            <a:srgbClr val="F8FAFC"/>
-          </a:solidFill>
-          <a:ln w="12700">
-            <a:solidFill>
-              <a:srgbClr val="E2E8F0"/>
-            </a:solidFill>
             <a:prstDash val="dash"/>
           </a:ln>
         </p:spPr>
       </p:sp>
       <p:sp>
         <p:nvSpPr>
-          <p:cNvPr id="40" name="Text 38"/>
+          <p:cNvPr id="37" name="Text 35"/>
           <p:cNvSpPr/>
           <p:nvPr/>
         </p:nvSpPr>
@@ -9933,7 +9828,7 @@
                 <a:ea typeface="Calibri" pitchFamily="34" charset="-122"/>
                 <a:cs typeface="Calibri" pitchFamily="34" charset="-120"/>
               </a:rPr>
-              <a:t>Word Labs  •  wordlabs.app  •  Suffix: '-able' = able to be done</a:t>
+              <a:t>Word Labs  •  wordlabs.app  •  Suffix: '-able' = can be done; capable of</a:t>
             </a:r>
             <a:endParaRPr lang="en-US" sz="800" dirty="0"/>
           </a:p>
@@ -10072,7 +9967,7 @@
                 <a:ea typeface="Trebuchet MS" pitchFamily="34" charset="-122"/>
                 <a:cs typeface="Trebuchet MS" pitchFamily="34" charset="-120"/>
               </a:rPr>
-              <a:t>manageable</a:t>
+              <a:t>changeable</a:t>
             </a:r>
             <a:endParaRPr lang="en-US" sz="2800" dirty="0"/>
           </a:p>
@@ -10211,7 +10106,7 @@
                 <a:ea typeface="Trebuchet MS" pitchFamily="34" charset="-122"/>
                 <a:cs typeface="Trebuchet MS" pitchFamily="34" charset="-120"/>
               </a:rPr>
-              <a:t>manage</a:t>
+              <a:t>change</a:t>
             </a:r>
             <a:endParaRPr lang="en-US" sz="1300" dirty="0"/>
           </a:p>
@@ -10250,7 +10145,7 @@
                 <a:ea typeface="Calibri" pitchFamily="34" charset="-122"/>
                 <a:cs typeface="Calibri" pitchFamily="34" charset="-120"/>
               </a:rPr>
-              <a:t>to handle or control</a:t>
+              <a:t>to alter or vary</a:t>
             </a:r>
             <a:endParaRPr lang="en-US" sz="850" dirty="0"/>
           </a:p>
@@ -10362,7 +10257,7 @@
                 <a:ea typeface="Calibri" pitchFamily="34" charset="-122"/>
                 <a:cs typeface="Calibri" pitchFamily="34" charset="-120"/>
               </a:rPr>
-              <a:t>able to be done</a:t>
+              <a:t>can be done; capable of</a:t>
             </a:r>
             <a:endParaRPr lang="en-US" sz="850" dirty="0"/>
           </a:p>
@@ -10401,7 +10296,7 @@
                 <a:ea typeface="Calibri" pitchFamily="34" charset="-122"/>
                 <a:cs typeface="Calibri" pitchFamily="34" charset="-120"/>
               </a:rPr>
-              <a:t>'e' kept before consonant suffix</a:t>
+              <a:t>'e' kept before '-able' here to preserve the /j/ sound of 'g'</a:t>
             </a:r>
             <a:endParaRPr lang="en-US" sz="700" dirty="0"/>
           </a:p>
@@ -10508,8 +10403,8 @@
         </p:nvSpPr>
         <p:spPr>
           <a:xfrm>
-            <a:off x="1975104" y="3364992"/>
-            <a:ext cx="1554480" cy="475488"/>
+            <a:off x="2313432" y="3364992"/>
+            <a:ext cx="1645920" cy="475488"/>
           </a:xfrm>
           <a:prstGeom prst="rect">
             <a:avLst>
@@ -10535,8 +10430,8 @@
         </p:nvSpPr>
         <p:spPr>
           <a:xfrm>
-            <a:off x="1975104" y="3364992"/>
-            <a:ext cx="1554480" cy="475488"/>
+            <a:off x="2313432" y="3364992"/>
+            <a:ext cx="1645920" cy="475488"/>
           </a:xfrm>
           <a:prstGeom prst="rect">
             <a:avLst/>
@@ -10560,7 +10455,7 @@
                 <a:ea typeface="Trebuchet MS" pitchFamily="34" charset="-122"/>
                 <a:cs typeface="Trebuchet MS" pitchFamily="34" charset="-120"/>
               </a:rPr>
-              <a:t>man</a:t>
+              <a:t>change</a:t>
             </a:r>
             <a:endParaRPr lang="en-US" sz="1400" dirty="0"/>
           </a:p>
@@ -10574,8 +10469,8 @@
         </p:nvSpPr>
         <p:spPr>
           <a:xfrm>
-            <a:off x="3529584" y="3364992"/>
-            <a:ext cx="73152" cy="475488"/>
+            <a:off x="3959352" y="3364992"/>
+            <a:ext cx="411480" cy="475488"/>
           </a:xfrm>
           <a:prstGeom prst="rect">
             <a:avLst/>
@@ -10613,8 +10508,8 @@
         </p:nvSpPr>
         <p:spPr>
           <a:xfrm>
-            <a:off x="3602736" y="3364992"/>
-            <a:ext cx="1554480" cy="475488"/>
+            <a:off x="4370832" y="3364992"/>
+            <a:ext cx="1645920" cy="475488"/>
           </a:xfrm>
           <a:prstGeom prst="rect">
             <a:avLst>
@@ -10640,8 +10535,8 @@
         </p:nvSpPr>
         <p:spPr>
           <a:xfrm>
-            <a:off x="3602736" y="3364992"/>
-            <a:ext cx="1554480" cy="475488"/>
+            <a:off x="4370832" y="3364992"/>
+            <a:ext cx="1645920" cy="475488"/>
           </a:xfrm>
           <a:prstGeom prst="rect">
             <a:avLst/>
@@ -10665,7 +10560,7 @@
                 <a:ea typeface="Trebuchet MS" pitchFamily="34" charset="-122"/>
                 <a:cs typeface="Trebuchet MS" pitchFamily="34" charset="-120"/>
               </a:rPr>
-              <a:t>age</a:t>
+              <a:t>a</a:t>
             </a:r>
             <a:endParaRPr lang="en-US" sz="1400" dirty="0"/>
           </a:p>
@@ -10679,8 +10574,8 @@
         </p:nvSpPr>
         <p:spPr>
           <a:xfrm>
-            <a:off x="5157216" y="3364992"/>
-            <a:ext cx="73152" cy="475488"/>
+            <a:off x="6016752" y="3364992"/>
+            <a:ext cx="411480" cy="475488"/>
           </a:xfrm>
           <a:prstGeom prst="rect">
             <a:avLst/>
@@ -10718,8 +10613,8 @@
         </p:nvSpPr>
         <p:spPr>
           <a:xfrm>
-            <a:off x="5230368" y="3364992"/>
-            <a:ext cx="1554480" cy="475488"/>
+            <a:off x="6428232" y="3364992"/>
+            <a:ext cx="1645920" cy="475488"/>
           </a:xfrm>
           <a:prstGeom prst="rect">
             <a:avLst>
@@ -10745,8 +10640,8 @@
         </p:nvSpPr>
         <p:spPr>
           <a:xfrm>
-            <a:off x="5230368" y="3364992"/>
-            <a:ext cx="1554480" cy="475488"/>
+            <a:off x="6428232" y="3364992"/>
+            <a:ext cx="1645920" cy="475488"/>
           </a:xfrm>
           <a:prstGeom prst="rect">
             <a:avLst/>
@@ -10770,7 +10665,7 @@
                 <a:ea typeface="Trebuchet MS" pitchFamily="34" charset="-122"/>
                 <a:cs typeface="Trebuchet MS" pitchFamily="34" charset="-120"/>
               </a:rPr>
-              <a:t>a</a:t>
+              <a:t>ble</a:t>
             </a:r>
             <a:endParaRPr lang="en-US" sz="1400" dirty="0"/>
           </a:p>
@@ -10778,211 +10673,238 @@
       </p:sp>
       <p:sp>
         <p:nvSpPr>
-          <p:cNvPr id="34" name="Text 32"/>
-          <p:cNvSpPr/>
-          <p:nvPr/>
-        </p:nvSpPr>
-        <p:spPr>
-          <a:xfrm>
-            <a:off x="6784848" y="3364992"/>
-            <a:ext cx="73152" cy="475488"/>
-          </a:xfrm>
-          <a:prstGeom prst="rect">
-            <a:avLst/>
-          </a:prstGeom>
-          <a:noFill/>
-          <a:ln/>
-        </p:spPr>
-        <p:txBody>
-          <a:bodyPr wrap="square" lIns="0" tIns="0" rIns="0" bIns="0" rtlCol="0" anchor="ctr"/>
-          <a:lstStyle/>
-          <a:p>
-            <a:pPr algn="ctr" indent="0" marL="0">
-              <a:buNone/>
-            </a:pPr>
-            <a:r>
-              <a:rPr lang="en-US" sz="1600" b="1" dirty="0">
-                <a:solidFill>
-                  <a:srgbClr val="0D9488"/>
+          <p:cNvPr id="34" name="Shape 32"/>
+          <p:cNvSpPr/>
+          <p:nvPr/>
+        </p:nvSpPr>
+        <p:spPr>
+          <a:xfrm>
+            <a:off x="365760" y="4096512"/>
+            <a:ext cx="1371600" cy="804672"/>
+          </a:xfrm>
+          <a:prstGeom prst="rect">
+            <a:avLst>
+              <a:gd name="adj" fmla="val 6818"/>
+            </a:avLst>
+          </a:prstGeom>
+          <a:solidFill>
+            <a:srgbClr val="E2E8F0"/>
+          </a:solidFill>
+          <a:ln w="12700">
+            <a:solidFill>
+              <a:srgbClr val="E2E8F0"/>
+            </a:solidFill>
+            <a:prstDash val="solid"/>
+          </a:ln>
+        </p:spPr>
+      </p:sp>
+      <p:sp>
+        <p:nvSpPr>
+          <p:cNvPr id="35" name="Text 33"/>
+          <p:cNvSpPr/>
+          <p:nvPr/>
+        </p:nvSpPr>
+        <p:spPr>
+          <a:xfrm>
+            <a:off x="365760" y="4096512"/>
+            <a:ext cx="1371600" cy="804672"/>
+          </a:xfrm>
+          <a:prstGeom prst="rect">
+            <a:avLst/>
+          </a:prstGeom>
+          <a:noFill/>
+          <a:ln/>
+        </p:spPr>
+        <p:txBody>
+          <a:bodyPr wrap="square" lIns="0" tIns="0" rIns="0" bIns="0" rtlCol="0" anchor="ctr"/>
+          <a:lstStyle/>
+          <a:p>
+            <a:pPr algn="ctr" indent="0" marL="0">
+              <a:buNone/>
+            </a:pPr>
+            <a:r>
+              <a:rPr lang="en-US" sz="1100" b="1" dirty="0">
+                <a:solidFill>
+                  <a:srgbClr val="475569"/>
                 </a:solidFill>
                 <a:latin typeface="Trebuchet MS" pitchFamily="34" charset="0"/>
                 <a:ea typeface="Trebuchet MS" pitchFamily="34" charset="-122"/>
                 <a:cs typeface="Trebuchet MS" pitchFamily="34" charset="-120"/>
               </a:rPr>
-              <a:t>·</a:t>
-            </a:r>
-            <a:endParaRPr lang="en-US" sz="1600" dirty="0"/>
-          </a:p>
-        </p:txBody>
-      </p:sp>
-      <p:sp>
-        <p:nvSpPr>
-          <p:cNvPr id="35" name="Shape 33"/>
-          <p:cNvSpPr/>
-          <p:nvPr/>
-        </p:nvSpPr>
-        <p:spPr>
-          <a:xfrm>
-            <a:off x="6858000" y="3364992"/>
-            <a:ext cx="1554480" cy="475488"/>
+              <a:t>Phonemes</a:t>
+            </a:r>
+            <a:endParaRPr lang="en-US" sz="1100" dirty="0"/>
+          </a:p>
+        </p:txBody>
+      </p:sp>
+      <p:sp>
+        <p:nvSpPr>
+          <p:cNvPr id="36" name="Shape 34"/>
+          <p:cNvSpPr/>
+          <p:nvPr/>
+        </p:nvSpPr>
+        <p:spPr>
+          <a:xfrm>
+            <a:off x="1874520" y="4096512"/>
+            <a:ext cx="6903720" cy="804672"/>
           </a:xfrm>
           <a:prstGeom prst="rect">
             <a:avLst>
-              <a:gd name="adj" fmla="val 9615"/>
+              <a:gd name="adj" fmla="val 6818"/>
             </a:avLst>
           </a:prstGeom>
           <a:solidFill>
+            <a:srgbClr val="FCE7F3"/>
+          </a:solidFill>
+          <a:ln w="12700">
+            <a:solidFill>
+              <a:srgbClr val="DB2777"/>
+            </a:solidFill>
+            <a:prstDash val="solid"/>
+          </a:ln>
+        </p:spPr>
+      </p:sp>
+      <p:sp>
+        <p:nvSpPr>
+          <p:cNvPr id="37" name="Shape 35"/>
+          <p:cNvSpPr/>
+          <p:nvPr/>
+        </p:nvSpPr>
+        <p:spPr>
+          <a:xfrm>
+            <a:off x="2023872" y="4169664"/>
+            <a:ext cx="685800" cy="384048"/>
+          </a:xfrm>
+          <a:prstGeom prst="rect">
+            <a:avLst>
+              <a:gd name="adj" fmla="val 9524"/>
+            </a:avLst>
+          </a:prstGeom>
+          <a:solidFill>
             <a:srgbClr val="FFFFFF"/>
           </a:solidFill>
           <a:ln w="12700">
             <a:solidFill>
-              <a:srgbClr val="0D9488"/>
-            </a:solidFill>
-            <a:prstDash val="solid"/>
-          </a:ln>
-        </p:spPr>
-      </p:sp>
-      <p:sp>
-        <p:nvSpPr>
-          <p:cNvPr id="36" name="Text 34"/>
-          <p:cNvSpPr/>
-          <p:nvPr/>
-        </p:nvSpPr>
-        <p:spPr>
-          <a:xfrm>
-            <a:off x="6858000" y="3364992"/>
-            <a:ext cx="1554480" cy="475488"/>
-          </a:xfrm>
-          <a:prstGeom prst="rect">
-            <a:avLst/>
-          </a:prstGeom>
-          <a:noFill/>
-          <a:ln/>
-        </p:spPr>
-        <p:txBody>
-          <a:bodyPr wrap="square" lIns="0" tIns="0" rIns="0" bIns="0" rtlCol="0" anchor="ctr"/>
-          <a:lstStyle/>
-          <a:p>
-            <a:pPr algn="ctr" indent="0" marL="0">
-              <a:buNone/>
-            </a:pPr>
-            <a:r>
-              <a:rPr lang="en-US" sz="1400" b="1" dirty="0">
-                <a:solidFill>
-                  <a:srgbClr val="0D9488"/>
+              <a:srgbClr val="DB2777"/>
+            </a:solidFill>
+            <a:prstDash val="solid"/>
+          </a:ln>
+        </p:spPr>
+      </p:sp>
+      <p:sp>
+        <p:nvSpPr>
+          <p:cNvPr id="38" name="Text 36"/>
+          <p:cNvSpPr/>
+          <p:nvPr/>
+        </p:nvSpPr>
+        <p:spPr>
+          <a:xfrm>
+            <a:off x="2023872" y="4169664"/>
+            <a:ext cx="685800" cy="384048"/>
+          </a:xfrm>
+          <a:prstGeom prst="rect">
+            <a:avLst/>
+          </a:prstGeom>
+          <a:noFill/>
+          <a:ln/>
+        </p:spPr>
+        <p:txBody>
+          <a:bodyPr wrap="square" lIns="0" tIns="0" rIns="0" bIns="0" rtlCol="0" anchor="ctr"/>
+          <a:lstStyle/>
+          <a:p>
+            <a:pPr algn="ctr" indent="0" marL="0">
+              <a:buNone/>
+            </a:pPr>
+            <a:r>
+              <a:rPr lang="en-US" sz="900" b="1" dirty="0">
+                <a:solidFill>
+                  <a:srgbClr val="9D174D"/>
                 </a:solidFill>
                 <a:latin typeface="Trebuchet MS" pitchFamily="34" charset="0"/>
                 <a:ea typeface="Trebuchet MS" pitchFamily="34" charset="-122"/>
                 <a:cs typeface="Trebuchet MS" pitchFamily="34" charset="-120"/>
               </a:rPr>
-              <a:t>ble</a:t>
-            </a:r>
-            <a:endParaRPr lang="en-US" sz="1400" dirty="0"/>
-          </a:p>
-        </p:txBody>
-      </p:sp>
-      <p:sp>
-        <p:nvSpPr>
-          <p:cNvPr id="37" name="Shape 35"/>
-          <p:cNvSpPr/>
-          <p:nvPr/>
-        </p:nvSpPr>
-        <p:spPr>
-          <a:xfrm>
-            <a:off x="365760" y="4096512"/>
-            <a:ext cx="1371600" cy="804672"/>
+              <a:t>ch</a:t>
+            </a:r>
+            <a:endParaRPr lang="en-US" sz="900" dirty="0"/>
+          </a:p>
+        </p:txBody>
+      </p:sp>
+      <p:sp>
+        <p:nvSpPr>
+          <p:cNvPr id="39" name="Shape 37"/>
+          <p:cNvSpPr/>
+          <p:nvPr/>
+        </p:nvSpPr>
+        <p:spPr>
+          <a:xfrm>
+            <a:off x="2831592" y="4169664"/>
+            <a:ext cx="685800" cy="384048"/>
           </a:xfrm>
           <a:prstGeom prst="rect">
             <a:avLst>
-              <a:gd name="adj" fmla="val 6818"/>
+              <a:gd name="adj" fmla="val 9524"/>
             </a:avLst>
           </a:prstGeom>
           <a:solidFill>
-            <a:srgbClr val="E2E8F0"/>
-          </a:solidFill>
-          <a:ln w="12700">
-            <a:solidFill>
-              <a:srgbClr val="E2E8F0"/>
-            </a:solidFill>
-            <a:prstDash val="solid"/>
-          </a:ln>
-        </p:spPr>
-      </p:sp>
-      <p:sp>
-        <p:nvSpPr>
-          <p:cNvPr id="38" name="Text 36"/>
-          <p:cNvSpPr/>
-          <p:nvPr/>
-        </p:nvSpPr>
-        <p:spPr>
-          <a:xfrm>
-            <a:off x="365760" y="4096512"/>
-            <a:ext cx="1371600" cy="804672"/>
-          </a:xfrm>
-          <a:prstGeom prst="rect">
-            <a:avLst/>
-          </a:prstGeom>
-          <a:noFill/>
-          <a:ln/>
-        </p:spPr>
-        <p:txBody>
-          <a:bodyPr wrap="square" lIns="0" tIns="0" rIns="0" bIns="0" rtlCol="0" anchor="ctr"/>
-          <a:lstStyle/>
-          <a:p>
-            <a:pPr algn="ctr" indent="0" marL="0">
-              <a:buNone/>
-            </a:pPr>
-            <a:r>
-              <a:rPr lang="en-US" sz="1100" b="1" dirty="0">
-                <a:solidFill>
-                  <a:srgbClr val="475569"/>
+            <a:srgbClr val="FFFFFF"/>
+          </a:solidFill>
+          <a:ln w="12700">
+            <a:solidFill>
+              <a:srgbClr val="DB2777"/>
+            </a:solidFill>
+            <a:prstDash val="solid"/>
+          </a:ln>
+        </p:spPr>
+      </p:sp>
+      <p:sp>
+        <p:nvSpPr>
+          <p:cNvPr id="40" name="Text 38"/>
+          <p:cNvSpPr/>
+          <p:nvPr/>
+        </p:nvSpPr>
+        <p:spPr>
+          <a:xfrm>
+            <a:off x="2831592" y="4169664"/>
+            <a:ext cx="685800" cy="384048"/>
+          </a:xfrm>
+          <a:prstGeom prst="rect">
+            <a:avLst/>
+          </a:prstGeom>
+          <a:noFill/>
+          <a:ln/>
+        </p:spPr>
+        <p:txBody>
+          <a:bodyPr wrap="square" lIns="0" tIns="0" rIns="0" bIns="0" rtlCol="0" anchor="ctr"/>
+          <a:lstStyle/>
+          <a:p>
+            <a:pPr algn="ctr" indent="0" marL="0">
+              <a:buNone/>
+            </a:pPr>
+            <a:r>
+              <a:rPr lang="en-US" sz="900" b="1" dirty="0">
+                <a:solidFill>
+                  <a:srgbClr val="9D174D"/>
                 </a:solidFill>
                 <a:latin typeface="Trebuchet MS" pitchFamily="34" charset="0"/>
                 <a:ea typeface="Trebuchet MS" pitchFamily="34" charset="-122"/>
                 <a:cs typeface="Trebuchet MS" pitchFamily="34" charset="-120"/>
               </a:rPr>
-              <a:t>Phonemes</a:t>
-            </a:r>
-            <a:endParaRPr lang="en-US" sz="1100" dirty="0"/>
-          </a:p>
-        </p:txBody>
-      </p:sp>
-      <p:sp>
-        <p:nvSpPr>
-          <p:cNvPr id="39" name="Shape 37"/>
-          <p:cNvSpPr/>
-          <p:nvPr/>
-        </p:nvSpPr>
-        <p:spPr>
-          <a:xfrm>
-            <a:off x="1874520" y="4096512"/>
-            <a:ext cx="6903720" cy="804672"/>
-          </a:xfrm>
-          <a:prstGeom prst="rect">
-            <a:avLst>
-              <a:gd name="adj" fmla="val 6818"/>
-            </a:avLst>
-          </a:prstGeom>
-          <a:solidFill>
-            <a:srgbClr val="FCE7F3"/>
-          </a:solidFill>
-          <a:ln w="12700">
-            <a:solidFill>
-              <a:srgbClr val="DB2777"/>
-            </a:solidFill>
-            <a:prstDash val="solid"/>
-          </a:ln>
-        </p:spPr>
-      </p:sp>
-      <p:sp>
-        <p:nvSpPr>
-          <p:cNvPr id="40" name="Shape 38"/>
-          <p:cNvSpPr/>
-          <p:nvPr/>
-        </p:nvSpPr>
-        <p:spPr>
-          <a:xfrm>
-            <a:off x="2023872" y="4169664"/>
+              <a:t>a</a:t>
+            </a:r>
+            <a:endParaRPr lang="en-US" sz="900" dirty="0"/>
+          </a:p>
+        </p:txBody>
+      </p:sp>
+      <p:sp>
+        <p:nvSpPr>
+          <p:cNvPr id="41" name="Shape 39"/>
+          <p:cNvSpPr/>
+          <p:nvPr/>
+        </p:nvSpPr>
+        <p:spPr>
+          <a:xfrm>
+            <a:off x="3639312" y="4169664"/>
             <a:ext cx="685800" cy="384048"/>
           </a:xfrm>
           <a:prstGeom prst="rect">
@@ -11003,13 +10925,13 @@
       </p:sp>
       <p:sp>
         <p:nvSpPr>
-          <p:cNvPr id="41" name="Text 39"/>
-          <p:cNvSpPr/>
-          <p:nvPr/>
-        </p:nvSpPr>
-        <p:spPr>
-          <a:xfrm>
-            <a:off x="2023872" y="4169664"/>
+          <p:cNvPr id="42" name="Text 40"/>
+          <p:cNvSpPr/>
+          <p:nvPr/>
+        </p:nvSpPr>
+        <p:spPr>
+          <a:xfrm>
+            <a:off x="3639312" y="4169664"/>
             <a:ext cx="685800" cy="384048"/>
           </a:xfrm>
           <a:prstGeom prst="rect">
@@ -11034,7 +10956,7 @@
                 <a:ea typeface="Trebuchet MS" pitchFamily="34" charset="-122"/>
                 <a:cs typeface="Trebuchet MS" pitchFamily="34" charset="-120"/>
               </a:rPr>
-              <a:t>m</a:t>
+              <a:t>ng</a:t>
             </a:r>
             <a:endParaRPr lang="en-US" sz="900" dirty="0"/>
           </a:p>
@@ -11042,13 +10964,13 @@
       </p:sp>
       <p:sp>
         <p:nvSpPr>
-          <p:cNvPr id="42" name="Shape 40"/>
-          <p:cNvSpPr/>
-          <p:nvPr/>
-        </p:nvSpPr>
-        <p:spPr>
-          <a:xfrm>
-            <a:off x="2831592" y="4169664"/>
+          <p:cNvPr id="43" name="Shape 41"/>
+          <p:cNvSpPr/>
+          <p:nvPr/>
+        </p:nvSpPr>
+        <p:spPr>
+          <a:xfrm>
+            <a:off x="4447032" y="4169664"/>
             <a:ext cx="685800" cy="384048"/>
           </a:xfrm>
           <a:prstGeom prst="rect">
@@ -11069,13 +10991,13 @@
       </p:sp>
       <p:sp>
         <p:nvSpPr>
-          <p:cNvPr id="43" name="Text 41"/>
-          <p:cNvSpPr/>
-          <p:nvPr/>
-        </p:nvSpPr>
-        <p:spPr>
-          <a:xfrm>
-            <a:off x="2831592" y="4169664"/>
+          <p:cNvPr id="44" name="Text 42"/>
+          <p:cNvSpPr/>
+          <p:nvPr/>
+        </p:nvSpPr>
+        <p:spPr>
+          <a:xfrm>
+            <a:off x="4447032" y="4169664"/>
             <a:ext cx="685800" cy="384048"/>
           </a:xfrm>
           <a:prstGeom prst="rect">
@@ -11100,7 +11022,7 @@
                 <a:ea typeface="Trebuchet MS" pitchFamily="34" charset="-122"/>
                 <a:cs typeface="Trebuchet MS" pitchFamily="34" charset="-120"/>
               </a:rPr>
-              <a:t>a</a:t>
+              <a:t>e</a:t>
             </a:r>
             <a:endParaRPr lang="en-US" sz="900" dirty="0"/>
           </a:p>
@@ -11108,13 +11030,52 @@
       </p:sp>
       <p:sp>
         <p:nvSpPr>
-          <p:cNvPr id="44" name="Shape 42"/>
-          <p:cNvSpPr/>
-          <p:nvPr/>
-        </p:nvSpPr>
-        <p:spPr>
-          <a:xfrm>
-            <a:off x="3639312" y="4169664"/>
+          <p:cNvPr id="45" name="Text 43"/>
+          <p:cNvSpPr/>
+          <p:nvPr/>
+        </p:nvSpPr>
+        <p:spPr>
+          <a:xfrm>
+            <a:off x="4447032" y="4572000"/>
+            <a:ext cx="685800" cy="219456"/>
+          </a:xfrm>
+          <a:prstGeom prst="rect">
+            <a:avLst/>
+          </a:prstGeom>
+          <a:noFill/>
+          <a:ln/>
+        </p:spPr>
+        <p:txBody>
+          <a:bodyPr wrap="square" lIns="0" tIns="0" rIns="0" bIns="0" rtlCol="0" anchor="t"/>
+          <a:lstStyle/>
+          <a:p>
+            <a:pPr algn="ctr" indent="0" marL="0">
+              <a:buNone/>
+            </a:pPr>
+            <a:r>
+              <a:rPr lang="en-US" sz="750" i="1" dirty="0">
+                <a:solidFill>
+                  <a:srgbClr val="94A3B8"/>
+                </a:solidFill>
+                <a:latin typeface="Calibri" pitchFamily="34" charset="0"/>
+                <a:ea typeface="Calibri" pitchFamily="34" charset="-122"/>
+                <a:cs typeface="Calibri" pitchFamily="34" charset="-120"/>
+              </a:rPr>
+              <a:t>/j/ keeper</a:t>
+            </a:r>
+            <a:endParaRPr lang="en-US" sz="750" dirty="0"/>
+          </a:p>
+        </p:txBody>
+      </p:sp>
+      <p:sp>
+        <p:nvSpPr>
+          <p:cNvPr id="46" name="Shape 44"/>
+          <p:cNvSpPr/>
+          <p:nvPr/>
+        </p:nvSpPr>
+        <p:spPr>
+          <a:xfrm>
+            <a:off x="5254752" y="4169664"/>
             <a:ext cx="685800" cy="384048"/>
           </a:xfrm>
           <a:prstGeom prst="rect">
@@ -11135,13 +11096,13 @@
       </p:sp>
       <p:sp>
         <p:nvSpPr>
-          <p:cNvPr id="45" name="Text 43"/>
-          <p:cNvSpPr/>
-          <p:nvPr/>
-        </p:nvSpPr>
-        <p:spPr>
-          <a:xfrm>
-            <a:off x="3639312" y="4169664"/>
+          <p:cNvPr id="47" name="Text 45"/>
+          <p:cNvSpPr/>
+          <p:nvPr/>
+        </p:nvSpPr>
+        <p:spPr>
+          <a:xfrm>
+            <a:off x="5254752" y="4169664"/>
             <a:ext cx="685800" cy="384048"/>
           </a:xfrm>
           <a:prstGeom prst="rect">
@@ -11166,7 +11127,7 @@
                 <a:ea typeface="Trebuchet MS" pitchFamily="34" charset="-122"/>
                 <a:cs typeface="Trebuchet MS" pitchFamily="34" charset="-120"/>
               </a:rPr>
-              <a:t>n</a:t>
+              <a:t>a</a:t>
             </a:r>
             <a:endParaRPr lang="en-US" sz="900" dirty="0"/>
           </a:p>
@@ -11174,13 +11135,13 @@
       </p:sp>
       <p:sp>
         <p:nvSpPr>
-          <p:cNvPr id="46" name="Shape 44"/>
-          <p:cNvSpPr/>
-          <p:nvPr/>
-        </p:nvSpPr>
-        <p:spPr>
-          <a:xfrm>
-            <a:off x="4447032" y="4169664"/>
+          <p:cNvPr id="48" name="Shape 46"/>
+          <p:cNvSpPr/>
+          <p:nvPr/>
+        </p:nvSpPr>
+        <p:spPr>
+          <a:xfrm>
+            <a:off x="6062472" y="4169664"/>
             <a:ext cx="685800" cy="384048"/>
           </a:xfrm>
           <a:prstGeom prst="rect">
@@ -11201,13 +11162,13 @@
       </p:sp>
       <p:sp>
         <p:nvSpPr>
-          <p:cNvPr id="47" name="Text 45"/>
-          <p:cNvSpPr/>
-          <p:nvPr/>
-        </p:nvSpPr>
-        <p:spPr>
-          <a:xfrm>
-            <a:off x="4447032" y="4169664"/>
+          <p:cNvPr id="49" name="Text 47"/>
+          <p:cNvSpPr/>
+          <p:nvPr/>
+        </p:nvSpPr>
+        <p:spPr>
+          <a:xfrm>
+            <a:off x="6062472" y="4169664"/>
             <a:ext cx="685800" cy="384048"/>
           </a:xfrm>
           <a:prstGeom prst="rect">
@@ -11232,7 +11193,7 @@
                 <a:ea typeface="Trebuchet MS" pitchFamily="34" charset="-122"/>
                 <a:cs typeface="Trebuchet MS" pitchFamily="34" charset="-120"/>
               </a:rPr>
-              <a:t>a</a:t>
+              <a:t>b</a:t>
             </a:r>
             <a:endParaRPr lang="en-US" sz="900" dirty="0"/>
           </a:p>
@@ -11240,13 +11201,13 @@
       </p:sp>
       <p:sp>
         <p:nvSpPr>
-          <p:cNvPr id="48" name="Shape 46"/>
-          <p:cNvSpPr/>
-          <p:nvPr/>
-        </p:nvSpPr>
-        <p:spPr>
-          <a:xfrm>
-            <a:off x="5254752" y="4169664"/>
+          <p:cNvPr id="50" name="Shape 48"/>
+          <p:cNvSpPr/>
+          <p:nvPr/>
+        </p:nvSpPr>
+        <p:spPr>
+          <a:xfrm>
+            <a:off x="6870192" y="4169664"/>
             <a:ext cx="685800" cy="384048"/>
           </a:xfrm>
           <a:prstGeom prst="rect">
@@ -11267,13 +11228,13 @@
       </p:sp>
       <p:sp>
         <p:nvSpPr>
-          <p:cNvPr id="49" name="Text 47"/>
-          <p:cNvSpPr/>
-          <p:nvPr/>
-        </p:nvSpPr>
-        <p:spPr>
-          <a:xfrm>
-            <a:off x="5254752" y="4169664"/>
+          <p:cNvPr id="51" name="Text 49"/>
+          <p:cNvSpPr/>
+          <p:nvPr/>
+        </p:nvSpPr>
+        <p:spPr>
+          <a:xfrm>
+            <a:off x="6870192" y="4169664"/>
             <a:ext cx="685800" cy="384048"/>
           </a:xfrm>
           <a:prstGeom prst="rect">
@@ -11298,7 +11259,7 @@
                 <a:ea typeface="Trebuchet MS" pitchFamily="34" charset="-122"/>
                 <a:cs typeface="Trebuchet MS" pitchFamily="34" charset="-120"/>
               </a:rPr>
-              <a:t>ge</a:t>
+              <a:t>l</a:t>
             </a:r>
             <a:endParaRPr lang="en-US" sz="900" dirty="0"/>
           </a:p>
@@ -11306,52 +11267,13 @@
       </p:sp>
       <p:sp>
         <p:nvSpPr>
-          <p:cNvPr id="50" name="Text 48"/>
-          <p:cNvSpPr/>
-          <p:nvPr/>
-        </p:nvSpPr>
-        <p:spPr>
-          <a:xfrm>
-            <a:off x="5254752" y="4572000"/>
-            <a:ext cx="685800" cy="219456"/>
-          </a:xfrm>
-          <a:prstGeom prst="rect">
-            <a:avLst/>
-          </a:prstGeom>
-          <a:noFill/>
-          <a:ln/>
-        </p:spPr>
-        <p:txBody>
-          <a:bodyPr wrap="square" lIns="0" tIns="0" rIns="0" bIns="0" rtlCol="0" anchor="t"/>
-          <a:lstStyle/>
-          <a:p>
-            <a:pPr algn="ctr" indent="0" marL="0">
-              <a:buNone/>
-            </a:pPr>
-            <a:r>
-              <a:rPr lang="en-US" sz="750" i="1" dirty="0">
-                <a:solidFill>
-                  <a:srgbClr val="94A3B8"/>
-                </a:solidFill>
-                <a:latin typeface="Calibri" pitchFamily="34" charset="0"/>
-                <a:ea typeface="Calibri" pitchFamily="34" charset="-122"/>
-                <a:cs typeface="Calibri" pitchFamily="34" charset="-120"/>
-              </a:rPr>
-              <a:t>/j/</a:t>
-            </a:r>
-            <a:endParaRPr lang="en-US" sz="750" dirty="0"/>
-          </a:p>
-        </p:txBody>
-      </p:sp>
-      <p:sp>
-        <p:nvSpPr>
-          <p:cNvPr id="51" name="Shape 49"/>
-          <p:cNvSpPr/>
-          <p:nvPr/>
-        </p:nvSpPr>
-        <p:spPr>
-          <a:xfrm>
-            <a:off x="6062472" y="4169664"/>
+          <p:cNvPr id="52" name="Shape 50"/>
+          <p:cNvSpPr/>
+          <p:nvPr/>
+        </p:nvSpPr>
+        <p:spPr>
+          <a:xfrm>
+            <a:off x="7677912" y="4169664"/>
             <a:ext cx="685800" cy="384048"/>
           </a:xfrm>
           <a:prstGeom prst="rect">
@@ -11372,13 +11294,13 @@
       </p:sp>
       <p:sp>
         <p:nvSpPr>
-          <p:cNvPr id="52" name="Text 50"/>
-          <p:cNvSpPr/>
-          <p:nvPr/>
-        </p:nvSpPr>
-        <p:spPr>
-          <a:xfrm>
-            <a:off x="6062472" y="4169664"/>
+          <p:cNvPr id="53" name="Text 51"/>
+          <p:cNvSpPr/>
+          <p:nvPr/>
+        </p:nvSpPr>
+        <p:spPr>
+          <a:xfrm>
+            <a:off x="7677912" y="4169664"/>
             <a:ext cx="685800" cy="384048"/>
           </a:xfrm>
           <a:prstGeom prst="rect">
@@ -11403,139 +11325,7 @@
                 <a:ea typeface="Trebuchet MS" pitchFamily="34" charset="-122"/>
                 <a:cs typeface="Trebuchet MS" pitchFamily="34" charset="-120"/>
               </a:rPr>
-              <a:t>a</a:t>
-            </a:r>
-            <a:endParaRPr lang="en-US" sz="900" dirty="0"/>
-          </a:p>
-        </p:txBody>
-      </p:sp>
-      <p:sp>
-        <p:nvSpPr>
-          <p:cNvPr id="53" name="Shape 51"/>
-          <p:cNvSpPr/>
-          <p:nvPr/>
-        </p:nvSpPr>
-        <p:spPr>
-          <a:xfrm>
-            <a:off x="6870192" y="4169664"/>
-            <a:ext cx="685800" cy="384048"/>
-          </a:xfrm>
-          <a:prstGeom prst="rect">
-            <a:avLst>
-              <a:gd name="adj" fmla="val 9524"/>
-            </a:avLst>
-          </a:prstGeom>
-          <a:solidFill>
-            <a:srgbClr val="FFFFFF"/>
-          </a:solidFill>
-          <a:ln w="12700">
-            <a:solidFill>
-              <a:srgbClr val="DB2777"/>
-            </a:solidFill>
-            <a:prstDash val="solid"/>
-          </a:ln>
-        </p:spPr>
-      </p:sp>
-      <p:sp>
-        <p:nvSpPr>
-          <p:cNvPr id="54" name="Text 52"/>
-          <p:cNvSpPr/>
-          <p:nvPr/>
-        </p:nvSpPr>
-        <p:spPr>
-          <a:xfrm>
-            <a:off x="6870192" y="4169664"/>
-            <a:ext cx="685800" cy="384048"/>
-          </a:xfrm>
-          <a:prstGeom prst="rect">
-            <a:avLst/>
-          </a:prstGeom>
-          <a:noFill/>
-          <a:ln/>
-        </p:spPr>
-        <p:txBody>
-          <a:bodyPr wrap="square" lIns="0" tIns="0" rIns="0" bIns="0" rtlCol="0" anchor="ctr"/>
-          <a:lstStyle/>
-          <a:p>
-            <a:pPr algn="ctr" indent="0" marL="0">
-              <a:buNone/>
-            </a:pPr>
-            <a:r>
-              <a:rPr lang="en-US" sz="900" b="1" dirty="0">
-                <a:solidFill>
-                  <a:srgbClr val="9D174D"/>
-                </a:solidFill>
-                <a:latin typeface="Trebuchet MS" pitchFamily="34" charset="0"/>
-                <a:ea typeface="Trebuchet MS" pitchFamily="34" charset="-122"/>
-                <a:cs typeface="Trebuchet MS" pitchFamily="34" charset="-120"/>
-              </a:rPr>
-              <a:t>b</a:t>
-            </a:r>
-            <a:endParaRPr lang="en-US" sz="900" dirty="0"/>
-          </a:p>
-        </p:txBody>
-      </p:sp>
-      <p:sp>
-        <p:nvSpPr>
-          <p:cNvPr id="55" name="Shape 53"/>
-          <p:cNvSpPr/>
-          <p:nvPr/>
-        </p:nvSpPr>
-        <p:spPr>
-          <a:xfrm>
-            <a:off x="7677912" y="4169664"/>
-            <a:ext cx="685800" cy="384048"/>
-          </a:xfrm>
-          <a:prstGeom prst="rect">
-            <a:avLst>
-              <a:gd name="adj" fmla="val 9524"/>
-            </a:avLst>
-          </a:prstGeom>
-          <a:solidFill>
-            <a:srgbClr val="FFFFFF"/>
-          </a:solidFill>
-          <a:ln w="12700">
-            <a:solidFill>
-              <a:srgbClr val="DB2777"/>
-            </a:solidFill>
-            <a:prstDash val="solid"/>
-          </a:ln>
-        </p:spPr>
-      </p:sp>
-      <p:sp>
-        <p:nvSpPr>
-          <p:cNvPr id="56" name="Text 54"/>
-          <p:cNvSpPr/>
-          <p:nvPr/>
-        </p:nvSpPr>
-        <p:spPr>
-          <a:xfrm>
-            <a:off x="7677912" y="4169664"/>
-            <a:ext cx="685800" cy="384048"/>
-          </a:xfrm>
-          <a:prstGeom prst="rect">
-            <a:avLst/>
-          </a:prstGeom>
-          <a:noFill/>
-          <a:ln/>
-        </p:spPr>
-        <p:txBody>
-          <a:bodyPr wrap="square" lIns="0" tIns="0" rIns="0" bIns="0" rtlCol="0" anchor="ctr"/>
-          <a:lstStyle/>
-          <a:p>
-            <a:pPr algn="ctr" indent="0" marL="0">
-              <a:buNone/>
-            </a:pPr>
-            <a:r>
-              <a:rPr lang="en-US" sz="900" b="1" dirty="0">
-                <a:solidFill>
-                  <a:srgbClr val="9D174D"/>
-                </a:solidFill>
-                <a:latin typeface="Trebuchet MS" pitchFamily="34" charset="0"/>
-                <a:ea typeface="Trebuchet MS" pitchFamily="34" charset="-122"/>
-                <a:cs typeface="Trebuchet MS" pitchFamily="34" charset="-120"/>
-              </a:rPr>
-              <a:t>le</a:t>
+              <a:t>e</a:t>
             </a:r>
             <a:endParaRPr lang="en-US" sz="900" dirty="0"/>
           </a:p>
@@ -11827,7 +11617,7 @@
                 <a:ea typeface="Calibri" pitchFamily="34" charset="-122"/>
                 <a:cs typeface="Calibri" pitchFamily="34" charset="-120"/>
               </a:rPr>
-              <a:t>Word Labs  •  wordlabs.app  •  Suffix: '-able' = able to be done</a:t>
+              <a:t>Word Labs  •  wordlabs.app  •  Suffix: '-able' = can be done; capable of</a:t>
             </a:r>
             <a:endParaRPr lang="en-US" sz="800" dirty="0"/>
           </a:p>
@@ -12654,7 +12444,7 @@
                 <a:ea typeface="Calibri" pitchFamily="34" charset="-122"/>
                 <a:cs typeface="Calibri" pitchFamily="34" charset="-120"/>
               </a:rPr>
-              <a:t>Word Labs  •  wordlabs.app  •  Suffix: '-able' = able to be done</a:t>
+              <a:t>Word Labs  •  wordlabs.app  •  Suffix: '-able' = can be done; capable of</a:t>
             </a:r>
             <a:endParaRPr lang="en-US" sz="800" dirty="0"/>
           </a:p>
@@ -12971,7 +12761,7 @@
                 <a:ea typeface="Calibri" pitchFamily="34" charset="-122"/>
                 <a:cs typeface="Calibri" pitchFamily="34" charset="-120"/>
               </a:rPr>
-              <a:t>to make or cause</a:t>
+              <a:t>to put into or make</a:t>
             </a:r>
             <a:endParaRPr lang="en-US" sz="850" dirty="0"/>
           </a:p>
@@ -13083,7 +12873,7 @@
                 <a:ea typeface="Calibri" pitchFamily="34" charset="-122"/>
                 <a:cs typeface="Calibri" pitchFamily="34" charset="-120"/>
               </a:rPr>
-              <a:t>great happiness</a:t>
+              <a:t>happiness or pleasure</a:t>
             </a:r>
             <a:endParaRPr lang="en-US" sz="850" dirty="0"/>
           </a:p>
@@ -13195,7 +12985,7 @@
                 <a:ea typeface="Calibri" pitchFamily="34" charset="-122"/>
                 <a:cs typeface="Calibri" pitchFamily="34" charset="-120"/>
               </a:rPr>
-              <a:t>able to be done</a:t>
+              <a:t>can be done; capable of</a:t>
             </a:r>
             <a:endParaRPr lang="en-US" sz="850" dirty="0"/>
           </a:p>
@@ -13751,7 +13541,7 @@
                 <a:ea typeface="Calibri" pitchFamily="34" charset="-122"/>
                 <a:cs typeface="Calibri" pitchFamily="34" charset="-120"/>
               </a:rPr>
-              <a:t>Word Labs  •  wordlabs.app  •  Suffix: '-able' = able to be done</a:t>
+              <a:t>Word Labs  •  wordlabs.app  •  Suffix: '-able' = can be done; capable of</a:t>
             </a:r>
             <a:endParaRPr lang="en-US" sz="800" dirty="0"/>
           </a:p>
@@ -14068,7 +13858,7 @@
                 <a:ea typeface="Calibri" pitchFamily="34" charset="-122"/>
                 <a:cs typeface="Calibri" pitchFamily="34" charset="-120"/>
               </a:rPr>
-              <a:t>to make or cause</a:t>
+              <a:t>to put into or make</a:t>
             </a:r>
             <a:endParaRPr lang="en-US" sz="850" dirty="0"/>
           </a:p>
@@ -14180,7 +13970,7 @@
                 <a:ea typeface="Calibri" pitchFamily="34" charset="-122"/>
                 <a:cs typeface="Calibri" pitchFamily="34" charset="-120"/>
               </a:rPr>
-              <a:t>great happiness</a:t>
+              <a:t>happiness or pleasure</a:t>
             </a:r>
             <a:endParaRPr lang="en-US" sz="850" dirty="0"/>
           </a:p>
@@ -14292,7 +14082,7 @@
                 <a:ea typeface="Calibri" pitchFamily="34" charset="-122"/>
                 <a:cs typeface="Calibri" pitchFamily="34" charset="-120"/>
               </a:rPr>
-              <a:t>able to be done</a:t>
+              <a:t>can be done; capable of</a:t>
             </a:r>
             <a:endParaRPr lang="en-US" sz="850" dirty="0"/>
           </a:p>
@@ -15099,7 +14889,7 @@
                 <a:ea typeface="Calibri" pitchFamily="34" charset="-122"/>
                 <a:cs typeface="Calibri" pitchFamily="34" charset="-120"/>
               </a:rPr>
-              <a:t>Suffix '-able' — able to be done</a:t>
+              <a:t>Suffix '-able' — can be done; capable of</a:t>
             </a:r>
             <a:endParaRPr lang="en-US" sz="1600" dirty="0"/>
           </a:p>
@@ -15455,7 +15245,7 @@
                 <a:ea typeface="Calibri" pitchFamily="34" charset="-122"/>
                 <a:cs typeface="Calibri" pitchFamily="34" charset="-120"/>
               </a:rPr>
-              <a:t>Word Labs  •  wordlabs.app  •  Suffix: '-able' = able to be done</a:t>
+              <a:t>Word Labs  •  wordlabs.app  •  Suffix: '-able' = can be done; capable of</a:t>
             </a:r>
             <a:endParaRPr lang="en-US" sz="800" dirty="0"/>
           </a:p>
@@ -15772,7 +15562,7 @@
                 <a:ea typeface="Calibri" pitchFamily="34" charset="-122"/>
                 <a:cs typeface="Calibri" pitchFamily="34" charset="-120"/>
               </a:rPr>
-              <a:t>to make or cause</a:t>
+              <a:t>to put into or make</a:t>
             </a:r>
             <a:endParaRPr lang="en-US" sz="850" dirty="0"/>
           </a:p>
@@ -15884,7 +15674,7 @@
                 <a:ea typeface="Calibri" pitchFamily="34" charset="-122"/>
                 <a:cs typeface="Calibri" pitchFamily="34" charset="-120"/>
               </a:rPr>
-              <a:t>great happiness</a:t>
+              <a:t>happiness or pleasure</a:t>
             </a:r>
             <a:endParaRPr lang="en-US" sz="850" dirty="0"/>
           </a:p>
@@ -15996,7 +15786,7 @@
                 <a:ea typeface="Calibri" pitchFamily="34" charset="-122"/>
                 <a:cs typeface="Calibri" pitchFamily="34" charset="-120"/>
               </a:rPr>
-              <a:t>able to be done</a:t>
+              <a:t>can be done; capable of</a:t>
             </a:r>
             <a:endParaRPr lang="en-US" sz="850" dirty="0"/>
           </a:p>
@@ -16577,7 +16367,7 @@
         </p:nvSpPr>
         <p:spPr>
           <a:xfrm>
-            <a:off x="2124837" y="4169664"/>
+            <a:off x="2023872" y="4169664"/>
             <a:ext cx="685800" cy="475488"/>
           </a:xfrm>
           <a:prstGeom prst="rect">
@@ -16604,7 +16394,7 @@
         </p:nvSpPr>
         <p:spPr>
           <a:xfrm>
-            <a:off x="2124837" y="4169664"/>
+            <a:off x="2023872" y="4169664"/>
             <a:ext cx="685800" cy="475488"/>
           </a:xfrm>
           <a:prstGeom prst="rect">
@@ -16643,7 +16433,7 @@
         </p:nvSpPr>
         <p:spPr>
           <a:xfrm>
-            <a:off x="3033522" y="4169664"/>
+            <a:off x="2831592" y="4169664"/>
             <a:ext cx="685800" cy="475488"/>
           </a:xfrm>
           <a:prstGeom prst="rect">
@@ -16670,7 +16460,7 @@
         </p:nvSpPr>
         <p:spPr>
           <a:xfrm>
-            <a:off x="3033522" y="4169664"/>
+            <a:off x="2831592" y="4169664"/>
             <a:ext cx="685800" cy="475488"/>
           </a:xfrm>
           <a:prstGeom prst="rect">
@@ -16709,7 +16499,7 @@
         </p:nvSpPr>
         <p:spPr>
           <a:xfrm>
-            <a:off x="3942207" y="4169664"/>
+            <a:off x="3639312" y="4169664"/>
             <a:ext cx="685800" cy="475488"/>
           </a:xfrm>
           <a:prstGeom prst="rect">
@@ -16736,7 +16526,7 @@
         </p:nvSpPr>
         <p:spPr>
           <a:xfrm>
-            <a:off x="3942207" y="4169664"/>
+            <a:off x="3639312" y="4169664"/>
             <a:ext cx="685800" cy="475488"/>
           </a:xfrm>
           <a:prstGeom prst="rect">
@@ -16775,7 +16565,7 @@
         </p:nvSpPr>
         <p:spPr>
           <a:xfrm>
-            <a:off x="4850892" y="4169664"/>
+            <a:off x="4447032" y="4169664"/>
             <a:ext cx="685800" cy="475488"/>
           </a:xfrm>
           <a:prstGeom prst="rect">
@@ -16802,7 +16592,7 @@
         </p:nvSpPr>
         <p:spPr>
           <a:xfrm>
-            <a:off x="4850892" y="4169664"/>
+            <a:off x="4447032" y="4169664"/>
             <a:ext cx="685800" cy="475488"/>
           </a:xfrm>
           <a:prstGeom prst="rect">
@@ -16841,7 +16631,7 @@
         </p:nvSpPr>
         <p:spPr>
           <a:xfrm>
-            <a:off x="5759577" y="4169664"/>
+            <a:off x="5254752" y="4169664"/>
             <a:ext cx="685800" cy="475488"/>
           </a:xfrm>
           <a:prstGeom prst="rect">
@@ -16868,7 +16658,7 @@
         </p:nvSpPr>
         <p:spPr>
           <a:xfrm>
-            <a:off x="5759577" y="4169664"/>
+            <a:off x="5254752" y="4169664"/>
             <a:ext cx="685800" cy="475488"/>
           </a:xfrm>
           <a:prstGeom prst="rect">
@@ -16907,7 +16697,7 @@
         </p:nvSpPr>
         <p:spPr>
           <a:xfrm>
-            <a:off x="6668262" y="4169664"/>
+            <a:off x="6062472" y="4169664"/>
             <a:ext cx="685800" cy="475488"/>
           </a:xfrm>
           <a:prstGeom prst="rect">
@@ -16934,7 +16724,7 @@
         </p:nvSpPr>
         <p:spPr>
           <a:xfrm>
-            <a:off x="6668262" y="4169664"/>
+            <a:off x="6062472" y="4169664"/>
             <a:ext cx="685800" cy="475488"/>
           </a:xfrm>
           <a:prstGeom prst="rect">
@@ -16973,7 +16763,7 @@
         </p:nvSpPr>
         <p:spPr>
           <a:xfrm>
-            <a:off x="7576947" y="4169664"/>
+            <a:off x="6870192" y="4169664"/>
             <a:ext cx="685800" cy="475488"/>
           </a:xfrm>
           <a:prstGeom prst="rect">
@@ -17000,7 +16790,7 @@
         </p:nvSpPr>
         <p:spPr>
           <a:xfrm>
-            <a:off x="7576947" y="4169664"/>
+            <a:off x="6870192" y="4169664"/>
             <a:ext cx="685800" cy="475488"/>
           </a:xfrm>
           <a:prstGeom prst="rect">
@@ -17025,7 +16815,73 @@
                 <a:ea typeface="Trebuchet MS" pitchFamily="34" charset="-122"/>
                 <a:cs typeface="Trebuchet MS" pitchFamily="34" charset="-120"/>
               </a:rPr>
-              <a:t>le</a:t>
+              <a:t>l</a:t>
+            </a:r>
+            <a:endParaRPr lang="en-US" sz="900" dirty="0"/>
+          </a:p>
+        </p:txBody>
+      </p:sp>
+      <p:sp>
+        <p:nvSpPr>
+          <p:cNvPr id="56" name="Shape 54"/>
+          <p:cNvSpPr/>
+          <p:nvPr/>
+        </p:nvSpPr>
+        <p:spPr>
+          <a:xfrm>
+            <a:off x="7677912" y="4169664"/>
+            <a:ext cx="685800" cy="475488"/>
+          </a:xfrm>
+          <a:prstGeom prst="rect">
+            <a:avLst>
+              <a:gd name="adj" fmla="val 7692"/>
+            </a:avLst>
+          </a:prstGeom>
+          <a:solidFill>
+            <a:srgbClr val="FFFFFF"/>
+          </a:solidFill>
+          <a:ln w="12700">
+            <a:solidFill>
+              <a:srgbClr val="DB2777"/>
+            </a:solidFill>
+            <a:prstDash val="solid"/>
+          </a:ln>
+        </p:spPr>
+      </p:sp>
+      <p:sp>
+        <p:nvSpPr>
+          <p:cNvPr id="57" name="Text 55"/>
+          <p:cNvSpPr/>
+          <p:nvPr/>
+        </p:nvSpPr>
+        <p:spPr>
+          <a:xfrm>
+            <a:off x="7677912" y="4169664"/>
+            <a:ext cx="685800" cy="475488"/>
+          </a:xfrm>
+          <a:prstGeom prst="rect">
+            <a:avLst/>
+          </a:prstGeom>
+          <a:noFill/>
+          <a:ln/>
+        </p:spPr>
+        <p:txBody>
+          <a:bodyPr wrap="square" lIns="0" tIns="0" rIns="0" bIns="0" rtlCol="0" anchor="ctr"/>
+          <a:lstStyle/>
+          <a:p>
+            <a:pPr algn="ctr" indent="0" marL="0">
+              <a:buNone/>
+            </a:pPr>
+            <a:r>
+              <a:rPr lang="en-US" sz="900" b="1" dirty="0">
+                <a:solidFill>
+                  <a:srgbClr val="9D174D"/>
+                </a:solidFill>
+                <a:latin typeface="Trebuchet MS" pitchFamily="34" charset="0"/>
+                <a:ea typeface="Trebuchet MS" pitchFamily="34" charset="-122"/>
+                <a:cs typeface="Trebuchet MS" pitchFamily="34" charset="-120"/>
+              </a:rPr>
+              <a:t>e</a:t>
             </a:r>
             <a:endParaRPr lang="en-US" sz="900" dirty="0"/>
           </a:p>
@@ -17599,7 +17455,7 @@
                 <a:ea typeface="Calibri" pitchFamily="34" charset="-122"/>
                 <a:cs typeface="Calibri" pitchFamily="34" charset="-120"/>
               </a:rPr>
-              <a:t>Word Labs  •  wordlabs.app  •  Suffix: '-able' = able to be done</a:t>
+              <a:t>Word Labs  •  wordlabs.app  •  Suffix: '-able' = can be done; capable of</a:t>
             </a:r>
             <a:endParaRPr lang="en-US" sz="800" dirty="0"/>
           </a:p>
@@ -18239,7 +18095,7 @@
                 <a:ea typeface="Calibri" pitchFamily="34" charset="-122"/>
                 <a:cs typeface="Calibri" pitchFamily="34" charset="-120"/>
               </a:rPr>
-              <a:t>Word Labs  •  wordlabs.app  •  Suffix: '-able' = able to be done</a:t>
+              <a:t>Word Labs  •  wordlabs.app  •  Suffix: '-able' = can be done; capable of</a:t>
             </a:r>
             <a:endParaRPr lang="en-US" sz="800" dirty="0"/>
           </a:p>
@@ -18351,7 +18207,7 @@
                 <a:ea typeface="Calibri" pitchFamily="34" charset="-122"/>
                 <a:cs typeface="Calibri" pitchFamily="34" charset="-120"/>
               </a:rPr>
-              <a:t>It was </a:t>
+              <a:t>It is </a:t>
             </a:r>
             <a:pPr algn="l" indent="0" marL="0">
               <a:buNone/>
@@ -18382,7 +18238,7 @@
                 <a:ea typeface="Calibri" pitchFamily="34" charset="-122"/>
                 <a:cs typeface="Calibri" pitchFamily="34" charset="-120"/>
               </a:rPr>
-              <a:t> how the team made an </a:t>
+              <a:t> how </a:t>
             </a:r>
             <a:pPr algn="l" indent="0" marL="0">
               <a:buNone/>
@@ -18399,7 +18255,7 @@
                 <a:ea typeface="Calibri" pitchFamily="34" charset="-122"/>
                 <a:cs typeface="Calibri" pitchFamily="34" charset="-120"/>
               </a:rPr>
-              <a:t>unbreakable</a:t>
+              <a:t>dependable</a:t>
             </a:r>
             <a:pPr algn="l" indent="0" marL="0">
               <a:buNone/>
@@ -18413,7 +18269,7 @@
                 <a:ea typeface="Calibri" pitchFamily="34" charset="-122"/>
                 <a:cs typeface="Calibri" pitchFamily="34" charset="-120"/>
               </a:rPr>
-              <a:t> bond, and their performance was truly </a:t>
+              <a:t> she is, and her </a:t>
             </a:r>
             <a:pPr algn="l" indent="0" marL="0">
               <a:buNone/>
@@ -18430,7 +18286,7 @@
                 <a:ea typeface="Calibri" pitchFamily="34" charset="-122"/>
                 <a:cs typeface="Calibri" pitchFamily="34" charset="-120"/>
               </a:rPr>
-              <a:t>unforgettable</a:t>
+              <a:t>readable</a:t>
             </a:r>
             <a:pPr algn="l" indent="0" marL="0">
               <a:buNone/>
@@ -18444,7 +18300,7 @@
                 <a:ea typeface="Calibri" pitchFamily="34" charset="-122"/>
                 <a:cs typeface="Calibri" pitchFamily="34" charset="-120"/>
               </a:rPr>
-              <a:t>.</a:t>
+              <a:t> handwriting makes marking so much easier.</a:t>
             </a:r>
             <a:endParaRPr lang="en-US" sz="1800" dirty="0"/>
           </a:p>
@@ -18727,7 +18583,7 @@
                 <a:ea typeface="Trebuchet MS" pitchFamily="34" charset="-122"/>
                 <a:cs typeface="Trebuchet MS" pitchFamily="34" charset="-120"/>
               </a:rPr>
-              <a:t>unbreakable</a:t>
+              <a:t>dependable</a:t>
             </a:r>
             <a:endParaRPr lang="en-US" sz="1400" dirty="0"/>
           </a:p>
@@ -18855,7 +18711,7 @@
                 <a:ea typeface="Trebuchet MS" pitchFamily="34" charset="-122"/>
                 <a:cs typeface="Trebuchet MS" pitchFamily="34" charset="-120"/>
               </a:rPr>
-              <a:t>unforgettable</a:t>
+              <a:t>readable</a:t>
             </a:r>
             <a:endParaRPr lang="en-US" sz="1400" dirty="0"/>
           </a:p>
@@ -19186,7 +19042,7 @@
                 <a:ea typeface="Calibri" pitchFamily="34" charset="-122"/>
                 <a:cs typeface="Calibri" pitchFamily="34" charset="-120"/>
               </a:rPr>
-              <a:t>Word Labs  •  wordlabs.app  •  Suffix: '-able' = able to be done</a:t>
+              <a:t>Word Labs  •  wordlabs.app  •  Suffix: '-able' = can be done; capable of</a:t>
             </a:r>
             <a:endParaRPr lang="en-US" sz="800" dirty="0"/>
           </a:p>
@@ -20013,7 +19869,7 @@
                 <a:ea typeface="Calibri" pitchFamily="34" charset="-122"/>
                 <a:cs typeface="Calibri" pitchFamily="34" charset="-120"/>
               </a:rPr>
-              <a:t>Word Labs  •  wordlabs.app  •  Suffix: '-able' = able to be done</a:t>
+              <a:t>Word Labs  •  wordlabs.app  •  Suffix: '-able' = can be done; capable of</a:t>
             </a:r>
             <a:endParaRPr lang="en-US" sz="800" dirty="0"/>
           </a:p>
@@ -20554,7 +20410,7 @@
                 <a:ea typeface="Calibri" pitchFamily="34" charset="-122"/>
                 <a:cs typeface="Calibri" pitchFamily="34" charset="-120"/>
               </a:rPr>
-              <a:t>able to be done</a:t>
+              <a:t>can be done; capable of</a:t>
             </a:r>
             <a:endParaRPr lang="en-US" sz="850" dirty="0"/>
           </a:p>
@@ -21110,7 +20966,7 @@
                 <a:ea typeface="Calibri" pitchFamily="34" charset="-122"/>
                 <a:cs typeface="Calibri" pitchFamily="34" charset="-120"/>
               </a:rPr>
-              <a:t>Word Labs  •  wordlabs.app  •  Suffix: '-able' = able to be done</a:t>
+              <a:t>Word Labs  •  wordlabs.app  •  Suffix: '-able' = can be done; capable of</a:t>
             </a:r>
             <a:endParaRPr lang="en-US" sz="800" dirty="0"/>
           </a:p>
@@ -21651,7 +21507,7 @@
                 <a:ea typeface="Calibri" pitchFamily="34" charset="-122"/>
                 <a:cs typeface="Calibri" pitchFamily="34" charset="-120"/>
               </a:rPr>
-              <a:t>able to be done</a:t>
+              <a:t>can be done; capable of</a:t>
             </a:r>
             <a:endParaRPr lang="en-US" sz="850" dirty="0"/>
           </a:p>
@@ -22549,7 +22405,7 @@
                 <a:ea typeface="Calibri" pitchFamily="34" charset="-122"/>
                 <a:cs typeface="Calibri" pitchFamily="34" charset="-120"/>
               </a:rPr>
-              <a:t>Word Labs  •  wordlabs.app  •  Suffix: '-able' = able to be done</a:t>
+              <a:t>Word Labs  •  wordlabs.app  •  Suffix: '-able' = can be done; capable of</a:t>
             </a:r>
             <a:endParaRPr lang="en-US" sz="800" dirty="0"/>
           </a:p>
@@ -23090,7 +22946,7 @@
                 <a:ea typeface="Calibri" pitchFamily="34" charset="-122"/>
                 <a:cs typeface="Calibri" pitchFamily="34" charset="-120"/>
               </a:rPr>
-              <a:t>able to be done</a:t>
+              <a:t>can be done; capable of</a:t>
             </a:r>
             <a:endParaRPr lang="en-US" sz="850" dirty="0"/>
           </a:p>
@@ -23671,8 +23527,8 @@
         </p:nvSpPr>
         <p:spPr>
           <a:xfrm>
-            <a:off x="2023872" y="4169664"/>
-            <a:ext cx="685800" cy="475488"/>
+            <a:off x="1951330" y="4169664"/>
+            <a:ext cx="676656" cy="475488"/>
           </a:xfrm>
           <a:prstGeom prst="rect">
             <a:avLst>
@@ -23698,8 +23554,8 @@
         </p:nvSpPr>
         <p:spPr>
           <a:xfrm>
-            <a:off x="2023872" y="4169664"/>
-            <a:ext cx="685800" cy="475488"/>
+            <a:off x="1951330" y="4169664"/>
+            <a:ext cx="676656" cy="475488"/>
           </a:xfrm>
           <a:prstGeom prst="rect">
             <a:avLst/>
@@ -23737,8 +23593,8 @@
         </p:nvSpPr>
         <p:spPr>
           <a:xfrm>
-            <a:off x="2831592" y="4169664"/>
-            <a:ext cx="685800" cy="475488"/>
+            <a:off x="2677363" y="4169664"/>
+            <a:ext cx="676656" cy="475488"/>
           </a:xfrm>
           <a:prstGeom prst="rect">
             <a:avLst>
@@ -23764,8 +23620,8 @@
         </p:nvSpPr>
         <p:spPr>
           <a:xfrm>
-            <a:off x="2831592" y="4169664"/>
-            <a:ext cx="685800" cy="475488"/>
+            <a:off x="2677363" y="4169664"/>
+            <a:ext cx="676656" cy="475488"/>
           </a:xfrm>
           <a:prstGeom prst="rect">
             <a:avLst/>
@@ -23803,8 +23659,8 @@
         </p:nvSpPr>
         <p:spPr>
           <a:xfrm>
-            <a:off x="3639312" y="4169664"/>
-            <a:ext cx="685800" cy="475488"/>
+            <a:off x="3403397" y="4169664"/>
+            <a:ext cx="676656" cy="475488"/>
           </a:xfrm>
           <a:prstGeom prst="rect">
             <a:avLst>
@@ -23830,8 +23686,8 @@
         </p:nvSpPr>
         <p:spPr>
           <a:xfrm>
-            <a:off x="3639312" y="4169664"/>
-            <a:ext cx="685800" cy="475488"/>
+            <a:off x="3403397" y="4169664"/>
+            <a:ext cx="676656" cy="475488"/>
           </a:xfrm>
           <a:prstGeom prst="rect">
             <a:avLst/>
@@ -23869,8 +23725,8 @@
         </p:nvSpPr>
         <p:spPr>
           <a:xfrm>
-            <a:off x="4447032" y="4169664"/>
-            <a:ext cx="685800" cy="475488"/>
+            <a:off x="4129430" y="4169664"/>
+            <a:ext cx="676656" cy="475488"/>
           </a:xfrm>
           <a:prstGeom prst="rect">
             <a:avLst>
@@ -23896,8 +23752,8 @@
         </p:nvSpPr>
         <p:spPr>
           <a:xfrm>
-            <a:off x="4447032" y="4169664"/>
-            <a:ext cx="685800" cy="475488"/>
+            <a:off x="4129430" y="4169664"/>
+            <a:ext cx="676656" cy="475488"/>
           </a:xfrm>
           <a:prstGeom prst="rect">
             <a:avLst/>
@@ -23935,8 +23791,8 @@
         </p:nvSpPr>
         <p:spPr>
           <a:xfrm>
-            <a:off x="5254752" y="4169664"/>
-            <a:ext cx="685800" cy="475488"/>
+            <a:off x="4855464" y="4169664"/>
+            <a:ext cx="676656" cy="475488"/>
           </a:xfrm>
           <a:prstGeom prst="rect">
             <a:avLst>
@@ -23962,8 +23818,8 @@
         </p:nvSpPr>
         <p:spPr>
           <a:xfrm>
-            <a:off x="5254752" y="4169664"/>
-            <a:ext cx="685800" cy="475488"/>
+            <a:off x="4855464" y="4169664"/>
+            <a:ext cx="676656" cy="475488"/>
           </a:xfrm>
           <a:prstGeom prst="rect">
             <a:avLst/>
@@ -24001,8 +23857,8 @@
         </p:nvSpPr>
         <p:spPr>
           <a:xfrm>
-            <a:off x="6062472" y="4169664"/>
-            <a:ext cx="685800" cy="475488"/>
+            <a:off x="5581498" y="4169664"/>
+            <a:ext cx="676656" cy="475488"/>
           </a:xfrm>
           <a:prstGeom prst="rect">
             <a:avLst>
@@ -24028,8 +23884,8 @@
         </p:nvSpPr>
         <p:spPr>
           <a:xfrm>
-            <a:off x="6062472" y="4169664"/>
-            <a:ext cx="685800" cy="475488"/>
+            <a:off x="5581498" y="4169664"/>
+            <a:ext cx="676656" cy="475488"/>
           </a:xfrm>
           <a:prstGeom prst="rect">
             <a:avLst/>
@@ -24067,8 +23923,8 @@
         </p:nvSpPr>
         <p:spPr>
           <a:xfrm>
-            <a:off x="6870192" y="4169664"/>
-            <a:ext cx="685800" cy="475488"/>
+            <a:off x="6307531" y="4169664"/>
+            <a:ext cx="676656" cy="475488"/>
           </a:xfrm>
           <a:prstGeom prst="rect">
             <a:avLst>
@@ -24094,8 +23950,8 @@
         </p:nvSpPr>
         <p:spPr>
           <a:xfrm>
-            <a:off x="6870192" y="4169664"/>
-            <a:ext cx="685800" cy="475488"/>
+            <a:off x="6307531" y="4169664"/>
+            <a:ext cx="676656" cy="475488"/>
           </a:xfrm>
           <a:prstGeom prst="rect">
             <a:avLst/>
@@ -24133,8 +23989,8 @@
         </p:nvSpPr>
         <p:spPr>
           <a:xfrm>
-            <a:off x="7677912" y="4169664"/>
-            <a:ext cx="685800" cy="475488"/>
+            <a:off x="7033565" y="4169664"/>
+            <a:ext cx="676656" cy="475488"/>
           </a:xfrm>
           <a:prstGeom prst="rect">
             <a:avLst>
@@ -24160,8 +24016,8 @@
         </p:nvSpPr>
         <p:spPr>
           <a:xfrm>
-            <a:off x="7677912" y="4169664"/>
-            <a:ext cx="685800" cy="475488"/>
+            <a:off x="7033565" y="4169664"/>
+            <a:ext cx="676656" cy="475488"/>
           </a:xfrm>
           <a:prstGeom prst="rect">
             <a:avLst/>
@@ -24185,7 +24041,73 @@
                 <a:ea typeface="Trebuchet MS" pitchFamily="34" charset="-122"/>
                 <a:cs typeface="Trebuchet MS" pitchFamily="34" charset="-120"/>
               </a:rPr>
-              <a:t>le</a:t>
+              <a:t>l</a:t>
+            </a:r>
+            <a:endParaRPr lang="en-US" sz="900" dirty="0"/>
+          </a:p>
+        </p:txBody>
+      </p:sp>
+      <p:sp>
+        <p:nvSpPr>
+          <p:cNvPr id="58" name="Shape 56"/>
+          <p:cNvSpPr/>
+          <p:nvPr/>
+        </p:nvSpPr>
+        <p:spPr>
+          <a:xfrm>
+            <a:off x="7759598" y="4169664"/>
+            <a:ext cx="676656" cy="475488"/>
+          </a:xfrm>
+          <a:prstGeom prst="rect">
+            <a:avLst>
+              <a:gd name="adj" fmla="val 7692"/>
+            </a:avLst>
+          </a:prstGeom>
+          <a:solidFill>
+            <a:srgbClr val="FFFFFF"/>
+          </a:solidFill>
+          <a:ln w="12700">
+            <a:solidFill>
+              <a:srgbClr val="DB2777"/>
+            </a:solidFill>
+            <a:prstDash val="solid"/>
+          </a:ln>
+        </p:spPr>
+      </p:sp>
+      <p:sp>
+        <p:nvSpPr>
+          <p:cNvPr id="59" name="Text 57"/>
+          <p:cNvSpPr/>
+          <p:nvPr/>
+        </p:nvSpPr>
+        <p:spPr>
+          <a:xfrm>
+            <a:off x="7759598" y="4169664"/>
+            <a:ext cx="676656" cy="475488"/>
+          </a:xfrm>
+          <a:prstGeom prst="rect">
+            <a:avLst/>
+          </a:prstGeom>
+          <a:noFill/>
+          <a:ln/>
+        </p:spPr>
+        <p:txBody>
+          <a:bodyPr wrap="square" lIns="0" tIns="0" rIns="0" bIns="0" rtlCol="0" anchor="ctr"/>
+          <a:lstStyle/>
+          <a:p>
+            <a:pPr algn="ctr" indent="0" marL="0">
+              <a:buNone/>
+            </a:pPr>
+            <a:r>
+              <a:rPr lang="en-US" sz="900" b="1" dirty="0">
+                <a:solidFill>
+                  <a:srgbClr val="9D174D"/>
+                </a:solidFill>
+                <a:latin typeface="Trebuchet MS" pitchFamily="34" charset="0"/>
+                <a:ea typeface="Trebuchet MS" pitchFamily="34" charset="-122"/>
+                <a:cs typeface="Trebuchet MS" pitchFamily="34" charset="-120"/>
+              </a:rPr>
+              <a:t>e</a:t>
             </a:r>
             <a:endParaRPr lang="en-US" sz="900" dirty="0"/>
           </a:p>
@@ -24477,7 +24399,7 @@
                 <a:ea typeface="Calibri" pitchFamily="34" charset="-122"/>
                 <a:cs typeface="Calibri" pitchFamily="34" charset="-120"/>
               </a:rPr>
-              <a:t>Word Labs  •  wordlabs.app  •  Suffix: '-able' = able to be done</a:t>
+              <a:t>Word Labs  •  wordlabs.app  •  Suffix: '-able' = can be done; capable of</a:t>
             </a:r>
             <a:endParaRPr lang="en-US" sz="800" dirty="0"/>
           </a:p>
@@ -24616,7 +24538,7 @@
                 <a:ea typeface="Trebuchet MS" pitchFamily="34" charset="-122"/>
                 <a:cs typeface="Trebuchet MS" pitchFamily="34" charset="-120"/>
               </a:rPr>
-              <a:t>unbreakable</a:t>
+              <a:t>dependable</a:t>
             </a:r>
             <a:endParaRPr lang="en-US" sz="2800" dirty="0"/>
           </a:p>
@@ -25304,7 +25226,7 @@
                 <a:ea typeface="Calibri" pitchFamily="34" charset="-122"/>
                 <a:cs typeface="Calibri" pitchFamily="34" charset="-120"/>
               </a:rPr>
-              <a:t>Word Labs  •  wordlabs.app  •  Suffix: '-able' = able to be done</a:t>
+              <a:t>Word Labs  •  wordlabs.app  •  Suffix: '-able' = can be done; capable of</a:t>
             </a:r>
             <a:endParaRPr lang="en-US" sz="800" dirty="0"/>
           </a:p>
@@ -25443,7 +25365,7 @@
                 <a:ea typeface="Trebuchet MS" pitchFamily="34" charset="-122"/>
                 <a:cs typeface="Trebuchet MS" pitchFamily="34" charset="-120"/>
               </a:rPr>
-              <a:t>unbreakable</a:t>
+              <a:t>dependable</a:t>
             </a:r>
             <a:endParaRPr lang="en-US" sz="2800" dirty="0"/>
           </a:p>
@@ -25582,7 +25504,7 @@
                 <a:ea typeface="Trebuchet MS" pitchFamily="34" charset="-122"/>
                 <a:cs typeface="Trebuchet MS" pitchFamily="34" charset="-120"/>
               </a:rPr>
-              <a:t>un</a:t>
+              <a:t>de</a:t>
             </a:r>
             <a:endParaRPr lang="en-US" sz="1300" dirty="0"/>
           </a:p>
@@ -25621,7 +25543,7 @@
                 <a:ea typeface="Calibri" pitchFamily="34" charset="-122"/>
                 <a:cs typeface="Calibri" pitchFamily="34" charset="-120"/>
               </a:rPr>
-              <a:t>not</a:t>
+              <a:t>from or down</a:t>
             </a:r>
             <a:endParaRPr lang="en-US" sz="850" dirty="0"/>
           </a:p>
@@ -25694,7 +25616,7 @@
                 <a:ea typeface="Trebuchet MS" pitchFamily="34" charset="-122"/>
                 <a:cs typeface="Trebuchet MS" pitchFamily="34" charset="-120"/>
               </a:rPr>
-              <a:t>break</a:t>
+              <a:t>pend</a:t>
             </a:r>
             <a:endParaRPr lang="en-US" sz="1300" dirty="0"/>
           </a:p>
@@ -25733,7 +25655,7 @@
                 <a:ea typeface="Calibri" pitchFamily="34" charset="-122"/>
                 <a:cs typeface="Calibri" pitchFamily="34" charset="-120"/>
               </a:rPr>
-              <a:t>to split apart</a:t>
+              <a:t>to hang; to rely on</a:t>
             </a:r>
             <a:endParaRPr lang="en-US" sz="850" dirty="0"/>
           </a:p>
@@ -25845,7 +25767,7 @@
                 <a:ea typeface="Calibri" pitchFamily="34" charset="-122"/>
                 <a:cs typeface="Calibri" pitchFamily="34" charset="-120"/>
               </a:rPr>
-              <a:t>able to be done</a:t>
+              <a:t>can be done; capable of</a:t>
             </a:r>
             <a:endParaRPr lang="en-US" sz="850" dirty="0"/>
           </a:p>
@@ -26401,7 +26323,7 @@
                 <a:ea typeface="Calibri" pitchFamily="34" charset="-122"/>
                 <a:cs typeface="Calibri" pitchFamily="34" charset="-120"/>
               </a:rPr>
-              <a:t>Word Labs  •  wordlabs.app  •  Suffix: '-able' = able to be done</a:t>
+              <a:t>Word Labs  •  wordlabs.app  •  Suffix: '-able' = can be done; capable of</a:t>
             </a:r>
             <a:endParaRPr lang="en-US" sz="800" dirty="0"/>
           </a:p>
@@ -26474,7 +26396,7 @@
                 <a:ea typeface="Trebuchet MS" pitchFamily="34" charset="-122"/>
                 <a:cs typeface="Trebuchet MS" pitchFamily="34" charset="-120"/>
               </a:rPr>
-              <a:t>We are learning that the suffix '-able' means 'able to be done'.</a:t>
+              <a:t>We are learning that the suffix '-able' means 'can be done; capable of'.</a:t>
             </a:r>
             <a:endParaRPr lang="en-US" sz="2000" dirty="0"/>
           </a:p>
@@ -27120,7 +27042,7 @@
                 <a:ea typeface="Calibri" pitchFamily="34" charset="-122"/>
                 <a:cs typeface="Calibri" pitchFamily="34" charset="-120"/>
               </a:rPr>
-              <a:t>Word Labs  •  wordlabs.app  •  Suffix: '-able' = able to be done</a:t>
+              <a:t>Word Labs  •  wordlabs.app  •  Suffix: '-able' = can be done; capable of</a:t>
             </a:r>
             <a:endParaRPr lang="en-US" sz="800" dirty="0"/>
           </a:p>
@@ -27259,7 +27181,7 @@
                 <a:ea typeface="Trebuchet MS" pitchFamily="34" charset="-122"/>
                 <a:cs typeface="Trebuchet MS" pitchFamily="34" charset="-120"/>
               </a:rPr>
-              <a:t>unbreakable</a:t>
+              <a:t>dependable</a:t>
             </a:r>
             <a:endParaRPr lang="en-US" sz="2800" dirty="0"/>
           </a:p>
@@ -27398,7 +27320,7 @@
                 <a:ea typeface="Trebuchet MS" pitchFamily="34" charset="-122"/>
                 <a:cs typeface="Trebuchet MS" pitchFamily="34" charset="-120"/>
               </a:rPr>
-              <a:t>un</a:t>
+              <a:t>de</a:t>
             </a:r>
             <a:endParaRPr lang="en-US" sz="1300" dirty="0"/>
           </a:p>
@@ -27437,7 +27359,7 @@
                 <a:ea typeface="Calibri" pitchFamily="34" charset="-122"/>
                 <a:cs typeface="Calibri" pitchFamily="34" charset="-120"/>
               </a:rPr>
-              <a:t>not</a:t>
+              <a:t>from or down</a:t>
             </a:r>
             <a:endParaRPr lang="en-US" sz="850" dirty="0"/>
           </a:p>
@@ -27510,7 +27432,7 @@
                 <a:ea typeface="Trebuchet MS" pitchFamily="34" charset="-122"/>
                 <a:cs typeface="Trebuchet MS" pitchFamily="34" charset="-120"/>
               </a:rPr>
-              <a:t>break</a:t>
+              <a:t>pend</a:t>
             </a:r>
             <a:endParaRPr lang="en-US" sz="1300" dirty="0"/>
           </a:p>
@@ -27549,7 +27471,7 @@
                 <a:ea typeface="Calibri" pitchFamily="34" charset="-122"/>
                 <a:cs typeface="Calibri" pitchFamily="34" charset="-120"/>
               </a:rPr>
-              <a:t>to split apart</a:t>
+              <a:t>to hang; to rely on</a:t>
             </a:r>
             <a:endParaRPr lang="en-US" sz="850" dirty="0"/>
           </a:p>
@@ -27661,7 +27583,7 @@
                 <a:ea typeface="Calibri" pitchFamily="34" charset="-122"/>
                 <a:cs typeface="Calibri" pitchFamily="34" charset="-120"/>
               </a:rPr>
-              <a:t>able to be done</a:t>
+              <a:t>can be done; capable of</a:t>
             </a:r>
             <a:endParaRPr lang="en-US" sz="850" dirty="0"/>
           </a:p>
@@ -27820,7 +27742,7 @@
                 <a:ea typeface="Trebuchet MS" pitchFamily="34" charset="-122"/>
                 <a:cs typeface="Trebuchet MS" pitchFamily="34" charset="-120"/>
               </a:rPr>
-              <a:t>un</a:t>
+              <a:t>de</a:t>
             </a:r>
             <a:endParaRPr lang="en-US" sz="1400" dirty="0"/>
           </a:p>
@@ -27925,7 +27847,7 @@
                 <a:ea typeface="Trebuchet MS" pitchFamily="34" charset="-122"/>
                 <a:cs typeface="Trebuchet MS" pitchFamily="34" charset="-120"/>
               </a:rPr>
-              <a:t>break</a:t>
+              <a:t>pend</a:t>
             </a:r>
             <a:endParaRPr lang="en-US" sz="1400" dirty="0"/>
           </a:p>
@@ -28559,7 +28481,7 @@
                 <a:ea typeface="Calibri" pitchFamily="34" charset="-122"/>
                 <a:cs typeface="Calibri" pitchFamily="34" charset="-120"/>
               </a:rPr>
-              <a:t>Word Labs  •  wordlabs.app  •  Suffix: '-able' = able to be done</a:t>
+              <a:t>Word Labs  •  wordlabs.app  •  Suffix: '-able' = can be done; capable of</a:t>
             </a:r>
             <a:endParaRPr lang="en-US" sz="800" dirty="0"/>
           </a:p>
@@ -28698,7 +28620,7 @@
                 <a:ea typeface="Trebuchet MS" pitchFamily="34" charset="-122"/>
                 <a:cs typeface="Trebuchet MS" pitchFamily="34" charset="-120"/>
               </a:rPr>
-              <a:t>unbreakable</a:t>
+              <a:t>dependable</a:t>
             </a:r>
             <a:endParaRPr lang="en-US" sz="2800" dirty="0"/>
           </a:p>
@@ -28837,7 +28759,7 @@
                 <a:ea typeface="Trebuchet MS" pitchFamily="34" charset="-122"/>
                 <a:cs typeface="Trebuchet MS" pitchFamily="34" charset="-120"/>
               </a:rPr>
-              <a:t>un</a:t>
+              <a:t>de</a:t>
             </a:r>
             <a:endParaRPr lang="en-US" sz="1300" dirty="0"/>
           </a:p>
@@ -28876,7 +28798,7 @@
                 <a:ea typeface="Calibri" pitchFamily="34" charset="-122"/>
                 <a:cs typeface="Calibri" pitchFamily="34" charset="-120"/>
               </a:rPr>
-              <a:t>not</a:t>
+              <a:t>from or down</a:t>
             </a:r>
             <a:endParaRPr lang="en-US" sz="850" dirty="0"/>
           </a:p>
@@ -28949,7 +28871,7 @@
                 <a:ea typeface="Trebuchet MS" pitchFamily="34" charset="-122"/>
                 <a:cs typeface="Trebuchet MS" pitchFamily="34" charset="-120"/>
               </a:rPr>
-              <a:t>break</a:t>
+              <a:t>pend</a:t>
             </a:r>
             <a:endParaRPr lang="en-US" sz="1300" dirty="0"/>
           </a:p>
@@ -28988,7 +28910,7 @@
                 <a:ea typeface="Calibri" pitchFamily="34" charset="-122"/>
                 <a:cs typeface="Calibri" pitchFamily="34" charset="-120"/>
               </a:rPr>
-              <a:t>to split apart</a:t>
+              <a:t>to hang; to rely on</a:t>
             </a:r>
             <a:endParaRPr lang="en-US" sz="850" dirty="0"/>
           </a:p>
@@ -29100,7 +29022,7 @@
                 <a:ea typeface="Calibri" pitchFamily="34" charset="-122"/>
                 <a:cs typeface="Calibri" pitchFamily="34" charset="-120"/>
               </a:rPr>
-              <a:t>able to be done</a:t>
+              <a:t>can be done; capable of</a:t>
             </a:r>
             <a:endParaRPr lang="en-US" sz="850" dirty="0"/>
           </a:p>
@@ -29259,7 +29181,7 @@
                 <a:ea typeface="Trebuchet MS" pitchFamily="34" charset="-122"/>
                 <a:cs typeface="Trebuchet MS" pitchFamily="34" charset="-120"/>
               </a:rPr>
-              <a:t>un</a:t>
+              <a:t>de</a:t>
             </a:r>
             <a:endParaRPr lang="en-US" sz="1400" dirty="0"/>
           </a:p>
@@ -29364,7 +29286,7 @@
                 <a:ea typeface="Trebuchet MS" pitchFamily="34" charset="-122"/>
                 <a:cs typeface="Trebuchet MS" pitchFamily="34" charset="-120"/>
               </a:rPr>
-              <a:t>break</a:t>
+              <a:t>pend</a:t>
             </a:r>
             <a:endParaRPr lang="en-US" sz="1400" dirty="0"/>
           </a:p>
@@ -29681,8 +29603,8 @@
         </p:nvSpPr>
         <p:spPr>
           <a:xfrm>
-            <a:off x="1951330" y="4169664"/>
-            <a:ext cx="676656" cy="475488"/>
+            <a:off x="1951828" y="4169664"/>
+            <a:ext cx="603504" cy="475488"/>
           </a:xfrm>
           <a:prstGeom prst="rect">
             <a:avLst>
@@ -29708,8 +29630,8 @@
         </p:nvSpPr>
         <p:spPr>
           <a:xfrm>
-            <a:off x="1951330" y="4169664"/>
-            <a:ext cx="676656" cy="475488"/>
+            <a:off x="1951828" y="4169664"/>
+            <a:ext cx="603504" cy="475488"/>
           </a:xfrm>
           <a:prstGeom prst="rect">
             <a:avLst/>
@@ -29733,7 +29655,7 @@
                 <a:ea typeface="Trebuchet MS" pitchFamily="34" charset="-122"/>
                 <a:cs typeface="Trebuchet MS" pitchFamily="34" charset="-120"/>
               </a:rPr>
-              <a:t>u</a:t>
+              <a:t>d</a:t>
             </a:r>
             <a:endParaRPr lang="en-US" sz="900" dirty="0"/>
           </a:p>
@@ -29747,8 +29669,8 @@
         </p:nvSpPr>
         <p:spPr>
           <a:xfrm>
-            <a:off x="2677363" y="4169664"/>
-            <a:ext cx="676656" cy="475488"/>
+            <a:off x="2605209" y="4169664"/>
+            <a:ext cx="603504" cy="475488"/>
           </a:xfrm>
           <a:prstGeom prst="rect">
             <a:avLst>
@@ -29774,8 +29696,8 @@
         </p:nvSpPr>
         <p:spPr>
           <a:xfrm>
-            <a:off x="2677363" y="4169664"/>
-            <a:ext cx="676656" cy="475488"/>
+            <a:off x="2605209" y="4169664"/>
+            <a:ext cx="603504" cy="475488"/>
           </a:xfrm>
           <a:prstGeom prst="rect">
             <a:avLst/>
@@ -29799,7 +29721,7 @@
                 <a:ea typeface="Trebuchet MS" pitchFamily="34" charset="-122"/>
                 <a:cs typeface="Trebuchet MS" pitchFamily="34" charset="-120"/>
               </a:rPr>
-              <a:t>n</a:t>
+              <a:t>e</a:t>
             </a:r>
             <a:endParaRPr lang="en-US" sz="900" dirty="0"/>
           </a:p>
@@ -29813,8 +29735,8 @@
         </p:nvSpPr>
         <p:spPr>
           <a:xfrm>
-            <a:off x="3403397" y="4169664"/>
-            <a:ext cx="676656" cy="475488"/>
+            <a:off x="3258589" y="4169664"/>
+            <a:ext cx="603504" cy="475488"/>
           </a:xfrm>
           <a:prstGeom prst="rect">
             <a:avLst>
@@ -29840,8 +29762,8 @@
         </p:nvSpPr>
         <p:spPr>
           <a:xfrm>
-            <a:off x="3403397" y="4169664"/>
-            <a:ext cx="676656" cy="475488"/>
+            <a:off x="3258589" y="4169664"/>
+            <a:ext cx="603504" cy="475488"/>
           </a:xfrm>
           <a:prstGeom prst="rect">
             <a:avLst/>
@@ -29865,7 +29787,7 @@
                 <a:ea typeface="Trebuchet MS" pitchFamily="34" charset="-122"/>
                 <a:cs typeface="Trebuchet MS" pitchFamily="34" charset="-120"/>
               </a:rPr>
-              <a:t>b</a:t>
+              <a:t>p</a:t>
             </a:r>
             <a:endParaRPr lang="en-US" sz="900" dirty="0"/>
           </a:p>
@@ -29879,8 +29801,8 @@
         </p:nvSpPr>
         <p:spPr>
           <a:xfrm>
-            <a:off x="4129430" y="4169664"/>
-            <a:ext cx="676656" cy="475488"/>
+            <a:off x="3911969" y="4169664"/>
+            <a:ext cx="603504" cy="475488"/>
           </a:xfrm>
           <a:prstGeom prst="rect">
             <a:avLst>
@@ -29906,8 +29828,8 @@
         </p:nvSpPr>
         <p:spPr>
           <a:xfrm>
-            <a:off x="4129430" y="4169664"/>
-            <a:ext cx="676656" cy="475488"/>
+            <a:off x="3911969" y="4169664"/>
+            <a:ext cx="603504" cy="475488"/>
           </a:xfrm>
           <a:prstGeom prst="rect">
             <a:avLst/>
@@ -29931,7 +29853,7 @@
                 <a:ea typeface="Trebuchet MS" pitchFamily="34" charset="-122"/>
                 <a:cs typeface="Trebuchet MS" pitchFamily="34" charset="-120"/>
               </a:rPr>
-              <a:t>r</a:t>
+              <a:t>e</a:t>
             </a:r>
             <a:endParaRPr lang="en-US" sz="900" dirty="0"/>
           </a:p>
@@ -29945,8 +29867,8 @@
         </p:nvSpPr>
         <p:spPr>
           <a:xfrm>
-            <a:off x="4855464" y="4169664"/>
-            <a:ext cx="676656" cy="475488"/>
+            <a:off x="4565350" y="4169664"/>
+            <a:ext cx="603504" cy="475488"/>
           </a:xfrm>
           <a:prstGeom prst="rect">
             <a:avLst>
@@ -29972,8 +29894,8 @@
         </p:nvSpPr>
         <p:spPr>
           <a:xfrm>
-            <a:off x="4855464" y="4169664"/>
-            <a:ext cx="676656" cy="475488"/>
+            <a:off x="4565350" y="4169664"/>
+            <a:ext cx="603504" cy="475488"/>
           </a:xfrm>
           <a:prstGeom prst="rect">
             <a:avLst/>
@@ -29997,7 +29919,7 @@
                 <a:ea typeface="Trebuchet MS" pitchFamily="34" charset="-122"/>
                 <a:cs typeface="Trebuchet MS" pitchFamily="34" charset="-120"/>
               </a:rPr>
-              <a:t>ea</a:t>
+              <a:t>n</a:t>
             </a:r>
             <a:endParaRPr lang="en-US" sz="900" dirty="0"/>
           </a:p>
@@ -30011,8 +29933,8 @@
         </p:nvSpPr>
         <p:spPr>
           <a:xfrm>
-            <a:off x="5581498" y="4169664"/>
-            <a:ext cx="676656" cy="475488"/>
+            <a:off x="5218730" y="4169664"/>
+            <a:ext cx="603504" cy="475488"/>
           </a:xfrm>
           <a:prstGeom prst="rect">
             <a:avLst>
@@ -30038,8 +29960,8 @@
         </p:nvSpPr>
         <p:spPr>
           <a:xfrm>
-            <a:off x="5581498" y="4169664"/>
-            <a:ext cx="676656" cy="475488"/>
+            <a:off x="5218730" y="4169664"/>
+            <a:ext cx="603504" cy="475488"/>
           </a:xfrm>
           <a:prstGeom prst="rect">
             <a:avLst/>
@@ -30063,7 +29985,7 @@
                 <a:ea typeface="Trebuchet MS" pitchFamily="34" charset="-122"/>
                 <a:cs typeface="Trebuchet MS" pitchFamily="34" charset="-120"/>
               </a:rPr>
-              <a:t>k</a:t>
+              <a:t>d</a:t>
             </a:r>
             <a:endParaRPr lang="en-US" sz="900" dirty="0"/>
           </a:p>
@@ -30077,8 +29999,8 @@
         </p:nvSpPr>
         <p:spPr>
           <a:xfrm>
-            <a:off x="6307531" y="4169664"/>
-            <a:ext cx="676656" cy="475488"/>
+            <a:off x="5872111" y="4169664"/>
+            <a:ext cx="603504" cy="475488"/>
           </a:xfrm>
           <a:prstGeom prst="rect">
             <a:avLst>
@@ -30104,8 +30026,8 @@
         </p:nvSpPr>
         <p:spPr>
           <a:xfrm>
-            <a:off x="6307531" y="4169664"/>
-            <a:ext cx="676656" cy="475488"/>
+            <a:off x="5872111" y="4169664"/>
+            <a:ext cx="603504" cy="475488"/>
           </a:xfrm>
           <a:prstGeom prst="rect">
             <a:avLst/>
@@ -30143,8 +30065,8 @@
         </p:nvSpPr>
         <p:spPr>
           <a:xfrm>
-            <a:off x="7033565" y="4169664"/>
-            <a:ext cx="676656" cy="475488"/>
+            <a:off x="6525491" y="4169664"/>
+            <a:ext cx="603504" cy="475488"/>
           </a:xfrm>
           <a:prstGeom prst="rect">
             <a:avLst>
@@ -30170,8 +30092,8 @@
         </p:nvSpPr>
         <p:spPr>
           <a:xfrm>
-            <a:off x="7033565" y="4169664"/>
-            <a:ext cx="676656" cy="475488"/>
+            <a:off x="6525491" y="4169664"/>
+            <a:ext cx="603504" cy="475488"/>
           </a:xfrm>
           <a:prstGeom prst="rect">
             <a:avLst/>
@@ -30209,8 +30131,8 @@
         </p:nvSpPr>
         <p:spPr>
           <a:xfrm>
-            <a:off x="7759598" y="4169664"/>
-            <a:ext cx="676656" cy="475488"/>
+            <a:off x="7178871" y="4169664"/>
+            <a:ext cx="603504" cy="475488"/>
           </a:xfrm>
           <a:prstGeom prst="rect">
             <a:avLst>
@@ -30236,8 +30158,8 @@
         </p:nvSpPr>
         <p:spPr>
           <a:xfrm>
-            <a:off x="7759598" y="4169664"/>
-            <a:ext cx="676656" cy="475488"/>
+            <a:off x="7178871" y="4169664"/>
+            <a:ext cx="603504" cy="475488"/>
           </a:xfrm>
           <a:prstGeom prst="rect">
             <a:avLst/>
@@ -30261,7 +30183,73 @@
                 <a:ea typeface="Trebuchet MS" pitchFamily="34" charset="-122"/>
                 <a:cs typeface="Trebuchet MS" pitchFamily="34" charset="-120"/>
               </a:rPr>
-              <a:t>le</a:t>
+              <a:t>l</a:t>
+            </a:r>
+            <a:endParaRPr lang="en-US" sz="900" dirty="0"/>
+          </a:p>
+        </p:txBody>
+      </p:sp>
+      <p:sp>
+        <p:nvSpPr>
+          <p:cNvPr id="60" name="Shape 58"/>
+          <p:cNvSpPr/>
+          <p:nvPr/>
+        </p:nvSpPr>
+        <p:spPr>
+          <a:xfrm>
+            <a:off x="7832252" y="4169664"/>
+            <a:ext cx="603504" cy="475488"/>
+          </a:xfrm>
+          <a:prstGeom prst="rect">
+            <a:avLst>
+              <a:gd name="adj" fmla="val 7692"/>
+            </a:avLst>
+          </a:prstGeom>
+          <a:solidFill>
+            <a:srgbClr val="FFFFFF"/>
+          </a:solidFill>
+          <a:ln w="12700">
+            <a:solidFill>
+              <a:srgbClr val="DB2777"/>
+            </a:solidFill>
+            <a:prstDash val="solid"/>
+          </a:ln>
+        </p:spPr>
+      </p:sp>
+      <p:sp>
+        <p:nvSpPr>
+          <p:cNvPr id="61" name="Text 59"/>
+          <p:cNvSpPr/>
+          <p:nvPr/>
+        </p:nvSpPr>
+        <p:spPr>
+          <a:xfrm>
+            <a:off x="7832252" y="4169664"/>
+            <a:ext cx="603504" cy="475488"/>
+          </a:xfrm>
+          <a:prstGeom prst="rect">
+            <a:avLst/>
+          </a:prstGeom>
+          <a:noFill/>
+          <a:ln/>
+        </p:spPr>
+        <p:txBody>
+          <a:bodyPr wrap="square" lIns="0" tIns="0" rIns="0" bIns="0" rtlCol="0" anchor="ctr"/>
+          <a:lstStyle/>
+          <a:p>
+            <a:pPr algn="ctr" indent="0" marL="0">
+              <a:buNone/>
+            </a:pPr>
+            <a:r>
+              <a:rPr lang="en-US" sz="900" b="1" dirty="0">
+                <a:solidFill>
+                  <a:srgbClr val="9D174D"/>
+                </a:solidFill>
+                <a:latin typeface="Trebuchet MS" pitchFamily="34" charset="0"/>
+                <a:ea typeface="Trebuchet MS" pitchFamily="34" charset="-122"/>
+                <a:cs typeface="Trebuchet MS" pitchFamily="34" charset="-120"/>
+              </a:rPr>
+              <a:t>e</a:t>
             </a:r>
             <a:endParaRPr lang="en-US" sz="900" dirty="0"/>
           </a:p>
@@ -30553,7 +30541,7 @@
                 <a:ea typeface="Calibri" pitchFamily="34" charset="-122"/>
                 <a:cs typeface="Calibri" pitchFamily="34" charset="-120"/>
               </a:rPr>
-              <a:t>Word Labs  •  wordlabs.app  •  Suffix: '-able' = able to be done</a:t>
+              <a:t>Word Labs  •  wordlabs.app  •  Suffix: '-able' = can be done; capable of</a:t>
             </a:r>
             <a:endParaRPr lang="en-US" sz="800" dirty="0"/>
           </a:p>
@@ -30692,7 +30680,7 @@
                 <a:ea typeface="Trebuchet MS" pitchFamily="34" charset="-122"/>
                 <a:cs typeface="Trebuchet MS" pitchFamily="34" charset="-120"/>
               </a:rPr>
-              <a:t>unforgettable</a:t>
+              <a:t>readable</a:t>
             </a:r>
             <a:endParaRPr lang="en-US" sz="2800" dirty="0"/>
           </a:p>
@@ -31380,7 +31368,7 @@
                 <a:ea typeface="Calibri" pitchFamily="34" charset="-122"/>
                 <a:cs typeface="Calibri" pitchFamily="34" charset="-120"/>
               </a:rPr>
-              <a:t>Word Labs  •  wordlabs.app  •  Suffix: '-able' = able to be done</a:t>
+              <a:t>Word Labs  •  wordlabs.app  •  Suffix: '-able' = can be done; capable of</a:t>
             </a:r>
             <a:endParaRPr lang="en-US" sz="800" dirty="0"/>
           </a:p>
@@ -31519,7 +31507,7 @@
                 <a:ea typeface="Trebuchet MS" pitchFamily="34" charset="-122"/>
                 <a:cs typeface="Trebuchet MS" pitchFamily="34" charset="-120"/>
               </a:rPr>
-              <a:t>unforgettable</a:t>
+              <a:t>readable</a:t>
             </a:r>
             <a:endParaRPr lang="en-US" sz="2800" dirty="0"/>
           </a:p>
@@ -31599,8 +31587,8 @@
         </p:nvSpPr>
         <p:spPr>
           <a:xfrm>
-            <a:off x="1989734" y="2258568"/>
-            <a:ext cx="1581912" cy="292608"/>
+            <a:off x="2938272" y="2258568"/>
+            <a:ext cx="1828800" cy="292608"/>
           </a:xfrm>
           <a:prstGeom prst="rect">
             <a:avLst>
@@ -31633,8 +31621,8 @@
         </p:nvSpPr>
         <p:spPr>
           <a:xfrm>
-            <a:off x="1989734" y="2258568"/>
-            <a:ext cx="1581912" cy="292608"/>
+            <a:off x="2938272" y="2258568"/>
+            <a:ext cx="1828800" cy="292608"/>
           </a:xfrm>
           <a:prstGeom prst="rect">
             <a:avLst/>
@@ -31658,7 +31646,7 @@
                 <a:ea typeface="Trebuchet MS" pitchFamily="34" charset="-122"/>
                 <a:cs typeface="Trebuchet MS" pitchFamily="34" charset="-120"/>
               </a:rPr>
-              <a:t>un</a:t>
+              <a:t>read</a:t>
             </a:r>
             <a:endParaRPr lang="en-US" sz="1300" dirty="0"/>
           </a:p>
@@ -31672,8 +31660,8 @@
         </p:nvSpPr>
         <p:spPr>
           <a:xfrm>
-            <a:off x="1989734" y="2569464"/>
-            <a:ext cx="1581912" cy="201168"/>
+            <a:off x="2938272" y="2569464"/>
+            <a:ext cx="1828800" cy="201168"/>
           </a:xfrm>
           <a:prstGeom prst="rect">
             <a:avLst/>
@@ -31697,7 +31685,7 @@
                 <a:ea typeface="Calibri" pitchFamily="34" charset="-122"/>
                 <a:cs typeface="Calibri" pitchFamily="34" charset="-120"/>
               </a:rPr>
-              <a:t>not</a:t>
+              <a:t>to look at and understand written words</a:t>
             </a:r>
             <a:endParaRPr lang="en-US" sz="850" dirty="0"/>
           </a:p>
@@ -31711,8 +31699,8 @@
         </p:nvSpPr>
         <p:spPr>
           <a:xfrm>
-            <a:off x="3659429" y="2258568"/>
-            <a:ext cx="1581912" cy="292608"/>
+            <a:off x="5803392" y="2258568"/>
+            <a:ext cx="1828800" cy="292608"/>
           </a:xfrm>
           <a:prstGeom prst="rect">
             <a:avLst>
@@ -31720,11 +31708,11 @@
             </a:avLst>
           </a:prstGeom>
           <a:solidFill>
-            <a:srgbClr val="FCE7F3"/>
+            <a:srgbClr val="CCFBF1"/>
           </a:solidFill>
           <a:ln w="19050">
             <a:solidFill>
-              <a:srgbClr val="DB2777"/>
+              <a:srgbClr val="0D9488"/>
             </a:solidFill>
             <a:prstDash val="solid"/>
           </a:ln>
@@ -31745,8 +31733,8 @@
         </p:nvSpPr>
         <p:spPr>
           <a:xfrm>
-            <a:off x="3659429" y="2258568"/>
-            <a:ext cx="1581912" cy="292608"/>
+            <a:off x="5803392" y="2258568"/>
+            <a:ext cx="1828800" cy="292608"/>
           </a:xfrm>
           <a:prstGeom prst="rect">
             <a:avLst/>
@@ -31764,13 +31752,13 @@
             <a:r>
               <a:rPr lang="en-US" sz="1300" b="1" dirty="0">
                 <a:solidFill>
-                  <a:srgbClr val="9D174D"/>
+                  <a:srgbClr val="0F766E"/>
                 </a:solidFill>
                 <a:latin typeface="Trebuchet MS" pitchFamily="34" charset="0"/>
                 <a:ea typeface="Trebuchet MS" pitchFamily="34" charset="-122"/>
                 <a:cs typeface="Trebuchet MS" pitchFamily="34" charset="-120"/>
               </a:rPr>
-              <a:t>forget</a:t>
+              <a:t>able</a:t>
             </a:r>
             <a:endParaRPr lang="en-US" sz="1300" dirty="0"/>
           </a:p>
@@ -31784,8 +31772,8 @@
         </p:nvSpPr>
         <p:spPr>
           <a:xfrm>
-            <a:off x="3659429" y="2569464"/>
-            <a:ext cx="1581912" cy="201168"/>
+            <a:off x="5803392" y="2569464"/>
+            <a:ext cx="1828800" cy="201168"/>
           </a:xfrm>
           <a:prstGeom prst="rect">
             <a:avLst/>
@@ -31809,7 +31797,7 @@
                 <a:ea typeface="Calibri" pitchFamily="34" charset="-122"/>
                 <a:cs typeface="Calibri" pitchFamily="34" charset="-120"/>
               </a:rPr>
-              <a:t>to fail to remember</a:t>
+              <a:t>can be done; capable of</a:t>
             </a:r>
             <a:endParaRPr lang="en-US" sz="850" dirty="0"/>
           </a:p>
@@ -31817,264 +31805,238 @@
       </p:sp>
       <p:sp>
         <p:nvSpPr>
-          <p:cNvPr id="22" name="Shape 20"/>
-          <p:cNvSpPr/>
-          <p:nvPr/>
-        </p:nvSpPr>
-        <p:spPr>
-          <a:xfrm>
-            <a:off x="5329123" y="2258568"/>
-            <a:ext cx="1581912" cy="292608"/>
+          <p:cNvPr id="22" name="Text 20"/>
+          <p:cNvSpPr/>
+          <p:nvPr/>
+        </p:nvSpPr>
+        <p:spPr>
+          <a:xfrm>
+            <a:off x="5803392" y="2752344"/>
+            <a:ext cx="1828800" cy="182880"/>
+          </a:xfrm>
+          <a:prstGeom prst="rect">
+            <a:avLst/>
+          </a:prstGeom>
+          <a:noFill/>
+          <a:ln/>
+        </p:spPr>
+        <p:txBody>
+          <a:bodyPr wrap="square" lIns="0" tIns="0" rIns="0" bIns="0" rtlCol="0" anchor="t"/>
+          <a:lstStyle/>
+          <a:p>
+            <a:pPr algn="ctr" indent="0" marL="0">
+              <a:buNone/>
+            </a:pPr>
+            <a:r>
+              <a:rPr lang="en-US" sz="700" i="1" dirty="0">
+                <a:solidFill>
+                  <a:srgbClr val="94A3B8"/>
+                </a:solidFill>
+                <a:latin typeface="Calibri" pitchFamily="34" charset="0"/>
+                <a:ea typeface="Calibri" pitchFamily="34" charset="-122"/>
+                <a:cs typeface="Calibri" pitchFamily="34" charset="-120"/>
+              </a:rPr>
+              <a:t>'e' dropped from 'reade' before vowel suffix '-able'</a:t>
+            </a:r>
+            <a:endParaRPr lang="en-US" sz="700" dirty="0"/>
+          </a:p>
+        </p:txBody>
+      </p:sp>
+      <p:sp>
+        <p:nvSpPr>
+          <p:cNvPr id="23" name="Shape 21"/>
+          <p:cNvSpPr/>
+          <p:nvPr/>
+        </p:nvSpPr>
+        <p:spPr>
+          <a:xfrm>
+            <a:off x="365760" y="3273552"/>
+            <a:ext cx="1371600" cy="658368"/>
           </a:xfrm>
           <a:prstGeom prst="rect">
             <a:avLst>
-              <a:gd name="adj" fmla="val 25000"/>
+              <a:gd name="adj" fmla="val 8333"/>
             </a:avLst>
           </a:prstGeom>
           <a:solidFill>
-            <a:srgbClr val="FCE7F3"/>
-          </a:solidFill>
-          <a:ln w="19050">
-            <a:solidFill>
-              <a:srgbClr val="DB2777"/>
-            </a:solidFill>
-            <a:prstDash val="solid"/>
-          </a:ln>
-          <a:effectLst>
-            <a:outerShdw sx="100000" sy="100000" kx="0" ky="0" algn="bl" rotWithShape="0" blurRad="101600" dist="38100" dir="8100000">
-              <a:srgbClr val="000000">
-                <a:alpha val="12000"/>
-              </a:srgbClr>
-            </a:outerShdw>
-          </a:effectLst>
-        </p:spPr>
-      </p:sp>
-      <p:sp>
-        <p:nvSpPr>
-          <p:cNvPr id="23" name="Text 21"/>
-          <p:cNvSpPr/>
-          <p:nvPr/>
-        </p:nvSpPr>
-        <p:spPr>
-          <a:xfrm>
-            <a:off x="5329123" y="2258568"/>
-            <a:ext cx="1581912" cy="292608"/>
-          </a:xfrm>
-          <a:prstGeom prst="rect">
-            <a:avLst/>
-          </a:prstGeom>
-          <a:noFill/>
-          <a:ln/>
-        </p:spPr>
-        <p:txBody>
-          <a:bodyPr wrap="square" lIns="0" tIns="0" rIns="0" bIns="0" rtlCol="0" anchor="ctr"/>
-          <a:lstStyle/>
-          <a:p>
-            <a:pPr algn="ctr" indent="0" marL="0">
-              <a:buNone/>
-            </a:pPr>
-            <a:r>
-              <a:rPr lang="en-US" sz="1300" b="1" dirty="0">
-                <a:solidFill>
-                  <a:srgbClr val="9D174D"/>
+            <a:srgbClr val="E2E8F0"/>
+          </a:solidFill>
+          <a:ln w="12700">
+            <a:solidFill>
+              <a:srgbClr val="E2E8F0"/>
+            </a:solidFill>
+            <a:prstDash val="solid"/>
+          </a:ln>
+        </p:spPr>
+      </p:sp>
+      <p:sp>
+        <p:nvSpPr>
+          <p:cNvPr id="24" name="Text 22"/>
+          <p:cNvSpPr/>
+          <p:nvPr/>
+        </p:nvSpPr>
+        <p:spPr>
+          <a:xfrm>
+            <a:off x="365760" y="3273552"/>
+            <a:ext cx="1371600" cy="658368"/>
+          </a:xfrm>
+          <a:prstGeom prst="rect">
+            <a:avLst/>
+          </a:prstGeom>
+          <a:noFill/>
+          <a:ln/>
+        </p:spPr>
+        <p:txBody>
+          <a:bodyPr wrap="square" lIns="0" tIns="0" rIns="0" bIns="0" rtlCol="0" anchor="ctr"/>
+          <a:lstStyle/>
+          <a:p>
+            <a:pPr algn="ctr" indent="0" marL="0">
+              <a:buNone/>
+            </a:pPr>
+            <a:r>
+              <a:rPr lang="en-US" sz="1100" b="1" dirty="0">
+                <a:solidFill>
+                  <a:srgbClr val="475569"/>
                 </a:solidFill>
                 <a:latin typeface="Trebuchet MS" pitchFamily="34" charset="0"/>
                 <a:ea typeface="Trebuchet MS" pitchFamily="34" charset="-122"/>
                 <a:cs typeface="Trebuchet MS" pitchFamily="34" charset="-120"/>
               </a:rPr>
-              <a:t>t</a:t>
-            </a:r>
-            <a:endParaRPr lang="en-US" sz="1300" dirty="0"/>
-          </a:p>
-        </p:txBody>
-      </p:sp>
-      <p:sp>
-        <p:nvSpPr>
-          <p:cNvPr id="24" name="Text 22"/>
-          <p:cNvSpPr/>
-          <p:nvPr/>
-        </p:nvSpPr>
-        <p:spPr>
-          <a:xfrm>
-            <a:off x="5329123" y="2569464"/>
-            <a:ext cx="1581912" cy="201168"/>
-          </a:xfrm>
-          <a:prstGeom prst="rect">
-            <a:avLst/>
-          </a:prstGeom>
-          <a:noFill/>
-          <a:ln/>
-        </p:spPr>
-        <p:txBody>
-          <a:bodyPr wrap="square" lIns="0" tIns="0" rIns="0" bIns="0" rtlCol="0" anchor="t"/>
-          <a:lstStyle/>
-          <a:p>
-            <a:pPr algn="ctr" indent="0" marL="0">
-              <a:buNone/>
-            </a:pPr>
-            <a:r>
-              <a:rPr lang="en-US" sz="850" dirty="0">
-                <a:solidFill>
-                  <a:srgbClr val="475569"/>
+              <a:t>Syllables</a:t>
+            </a:r>
+            <a:endParaRPr lang="en-US" sz="1100" dirty="0"/>
+          </a:p>
+        </p:txBody>
+      </p:sp>
+      <p:sp>
+        <p:nvSpPr>
+          <p:cNvPr id="25" name="Shape 23"/>
+          <p:cNvSpPr/>
+          <p:nvPr/>
+        </p:nvSpPr>
+        <p:spPr>
+          <a:xfrm>
+            <a:off x="1874520" y="3273552"/>
+            <a:ext cx="6903720" cy="658368"/>
+          </a:xfrm>
+          <a:prstGeom prst="rect">
+            <a:avLst>
+              <a:gd name="adj" fmla="val 8333"/>
+            </a:avLst>
+          </a:prstGeom>
+          <a:solidFill>
+            <a:srgbClr val="F8FAFC"/>
+          </a:solidFill>
+          <a:ln w="12700">
+            <a:solidFill>
+              <a:srgbClr val="E2E8F0"/>
+            </a:solidFill>
+            <a:prstDash val="dash"/>
+          </a:ln>
+        </p:spPr>
+      </p:sp>
+      <p:sp>
+        <p:nvSpPr>
+          <p:cNvPr id="26" name="Text 24"/>
+          <p:cNvSpPr/>
+          <p:nvPr/>
+        </p:nvSpPr>
+        <p:spPr>
+          <a:xfrm>
+            <a:off x="1874520" y="3273552"/>
+            <a:ext cx="6903720" cy="658368"/>
+          </a:xfrm>
+          <a:prstGeom prst="rect">
+            <a:avLst/>
+          </a:prstGeom>
+          <a:noFill/>
+          <a:ln/>
+        </p:spPr>
+        <p:txBody>
+          <a:bodyPr wrap="square" rtlCol="0" anchor="ctr"/>
+          <a:lstStyle/>
+          <a:p>
+            <a:pPr algn="ctr" indent="0" marL="0">
+              <a:buNone/>
+            </a:pPr>
+            <a:r>
+              <a:rPr lang="en-US" sz="1100" i="1" dirty="0">
+                <a:solidFill>
+                  <a:srgbClr val="CBD5E1"/>
                 </a:solidFill>
                 <a:latin typeface="Calibri" pitchFamily="34" charset="0"/>
                 <a:ea typeface="Calibri" pitchFamily="34" charset="-122"/>
                 <a:cs typeface="Calibri" pitchFamily="34" charset="-120"/>
               </a:rPr>
-              <a:t>doubled consonant</a:t>
-            </a:r>
-            <a:endParaRPr lang="en-US" sz="850" dirty="0"/>
-          </a:p>
-        </p:txBody>
-      </p:sp>
-      <p:sp>
-        <p:nvSpPr>
-          <p:cNvPr id="25" name="Text 23"/>
-          <p:cNvSpPr/>
-          <p:nvPr/>
-        </p:nvSpPr>
-        <p:spPr>
-          <a:xfrm>
-            <a:off x="5329123" y="2752344"/>
-            <a:ext cx="1581912" cy="182880"/>
-          </a:xfrm>
-          <a:prstGeom prst="rect">
-            <a:avLst/>
-          </a:prstGeom>
-          <a:noFill/>
-          <a:ln/>
-        </p:spPr>
-        <p:txBody>
-          <a:bodyPr wrap="square" lIns="0" tIns="0" rIns="0" bIns="0" rtlCol="0" anchor="t"/>
-          <a:lstStyle/>
-          <a:p>
-            <a:pPr algn="ctr" indent="0" marL="0">
-              <a:buNone/>
-            </a:pPr>
-            <a:r>
-              <a:rPr lang="en-US" sz="700" i="1" dirty="0">
-                <a:solidFill>
-                  <a:srgbClr val="94A3B8"/>
-                </a:solidFill>
-                <a:latin typeface="Calibri" pitchFamily="34" charset="0"/>
-                <a:ea typeface="Calibri" pitchFamily="34" charset="-122"/>
-                <a:cs typeface="Calibri" pitchFamily="34" charset="-120"/>
-              </a:rPr>
-              <a:t>final 't' doubled before vowel suffix</a:t>
-            </a:r>
-            <a:endParaRPr lang="en-US" sz="700" dirty="0"/>
-          </a:p>
-        </p:txBody>
-      </p:sp>
-      <p:sp>
-        <p:nvSpPr>
-          <p:cNvPr id="26" name="Shape 24"/>
-          <p:cNvSpPr/>
-          <p:nvPr/>
-        </p:nvSpPr>
-        <p:spPr>
-          <a:xfrm>
-            <a:off x="6998818" y="2258568"/>
-            <a:ext cx="1581912" cy="292608"/>
+              <a:t>Write here...</a:t>
+            </a:r>
+            <a:endParaRPr lang="en-US" sz="1100" dirty="0"/>
+          </a:p>
+        </p:txBody>
+      </p:sp>
+      <p:sp>
+        <p:nvSpPr>
+          <p:cNvPr id="27" name="Shape 25"/>
+          <p:cNvSpPr/>
+          <p:nvPr/>
+        </p:nvSpPr>
+        <p:spPr>
+          <a:xfrm>
+            <a:off x="365760" y="4096512"/>
+            <a:ext cx="1371600" cy="804672"/>
           </a:xfrm>
           <a:prstGeom prst="rect">
             <a:avLst>
-              <a:gd name="adj" fmla="val 25000"/>
+              <a:gd name="adj" fmla="val 6818"/>
             </a:avLst>
           </a:prstGeom>
           <a:solidFill>
-            <a:srgbClr val="CCFBF1"/>
-          </a:solidFill>
-          <a:ln w="19050">
-            <a:solidFill>
-              <a:srgbClr val="0D9488"/>
-            </a:solidFill>
-            <a:prstDash val="solid"/>
-          </a:ln>
-          <a:effectLst>
-            <a:outerShdw sx="100000" sy="100000" kx="0" ky="0" algn="bl" rotWithShape="0" blurRad="101600" dist="38100" dir="8100000">
-              <a:srgbClr val="000000">
-                <a:alpha val="12000"/>
-              </a:srgbClr>
-            </a:outerShdw>
-          </a:effectLst>
-        </p:spPr>
-      </p:sp>
-      <p:sp>
-        <p:nvSpPr>
-          <p:cNvPr id="27" name="Text 25"/>
-          <p:cNvSpPr/>
-          <p:nvPr/>
-        </p:nvSpPr>
-        <p:spPr>
-          <a:xfrm>
-            <a:off x="6998818" y="2258568"/>
-            <a:ext cx="1581912" cy="292608"/>
-          </a:xfrm>
-          <a:prstGeom prst="rect">
-            <a:avLst/>
-          </a:prstGeom>
-          <a:noFill/>
-          <a:ln/>
-        </p:spPr>
-        <p:txBody>
-          <a:bodyPr wrap="square" lIns="0" tIns="0" rIns="0" bIns="0" rtlCol="0" anchor="ctr"/>
-          <a:lstStyle/>
-          <a:p>
-            <a:pPr algn="ctr" indent="0" marL="0">
-              <a:buNone/>
-            </a:pPr>
-            <a:r>
-              <a:rPr lang="en-US" sz="1300" b="1" dirty="0">
-                <a:solidFill>
-                  <a:srgbClr val="0F766E"/>
+            <a:srgbClr val="E2E8F0"/>
+          </a:solidFill>
+          <a:ln w="12700">
+            <a:solidFill>
+              <a:srgbClr val="E2E8F0"/>
+            </a:solidFill>
+            <a:prstDash val="solid"/>
+          </a:ln>
+        </p:spPr>
+      </p:sp>
+      <p:sp>
+        <p:nvSpPr>
+          <p:cNvPr id="28" name="Text 26"/>
+          <p:cNvSpPr/>
+          <p:nvPr/>
+        </p:nvSpPr>
+        <p:spPr>
+          <a:xfrm>
+            <a:off x="365760" y="4096512"/>
+            <a:ext cx="1371600" cy="804672"/>
+          </a:xfrm>
+          <a:prstGeom prst="rect">
+            <a:avLst/>
+          </a:prstGeom>
+          <a:noFill/>
+          <a:ln/>
+        </p:spPr>
+        <p:txBody>
+          <a:bodyPr wrap="square" lIns="0" tIns="0" rIns="0" bIns="0" rtlCol="0" anchor="ctr"/>
+          <a:lstStyle/>
+          <a:p>
+            <a:pPr algn="ctr" indent="0" marL="0">
+              <a:buNone/>
+            </a:pPr>
+            <a:r>
+              <a:rPr lang="en-US" sz="1100" b="1" dirty="0">
+                <a:solidFill>
+                  <a:srgbClr val="475569"/>
                 </a:solidFill>
                 <a:latin typeface="Trebuchet MS" pitchFamily="34" charset="0"/>
                 <a:ea typeface="Trebuchet MS" pitchFamily="34" charset="-122"/>
                 <a:cs typeface="Trebuchet MS" pitchFamily="34" charset="-120"/>
               </a:rPr>
-              <a:t>able</a:t>
-            </a:r>
-            <a:endParaRPr lang="en-US" sz="1300" dirty="0"/>
-          </a:p>
-        </p:txBody>
-      </p:sp>
-      <p:sp>
-        <p:nvSpPr>
-          <p:cNvPr id="28" name="Text 26"/>
-          <p:cNvSpPr/>
-          <p:nvPr/>
-        </p:nvSpPr>
-        <p:spPr>
-          <a:xfrm>
-            <a:off x="6998818" y="2569464"/>
-            <a:ext cx="1581912" cy="201168"/>
-          </a:xfrm>
-          <a:prstGeom prst="rect">
-            <a:avLst/>
-          </a:prstGeom>
-          <a:noFill/>
-          <a:ln/>
-        </p:spPr>
-        <p:txBody>
-          <a:bodyPr wrap="square" lIns="0" tIns="0" rIns="0" bIns="0" rtlCol="0" anchor="t"/>
-          <a:lstStyle/>
-          <a:p>
-            <a:pPr algn="ctr" indent="0" marL="0">
-              <a:buNone/>
-            </a:pPr>
-            <a:r>
-              <a:rPr lang="en-US" sz="850" dirty="0">
-                <a:solidFill>
-                  <a:srgbClr val="475569"/>
-                </a:solidFill>
-                <a:latin typeface="Calibri" pitchFamily="34" charset="0"/>
-                <a:ea typeface="Calibri" pitchFamily="34" charset="-122"/>
-                <a:cs typeface="Calibri" pitchFamily="34" charset="-120"/>
-              </a:rPr>
-              <a:t>able to be done</a:t>
-            </a:r>
-            <a:endParaRPr lang="en-US" sz="850" dirty="0"/>
+              <a:t>Phonemes</a:t>
+            </a:r>
+            <a:endParaRPr lang="en-US" sz="1100" dirty="0"/>
           </a:p>
         </p:txBody>
       </p:sp>
@@ -32086,140 +32048,8 @@
         </p:nvSpPr>
         <p:spPr>
           <a:xfrm>
-            <a:off x="365760" y="3273552"/>
-            <a:ext cx="1371600" cy="658368"/>
-          </a:xfrm>
-          <a:prstGeom prst="rect">
-            <a:avLst>
-              <a:gd name="adj" fmla="val 8333"/>
-            </a:avLst>
-          </a:prstGeom>
-          <a:solidFill>
-            <a:srgbClr val="E2E8F0"/>
-          </a:solidFill>
-          <a:ln w="12700">
-            <a:solidFill>
-              <a:srgbClr val="E2E8F0"/>
-            </a:solidFill>
-            <a:prstDash val="solid"/>
-          </a:ln>
-        </p:spPr>
-      </p:sp>
-      <p:sp>
-        <p:nvSpPr>
-          <p:cNvPr id="30" name="Text 28"/>
-          <p:cNvSpPr/>
-          <p:nvPr/>
-        </p:nvSpPr>
-        <p:spPr>
-          <a:xfrm>
-            <a:off x="365760" y="3273552"/>
-            <a:ext cx="1371600" cy="658368"/>
-          </a:xfrm>
-          <a:prstGeom prst="rect">
-            <a:avLst/>
-          </a:prstGeom>
-          <a:noFill/>
-          <a:ln/>
-        </p:spPr>
-        <p:txBody>
-          <a:bodyPr wrap="square" lIns="0" tIns="0" rIns="0" bIns="0" rtlCol="0" anchor="ctr"/>
-          <a:lstStyle/>
-          <a:p>
-            <a:pPr algn="ctr" indent="0" marL="0">
-              <a:buNone/>
-            </a:pPr>
-            <a:r>
-              <a:rPr lang="en-US" sz="1100" b="1" dirty="0">
-                <a:solidFill>
-                  <a:srgbClr val="475569"/>
-                </a:solidFill>
-                <a:latin typeface="Trebuchet MS" pitchFamily="34" charset="0"/>
-                <a:ea typeface="Trebuchet MS" pitchFamily="34" charset="-122"/>
-                <a:cs typeface="Trebuchet MS" pitchFamily="34" charset="-120"/>
-              </a:rPr>
-              <a:t>Syllables</a:t>
-            </a:r>
-            <a:endParaRPr lang="en-US" sz="1100" dirty="0"/>
-          </a:p>
-        </p:txBody>
-      </p:sp>
-      <p:sp>
-        <p:nvSpPr>
-          <p:cNvPr id="31" name="Shape 29"/>
-          <p:cNvSpPr/>
-          <p:nvPr/>
-        </p:nvSpPr>
-        <p:spPr>
-          <a:xfrm>
-            <a:off x="1874520" y="3273552"/>
-            <a:ext cx="6903720" cy="658368"/>
-          </a:xfrm>
-          <a:prstGeom prst="rect">
-            <a:avLst>
-              <a:gd name="adj" fmla="val 8333"/>
-            </a:avLst>
-          </a:prstGeom>
-          <a:solidFill>
-            <a:srgbClr val="F8FAFC"/>
-          </a:solidFill>
-          <a:ln w="12700">
-            <a:solidFill>
-              <a:srgbClr val="E2E8F0"/>
-            </a:solidFill>
-            <a:prstDash val="dash"/>
-          </a:ln>
-        </p:spPr>
-      </p:sp>
-      <p:sp>
-        <p:nvSpPr>
-          <p:cNvPr id="32" name="Text 30"/>
-          <p:cNvSpPr/>
-          <p:nvPr/>
-        </p:nvSpPr>
-        <p:spPr>
-          <a:xfrm>
-            <a:off x="1874520" y="3273552"/>
-            <a:ext cx="6903720" cy="658368"/>
-          </a:xfrm>
-          <a:prstGeom prst="rect">
-            <a:avLst/>
-          </a:prstGeom>
-          <a:noFill/>
-          <a:ln/>
-        </p:spPr>
-        <p:txBody>
-          <a:bodyPr wrap="square" rtlCol="0" anchor="ctr"/>
-          <a:lstStyle/>
-          <a:p>
-            <a:pPr algn="ctr" indent="0" marL="0">
-              <a:buNone/>
-            </a:pPr>
-            <a:r>
-              <a:rPr lang="en-US" sz="1100" i="1" dirty="0">
-                <a:solidFill>
-                  <a:srgbClr val="CBD5E1"/>
-                </a:solidFill>
-                <a:latin typeface="Calibri" pitchFamily="34" charset="0"/>
-                <a:ea typeface="Calibri" pitchFamily="34" charset="-122"/>
-                <a:cs typeface="Calibri" pitchFamily="34" charset="-120"/>
-              </a:rPr>
-              <a:t>Write here...</a:t>
-            </a:r>
-            <a:endParaRPr lang="en-US" sz="1100" dirty="0"/>
-          </a:p>
-        </p:txBody>
-      </p:sp>
-      <p:sp>
-        <p:nvSpPr>
-          <p:cNvPr id="33" name="Shape 31"/>
-          <p:cNvSpPr/>
-          <p:nvPr/>
-        </p:nvSpPr>
-        <p:spPr>
-          <a:xfrm>
-            <a:off x="365760" y="4096512"/>
-            <a:ext cx="1371600" cy="804672"/>
+            <a:off x="1874520" y="4096512"/>
+            <a:ext cx="6903720" cy="804672"/>
           </a:xfrm>
           <a:prstGeom prst="rect">
             <a:avLst>
@@ -32227,85 +32057,19 @@
             </a:avLst>
           </a:prstGeom>
           <a:solidFill>
-            <a:srgbClr val="E2E8F0"/>
+            <a:srgbClr val="F8FAFC"/>
           </a:solidFill>
           <a:ln w="12700">
             <a:solidFill>
               <a:srgbClr val="E2E8F0"/>
             </a:solidFill>
-            <a:prstDash val="solid"/>
-          </a:ln>
-        </p:spPr>
-      </p:sp>
-      <p:sp>
-        <p:nvSpPr>
-          <p:cNvPr id="34" name="Text 32"/>
-          <p:cNvSpPr/>
-          <p:nvPr/>
-        </p:nvSpPr>
-        <p:spPr>
-          <a:xfrm>
-            <a:off x="365760" y="4096512"/>
-            <a:ext cx="1371600" cy="804672"/>
-          </a:xfrm>
-          <a:prstGeom prst="rect">
-            <a:avLst/>
-          </a:prstGeom>
-          <a:noFill/>
-          <a:ln/>
-        </p:spPr>
-        <p:txBody>
-          <a:bodyPr wrap="square" lIns="0" tIns="0" rIns="0" bIns="0" rtlCol="0" anchor="ctr"/>
-          <a:lstStyle/>
-          <a:p>
-            <a:pPr algn="ctr" indent="0" marL="0">
-              <a:buNone/>
-            </a:pPr>
-            <a:r>
-              <a:rPr lang="en-US" sz="1100" b="1" dirty="0">
-                <a:solidFill>
-                  <a:srgbClr val="475569"/>
-                </a:solidFill>
-                <a:latin typeface="Trebuchet MS" pitchFamily="34" charset="0"/>
-                <a:ea typeface="Trebuchet MS" pitchFamily="34" charset="-122"/>
-                <a:cs typeface="Trebuchet MS" pitchFamily="34" charset="-120"/>
-              </a:rPr>
-              <a:t>Phonemes</a:t>
-            </a:r>
-            <a:endParaRPr lang="en-US" sz="1100" dirty="0"/>
-          </a:p>
-        </p:txBody>
-      </p:sp>
-      <p:sp>
-        <p:nvSpPr>
-          <p:cNvPr id="35" name="Shape 33"/>
-          <p:cNvSpPr/>
-          <p:nvPr/>
-        </p:nvSpPr>
-        <p:spPr>
-          <a:xfrm>
-            <a:off x="1874520" y="4096512"/>
-            <a:ext cx="6903720" cy="804672"/>
-          </a:xfrm>
-          <a:prstGeom prst="rect">
-            <a:avLst>
-              <a:gd name="adj" fmla="val 6818"/>
-            </a:avLst>
-          </a:prstGeom>
-          <a:solidFill>
-            <a:srgbClr val="F8FAFC"/>
-          </a:solidFill>
-          <a:ln w="12700">
-            <a:solidFill>
-              <a:srgbClr val="E2E8F0"/>
-            </a:solidFill>
             <a:prstDash val="dash"/>
           </a:ln>
         </p:spPr>
       </p:sp>
       <p:sp>
         <p:nvSpPr>
-          <p:cNvPr id="36" name="Text 34"/>
+          <p:cNvPr id="30" name="Text 28"/>
           <p:cNvSpPr/>
           <p:nvPr/>
         </p:nvSpPr>
@@ -32628,7 +32392,7 @@
                 <a:ea typeface="Calibri" pitchFamily="34" charset="-122"/>
                 <a:cs typeface="Calibri" pitchFamily="34" charset="-120"/>
               </a:rPr>
-              <a:t>Word Labs  •  wordlabs.app  •  Suffix: '-able' = able to be done</a:t>
+              <a:t>Word Labs  •  wordlabs.app  •  Suffix: '-able' = can be done; capable of</a:t>
             </a:r>
             <a:endParaRPr lang="en-US" sz="800" dirty="0"/>
           </a:p>
@@ -32767,7 +32531,7 @@
                 <a:ea typeface="Trebuchet MS" pitchFamily="34" charset="-122"/>
                 <a:cs typeface="Trebuchet MS" pitchFamily="34" charset="-120"/>
               </a:rPr>
-              <a:t>unforgettable</a:t>
+              <a:t>readable</a:t>
             </a:r>
             <a:endParaRPr lang="en-US" sz="2800" dirty="0"/>
           </a:p>
@@ -32847,8 +32611,8 @@
         </p:nvSpPr>
         <p:spPr>
           <a:xfrm>
-            <a:off x="1989734" y="2258568"/>
-            <a:ext cx="1581912" cy="292608"/>
+            <a:off x="2938272" y="2258568"/>
+            <a:ext cx="1828800" cy="292608"/>
           </a:xfrm>
           <a:prstGeom prst="rect">
             <a:avLst>
@@ -32881,8 +32645,8 @@
         </p:nvSpPr>
         <p:spPr>
           <a:xfrm>
-            <a:off x="1989734" y="2258568"/>
-            <a:ext cx="1581912" cy="292608"/>
+            <a:off x="2938272" y="2258568"/>
+            <a:ext cx="1828800" cy="292608"/>
           </a:xfrm>
           <a:prstGeom prst="rect">
             <a:avLst/>
@@ -32906,7 +32670,7 @@
                 <a:ea typeface="Trebuchet MS" pitchFamily="34" charset="-122"/>
                 <a:cs typeface="Trebuchet MS" pitchFamily="34" charset="-120"/>
               </a:rPr>
-              <a:t>un</a:t>
+              <a:t>read</a:t>
             </a:r>
             <a:endParaRPr lang="en-US" sz="1300" dirty="0"/>
           </a:p>
@@ -32920,8 +32684,8 @@
         </p:nvSpPr>
         <p:spPr>
           <a:xfrm>
-            <a:off x="1989734" y="2569464"/>
-            <a:ext cx="1581912" cy="201168"/>
+            <a:off x="2938272" y="2569464"/>
+            <a:ext cx="1828800" cy="201168"/>
           </a:xfrm>
           <a:prstGeom prst="rect">
             <a:avLst/>
@@ -32945,7 +32709,7 @@
                 <a:ea typeface="Calibri" pitchFamily="34" charset="-122"/>
                 <a:cs typeface="Calibri" pitchFamily="34" charset="-120"/>
               </a:rPr>
-              <a:t>not</a:t>
+              <a:t>to look at and understand written words</a:t>
             </a:r>
             <a:endParaRPr lang="en-US" sz="850" dirty="0"/>
           </a:p>
@@ -32959,8 +32723,8 @@
         </p:nvSpPr>
         <p:spPr>
           <a:xfrm>
-            <a:off x="3659429" y="2258568"/>
-            <a:ext cx="1581912" cy="292608"/>
+            <a:off x="5803392" y="2258568"/>
+            <a:ext cx="1828800" cy="292608"/>
           </a:xfrm>
           <a:prstGeom prst="rect">
             <a:avLst>
@@ -32968,11 +32732,11 @@
             </a:avLst>
           </a:prstGeom>
           <a:solidFill>
-            <a:srgbClr val="FCE7F3"/>
+            <a:srgbClr val="CCFBF1"/>
           </a:solidFill>
           <a:ln w="19050">
             <a:solidFill>
-              <a:srgbClr val="DB2777"/>
+              <a:srgbClr val="0D9488"/>
             </a:solidFill>
             <a:prstDash val="solid"/>
           </a:ln>
@@ -32993,8 +32757,8 @@
         </p:nvSpPr>
         <p:spPr>
           <a:xfrm>
-            <a:off x="3659429" y="2258568"/>
-            <a:ext cx="1581912" cy="292608"/>
+            <a:off x="5803392" y="2258568"/>
+            <a:ext cx="1828800" cy="292608"/>
           </a:xfrm>
           <a:prstGeom prst="rect">
             <a:avLst/>
@@ -33012,13 +32776,13 @@
             <a:r>
               <a:rPr lang="en-US" sz="1300" b="1" dirty="0">
                 <a:solidFill>
-                  <a:srgbClr val="9D174D"/>
+                  <a:srgbClr val="0F766E"/>
                 </a:solidFill>
                 <a:latin typeface="Trebuchet MS" pitchFamily="34" charset="0"/>
                 <a:ea typeface="Trebuchet MS" pitchFamily="34" charset="-122"/>
                 <a:cs typeface="Trebuchet MS" pitchFamily="34" charset="-120"/>
               </a:rPr>
-              <a:t>forget</a:t>
+              <a:t>able</a:t>
             </a:r>
             <a:endParaRPr lang="en-US" sz="1300" dirty="0"/>
           </a:p>
@@ -33032,8 +32796,8 @@
         </p:nvSpPr>
         <p:spPr>
           <a:xfrm>
-            <a:off x="3659429" y="2569464"/>
-            <a:ext cx="1581912" cy="201168"/>
+            <a:off x="5803392" y="2569464"/>
+            <a:ext cx="1828800" cy="201168"/>
           </a:xfrm>
           <a:prstGeom prst="rect">
             <a:avLst/>
@@ -33057,7 +32821,7 @@
                 <a:ea typeface="Calibri" pitchFamily="34" charset="-122"/>
                 <a:cs typeface="Calibri" pitchFamily="34" charset="-120"/>
               </a:rPr>
-              <a:t>to fail to remember</a:t>
+              <a:t>can be done; capable of</a:t>
             </a:r>
             <a:endParaRPr lang="en-US" sz="850" dirty="0"/>
           </a:p>
@@ -33065,154 +32829,135 @@
       </p:sp>
       <p:sp>
         <p:nvSpPr>
-          <p:cNvPr id="22" name="Shape 20"/>
-          <p:cNvSpPr/>
-          <p:nvPr/>
-        </p:nvSpPr>
-        <p:spPr>
-          <a:xfrm>
-            <a:off x="5329123" y="2258568"/>
-            <a:ext cx="1581912" cy="292608"/>
+          <p:cNvPr id="22" name="Text 20"/>
+          <p:cNvSpPr/>
+          <p:nvPr/>
+        </p:nvSpPr>
+        <p:spPr>
+          <a:xfrm>
+            <a:off x="5803392" y="2752344"/>
+            <a:ext cx="1828800" cy="182880"/>
+          </a:xfrm>
+          <a:prstGeom prst="rect">
+            <a:avLst/>
+          </a:prstGeom>
+          <a:noFill/>
+          <a:ln/>
+        </p:spPr>
+        <p:txBody>
+          <a:bodyPr wrap="square" lIns="0" tIns="0" rIns="0" bIns="0" rtlCol="0" anchor="t"/>
+          <a:lstStyle/>
+          <a:p>
+            <a:pPr algn="ctr" indent="0" marL="0">
+              <a:buNone/>
+            </a:pPr>
+            <a:r>
+              <a:rPr lang="en-US" sz="700" i="1" dirty="0">
+                <a:solidFill>
+                  <a:srgbClr val="94A3B8"/>
+                </a:solidFill>
+                <a:latin typeface="Calibri" pitchFamily="34" charset="0"/>
+                <a:ea typeface="Calibri" pitchFamily="34" charset="-122"/>
+                <a:cs typeface="Calibri" pitchFamily="34" charset="-120"/>
+              </a:rPr>
+              <a:t>'e' dropped from 'reade' before vowel suffix '-able'</a:t>
+            </a:r>
+            <a:endParaRPr lang="en-US" sz="700" dirty="0"/>
+          </a:p>
+        </p:txBody>
+      </p:sp>
+      <p:sp>
+        <p:nvSpPr>
+          <p:cNvPr id="23" name="Shape 21"/>
+          <p:cNvSpPr/>
+          <p:nvPr/>
+        </p:nvSpPr>
+        <p:spPr>
+          <a:xfrm>
+            <a:off x="365760" y="3273552"/>
+            <a:ext cx="1371600" cy="658368"/>
           </a:xfrm>
           <a:prstGeom prst="rect">
             <a:avLst>
-              <a:gd name="adj" fmla="val 25000"/>
+              <a:gd name="adj" fmla="val 8333"/>
             </a:avLst>
           </a:prstGeom>
           <a:solidFill>
-            <a:srgbClr val="FCE7F3"/>
-          </a:solidFill>
-          <a:ln w="19050">
-            <a:solidFill>
-              <a:srgbClr val="DB2777"/>
-            </a:solidFill>
-            <a:prstDash val="solid"/>
-          </a:ln>
-          <a:effectLst>
-            <a:outerShdw sx="100000" sy="100000" kx="0" ky="0" algn="bl" rotWithShape="0" blurRad="101600" dist="38100" dir="8100000">
-              <a:srgbClr val="000000">
-                <a:alpha val="12000"/>
-              </a:srgbClr>
-            </a:outerShdw>
-          </a:effectLst>
-        </p:spPr>
-      </p:sp>
-      <p:sp>
-        <p:nvSpPr>
-          <p:cNvPr id="23" name="Text 21"/>
-          <p:cNvSpPr/>
-          <p:nvPr/>
-        </p:nvSpPr>
-        <p:spPr>
-          <a:xfrm>
-            <a:off x="5329123" y="2258568"/>
-            <a:ext cx="1581912" cy="292608"/>
-          </a:xfrm>
-          <a:prstGeom prst="rect">
-            <a:avLst/>
-          </a:prstGeom>
-          <a:noFill/>
-          <a:ln/>
-        </p:spPr>
-        <p:txBody>
-          <a:bodyPr wrap="square" lIns="0" tIns="0" rIns="0" bIns="0" rtlCol="0" anchor="ctr"/>
-          <a:lstStyle/>
-          <a:p>
-            <a:pPr algn="ctr" indent="0" marL="0">
-              <a:buNone/>
-            </a:pPr>
-            <a:r>
-              <a:rPr lang="en-US" sz="1300" b="1" dirty="0">
-                <a:solidFill>
-                  <a:srgbClr val="9D174D"/>
+            <a:srgbClr val="E2E8F0"/>
+          </a:solidFill>
+          <a:ln w="12700">
+            <a:solidFill>
+              <a:srgbClr val="E2E8F0"/>
+            </a:solidFill>
+            <a:prstDash val="solid"/>
+          </a:ln>
+        </p:spPr>
+      </p:sp>
+      <p:sp>
+        <p:nvSpPr>
+          <p:cNvPr id="24" name="Text 22"/>
+          <p:cNvSpPr/>
+          <p:nvPr/>
+        </p:nvSpPr>
+        <p:spPr>
+          <a:xfrm>
+            <a:off x="365760" y="3273552"/>
+            <a:ext cx="1371600" cy="658368"/>
+          </a:xfrm>
+          <a:prstGeom prst="rect">
+            <a:avLst/>
+          </a:prstGeom>
+          <a:noFill/>
+          <a:ln/>
+        </p:spPr>
+        <p:txBody>
+          <a:bodyPr wrap="square" lIns="0" tIns="0" rIns="0" bIns="0" rtlCol="0" anchor="ctr"/>
+          <a:lstStyle/>
+          <a:p>
+            <a:pPr algn="ctr" indent="0" marL="0">
+              <a:buNone/>
+            </a:pPr>
+            <a:r>
+              <a:rPr lang="en-US" sz="1100" b="1" dirty="0">
+                <a:solidFill>
+                  <a:srgbClr val="475569"/>
                 </a:solidFill>
                 <a:latin typeface="Trebuchet MS" pitchFamily="34" charset="0"/>
                 <a:ea typeface="Trebuchet MS" pitchFamily="34" charset="-122"/>
                 <a:cs typeface="Trebuchet MS" pitchFamily="34" charset="-120"/>
               </a:rPr>
-              <a:t>t</a:t>
-            </a:r>
-            <a:endParaRPr lang="en-US" sz="1300" dirty="0"/>
-          </a:p>
-        </p:txBody>
-      </p:sp>
-      <p:sp>
-        <p:nvSpPr>
-          <p:cNvPr id="24" name="Text 22"/>
-          <p:cNvSpPr/>
-          <p:nvPr/>
-        </p:nvSpPr>
-        <p:spPr>
-          <a:xfrm>
-            <a:off x="5329123" y="2569464"/>
-            <a:ext cx="1581912" cy="201168"/>
-          </a:xfrm>
-          <a:prstGeom prst="rect">
-            <a:avLst/>
-          </a:prstGeom>
-          <a:noFill/>
-          <a:ln/>
-        </p:spPr>
-        <p:txBody>
-          <a:bodyPr wrap="square" lIns="0" tIns="0" rIns="0" bIns="0" rtlCol="0" anchor="t"/>
-          <a:lstStyle/>
-          <a:p>
-            <a:pPr algn="ctr" indent="0" marL="0">
-              <a:buNone/>
-            </a:pPr>
-            <a:r>
-              <a:rPr lang="en-US" sz="850" dirty="0">
-                <a:solidFill>
-                  <a:srgbClr val="475569"/>
-                </a:solidFill>
-                <a:latin typeface="Calibri" pitchFamily="34" charset="0"/>
-                <a:ea typeface="Calibri" pitchFamily="34" charset="-122"/>
-                <a:cs typeface="Calibri" pitchFamily="34" charset="-120"/>
-              </a:rPr>
-              <a:t>doubled consonant</a:t>
-            </a:r>
-            <a:endParaRPr lang="en-US" sz="850" dirty="0"/>
-          </a:p>
-        </p:txBody>
-      </p:sp>
-      <p:sp>
-        <p:nvSpPr>
-          <p:cNvPr id="25" name="Text 23"/>
-          <p:cNvSpPr/>
-          <p:nvPr/>
-        </p:nvSpPr>
-        <p:spPr>
-          <a:xfrm>
-            <a:off x="5329123" y="2752344"/>
-            <a:ext cx="1581912" cy="182880"/>
-          </a:xfrm>
-          <a:prstGeom prst="rect">
-            <a:avLst/>
-          </a:prstGeom>
-          <a:noFill/>
-          <a:ln/>
-        </p:spPr>
-        <p:txBody>
-          <a:bodyPr wrap="square" lIns="0" tIns="0" rIns="0" bIns="0" rtlCol="0" anchor="t"/>
-          <a:lstStyle/>
-          <a:p>
-            <a:pPr algn="ctr" indent="0" marL="0">
-              <a:buNone/>
-            </a:pPr>
-            <a:r>
-              <a:rPr lang="en-US" sz="700" i="1" dirty="0">
-                <a:solidFill>
-                  <a:srgbClr val="94A3B8"/>
-                </a:solidFill>
-                <a:latin typeface="Calibri" pitchFamily="34" charset="0"/>
-                <a:ea typeface="Calibri" pitchFamily="34" charset="-122"/>
-                <a:cs typeface="Calibri" pitchFamily="34" charset="-120"/>
-              </a:rPr>
-              <a:t>final 't' doubled before vowel suffix</a:t>
-            </a:r>
-            <a:endParaRPr lang="en-US" sz="700" dirty="0"/>
-          </a:p>
-        </p:txBody>
+              <a:t>Syllables</a:t>
+            </a:r>
+            <a:endParaRPr lang="en-US" sz="1100" dirty="0"/>
+          </a:p>
+        </p:txBody>
+      </p:sp>
+      <p:sp>
+        <p:nvSpPr>
+          <p:cNvPr id="25" name="Shape 23"/>
+          <p:cNvSpPr/>
+          <p:nvPr/>
+        </p:nvSpPr>
+        <p:spPr>
+          <a:xfrm>
+            <a:off x="1874520" y="3273552"/>
+            <a:ext cx="6903720" cy="658368"/>
+          </a:xfrm>
+          <a:prstGeom prst="rect">
+            <a:avLst>
+              <a:gd name="adj" fmla="val 8333"/>
+            </a:avLst>
+          </a:prstGeom>
+          <a:solidFill>
+            <a:srgbClr val="CCFBF1"/>
+          </a:solidFill>
+          <a:ln w="12700">
+            <a:solidFill>
+              <a:srgbClr val="0D9488"/>
+            </a:solidFill>
+            <a:prstDash val="solid"/>
+          </a:ln>
+        </p:spPr>
       </p:sp>
       <p:sp>
         <p:nvSpPr>
@@ -33222,30 +32967,23 @@
         </p:nvSpPr>
         <p:spPr>
           <a:xfrm>
-            <a:off x="6998818" y="2258568"/>
-            <a:ext cx="1581912" cy="292608"/>
+            <a:off x="2313432" y="3364992"/>
+            <a:ext cx="1645920" cy="475488"/>
           </a:xfrm>
           <a:prstGeom prst="rect">
             <a:avLst>
-              <a:gd name="adj" fmla="val 25000"/>
+              <a:gd name="adj" fmla="val 9615"/>
             </a:avLst>
           </a:prstGeom>
           <a:solidFill>
-            <a:srgbClr val="CCFBF1"/>
-          </a:solidFill>
-          <a:ln w="19050">
+            <a:srgbClr val="FFFFFF"/>
+          </a:solidFill>
+          <a:ln w="12700">
             <a:solidFill>
               <a:srgbClr val="0D9488"/>
             </a:solidFill>
             <a:prstDash val="solid"/>
           </a:ln>
-          <a:effectLst>
-            <a:outerShdw sx="100000" sy="100000" kx="0" ky="0" algn="bl" rotWithShape="0" blurRad="101600" dist="38100" dir="8100000">
-              <a:srgbClr val="000000">
-                <a:alpha val="12000"/>
-              </a:srgbClr>
-            </a:outerShdw>
-          </a:effectLst>
         </p:spPr>
       </p:sp>
       <p:sp>
@@ -33256,34 +32994,34 @@
         </p:nvSpPr>
         <p:spPr>
           <a:xfrm>
-            <a:off x="6998818" y="2258568"/>
-            <a:ext cx="1581912" cy="292608"/>
-          </a:xfrm>
-          <a:prstGeom prst="rect">
-            <a:avLst/>
-          </a:prstGeom>
-          <a:noFill/>
-          <a:ln/>
-        </p:spPr>
-        <p:txBody>
-          <a:bodyPr wrap="square" lIns="0" tIns="0" rIns="0" bIns="0" rtlCol="0" anchor="ctr"/>
-          <a:lstStyle/>
-          <a:p>
-            <a:pPr algn="ctr" indent="0" marL="0">
-              <a:buNone/>
-            </a:pPr>
-            <a:r>
-              <a:rPr lang="en-US" sz="1300" b="1" dirty="0">
-                <a:solidFill>
-                  <a:srgbClr val="0F766E"/>
+            <a:off x="2313432" y="3364992"/>
+            <a:ext cx="1645920" cy="475488"/>
+          </a:xfrm>
+          <a:prstGeom prst="rect">
+            <a:avLst/>
+          </a:prstGeom>
+          <a:noFill/>
+          <a:ln/>
+        </p:spPr>
+        <p:txBody>
+          <a:bodyPr wrap="square" lIns="0" tIns="0" rIns="0" bIns="0" rtlCol="0" anchor="ctr"/>
+          <a:lstStyle/>
+          <a:p>
+            <a:pPr algn="ctr" indent="0" marL="0">
+              <a:buNone/>
+            </a:pPr>
+            <a:r>
+              <a:rPr lang="en-US" sz="1400" b="1" dirty="0">
+                <a:solidFill>
+                  <a:srgbClr val="0D9488"/>
                 </a:solidFill>
                 <a:latin typeface="Trebuchet MS" pitchFamily="34" charset="0"/>
                 <a:ea typeface="Trebuchet MS" pitchFamily="34" charset="-122"/>
                 <a:cs typeface="Trebuchet MS" pitchFamily="34" charset="-120"/>
               </a:rPr>
-              <a:t>able</a:t>
-            </a:r>
-            <a:endParaRPr lang="en-US" sz="1300" dirty="0"/>
+              <a:t>read</a:t>
+            </a:r>
+            <a:endParaRPr lang="en-US" sz="1400" dirty="0"/>
           </a:p>
         </p:txBody>
       </p:sp>
@@ -33295,140 +33033,47 @@
         </p:nvSpPr>
         <p:spPr>
           <a:xfrm>
-            <a:off x="6998818" y="2569464"/>
-            <a:ext cx="1581912" cy="201168"/>
-          </a:xfrm>
-          <a:prstGeom prst="rect">
-            <a:avLst/>
-          </a:prstGeom>
-          <a:noFill/>
-          <a:ln/>
-        </p:spPr>
-        <p:txBody>
-          <a:bodyPr wrap="square" lIns="0" tIns="0" rIns="0" bIns="0" rtlCol="0" anchor="t"/>
-          <a:lstStyle/>
-          <a:p>
-            <a:pPr algn="ctr" indent="0" marL="0">
-              <a:buNone/>
-            </a:pPr>
-            <a:r>
-              <a:rPr lang="en-US" sz="850" dirty="0">
-                <a:solidFill>
-                  <a:srgbClr val="475569"/>
-                </a:solidFill>
-                <a:latin typeface="Calibri" pitchFamily="34" charset="0"/>
-                <a:ea typeface="Calibri" pitchFamily="34" charset="-122"/>
-                <a:cs typeface="Calibri" pitchFamily="34" charset="-120"/>
-              </a:rPr>
-              <a:t>able to be done</a:t>
-            </a:r>
-            <a:endParaRPr lang="en-US" sz="850" dirty="0"/>
-          </a:p>
-        </p:txBody>
-      </p:sp>
-      <p:sp>
-        <p:nvSpPr>
-          <p:cNvPr id="29" name="Shape 27"/>
-          <p:cNvSpPr/>
-          <p:nvPr/>
-        </p:nvSpPr>
-        <p:spPr>
-          <a:xfrm>
-            <a:off x="365760" y="3273552"/>
-            <a:ext cx="1371600" cy="658368"/>
-          </a:xfrm>
-          <a:prstGeom prst="rect">
-            <a:avLst>
-              <a:gd name="adj" fmla="val 8333"/>
-            </a:avLst>
-          </a:prstGeom>
-          <a:solidFill>
-            <a:srgbClr val="E2E8F0"/>
-          </a:solidFill>
-          <a:ln w="12700">
-            <a:solidFill>
-              <a:srgbClr val="E2E8F0"/>
-            </a:solidFill>
-            <a:prstDash val="solid"/>
-          </a:ln>
-        </p:spPr>
-      </p:sp>
-      <p:sp>
-        <p:nvSpPr>
-          <p:cNvPr id="30" name="Text 28"/>
-          <p:cNvSpPr/>
-          <p:nvPr/>
-        </p:nvSpPr>
-        <p:spPr>
-          <a:xfrm>
-            <a:off x="365760" y="3273552"/>
-            <a:ext cx="1371600" cy="658368"/>
-          </a:xfrm>
-          <a:prstGeom prst="rect">
-            <a:avLst/>
-          </a:prstGeom>
-          <a:noFill/>
-          <a:ln/>
-        </p:spPr>
-        <p:txBody>
-          <a:bodyPr wrap="square" lIns="0" tIns="0" rIns="0" bIns="0" rtlCol="0" anchor="ctr"/>
-          <a:lstStyle/>
-          <a:p>
-            <a:pPr algn="ctr" indent="0" marL="0">
-              <a:buNone/>
-            </a:pPr>
-            <a:r>
-              <a:rPr lang="en-US" sz="1100" b="1" dirty="0">
-                <a:solidFill>
-                  <a:srgbClr val="475569"/>
+            <a:off x="3959352" y="3364992"/>
+            <a:ext cx="411480" cy="475488"/>
+          </a:xfrm>
+          <a:prstGeom prst="rect">
+            <a:avLst/>
+          </a:prstGeom>
+          <a:noFill/>
+          <a:ln/>
+        </p:spPr>
+        <p:txBody>
+          <a:bodyPr wrap="square" lIns="0" tIns="0" rIns="0" bIns="0" rtlCol="0" anchor="ctr"/>
+          <a:lstStyle/>
+          <a:p>
+            <a:pPr algn="ctr" indent="0" marL="0">
+              <a:buNone/>
+            </a:pPr>
+            <a:r>
+              <a:rPr lang="en-US" sz="1600" b="1" dirty="0">
+                <a:solidFill>
+                  <a:srgbClr val="0D9488"/>
                 </a:solidFill>
                 <a:latin typeface="Trebuchet MS" pitchFamily="34" charset="0"/>
                 <a:ea typeface="Trebuchet MS" pitchFamily="34" charset="-122"/>
                 <a:cs typeface="Trebuchet MS" pitchFamily="34" charset="-120"/>
               </a:rPr>
-              <a:t>Syllables</a:t>
-            </a:r>
-            <a:endParaRPr lang="en-US" sz="1100" dirty="0"/>
-          </a:p>
-        </p:txBody>
-      </p:sp>
-      <p:sp>
-        <p:nvSpPr>
-          <p:cNvPr id="31" name="Shape 29"/>
-          <p:cNvSpPr/>
-          <p:nvPr/>
-        </p:nvSpPr>
-        <p:spPr>
-          <a:xfrm>
-            <a:off x="1874520" y="3273552"/>
-            <a:ext cx="6903720" cy="658368"/>
-          </a:xfrm>
-          <a:prstGeom prst="rect">
-            <a:avLst>
-              <a:gd name="adj" fmla="val 8333"/>
-            </a:avLst>
-          </a:prstGeom>
-          <a:solidFill>
-            <a:srgbClr val="CCFBF1"/>
-          </a:solidFill>
-          <a:ln w="12700">
-            <a:solidFill>
-              <a:srgbClr val="0D9488"/>
-            </a:solidFill>
-            <a:prstDash val="solid"/>
-          </a:ln>
-        </p:spPr>
-      </p:sp>
-      <p:sp>
-        <p:nvSpPr>
-          <p:cNvPr id="32" name="Shape 30"/>
-          <p:cNvSpPr/>
-          <p:nvPr/>
-        </p:nvSpPr>
-        <p:spPr>
-          <a:xfrm>
-            <a:off x="1978152" y="3364992"/>
-            <a:ext cx="1225296" cy="475488"/>
+              <a:t>·</a:t>
+            </a:r>
+            <a:endParaRPr lang="en-US" sz="1600" dirty="0"/>
+          </a:p>
+        </p:txBody>
+      </p:sp>
+      <p:sp>
+        <p:nvSpPr>
+          <p:cNvPr id="29" name="Shape 27"/>
+          <p:cNvSpPr/>
+          <p:nvPr/>
+        </p:nvSpPr>
+        <p:spPr>
+          <a:xfrm>
+            <a:off x="4370832" y="3364992"/>
+            <a:ext cx="1645920" cy="475488"/>
           </a:xfrm>
           <a:prstGeom prst="rect">
             <a:avLst>
@@ -33448,14 +33093,14 @@
       </p:sp>
       <p:sp>
         <p:nvSpPr>
-          <p:cNvPr id="33" name="Text 31"/>
-          <p:cNvSpPr/>
-          <p:nvPr/>
-        </p:nvSpPr>
-        <p:spPr>
-          <a:xfrm>
-            <a:off x="1978152" y="3364992"/>
-            <a:ext cx="1225296" cy="475488"/>
+          <p:cNvPr id="30" name="Text 28"/>
+          <p:cNvSpPr/>
+          <p:nvPr/>
+        </p:nvSpPr>
+        <p:spPr>
+          <a:xfrm>
+            <a:off x="4370832" y="3364992"/>
+            <a:ext cx="1645920" cy="475488"/>
           </a:xfrm>
           <a:prstGeom prst="rect">
             <a:avLst/>
@@ -33479,7 +33124,7 @@
                 <a:ea typeface="Trebuchet MS" pitchFamily="34" charset="-122"/>
                 <a:cs typeface="Trebuchet MS" pitchFamily="34" charset="-120"/>
               </a:rPr>
-              <a:t>un</a:t>
+              <a:t>a</a:t>
             </a:r>
             <a:endParaRPr lang="en-US" sz="1400" dirty="0"/>
           </a:p>
@@ -33487,14 +33132,14 @@
       </p:sp>
       <p:sp>
         <p:nvSpPr>
-          <p:cNvPr id="34" name="Text 32"/>
-          <p:cNvSpPr/>
-          <p:nvPr/>
-        </p:nvSpPr>
-        <p:spPr>
-          <a:xfrm>
-            <a:off x="3203448" y="3364992"/>
-            <a:ext cx="76200" cy="475488"/>
+          <p:cNvPr id="31" name="Text 29"/>
+          <p:cNvSpPr/>
+          <p:nvPr/>
+        </p:nvSpPr>
+        <p:spPr>
+          <a:xfrm>
+            <a:off x="6016752" y="3364992"/>
+            <a:ext cx="411480" cy="475488"/>
           </a:xfrm>
           <a:prstGeom prst="rect">
             <a:avLst/>
@@ -33526,14 +33171,14 @@
       </p:sp>
       <p:sp>
         <p:nvSpPr>
-          <p:cNvPr id="35" name="Shape 33"/>
-          <p:cNvSpPr/>
-          <p:nvPr/>
-        </p:nvSpPr>
-        <p:spPr>
-          <a:xfrm>
-            <a:off x="3279648" y="3364992"/>
-            <a:ext cx="1225296" cy="475488"/>
+          <p:cNvPr id="32" name="Shape 30"/>
+          <p:cNvSpPr/>
+          <p:nvPr/>
+        </p:nvSpPr>
+        <p:spPr>
+          <a:xfrm>
+            <a:off x="6428232" y="3364992"/>
+            <a:ext cx="1645920" cy="475488"/>
           </a:xfrm>
           <a:prstGeom prst="rect">
             <a:avLst>
@@ -33553,14 +33198,14 @@
       </p:sp>
       <p:sp>
         <p:nvSpPr>
-          <p:cNvPr id="36" name="Text 34"/>
-          <p:cNvSpPr/>
-          <p:nvPr/>
-        </p:nvSpPr>
-        <p:spPr>
-          <a:xfrm>
-            <a:off x="3279648" y="3364992"/>
-            <a:ext cx="1225296" cy="475488"/>
+          <p:cNvPr id="33" name="Text 31"/>
+          <p:cNvSpPr/>
+          <p:nvPr/>
+        </p:nvSpPr>
+        <p:spPr>
+          <a:xfrm>
+            <a:off x="6428232" y="3364992"/>
+            <a:ext cx="1645920" cy="475488"/>
           </a:xfrm>
           <a:prstGeom prst="rect">
             <a:avLst/>
@@ -33584,7 +33229,7 @@
                 <a:ea typeface="Trebuchet MS" pitchFamily="34" charset="-122"/>
                 <a:cs typeface="Trebuchet MS" pitchFamily="34" charset="-120"/>
               </a:rPr>
-              <a:t>for</a:t>
+              <a:t>ble</a:t>
             </a:r>
             <a:endParaRPr lang="en-US" sz="1400" dirty="0"/>
           </a:p>
@@ -33592,329 +33237,80 @@
       </p:sp>
       <p:sp>
         <p:nvSpPr>
-          <p:cNvPr id="37" name="Text 35"/>
-          <p:cNvSpPr/>
-          <p:nvPr/>
-        </p:nvSpPr>
-        <p:spPr>
-          <a:xfrm>
-            <a:off x="4504944" y="3364992"/>
-            <a:ext cx="76200" cy="475488"/>
-          </a:xfrm>
-          <a:prstGeom prst="rect">
-            <a:avLst/>
-          </a:prstGeom>
-          <a:noFill/>
-          <a:ln/>
-        </p:spPr>
-        <p:txBody>
-          <a:bodyPr wrap="square" lIns="0" tIns="0" rIns="0" bIns="0" rtlCol="0" anchor="ctr"/>
-          <a:lstStyle/>
-          <a:p>
-            <a:pPr algn="ctr" indent="0" marL="0">
-              <a:buNone/>
-            </a:pPr>
-            <a:r>
-              <a:rPr lang="en-US" sz="1600" b="1" dirty="0">
-                <a:solidFill>
-                  <a:srgbClr val="0D9488"/>
+          <p:cNvPr id="34" name="Shape 32"/>
+          <p:cNvSpPr/>
+          <p:nvPr/>
+        </p:nvSpPr>
+        <p:spPr>
+          <a:xfrm>
+            <a:off x="365760" y="4096512"/>
+            <a:ext cx="1371600" cy="804672"/>
+          </a:xfrm>
+          <a:prstGeom prst="rect">
+            <a:avLst>
+              <a:gd name="adj" fmla="val 6818"/>
+            </a:avLst>
+          </a:prstGeom>
+          <a:solidFill>
+            <a:srgbClr val="E2E8F0"/>
+          </a:solidFill>
+          <a:ln w="12700">
+            <a:solidFill>
+              <a:srgbClr val="E2E8F0"/>
+            </a:solidFill>
+            <a:prstDash val="solid"/>
+          </a:ln>
+        </p:spPr>
+      </p:sp>
+      <p:sp>
+        <p:nvSpPr>
+          <p:cNvPr id="35" name="Text 33"/>
+          <p:cNvSpPr/>
+          <p:nvPr/>
+        </p:nvSpPr>
+        <p:spPr>
+          <a:xfrm>
+            <a:off x="365760" y="4096512"/>
+            <a:ext cx="1371600" cy="804672"/>
+          </a:xfrm>
+          <a:prstGeom prst="rect">
+            <a:avLst/>
+          </a:prstGeom>
+          <a:noFill/>
+          <a:ln/>
+        </p:spPr>
+        <p:txBody>
+          <a:bodyPr wrap="square" lIns="0" tIns="0" rIns="0" bIns="0" rtlCol="0" anchor="ctr"/>
+          <a:lstStyle/>
+          <a:p>
+            <a:pPr algn="ctr" indent="0" marL="0">
+              <a:buNone/>
+            </a:pPr>
+            <a:r>
+              <a:rPr lang="en-US" sz="1100" b="1" dirty="0">
+                <a:solidFill>
+                  <a:srgbClr val="475569"/>
                 </a:solidFill>
                 <a:latin typeface="Trebuchet MS" pitchFamily="34" charset="0"/>
                 <a:ea typeface="Trebuchet MS" pitchFamily="34" charset="-122"/>
                 <a:cs typeface="Trebuchet MS" pitchFamily="34" charset="-120"/>
               </a:rPr>
-              <a:t>·</a:t>
-            </a:r>
-            <a:endParaRPr lang="en-US" sz="1600" dirty="0"/>
-          </a:p>
-        </p:txBody>
-      </p:sp>
-      <p:sp>
-        <p:nvSpPr>
-          <p:cNvPr id="38" name="Shape 36"/>
-          <p:cNvSpPr/>
-          <p:nvPr/>
-        </p:nvSpPr>
-        <p:spPr>
-          <a:xfrm>
-            <a:off x="4581144" y="3364992"/>
-            <a:ext cx="1225296" cy="475488"/>
-          </a:xfrm>
-          <a:prstGeom prst="rect">
-            <a:avLst>
-              <a:gd name="adj" fmla="val 9615"/>
-            </a:avLst>
-          </a:prstGeom>
-          <a:solidFill>
-            <a:srgbClr val="FFFFFF"/>
-          </a:solidFill>
-          <a:ln w="12700">
-            <a:solidFill>
-              <a:srgbClr val="0D9488"/>
-            </a:solidFill>
-            <a:prstDash val="solid"/>
-          </a:ln>
-        </p:spPr>
-      </p:sp>
-      <p:sp>
-        <p:nvSpPr>
-          <p:cNvPr id="39" name="Text 37"/>
-          <p:cNvSpPr/>
-          <p:nvPr/>
-        </p:nvSpPr>
-        <p:spPr>
-          <a:xfrm>
-            <a:off x="4581144" y="3364992"/>
-            <a:ext cx="1225296" cy="475488"/>
-          </a:xfrm>
-          <a:prstGeom prst="rect">
-            <a:avLst/>
-          </a:prstGeom>
-          <a:noFill/>
-          <a:ln/>
-        </p:spPr>
-        <p:txBody>
-          <a:bodyPr wrap="square" lIns="0" tIns="0" rIns="0" bIns="0" rtlCol="0" anchor="ctr"/>
-          <a:lstStyle/>
-          <a:p>
-            <a:pPr algn="ctr" indent="0" marL="0">
-              <a:buNone/>
-            </a:pPr>
-            <a:r>
-              <a:rPr lang="en-US" sz="1400" b="1" dirty="0">
-                <a:solidFill>
-                  <a:srgbClr val="0D9488"/>
-                </a:solidFill>
-                <a:latin typeface="Trebuchet MS" pitchFamily="34" charset="0"/>
-                <a:ea typeface="Trebuchet MS" pitchFamily="34" charset="-122"/>
-                <a:cs typeface="Trebuchet MS" pitchFamily="34" charset="-120"/>
-              </a:rPr>
-              <a:t>get</a:t>
-            </a:r>
-            <a:endParaRPr lang="en-US" sz="1400" dirty="0"/>
-          </a:p>
-        </p:txBody>
-      </p:sp>
-      <p:sp>
-        <p:nvSpPr>
-          <p:cNvPr id="40" name="Text 38"/>
-          <p:cNvSpPr/>
-          <p:nvPr/>
-        </p:nvSpPr>
-        <p:spPr>
-          <a:xfrm>
-            <a:off x="5806440" y="3364992"/>
-            <a:ext cx="76200" cy="475488"/>
-          </a:xfrm>
-          <a:prstGeom prst="rect">
-            <a:avLst/>
-          </a:prstGeom>
-          <a:noFill/>
-          <a:ln/>
-        </p:spPr>
-        <p:txBody>
-          <a:bodyPr wrap="square" lIns="0" tIns="0" rIns="0" bIns="0" rtlCol="0" anchor="ctr"/>
-          <a:lstStyle/>
-          <a:p>
-            <a:pPr algn="ctr" indent="0" marL="0">
-              <a:buNone/>
-            </a:pPr>
-            <a:r>
-              <a:rPr lang="en-US" sz="1600" b="1" dirty="0">
-                <a:solidFill>
-                  <a:srgbClr val="0D9488"/>
-                </a:solidFill>
-                <a:latin typeface="Trebuchet MS" pitchFamily="34" charset="0"/>
-                <a:ea typeface="Trebuchet MS" pitchFamily="34" charset="-122"/>
-                <a:cs typeface="Trebuchet MS" pitchFamily="34" charset="-120"/>
-              </a:rPr>
-              <a:t>·</a:t>
-            </a:r>
-            <a:endParaRPr lang="en-US" sz="1600" dirty="0"/>
-          </a:p>
-        </p:txBody>
-      </p:sp>
-      <p:sp>
-        <p:nvSpPr>
-          <p:cNvPr id="41" name="Shape 39"/>
-          <p:cNvSpPr/>
-          <p:nvPr/>
-        </p:nvSpPr>
-        <p:spPr>
-          <a:xfrm>
-            <a:off x="5882640" y="3364992"/>
-            <a:ext cx="1225296" cy="475488"/>
-          </a:xfrm>
-          <a:prstGeom prst="rect">
-            <a:avLst>
-              <a:gd name="adj" fmla="val 9615"/>
-            </a:avLst>
-          </a:prstGeom>
-          <a:solidFill>
-            <a:srgbClr val="FFFFFF"/>
-          </a:solidFill>
-          <a:ln w="12700">
-            <a:solidFill>
-              <a:srgbClr val="0D9488"/>
-            </a:solidFill>
-            <a:prstDash val="solid"/>
-          </a:ln>
-        </p:spPr>
-      </p:sp>
-      <p:sp>
-        <p:nvSpPr>
-          <p:cNvPr id="42" name="Text 40"/>
-          <p:cNvSpPr/>
-          <p:nvPr/>
-        </p:nvSpPr>
-        <p:spPr>
-          <a:xfrm>
-            <a:off x="5882640" y="3364992"/>
-            <a:ext cx="1225296" cy="475488"/>
-          </a:xfrm>
-          <a:prstGeom prst="rect">
-            <a:avLst/>
-          </a:prstGeom>
-          <a:noFill/>
-          <a:ln/>
-        </p:spPr>
-        <p:txBody>
-          <a:bodyPr wrap="square" lIns="0" tIns="0" rIns="0" bIns="0" rtlCol="0" anchor="ctr"/>
-          <a:lstStyle/>
-          <a:p>
-            <a:pPr algn="ctr" indent="0" marL="0">
-              <a:buNone/>
-            </a:pPr>
-            <a:r>
-              <a:rPr lang="en-US" sz="1400" b="1" dirty="0">
-                <a:solidFill>
-                  <a:srgbClr val="0D9488"/>
-                </a:solidFill>
-                <a:latin typeface="Trebuchet MS" pitchFamily="34" charset="0"/>
-                <a:ea typeface="Trebuchet MS" pitchFamily="34" charset="-122"/>
-                <a:cs typeface="Trebuchet MS" pitchFamily="34" charset="-120"/>
-              </a:rPr>
-              <a:t>ta</a:t>
-            </a:r>
-            <a:endParaRPr lang="en-US" sz="1400" dirty="0"/>
-          </a:p>
-        </p:txBody>
-      </p:sp>
-      <p:sp>
-        <p:nvSpPr>
-          <p:cNvPr id="43" name="Text 41"/>
-          <p:cNvSpPr/>
-          <p:nvPr/>
-        </p:nvSpPr>
-        <p:spPr>
-          <a:xfrm>
-            <a:off x="7107936" y="3364992"/>
-            <a:ext cx="76200" cy="475488"/>
-          </a:xfrm>
-          <a:prstGeom prst="rect">
-            <a:avLst/>
-          </a:prstGeom>
-          <a:noFill/>
-          <a:ln/>
-        </p:spPr>
-        <p:txBody>
-          <a:bodyPr wrap="square" lIns="0" tIns="0" rIns="0" bIns="0" rtlCol="0" anchor="ctr"/>
-          <a:lstStyle/>
-          <a:p>
-            <a:pPr algn="ctr" indent="0" marL="0">
-              <a:buNone/>
-            </a:pPr>
-            <a:r>
-              <a:rPr lang="en-US" sz="1600" b="1" dirty="0">
-                <a:solidFill>
-                  <a:srgbClr val="0D9488"/>
-                </a:solidFill>
-                <a:latin typeface="Trebuchet MS" pitchFamily="34" charset="0"/>
-                <a:ea typeface="Trebuchet MS" pitchFamily="34" charset="-122"/>
-                <a:cs typeface="Trebuchet MS" pitchFamily="34" charset="-120"/>
-              </a:rPr>
-              <a:t>·</a:t>
-            </a:r>
-            <a:endParaRPr lang="en-US" sz="1600" dirty="0"/>
-          </a:p>
-        </p:txBody>
-      </p:sp>
-      <p:sp>
-        <p:nvSpPr>
-          <p:cNvPr id="44" name="Shape 42"/>
-          <p:cNvSpPr/>
-          <p:nvPr/>
-        </p:nvSpPr>
-        <p:spPr>
-          <a:xfrm>
-            <a:off x="7184136" y="3364992"/>
-            <a:ext cx="1225296" cy="475488"/>
-          </a:xfrm>
-          <a:prstGeom prst="rect">
-            <a:avLst>
-              <a:gd name="adj" fmla="val 9615"/>
-            </a:avLst>
-          </a:prstGeom>
-          <a:solidFill>
-            <a:srgbClr val="FFFFFF"/>
-          </a:solidFill>
-          <a:ln w="12700">
-            <a:solidFill>
-              <a:srgbClr val="0D9488"/>
-            </a:solidFill>
-            <a:prstDash val="solid"/>
-          </a:ln>
-        </p:spPr>
-      </p:sp>
-      <p:sp>
-        <p:nvSpPr>
-          <p:cNvPr id="45" name="Text 43"/>
-          <p:cNvSpPr/>
-          <p:nvPr/>
-        </p:nvSpPr>
-        <p:spPr>
-          <a:xfrm>
-            <a:off x="7184136" y="3364992"/>
-            <a:ext cx="1225296" cy="475488"/>
-          </a:xfrm>
-          <a:prstGeom prst="rect">
-            <a:avLst/>
-          </a:prstGeom>
-          <a:noFill/>
-          <a:ln/>
-        </p:spPr>
-        <p:txBody>
-          <a:bodyPr wrap="square" lIns="0" tIns="0" rIns="0" bIns="0" rtlCol="0" anchor="ctr"/>
-          <a:lstStyle/>
-          <a:p>
-            <a:pPr algn="ctr" indent="0" marL="0">
-              <a:buNone/>
-            </a:pPr>
-            <a:r>
-              <a:rPr lang="en-US" sz="1400" b="1" dirty="0">
-                <a:solidFill>
-                  <a:srgbClr val="0D9488"/>
-                </a:solidFill>
-                <a:latin typeface="Trebuchet MS" pitchFamily="34" charset="0"/>
-                <a:ea typeface="Trebuchet MS" pitchFamily="34" charset="-122"/>
-                <a:cs typeface="Trebuchet MS" pitchFamily="34" charset="-120"/>
-              </a:rPr>
-              <a:t>ble</a:t>
-            </a:r>
-            <a:endParaRPr lang="en-US" sz="1400" dirty="0"/>
-          </a:p>
-        </p:txBody>
-      </p:sp>
-      <p:sp>
-        <p:nvSpPr>
-          <p:cNvPr id="46" name="Shape 44"/>
-          <p:cNvSpPr/>
-          <p:nvPr/>
-        </p:nvSpPr>
-        <p:spPr>
-          <a:xfrm>
-            <a:off x="365760" y="4096512"/>
-            <a:ext cx="1371600" cy="804672"/>
+              <a:t>Phonemes</a:t>
+            </a:r>
+            <a:endParaRPr lang="en-US" sz="1100" dirty="0"/>
+          </a:p>
+        </p:txBody>
+      </p:sp>
+      <p:sp>
+        <p:nvSpPr>
+          <p:cNvPr id="36" name="Shape 34"/>
+          <p:cNvSpPr/>
+          <p:nvPr/>
+        </p:nvSpPr>
+        <p:spPr>
+          <a:xfrm>
+            <a:off x="1874520" y="4096512"/>
+            <a:ext cx="6903720" cy="804672"/>
           </a:xfrm>
           <a:prstGeom prst="rect">
             <a:avLst>
@@ -33922,85 +33318,19 @@
             </a:avLst>
           </a:prstGeom>
           <a:solidFill>
-            <a:srgbClr val="E2E8F0"/>
+            <a:srgbClr val="F8FAFC"/>
           </a:solidFill>
           <a:ln w="12700">
             <a:solidFill>
               <a:srgbClr val="E2E8F0"/>
             </a:solidFill>
-            <a:prstDash val="solid"/>
-          </a:ln>
-        </p:spPr>
-      </p:sp>
-      <p:sp>
-        <p:nvSpPr>
-          <p:cNvPr id="47" name="Text 45"/>
-          <p:cNvSpPr/>
-          <p:nvPr/>
-        </p:nvSpPr>
-        <p:spPr>
-          <a:xfrm>
-            <a:off x="365760" y="4096512"/>
-            <a:ext cx="1371600" cy="804672"/>
-          </a:xfrm>
-          <a:prstGeom prst="rect">
-            <a:avLst/>
-          </a:prstGeom>
-          <a:noFill/>
-          <a:ln/>
-        </p:spPr>
-        <p:txBody>
-          <a:bodyPr wrap="square" lIns="0" tIns="0" rIns="0" bIns="0" rtlCol="0" anchor="ctr"/>
-          <a:lstStyle/>
-          <a:p>
-            <a:pPr algn="ctr" indent="0" marL="0">
-              <a:buNone/>
-            </a:pPr>
-            <a:r>
-              <a:rPr lang="en-US" sz="1100" b="1" dirty="0">
-                <a:solidFill>
-                  <a:srgbClr val="475569"/>
-                </a:solidFill>
-                <a:latin typeface="Trebuchet MS" pitchFamily="34" charset="0"/>
-                <a:ea typeface="Trebuchet MS" pitchFamily="34" charset="-122"/>
-                <a:cs typeface="Trebuchet MS" pitchFamily="34" charset="-120"/>
-              </a:rPr>
-              <a:t>Phonemes</a:t>
-            </a:r>
-            <a:endParaRPr lang="en-US" sz="1100" dirty="0"/>
-          </a:p>
-        </p:txBody>
-      </p:sp>
-      <p:sp>
-        <p:nvSpPr>
-          <p:cNvPr id="48" name="Shape 46"/>
-          <p:cNvSpPr/>
-          <p:nvPr/>
-        </p:nvSpPr>
-        <p:spPr>
-          <a:xfrm>
-            <a:off x="1874520" y="4096512"/>
-            <a:ext cx="6903720" cy="804672"/>
-          </a:xfrm>
-          <a:prstGeom prst="rect">
-            <a:avLst>
-              <a:gd name="adj" fmla="val 6818"/>
-            </a:avLst>
-          </a:prstGeom>
-          <a:solidFill>
-            <a:srgbClr val="F8FAFC"/>
-          </a:solidFill>
-          <a:ln w="12700">
-            <a:solidFill>
-              <a:srgbClr val="E2E8F0"/>
-            </a:solidFill>
             <a:prstDash val="dash"/>
           </a:ln>
         </p:spPr>
       </p:sp>
       <p:sp>
         <p:nvSpPr>
-          <p:cNvPr id="49" name="Text 47"/>
+          <p:cNvPr id="37" name="Text 35"/>
           <p:cNvSpPr/>
           <p:nvPr/>
         </p:nvSpPr>
@@ -34323,7 +33653,7 @@
                 <a:ea typeface="Calibri" pitchFamily="34" charset="-122"/>
                 <a:cs typeface="Calibri" pitchFamily="34" charset="-120"/>
               </a:rPr>
-              <a:t>Word Labs  •  wordlabs.app  •  Suffix: '-able' = able to be done</a:t>
+              <a:t>Word Labs  •  wordlabs.app  •  Suffix: '-able' = can be done; capable of</a:t>
             </a:r>
             <a:endParaRPr lang="en-US" sz="800" dirty="0"/>
           </a:p>
@@ -34462,7 +33792,7 @@
                 <a:ea typeface="Trebuchet MS" pitchFamily="34" charset="-122"/>
                 <a:cs typeface="Trebuchet MS" pitchFamily="34" charset="-120"/>
               </a:rPr>
-              <a:t>unforgettable</a:t>
+              <a:t>readable</a:t>
             </a:r>
             <a:endParaRPr lang="en-US" sz="2800" dirty="0"/>
           </a:p>
@@ -34542,8 +33872,8 @@
         </p:nvSpPr>
         <p:spPr>
           <a:xfrm>
-            <a:off x="1989734" y="2258568"/>
-            <a:ext cx="1581912" cy="292608"/>
+            <a:off x="2938272" y="2258568"/>
+            <a:ext cx="1828800" cy="292608"/>
           </a:xfrm>
           <a:prstGeom prst="rect">
             <a:avLst>
@@ -34576,8 +33906,8 @@
         </p:nvSpPr>
         <p:spPr>
           <a:xfrm>
-            <a:off x="1989734" y="2258568"/>
-            <a:ext cx="1581912" cy="292608"/>
+            <a:off x="2938272" y="2258568"/>
+            <a:ext cx="1828800" cy="292608"/>
           </a:xfrm>
           <a:prstGeom prst="rect">
             <a:avLst/>
@@ -34601,7 +33931,7 @@
                 <a:ea typeface="Trebuchet MS" pitchFamily="34" charset="-122"/>
                 <a:cs typeface="Trebuchet MS" pitchFamily="34" charset="-120"/>
               </a:rPr>
-              <a:t>un</a:t>
+              <a:t>read</a:t>
             </a:r>
             <a:endParaRPr lang="en-US" sz="1300" dirty="0"/>
           </a:p>
@@ -34615,8 +33945,8 @@
         </p:nvSpPr>
         <p:spPr>
           <a:xfrm>
-            <a:off x="1989734" y="2569464"/>
-            <a:ext cx="1581912" cy="201168"/>
+            <a:off x="2938272" y="2569464"/>
+            <a:ext cx="1828800" cy="201168"/>
           </a:xfrm>
           <a:prstGeom prst="rect">
             <a:avLst/>
@@ -34640,7 +33970,7 @@
                 <a:ea typeface="Calibri" pitchFamily="34" charset="-122"/>
                 <a:cs typeface="Calibri" pitchFamily="34" charset="-120"/>
               </a:rPr>
-              <a:t>not</a:t>
+              <a:t>to look at and understand written words</a:t>
             </a:r>
             <a:endParaRPr lang="en-US" sz="850" dirty="0"/>
           </a:p>
@@ -34654,8 +33984,8 @@
         </p:nvSpPr>
         <p:spPr>
           <a:xfrm>
-            <a:off x="3659429" y="2258568"/>
-            <a:ext cx="1581912" cy="292608"/>
+            <a:off x="5803392" y="2258568"/>
+            <a:ext cx="1828800" cy="292608"/>
           </a:xfrm>
           <a:prstGeom prst="rect">
             <a:avLst>
@@ -34663,11 +33993,11 @@
             </a:avLst>
           </a:prstGeom>
           <a:solidFill>
-            <a:srgbClr val="FCE7F3"/>
+            <a:srgbClr val="CCFBF1"/>
           </a:solidFill>
           <a:ln w="19050">
             <a:solidFill>
-              <a:srgbClr val="DB2777"/>
+              <a:srgbClr val="0D9488"/>
             </a:solidFill>
             <a:prstDash val="solid"/>
           </a:ln>
@@ -34688,8 +34018,8 @@
         </p:nvSpPr>
         <p:spPr>
           <a:xfrm>
-            <a:off x="3659429" y="2258568"/>
-            <a:ext cx="1581912" cy="292608"/>
+            <a:off x="5803392" y="2258568"/>
+            <a:ext cx="1828800" cy="292608"/>
           </a:xfrm>
           <a:prstGeom prst="rect">
             <a:avLst/>
@@ -34707,13 +34037,13 @@
             <a:r>
               <a:rPr lang="en-US" sz="1300" b="1" dirty="0">
                 <a:solidFill>
-                  <a:srgbClr val="9D174D"/>
+                  <a:srgbClr val="0F766E"/>
                 </a:solidFill>
                 <a:latin typeface="Trebuchet MS" pitchFamily="34" charset="0"/>
                 <a:ea typeface="Trebuchet MS" pitchFamily="34" charset="-122"/>
                 <a:cs typeface="Trebuchet MS" pitchFamily="34" charset="-120"/>
               </a:rPr>
-              <a:t>forget</a:t>
+              <a:t>able</a:t>
             </a:r>
             <a:endParaRPr lang="en-US" sz="1300" dirty="0"/>
           </a:p>
@@ -34727,8 +34057,8 @@
         </p:nvSpPr>
         <p:spPr>
           <a:xfrm>
-            <a:off x="3659429" y="2569464"/>
-            <a:ext cx="1581912" cy="201168"/>
+            <a:off x="5803392" y="2569464"/>
+            <a:ext cx="1828800" cy="201168"/>
           </a:xfrm>
           <a:prstGeom prst="rect">
             <a:avLst/>
@@ -34752,7 +34082,7 @@
                 <a:ea typeface="Calibri" pitchFamily="34" charset="-122"/>
                 <a:cs typeface="Calibri" pitchFamily="34" charset="-120"/>
               </a:rPr>
-              <a:t>to fail to remember</a:t>
+              <a:t>can be done; capable of</a:t>
             </a:r>
             <a:endParaRPr lang="en-US" sz="850" dirty="0"/>
           </a:p>
@@ -34760,154 +34090,135 @@
       </p:sp>
       <p:sp>
         <p:nvSpPr>
-          <p:cNvPr id="22" name="Shape 20"/>
-          <p:cNvSpPr/>
-          <p:nvPr/>
-        </p:nvSpPr>
-        <p:spPr>
-          <a:xfrm>
-            <a:off x="5329123" y="2258568"/>
-            <a:ext cx="1581912" cy="292608"/>
+          <p:cNvPr id="22" name="Text 20"/>
+          <p:cNvSpPr/>
+          <p:nvPr/>
+        </p:nvSpPr>
+        <p:spPr>
+          <a:xfrm>
+            <a:off x="5803392" y="2752344"/>
+            <a:ext cx="1828800" cy="182880"/>
+          </a:xfrm>
+          <a:prstGeom prst="rect">
+            <a:avLst/>
+          </a:prstGeom>
+          <a:noFill/>
+          <a:ln/>
+        </p:spPr>
+        <p:txBody>
+          <a:bodyPr wrap="square" lIns="0" tIns="0" rIns="0" bIns="0" rtlCol="0" anchor="t"/>
+          <a:lstStyle/>
+          <a:p>
+            <a:pPr algn="ctr" indent="0" marL="0">
+              <a:buNone/>
+            </a:pPr>
+            <a:r>
+              <a:rPr lang="en-US" sz="700" i="1" dirty="0">
+                <a:solidFill>
+                  <a:srgbClr val="94A3B8"/>
+                </a:solidFill>
+                <a:latin typeface="Calibri" pitchFamily="34" charset="0"/>
+                <a:ea typeface="Calibri" pitchFamily="34" charset="-122"/>
+                <a:cs typeface="Calibri" pitchFamily="34" charset="-120"/>
+              </a:rPr>
+              <a:t>'e' dropped from 'reade' before vowel suffix '-able'</a:t>
+            </a:r>
+            <a:endParaRPr lang="en-US" sz="700" dirty="0"/>
+          </a:p>
+        </p:txBody>
+      </p:sp>
+      <p:sp>
+        <p:nvSpPr>
+          <p:cNvPr id="23" name="Shape 21"/>
+          <p:cNvSpPr/>
+          <p:nvPr/>
+        </p:nvSpPr>
+        <p:spPr>
+          <a:xfrm>
+            <a:off x="365760" y="3273552"/>
+            <a:ext cx="1371600" cy="658368"/>
           </a:xfrm>
           <a:prstGeom prst="rect">
             <a:avLst>
-              <a:gd name="adj" fmla="val 25000"/>
+              <a:gd name="adj" fmla="val 8333"/>
             </a:avLst>
           </a:prstGeom>
           <a:solidFill>
-            <a:srgbClr val="FCE7F3"/>
-          </a:solidFill>
-          <a:ln w="19050">
-            <a:solidFill>
-              <a:srgbClr val="DB2777"/>
-            </a:solidFill>
-            <a:prstDash val="solid"/>
-          </a:ln>
-          <a:effectLst>
-            <a:outerShdw sx="100000" sy="100000" kx="0" ky="0" algn="bl" rotWithShape="0" blurRad="101600" dist="38100" dir="8100000">
-              <a:srgbClr val="000000">
-                <a:alpha val="12000"/>
-              </a:srgbClr>
-            </a:outerShdw>
-          </a:effectLst>
-        </p:spPr>
-      </p:sp>
-      <p:sp>
-        <p:nvSpPr>
-          <p:cNvPr id="23" name="Text 21"/>
-          <p:cNvSpPr/>
-          <p:nvPr/>
-        </p:nvSpPr>
-        <p:spPr>
-          <a:xfrm>
-            <a:off x="5329123" y="2258568"/>
-            <a:ext cx="1581912" cy="292608"/>
-          </a:xfrm>
-          <a:prstGeom prst="rect">
-            <a:avLst/>
-          </a:prstGeom>
-          <a:noFill/>
-          <a:ln/>
-        </p:spPr>
-        <p:txBody>
-          <a:bodyPr wrap="square" lIns="0" tIns="0" rIns="0" bIns="0" rtlCol="0" anchor="ctr"/>
-          <a:lstStyle/>
-          <a:p>
-            <a:pPr algn="ctr" indent="0" marL="0">
-              <a:buNone/>
-            </a:pPr>
-            <a:r>
-              <a:rPr lang="en-US" sz="1300" b="1" dirty="0">
-                <a:solidFill>
-                  <a:srgbClr val="9D174D"/>
+            <a:srgbClr val="E2E8F0"/>
+          </a:solidFill>
+          <a:ln w="12700">
+            <a:solidFill>
+              <a:srgbClr val="E2E8F0"/>
+            </a:solidFill>
+            <a:prstDash val="solid"/>
+          </a:ln>
+        </p:spPr>
+      </p:sp>
+      <p:sp>
+        <p:nvSpPr>
+          <p:cNvPr id="24" name="Text 22"/>
+          <p:cNvSpPr/>
+          <p:nvPr/>
+        </p:nvSpPr>
+        <p:spPr>
+          <a:xfrm>
+            <a:off x="365760" y="3273552"/>
+            <a:ext cx="1371600" cy="658368"/>
+          </a:xfrm>
+          <a:prstGeom prst="rect">
+            <a:avLst/>
+          </a:prstGeom>
+          <a:noFill/>
+          <a:ln/>
+        </p:spPr>
+        <p:txBody>
+          <a:bodyPr wrap="square" lIns="0" tIns="0" rIns="0" bIns="0" rtlCol="0" anchor="ctr"/>
+          <a:lstStyle/>
+          <a:p>
+            <a:pPr algn="ctr" indent="0" marL="0">
+              <a:buNone/>
+            </a:pPr>
+            <a:r>
+              <a:rPr lang="en-US" sz="1100" b="1" dirty="0">
+                <a:solidFill>
+                  <a:srgbClr val="475569"/>
                 </a:solidFill>
                 <a:latin typeface="Trebuchet MS" pitchFamily="34" charset="0"/>
                 <a:ea typeface="Trebuchet MS" pitchFamily="34" charset="-122"/>
                 <a:cs typeface="Trebuchet MS" pitchFamily="34" charset="-120"/>
               </a:rPr>
-              <a:t>t</a:t>
-            </a:r>
-            <a:endParaRPr lang="en-US" sz="1300" dirty="0"/>
-          </a:p>
-        </p:txBody>
-      </p:sp>
-      <p:sp>
-        <p:nvSpPr>
-          <p:cNvPr id="24" name="Text 22"/>
-          <p:cNvSpPr/>
-          <p:nvPr/>
-        </p:nvSpPr>
-        <p:spPr>
-          <a:xfrm>
-            <a:off x="5329123" y="2569464"/>
-            <a:ext cx="1581912" cy="201168"/>
-          </a:xfrm>
-          <a:prstGeom prst="rect">
-            <a:avLst/>
-          </a:prstGeom>
-          <a:noFill/>
-          <a:ln/>
-        </p:spPr>
-        <p:txBody>
-          <a:bodyPr wrap="square" lIns="0" tIns="0" rIns="0" bIns="0" rtlCol="0" anchor="t"/>
-          <a:lstStyle/>
-          <a:p>
-            <a:pPr algn="ctr" indent="0" marL="0">
-              <a:buNone/>
-            </a:pPr>
-            <a:r>
-              <a:rPr lang="en-US" sz="850" dirty="0">
-                <a:solidFill>
-                  <a:srgbClr val="475569"/>
-                </a:solidFill>
-                <a:latin typeface="Calibri" pitchFamily="34" charset="0"/>
-                <a:ea typeface="Calibri" pitchFamily="34" charset="-122"/>
-                <a:cs typeface="Calibri" pitchFamily="34" charset="-120"/>
-              </a:rPr>
-              <a:t>doubled consonant</a:t>
-            </a:r>
-            <a:endParaRPr lang="en-US" sz="850" dirty="0"/>
-          </a:p>
-        </p:txBody>
-      </p:sp>
-      <p:sp>
-        <p:nvSpPr>
-          <p:cNvPr id="25" name="Text 23"/>
-          <p:cNvSpPr/>
-          <p:nvPr/>
-        </p:nvSpPr>
-        <p:spPr>
-          <a:xfrm>
-            <a:off x="5329123" y="2752344"/>
-            <a:ext cx="1581912" cy="182880"/>
-          </a:xfrm>
-          <a:prstGeom prst="rect">
-            <a:avLst/>
-          </a:prstGeom>
-          <a:noFill/>
-          <a:ln/>
-        </p:spPr>
-        <p:txBody>
-          <a:bodyPr wrap="square" lIns="0" tIns="0" rIns="0" bIns="0" rtlCol="0" anchor="t"/>
-          <a:lstStyle/>
-          <a:p>
-            <a:pPr algn="ctr" indent="0" marL="0">
-              <a:buNone/>
-            </a:pPr>
-            <a:r>
-              <a:rPr lang="en-US" sz="700" i="1" dirty="0">
-                <a:solidFill>
-                  <a:srgbClr val="94A3B8"/>
-                </a:solidFill>
-                <a:latin typeface="Calibri" pitchFamily="34" charset="0"/>
-                <a:ea typeface="Calibri" pitchFamily="34" charset="-122"/>
-                <a:cs typeface="Calibri" pitchFamily="34" charset="-120"/>
-              </a:rPr>
-              <a:t>final 't' doubled before vowel suffix</a:t>
-            </a:r>
-            <a:endParaRPr lang="en-US" sz="700" dirty="0"/>
-          </a:p>
-        </p:txBody>
+              <a:t>Syllables</a:t>
+            </a:r>
+            <a:endParaRPr lang="en-US" sz="1100" dirty="0"/>
+          </a:p>
+        </p:txBody>
+      </p:sp>
+      <p:sp>
+        <p:nvSpPr>
+          <p:cNvPr id="25" name="Shape 23"/>
+          <p:cNvSpPr/>
+          <p:nvPr/>
+        </p:nvSpPr>
+        <p:spPr>
+          <a:xfrm>
+            <a:off x="1874520" y="3273552"/>
+            <a:ext cx="6903720" cy="658368"/>
+          </a:xfrm>
+          <a:prstGeom prst="rect">
+            <a:avLst>
+              <a:gd name="adj" fmla="val 8333"/>
+            </a:avLst>
+          </a:prstGeom>
+          <a:solidFill>
+            <a:srgbClr val="CCFBF1"/>
+          </a:solidFill>
+          <a:ln w="12700">
+            <a:solidFill>
+              <a:srgbClr val="0D9488"/>
+            </a:solidFill>
+            <a:prstDash val="solid"/>
+          </a:ln>
+        </p:spPr>
       </p:sp>
       <p:sp>
         <p:nvSpPr>
@@ -34917,30 +34228,23 @@
         </p:nvSpPr>
         <p:spPr>
           <a:xfrm>
-            <a:off x="6998818" y="2258568"/>
-            <a:ext cx="1581912" cy="292608"/>
+            <a:off x="2313432" y="3364992"/>
+            <a:ext cx="1645920" cy="475488"/>
           </a:xfrm>
           <a:prstGeom prst="rect">
             <a:avLst>
-              <a:gd name="adj" fmla="val 25000"/>
+              <a:gd name="adj" fmla="val 9615"/>
             </a:avLst>
           </a:prstGeom>
           <a:solidFill>
-            <a:srgbClr val="CCFBF1"/>
-          </a:solidFill>
-          <a:ln w="19050">
+            <a:srgbClr val="FFFFFF"/>
+          </a:solidFill>
+          <a:ln w="12700">
             <a:solidFill>
               <a:srgbClr val="0D9488"/>
             </a:solidFill>
             <a:prstDash val="solid"/>
           </a:ln>
-          <a:effectLst>
-            <a:outerShdw sx="100000" sy="100000" kx="0" ky="0" algn="bl" rotWithShape="0" blurRad="101600" dist="38100" dir="8100000">
-              <a:srgbClr val="000000">
-                <a:alpha val="12000"/>
-              </a:srgbClr>
-            </a:outerShdw>
-          </a:effectLst>
         </p:spPr>
       </p:sp>
       <p:sp>
@@ -34951,34 +34255,34 @@
         </p:nvSpPr>
         <p:spPr>
           <a:xfrm>
-            <a:off x="6998818" y="2258568"/>
-            <a:ext cx="1581912" cy="292608"/>
-          </a:xfrm>
-          <a:prstGeom prst="rect">
-            <a:avLst/>
-          </a:prstGeom>
-          <a:noFill/>
-          <a:ln/>
-        </p:spPr>
-        <p:txBody>
-          <a:bodyPr wrap="square" lIns="0" tIns="0" rIns="0" bIns="0" rtlCol="0" anchor="ctr"/>
-          <a:lstStyle/>
-          <a:p>
-            <a:pPr algn="ctr" indent="0" marL="0">
-              <a:buNone/>
-            </a:pPr>
-            <a:r>
-              <a:rPr lang="en-US" sz="1300" b="1" dirty="0">
-                <a:solidFill>
-                  <a:srgbClr val="0F766E"/>
+            <a:off x="2313432" y="3364992"/>
+            <a:ext cx="1645920" cy="475488"/>
+          </a:xfrm>
+          <a:prstGeom prst="rect">
+            <a:avLst/>
+          </a:prstGeom>
+          <a:noFill/>
+          <a:ln/>
+        </p:spPr>
+        <p:txBody>
+          <a:bodyPr wrap="square" lIns="0" tIns="0" rIns="0" bIns="0" rtlCol="0" anchor="ctr"/>
+          <a:lstStyle/>
+          <a:p>
+            <a:pPr algn="ctr" indent="0" marL="0">
+              <a:buNone/>
+            </a:pPr>
+            <a:r>
+              <a:rPr lang="en-US" sz="1400" b="1" dirty="0">
+                <a:solidFill>
+                  <a:srgbClr val="0D9488"/>
                 </a:solidFill>
                 <a:latin typeface="Trebuchet MS" pitchFamily="34" charset="0"/>
                 <a:ea typeface="Trebuchet MS" pitchFamily="34" charset="-122"/>
                 <a:cs typeface="Trebuchet MS" pitchFamily="34" charset="-120"/>
               </a:rPr>
-              <a:t>able</a:t>
-            </a:r>
-            <a:endParaRPr lang="en-US" sz="1300" dirty="0"/>
+              <a:t>read</a:t>
+            </a:r>
+            <a:endParaRPr lang="en-US" sz="1400" dirty="0"/>
           </a:p>
         </p:txBody>
       </p:sp>
@@ -34990,47 +34294,284 @@
         </p:nvSpPr>
         <p:spPr>
           <a:xfrm>
-            <a:off x="6998818" y="2569464"/>
-            <a:ext cx="1581912" cy="201168"/>
-          </a:xfrm>
-          <a:prstGeom prst="rect">
-            <a:avLst/>
-          </a:prstGeom>
-          <a:noFill/>
-          <a:ln/>
-        </p:spPr>
-        <p:txBody>
-          <a:bodyPr wrap="square" lIns="0" tIns="0" rIns="0" bIns="0" rtlCol="0" anchor="t"/>
-          <a:lstStyle/>
-          <a:p>
-            <a:pPr algn="ctr" indent="0" marL="0">
-              <a:buNone/>
-            </a:pPr>
-            <a:r>
-              <a:rPr lang="en-US" sz="850" dirty="0">
+            <a:off x="3959352" y="3364992"/>
+            <a:ext cx="411480" cy="475488"/>
+          </a:xfrm>
+          <a:prstGeom prst="rect">
+            <a:avLst/>
+          </a:prstGeom>
+          <a:noFill/>
+          <a:ln/>
+        </p:spPr>
+        <p:txBody>
+          <a:bodyPr wrap="square" lIns="0" tIns="0" rIns="0" bIns="0" rtlCol="0" anchor="ctr"/>
+          <a:lstStyle/>
+          <a:p>
+            <a:pPr algn="ctr" indent="0" marL="0">
+              <a:buNone/>
+            </a:pPr>
+            <a:r>
+              <a:rPr lang="en-US" sz="1600" b="1" dirty="0">
+                <a:solidFill>
+                  <a:srgbClr val="0D9488"/>
+                </a:solidFill>
+                <a:latin typeface="Trebuchet MS" pitchFamily="34" charset="0"/>
+                <a:ea typeface="Trebuchet MS" pitchFamily="34" charset="-122"/>
+                <a:cs typeface="Trebuchet MS" pitchFamily="34" charset="-120"/>
+              </a:rPr>
+              <a:t>·</a:t>
+            </a:r>
+            <a:endParaRPr lang="en-US" sz="1600" dirty="0"/>
+          </a:p>
+        </p:txBody>
+      </p:sp>
+      <p:sp>
+        <p:nvSpPr>
+          <p:cNvPr id="29" name="Shape 27"/>
+          <p:cNvSpPr/>
+          <p:nvPr/>
+        </p:nvSpPr>
+        <p:spPr>
+          <a:xfrm>
+            <a:off x="4370832" y="3364992"/>
+            <a:ext cx="1645920" cy="475488"/>
+          </a:xfrm>
+          <a:prstGeom prst="rect">
+            <a:avLst>
+              <a:gd name="adj" fmla="val 9615"/>
+            </a:avLst>
+          </a:prstGeom>
+          <a:solidFill>
+            <a:srgbClr val="FFFFFF"/>
+          </a:solidFill>
+          <a:ln w="12700">
+            <a:solidFill>
+              <a:srgbClr val="0D9488"/>
+            </a:solidFill>
+            <a:prstDash val="solid"/>
+          </a:ln>
+        </p:spPr>
+      </p:sp>
+      <p:sp>
+        <p:nvSpPr>
+          <p:cNvPr id="30" name="Text 28"/>
+          <p:cNvSpPr/>
+          <p:nvPr/>
+        </p:nvSpPr>
+        <p:spPr>
+          <a:xfrm>
+            <a:off x="4370832" y="3364992"/>
+            <a:ext cx="1645920" cy="475488"/>
+          </a:xfrm>
+          <a:prstGeom prst="rect">
+            <a:avLst/>
+          </a:prstGeom>
+          <a:noFill/>
+          <a:ln/>
+        </p:spPr>
+        <p:txBody>
+          <a:bodyPr wrap="square" lIns="0" tIns="0" rIns="0" bIns="0" rtlCol="0" anchor="ctr"/>
+          <a:lstStyle/>
+          <a:p>
+            <a:pPr algn="ctr" indent="0" marL="0">
+              <a:buNone/>
+            </a:pPr>
+            <a:r>
+              <a:rPr lang="en-US" sz="1400" b="1" dirty="0">
+                <a:solidFill>
+                  <a:srgbClr val="0D9488"/>
+                </a:solidFill>
+                <a:latin typeface="Trebuchet MS" pitchFamily="34" charset="0"/>
+                <a:ea typeface="Trebuchet MS" pitchFamily="34" charset="-122"/>
+                <a:cs typeface="Trebuchet MS" pitchFamily="34" charset="-120"/>
+              </a:rPr>
+              <a:t>a</a:t>
+            </a:r>
+            <a:endParaRPr lang="en-US" sz="1400" dirty="0"/>
+          </a:p>
+        </p:txBody>
+      </p:sp>
+      <p:sp>
+        <p:nvSpPr>
+          <p:cNvPr id="31" name="Text 29"/>
+          <p:cNvSpPr/>
+          <p:nvPr/>
+        </p:nvSpPr>
+        <p:spPr>
+          <a:xfrm>
+            <a:off x="6016752" y="3364992"/>
+            <a:ext cx="411480" cy="475488"/>
+          </a:xfrm>
+          <a:prstGeom prst="rect">
+            <a:avLst/>
+          </a:prstGeom>
+          <a:noFill/>
+          <a:ln/>
+        </p:spPr>
+        <p:txBody>
+          <a:bodyPr wrap="square" lIns="0" tIns="0" rIns="0" bIns="0" rtlCol="0" anchor="ctr"/>
+          <a:lstStyle/>
+          <a:p>
+            <a:pPr algn="ctr" indent="0" marL="0">
+              <a:buNone/>
+            </a:pPr>
+            <a:r>
+              <a:rPr lang="en-US" sz="1600" b="1" dirty="0">
+                <a:solidFill>
+                  <a:srgbClr val="0D9488"/>
+                </a:solidFill>
+                <a:latin typeface="Trebuchet MS" pitchFamily="34" charset="0"/>
+                <a:ea typeface="Trebuchet MS" pitchFamily="34" charset="-122"/>
+                <a:cs typeface="Trebuchet MS" pitchFamily="34" charset="-120"/>
+              </a:rPr>
+              <a:t>·</a:t>
+            </a:r>
+            <a:endParaRPr lang="en-US" sz="1600" dirty="0"/>
+          </a:p>
+        </p:txBody>
+      </p:sp>
+      <p:sp>
+        <p:nvSpPr>
+          <p:cNvPr id="32" name="Shape 30"/>
+          <p:cNvSpPr/>
+          <p:nvPr/>
+        </p:nvSpPr>
+        <p:spPr>
+          <a:xfrm>
+            <a:off x="6428232" y="3364992"/>
+            <a:ext cx="1645920" cy="475488"/>
+          </a:xfrm>
+          <a:prstGeom prst="rect">
+            <a:avLst>
+              <a:gd name="adj" fmla="val 9615"/>
+            </a:avLst>
+          </a:prstGeom>
+          <a:solidFill>
+            <a:srgbClr val="FFFFFF"/>
+          </a:solidFill>
+          <a:ln w="12700">
+            <a:solidFill>
+              <a:srgbClr val="0D9488"/>
+            </a:solidFill>
+            <a:prstDash val="solid"/>
+          </a:ln>
+        </p:spPr>
+      </p:sp>
+      <p:sp>
+        <p:nvSpPr>
+          <p:cNvPr id="33" name="Text 31"/>
+          <p:cNvSpPr/>
+          <p:nvPr/>
+        </p:nvSpPr>
+        <p:spPr>
+          <a:xfrm>
+            <a:off x="6428232" y="3364992"/>
+            <a:ext cx="1645920" cy="475488"/>
+          </a:xfrm>
+          <a:prstGeom prst="rect">
+            <a:avLst/>
+          </a:prstGeom>
+          <a:noFill/>
+          <a:ln/>
+        </p:spPr>
+        <p:txBody>
+          <a:bodyPr wrap="square" lIns="0" tIns="0" rIns="0" bIns="0" rtlCol="0" anchor="ctr"/>
+          <a:lstStyle/>
+          <a:p>
+            <a:pPr algn="ctr" indent="0" marL="0">
+              <a:buNone/>
+            </a:pPr>
+            <a:r>
+              <a:rPr lang="en-US" sz="1400" b="1" dirty="0">
+                <a:solidFill>
+                  <a:srgbClr val="0D9488"/>
+                </a:solidFill>
+                <a:latin typeface="Trebuchet MS" pitchFamily="34" charset="0"/>
+                <a:ea typeface="Trebuchet MS" pitchFamily="34" charset="-122"/>
+                <a:cs typeface="Trebuchet MS" pitchFamily="34" charset="-120"/>
+              </a:rPr>
+              <a:t>ble</a:t>
+            </a:r>
+            <a:endParaRPr lang="en-US" sz="1400" dirty="0"/>
+          </a:p>
+        </p:txBody>
+      </p:sp>
+      <p:sp>
+        <p:nvSpPr>
+          <p:cNvPr id="34" name="Shape 32"/>
+          <p:cNvSpPr/>
+          <p:nvPr/>
+        </p:nvSpPr>
+        <p:spPr>
+          <a:xfrm>
+            <a:off x="365760" y="4096512"/>
+            <a:ext cx="1371600" cy="804672"/>
+          </a:xfrm>
+          <a:prstGeom prst="rect">
+            <a:avLst>
+              <a:gd name="adj" fmla="val 6818"/>
+            </a:avLst>
+          </a:prstGeom>
+          <a:solidFill>
+            <a:srgbClr val="E2E8F0"/>
+          </a:solidFill>
+          <a:ln w="12700">
+            <a:solidFill>
+              <a:srgbClr val="E2E8F0"/>
+            </a:solidFill>
+            <a:prstDash val="solid"/>
+          </a:ln>
+        </p:spPr>
+      </p:sp>
+      <p:sp>
+        <p:nvSpPr>
+          <p:cNvPr id="35" name="Text 33"/>
+          <p:cNvSpPr/>
+          <p:nvPr/>
+        </p:nvSpPr>
+        <p:spPr>
+          <a:xfrm>
+            <a:off x="365760" y="4096512"/>
+            <a:ext cx="1371600" cy="804672"/>
+          </a:xfrm>
+          <a:prstGeom prst="rect">
+            <a:avLst/>
+          </a:prstGeom>
+          <a:noFill/>
+          <a:ln/>
+        </p:spPr>
+        <p:txBody>
+          <a:bodyPr wrap="square" lIns="0" tIns="0" rIns="0" bIns="0" rtlCol="0" anchor="ctr"/>
+          <a:lstStyle/>
+          <a:p>
+            <a:pPr algn="ctr" indent="0" marL="0">
+              <a:buNone/>
+            </a:pPr>
+            <a:r>
+              <a:rPr lang="en-US" sz="1100" b="1" dirty="0">
                 <a:solidFill>
                   <a:srgbClr val="475569"/>
                 </a:solidFill>
-                <a:latin typeface="Calibri" pitchFamily="34" charset="0"/>
-                <a:ea typeface="Calibri" pitchFamily="34" charset="-122"/>
-                <a:cs typeface="Calibri" pitchFamily="34" charset="-120"/>
-              </a:rPr>
-              <a:t>able to be done</a:t>
-            </a:r>
-            <a:endParaRPr lang="en-US" sz="850" dirty="0"/>
-          </a:p>
-        </p:txBody>
-      </p:sp>
-      <p:sp>
-        <p:nvSpPr>
-          <p:cNvPr id="29" name="Shape 27"/>
-          <p:cNvSpPr/>
-          <p:nvPr/>
-        </p:nvSpPr>
-        <p:spPr>
-          <a:xfrm>
-            <a:off x="365760" y="3273552"/>
-            <a:ext cx="1371600" cy="658368"/>
+                <a:latin typeface="Trebuchet MS" pitchFamily="34" charset="0"/>
+                <a:ea typeface="Trebuchet MS" pitchFamily="34" charset="-122"/>
+                <a:cs typeface="Trebuchet MS" pitchFamily="34" charset="-120"/>
+              </a:rPr>
+              <a:t>Phonemes</a:t>
+            </a:r>
+            <a:endParaRPr lang="en-US" sz="1100" dirty="0"/>
+          </a:p>
+        </p:txBody>
+      </p:sp>
+      <p:sp>
+        <p:nvSpPr>
+          <p:cNvPr id="36" name="Shape 34"/>
+          <p:cNvSpPr/>
+          <p:nvPr/>
+        </p:nvSpPr>
+        <p:spPr>
+          <a:xfrm>
+            <a:off x="1874520" y="4096512"/>
+            <a:ext cx="6903720" cy="658368"/>
           </a:xfrm>
           <a:prstGeom prst="rect">
             <a:avLst>
@@ -35038,201 +34579,228 @@
             </a:avLst>
           </a:prstGeom>
           <a:solidFill>
-            <a:srgbClr val="E2E8F0"/>
-          </a:solidFill>
-          <a:ln w="12700">
-            <a:solidFill>
-              <a:srgbClr val="E2E8F0"/>
-            </a:solidFill>
-            <a:prstDash val="solid"/>
-          </a:ln>
-        </p:spPr>
-      </p:sp>
-      <p:sp>
-        <p:nvSpPr>
-          <p:cNvPr id="30" name="Text 28"/>
-          <p:cNvSpPr/>
-          <p:nvPr/>
-        </p:nvSpPr>
-        <p:spPr>
-          <a:xfrm>
-            <a:off x="365760" y="3273552"/>
-            <a:ext cx="1371600" cy="658368"/>
-          </a:xfrm>
-          <a:prstGeom prst="rect">
-            <a:avLst/>
-          </a:prstGeom>
-          <a:noFill/>
-          <a:ln/>
-        </p:spPr>
-        <p:txBody>
-          <a:bodyPr wrap="square" lIns="0" tIns="0" rIns="0" bIns="0" rtlCol="0" anchor="ctr"/>
-          <a:lstStyle/>
-          <a:p>
-            <a:pPr algn="ctr" indent="0" marL="0">
-              <a:buNone/>
-            </a:pPr>
-            <a:r>
-              <a:rPr lang="en-US" sz="1100" b="1" dirty="0">
-                <a:solidFill>
-                  <a:srgbClr val="475569"/>
+            <a:srgbClr val="FCE7F3"/>
+          </a:solidFill>
+          <a:ln w="12700">
+            <a:solidFill>
+              <a:srgbClr val="DB2777"/>
+            </a:solidFill>
+            <a:prstDash val="solid"/>
+          </a:ln>
+        </p:spPr>
+      </p:sp>
+      <p:sp>
+        <p:nvSpPr>
+          <p:cNvPr id="37" name="Shape 35"/>
+          <p:cNvSpPr/>
+          <p:nvPr/>
+        </p:nvSpPr>
+        <p:spPr>
+          <a:xfrm>
+            <a:off x="2124837" y="4169664"/>
+            <a:ext cx="685800" cy="475488"/>
+          </a:xfrm>
+          <a:prstGeom prst="rect">
+            <a:avLst>
+              <a:gd name="adj" fmla="val 7692"/>
+            </a:avLst>
+          </a:prstGeom>
+          <a:solidFill>
+            <a:srgbClr val="FFFFFF"/>
+          </a:solidFill>
+          <a:ln w="12700">
+            <a:solidFill>
+              <a:srgbClr val="DB2777"/>
+            </a:solidFill>
+            <a:prstDash val="solid"/>
+          </a:ln>
+        </p:spPr>
+      </p:sp>
+      <p:sp>
+        <p:nvSpPr>
+          <p:cNvPr id="38" name="Text 36"/>
+          <p:cNvSpPr/>
+          <p:nvPr/>
+        </p:nvSpPr>
+        <p:spPr>
+          <a:xfrm>
+            <a:off x="2124837" y="4169664"/>
+            <a:ext cx="685800" cy="475488"/>
+          </a:xfrm>
+          <a:prstGeom prst="rect">
+            <a:avLst/>
+          </a:prstGeom>
+          <a:noFill/>
+          <a:ln/>
+        </p:spPr>
+        <p:txBody>
+          <a:bodyPr wrap="square" lIns="0" tIns="0" rIns="0" bIns="0" rtlCol="0" anchor="ctr"/>
+          <a:lstStyle/>
+          <a:p>
+            <a:pPr algn="ctr" indent="0" marL="0">
+              <a:buNone/>
+            </a:pPr>
+            <a:r>
+              <a:rPr lang="en-US" sz="900" b="1" dirty="0">
+                <a:solidFill>
+                  <a:srgbClr val="9D174D"/>
                 </a:solidFill>
                 <a:latin typeface="Trebuchet MS" pitchFamily="34" charset="0"/>
                 <a:ea typeface="Trebuchet MS" pitchFamily="34" charset="-122"/>
                 <a:cs typeface="Trebuchet MS" pitchFamily="34" charset="-120"/>
               </a:rPr>
-              <a:t>Syllables</a:t>
-            </a:r>
-            <a:endParaRPr lang="en-US" sz="1100" dirty="0"/>
-          </a:p>
-        </p:txBody>
-      </p:sp>
-      <p:sp>
-        <p:nvSpPr>
-          <p:cNvPr id="31" name="Shape 29"/>
-          <p:cNvSpPr/>
-          <p:nvPr/>
-        </p:nvSpPr>
-        <p:spPr>
-          <a:xfrm>
-            <a:off x="1874520" y="3273552"/>
-            <a:ext cx="6903720" cy="658368"/>
+              <a:t>r</a:t>
+            </a:r>
+            <a:endParaRPr lang="en-US" sz="900" dirty="0"/>
+          </a:p>
+        </p:txBody>
+      </p:sp>
+      <p:sp>
+        <p:nvSpPr>
+          <p:cNvPr id="39" name="Shape 37"/>
+          <p:cNvSpPr/>
+          <p:nvPr/>
+        </p:nvSpPr>
+        <p:spPr>
+          <a:xfrm>
+            <a:off x="3033522" y="4169664"/>
+            <a:ext cx="685800" cy="475488"/>
           </a:xfrm>
           <a:prstGeom prst="rect">
             <a:avLst>
-              <a:gd name="adj" fmla="val 8333"/>
+              <a:gd name="adj" fmla="val 7692"/>
             </a:avLst>
           </a:prstGeom>
           <a:solidFill>
-            <a:srgbClr val="CCFBF1"/>
-          </a:solidFill>
-          <a:ln w="12700">
-            <a:solidFill>
-              <a:srgbClr val="0D9488"/>
-            </a:solidFill>
-            <a:prstDash val="solid"/>
-          </a:ln>
-        </p:spPr>
-      </p:sp>
-      <p:sp>
-        <p:nvSpPr>
-          <p:cNvPr id="32" name="Shape 30"/>
-          <p:cNvSpPr/>
-          <p:nvPr/>
-        </p:nvSpPr>
-        <p:spPr>
-          <a:xfrm>
-            <a:off x="1978152" y="3364992"/>
-            <a:ext cx="1225296" cy="475488"/>
-          </a:xfrm>
-          <a:prstGeom prst="rect">
-            <a:avLst>
-              <a:gd name="adj" fmla="val 9615"/>
-            </a:avLst>
-          </a:prstGeom>
-          <a:solidFill>
             <a:srgbClr val="FFFFFF"/>
           </a:solidFill>
           <a:ln w="12700">
             <a:solidFill>
-              <a:srgbClr val="0D9488"/>
-            </a:solidFill>
-            <a:prstDash val="solid"/>
-          </a:ln>
-        </p:spPr>
-      </p:sp>
-      <p:sp>
-        <p:nvSpPr>
-          <p:cNvPr id="33" name="Text 31"/>
-          <p:cNvSpPr/>
-          <p:nvPr/>
-        </p:nvSpPr>
-        <p:spPr>
-          <a:xfrm>
-            <a:off x="1978152" y="3364992"/>
-            <a:ext cx="1225296" cy="475488"/>
-          </a:xfrm>
-          <a:prstGeom prst="rect">
-            <a:avLst/>
-          </a:prstGeom>
-          <a:noFill/>
-          <a:ln/>
-        </p:spPr>
-        <p:txBody>
-          <a:bodyPr wrap="square" lIns="0" tIns="0" rIns="0" bIns="0" rtlCol="0" anchor="ctr"/>
-          <a:lstStyle/>
-          <a:p>
-            <a:pPr algn="ctr" indent="0" marL="0">
-              <a:buNone/>
-            </a:pPr>
-            <a:r>
-              <a:rPr lang="en-US" sz="1400" b="1" dirty="0">
-                <a:solidFill>
-                  <a:srgbClr val="0D9488"/>
+              <a:srgbClr val="DB2777"/>
+            </a:solidFill>
+            <a:prstDash val="solid"/>
+          </a:ln>
+        </p:spPr>
+      </p:sp>
+      <p:sp>
+        <p:nvSpPr>
+          <p:cNvPr id="40" name="Text 38"/>
+          <p:cNvSpPr/>
+          <p:nvPr/>
+        </p:nvSpPr>
+        <p:spPr>
+          <a:xfrm>
+            <a:off x="3033522" y="4169664"/>
+            <a:ext cx="685800" cy="475488"/>
+          </a:xfrm>
+          <a:prstGeom prst="rect">
+            <a:avLst/>
+          </a:prstGeom>
+          <a:noFill/>
+          <a:ln/>
+        </p:spPr>
+        <p:txBody>
+          <a:bodyPr wrap="square" lIns="0" tIns="0" rIns="0" bIns="0" rtlCol="0" anchor="ctr"/>
+          <a:lstStyle/>
+          <a:p>
+            <a:pPr algn="ctr" indent="0" marL="0">
+              <a:buNone/>
+            </a:pPr>
+            <a:r>
+              <a:rPr lang="en-US" sz="900" b="1" dirty="0">
+                <a:solidFill>
+                  <a:srgbClr val="9D174D"/>
                 </a:solidFill>
                 <a:latin typeface="Trebuchet MS" pitchFamily="34" charset="0"/>
                 <a:ea typeface="Trebuchet MS" pitchFamily="34" charset="-122"/>
                 <a:cs typeface="Trebuchet MS" pitchFamily="34" charset="-120"/>
               </a:rPr>
-              <a:t>un</a:t>
-            </a:r>
-            <a:endParaRPr lang="en-US" sz="1400" dirty="0"/>
-          </a:p>
-        </p:txBody>
-      </p:sp>
-      <p:sp>
-        <p:nvSpPr>
-          <p:cNvPr id="34" name="Text 32"/>
-          <p:cNvSpPr/>
-          <p:nvPr/>
-        </p:nvSpPr>
-        <p:spPr>
-          <a:xfrm>
-            <a:off x="3203448" y="3364992"/>
-            <a:ext cx="76200" cy="475488"/>
-          </a:xfrm>
-          <a:prstGeom prst="rect">
-            <a:avLst/>
-          </a:prstGeom>
-          <a:noFill/>
-          <a:ln/>
-        </p:spPr>
-        <p:txBody>
-          <a:bodyPr wrap="square" lIns="0" tIns="0" rIns="0" bIns="0" rtlCol="0" anchor="ctr"/>
-          <a:lstStyle/>
-          <a:p>
-            <a:pPr algn="ctr" indent="0" marL="0">
-              <a:buNone/>
-            </a:pPr>
-            <a:r>
-              <a:rPr lang="en-US" sz="1600" b="1" dirty="0">
-                <a:solidFill>
-                  <a:srgbClr val="0D9488"/>
+              <a:t>ea</a:t>
+            </a:r>
+            <a:endParaRPr lang="en-US" sz="900" dirty="0"/>
+          </a:p>
+        </p:txBody>
+      </p:sp>
+      <p:sp>
+        <p:nvSpPr>
+          <p:cNvPr id="41" name="Shape 39"/>
+          <p:cNvSpPr/>
+          <p:nvPr/>
+        </p:nvSpPr>
+        <p:spPr>
+          <a:xfrm>
+            <a:off x="3942207" y="4169664"/>
+            <a:ext cx="685800" cy="475488"/>
+          </a:xfrm>
+          <a:prstGeom prst="rect">
+            <a:avLst>
+              <a:gd name="adj" fmla="val 7692"/>
+            </a:avLst>
+          </a:prstGeom>
+          <a:solidFill>
+            <a:srgbClr val="FFFFFF"/>
+          </a:solidFill>
+          <a:ln w="12700">
+            <a:solidFill>
+              <a:srgbClr val="DB2777"/>
+            </a:solidFill>
+            <a:prstDash val="solid"/>
+          </a:ln>
+        </p:spPr>
+      </p:sp>
+      <p:sp>
+        <p:nvSpPr>
+          <p:cNvPr id="42" name="Text 40"/>
+          <p:cNvSpPr/>
+          <p:nvPr/>
+        </p:nvSpPr>
+        <p:spPr>
+          <a:xfrm>
+            <a:off x="3942207" y="4169664"/>
+            <a:ext cx="685800" cy="475488"/>
+          </a:xfrm>
+          <a:prstGeom prst="rect">
+            <a:avLst/>
+          </a:prstGeom>
+          <a:noFill/>
+          <a:ln/>
+        </p:spPr>
+        <p:txBody>
+          <a:bodyPr wrap="square" lIns="0" tIns="0" rIns="0" bIns="0" rtlCol="0" anchor="ctr"/>
+          <a:lstStyle/>
+          <a:p>
+            <a:pPr algn="ctr" indent="0" marL="0">
+              <a:buNone/>
+            </a:pPr>
+            <a:r>
+              <a:rPr lang="en-US" sz="900" b="1" dirty="0">
+                <a:solidFill>
+                  <a:srgbClr val="9D174D"/>
                 </a:solidFill>
                 <a:latin typeface="Trebuchet MS" pitchFamily="34" charset="0"/>
                 <a:ea typeface="Trebuchet MS" pitchFamily="34" charset="-122"/>
                 <a:cs typeface="Trebuchet MS" pitchFamily="34" charset="-120"/>
               </a:rPr>
-              <a:t>·</a:t>
-            </a:r>
-            <a:endParaRPr lang="en-US" sz="1600" dirty="0"/>
-          </a:p>
-        </p:txBody>
-      </p:sp>
-      <p:sp>
-        <p:nvSpPr>
-          <p:cNvPr id="35" name="Shape 33"/>
-          <p:cNvSpPr/>
-          <p:nvPr/>
-        </p:nvSpPr>
-        <p:spPr>
-          <a:xfrm>
-            <a:off x="3279648" y="3364992"/>
-            <a:ext cx="1225296" cy="475488"/>
+              <a:t>d</a:t>
+            </a:r>
+            <a:endParaRPr lang="en-US" sz="900" dirty="0"/>
+          </a:p>
+        </p:txBody>
+      </p:sp>
+      <p:sp>
+        <p:nvSpPr>
+          <p:cNvPr id="43" name="Shape 41"/>
+          <p:cNvSpPr/>
+          <p:nvPr/>
+        </p:nvSpPr>
+        <p:spPr>
+          <a:xfrm>
+            <a:off x="4850892" y="4169664"/>
+            <a:ext cx="685800" cy="475488"/>
           </a:xfrm>
           <a:prstGeom prst="rect">
             <a:avLst>
-              <a:gd name="adj" fmla="val 9615"/>
+              <a:gd name="adj" fmla="val 7692"/>
             </a:avLst>
           </a:prstGeom>
           <a:solidFill>
@@ -35240,104 +34808,131 @@
           </a:solidFill>
           <a:ln w="12700">
             <a:solidFill>
-              <a:srgbClr val="0D9488"/>
-            </a:solidFill>
-            <a:prstDash val="solid"/>
-          </a:ln>
-        </p:spPr>
-      </p:sp>
-      <p:sp>
-        <p:nvSpPr>
-          <p:cNvPr id="36" name="Text 34"/>
-          <p:cNvSpPr/>
-          <p:nvPr/>
-        </p:nvSpPr>
-        <p:spPr>
-          <a:xfrm>
-            <a:off x="3279648" y="3364992"/>
-            <a:ext cx="1225296" cy="475488"/>
-          </a:xfrm>
-          <a:prstGeom prst="rect">
-            <a:avLst/>
-          </a:prstGeom>
-          <a:noFill/>
-          <a:ln/>
-        </p:spPr>
-        <p:txBody>
-          <a:bodyPr wrap="square" lIns="0" tIns="0" rIns="0" bIns="0" rtlCol="0" anchor="ctr"/>
-          <a:lstStyle/>
-          <a:p>
-            <a:pPr algn="ctr" indent="0" marL="0">
-              <a:buNone/>
-            </a:pPr>
-            <a:r>
-              <a:rPr lang="en-US" sz="1400" b="1" dirty="0">
-                <a:solidFill>
-                  <a:srgbClr val="0D9488"/>
+              <a:srgbClr val="DB2777"/>
+            </a:solidFill>
+            <a:prstDash val="solid"/>
+          </a:ln>
+        </p:spPr>
+      </p:sp>
+      <p:sp>
+        <p:nvSpPr>
+          <p:cNvPr id="44" name="Text 42"/>
+          <p:cNvSpPr/>
+          <p:nvPr/>
+        </p:nvSpPr>
+        <p:spPr>
+          <a:xfrm>
+            <a:off x="4850892" y="4169664"/>
+            <a:ext cx="685800" cy="475488"/>
+          </a:xfrm>
+          <a:prstGeom prst="rect">
+            <a:avLst/>
+          </a:prstGeom>
+          <a:noFill/>
+          <a:ln/>
+        </p:spPr>
+        <p:txBody>
+          <a:bodyPr wrap="square" lIns="0" tIns="0" rIns="0" bIns="0" rtlCol="0" anchor="ctr"/>
+          <a:lstStyle/>
+          <a:p>
+            <a:pPr algn="ctr" indent="0" marL="0">
+              <a:buNone/>
+            </a:pPr>
+            <a:r>
+              <a:rPr lang="en-US" sz="900" b="1" dirty="0">
+                <a:solidFill>
+                  <a:srgbClr val="9D174D"/>
                 </a:solidFill>
                 <a:latin typeface="Trebuchet MS" pitchFamily="34" charset="0"/>
                 <a:ea typeface="Trebuchet MS" pitchFamily="34" charset="-122"/>
                 <a:cs typeface="Trebuchet MS" pitchFamily="34" charset="-120"/>
               </a:rPr>
-              <a:t>for</a:t>
-            </a:r>
-            <a:endParaRPr lang="en-US" sz="1400" dirty="0"/>
-          </a:p>
-        </p:txBody>
-      </p:sp>
-      <p:sp>
-        <p:nvSpPr>
-          <p:cNvPr id="37" name="Text 35"/>
-          <p:cNvSpPr/>
-          <p:nvPr/>
-        </p:nvSpPr>
-        <p:spPr>
-          <a:xfrm>
-            <a:off x="4504944" y="3364992"/>
-            <a:ext cx="76200" cy="475488"/>
-          </a:xfrm>
-          <a:prstGeom prst="rect">
-            <a:avLst/>
-          </a:prstGeom>
-          <a:noFill/>
-          <a:ln/>
-        </p:spPr>
-        <p:txBody>
-          <a:bodyPr wrap="square" lIns="0" tIns="0" rIns="0" bIns="0" rtlCol="0" anchor="ctr"/>
-          <a:lstStyle/>
-          <a:p>
-            <a:pPr algn="ctr" indent="0" marL="0">
-              <a:buNone/>
-            </a:pPr>
-            <a:r>
-              <a:rPr lang="en-US" sz="1600" b="1" dirty="0">
-                <a:solidFill>
-                  <a:srgbClr val="0D9488"/>
+              <a:t>a</a:t>
+            </a:r>
+            <a:endParaRPr lang="en-US" sz="900" dirty="0"/>
+          </a:p>
+        </p:txBody>
+      </p:sp>
+      <p:sp>
+        <p:nvSpPr>
+          <p:cNvPr id="45" name="Shape 43"/>
+          <p:cNvSpPr/>
+          <p:nvPr/>
+        </p:nvSpPr>
+        <p:spPr>
+          <a:xfrm>
+            <a:off x="5759577" y="4169664"/>
+            <a:ext cx="685800" cy="475488"/>
+          </a:xfrm>
+          <a:prstGeom prst="rect">
+            <a:avLst>
+              <a:gd name="adj" fmla="val 7692"/>
+            </a:avLst>
+          </a:prstGeom>
+          <a:solidFill>
+            <a:srgbClr val="FFFFFF"/>
+          </a:solidFill>
+          <a:ln w="12700">
+            <a:solidFill>
+              <a:srgbClr val="DB2777"/>
+            </a:solidFill>
+            <a:prstDash val="solid"/>
+          </a:ln>
+        </p:spPr>
+      </p:sp>
+      <p:sp>
+        <p:nvSpPr>
+          <p:cNvPr id="46" name="Text 44"/>
+          <p:cNvSpPr/>
+          <p:nvPr/>
+        </p:nvSpPr>
+        <p:spPr>
+          <a:xfrm>
+            <a:off x="5759577" y="4169664"/>
+            <a:ext cx="685800" cy="475488"/>
+          </a:xfrm>
+          <a:prstGeom prst="rect">
+            <a:avLst/>
+          </a:prstGeom>
+          <a:noFill/>
+          <a:ln/>
+        </p:spPr>
+        <p:txBody>
+          <a:bodyPr wrap="square" lIns="0" tIns="0" rIns="0" bIns="0" rtlCol="0" anchor="ctr"/>
+          <a:lstStyle/>
+          <a:p>
+            <a:pPr algn="ctr" indent="0" marL="0">
+              <a:buNone/>
+            </a:pPr>
+            <a:r>
+              <a:rPr lang="en-US" sz="900" b="1" dirty="0">
+                <a:solidFill>
+                  <a:srgbClr val="9D174D"/>
                 </a:solidFill>
                 <a:latin typeface="Trebuchet MS" pitchFamily="34" charset="0"/>
                 <a:ea typeface="Trebuchet MS" pitchFamily="34" charset="-122"/>
                 <a:cs typeface="Trebuchet MS" pitchFamily="34" charset="-120"/>
               </a:rPr>
-              <a:t>·</a:t>
-            </a:r>
-            <a:endParaRPr lang="en-US" sz="1600" dirty="0"/>
-          </a:p>
-        </p:txBody>
-      </p:sp>
-      <p:sp>
-        <p:nvSpPr>
-          <p:cNvPr id="38" name="Shape 36"/>
-          <p:cNvSpPr/>
-          <p:nvPr/>
-        </p:nvSpPr>
-        <p:spPr>
-          <a:xfrm>
-            <a:off x="4581144" y="3364992"/>
-            <a:ext cx="1225296" cy="475488"/>
+              <a:t>b</a:t>
+            </a:r>
+            <a:endParaRPr lang="en-US" sz="900" dirty="0"/>
+          </a:p>
+        </p:txBody>
+      </p:sp>
+      <p:sp>
+        <p:nvSpPr>
+          <p:cNvPr id="47" name="Shape 45"/>
+          <p:cNvSpPr/>
+          <p:nvPr/>
+        </p:nvSpPr>
+        <p:spPr>
+          <a:xfrm>
+            <a:off x="6668262" y="4169664"/>
+            <a:ext cx="685800" cy="475488"/>
           </a:xfrm>
           <a:prstGeom prst="rect">
             <a:avLst>
-              <a:gd name="adj" fmla="val 9615"/>
+              <a:gd name="adj" fmla="val 7692"/>
             </a:avLst>
           </a:prstGeom>
           <a:solidFill>
@@ -35345,1009 +34940,112 @@
           </a:solidFill>
           <a:ln w="12700">
             <a:solidFill>
-              <a:srgbClr val="0D9488"/>
-            </a:solidFill>
-            <a:prstDash val="solid"/>
-          </a:ln>
-        </p:spPr>
-      </p:sp>
-      <p:sp>
-        <p:nvSpPr>
-          <p:cNvPr id="39" name="Text 37"/>
-          <p:cNvSpPr/>
-          <p:nvPr/>
-        </p:nvSpPr>
-        <p:spPr>
-          <a:xfrm>
-            <a:off x="4581144" y="3364992"/>
-            <a:ext cx="1225296" cy="475488"/>
-          </a:xfrm>
-          <a:prstGeom prst="rect">
-            <a:avLst/>
-          </a:prstGeom>
-          <a:noFill/>
-          <a:ln/>
-        </p:spPr>
-        <p:txBody>
-          <a:bodyPr wrap="square" lIns="0" tIns="0" rIns="0" bIns="0" rtlCol="0" anchor="ctr"/>
-          <a:lstStyle/>
-          <a:p>
-            <a:pPr algn="ctr" indent="0" marL="0">
-              <a:buNone/>
-            </a:pPr>
-            <a:r>
-              <a:rPr lang="en-US" sz="1400" b="1" dirty="0">
-                <a:solidFill>
-                  <a:srgbClr val="0D9488"/>
+              <a:srgbClr val="DB2777"/>
+            </a:solidFill>
+            <a:prstDash val="solid"/>
+          </a:ln>
+        </p:spPr>
+      </p:sp>
+      <p:sp>
+        <p:nvSpPr>
+          <p:cNvPr id="48" name="Text 46"/>
+          <p:cNvSpPr/>
+          <p:nvPr/>
+        </p:nvSpPr>
+        <p:spPr>
+          <a:xfrm>
+            <a:off x="6668262" y="4169664"/>
+            <a:ext cx="685800" cy="475488"/>
+          </a:xfrm>
+          <a:prstGeom prst="rect">
+            <a:avLst/>
+          </a:prstGeom>
+          <a:noFill/>
+          <a:ln/>
+        </p:spPr>
+        <p:txBody>
+          <a:bodyPr wrap="square" lIns="0" tIns="0" rIns="0" bIns="0" rtlCol="0" anchor="ctr"/>
+          <a:lstStyle/>
+          <a:p>
+            <a:pPr algn="ctr" indent="0" marL="0">
+              <a:buNone/>
+            </a:pPr>
+            <a:r>
+              <a:rPr lang="en-US" sz="900" b="1" dirty="0">
+                <a:solidFill>
+                  <a:srgbClr val="9D174D"/>
                 </a:solidFill>
                 <a:latin typeface="Trebuchet MS" pitchFamily="34" charset="0"/>
                 <a:ea typeface="Trebuchet MS" pitchFamily="34" charset="-122"/>
                 <a:cs typeface="Trebuchet MS" pitchFamily="34" charset="-120"/>
               </a:rPr>
-              <a:t>get</a:t>
-            </a:r>
-            <a:endParaRPr lang="en-US" sz="1400" dirty="0"/>
-          </a:p>
-        </p:txBody>
-      </p:sp>
-      <p:sp>
-        <p:nvSpPr>
-          <p:cNvPr id="40" name="Text 38"/>
-          <p:cNvSpPr/>
-          <p:nvPr/>
-        </p:nvSpPr>
-        <p:spPr>
-          <a:xfrm>
-            <a:off x="5806440" y="3364992"/>
-            <a:ext cx="76200" cy="475488"/>
-          </a:xfrm>
-          <a:prstGeom prst="rect">
-            <a:avLst/>
-          </a:prstGeom>
-          <a:noFill/>
-          <a:ln/>
-        </p:spPr>
-        <p:txBody>
-          <a:bodyPr wrap="square" lIns="0" tIns="0" rIns="0" bIns="0" rtlCol="0" anchor="ctr"/>
-          <a:lstStyle/>
-          <a:p>
-            <a:pPr algn="ctr" indent="0" marL="0">
-              <a:buNone/>
-            </a:pPr>
-            <a:r>
-              <a:rPr lang="en-US" sz="1600" b="1" dirty="0">
-                <a:solidFill>
-                  <a:srgbClr val="0D9488"/>
+              <a:t>l</a:t>
+            </a:r>
+            <a:endParaRPr lang="en-US" sz="900" dirty="0"/>
+          </a:p>
+        </p:txBody>
+      </p:sp>
+      <p:sp>
+        <p:nvSpPr>
+          <p:cNvPr id="49" name="Shape 47"/>
+          <p:cNvSpPr/>
+          <p:nvPr/>
+        </p:nvSpPr>
+        <p:spPr>
+          <a:xfrm>
+            <a:off x="7576947" y="4169664"/>
+            <a:ext cx="685800" cy="475488"/>
+          </a:xfrm>
+          <a:prstGeom prst="rect">
+            <a:avLst>
+              <a:gd name="adj" fmla="val 7692"/>
+            </a:avLst>
+          </a:prstGeom>
+          <a:solidFill>
+            <a:srgbClr val="FFFFFF"/>
+          </a:solidFill>
+          <a:ln w="12700">
+            <a:solidFill>
+              <a:srgbClr val="DB2777"/>
+            </a:solidFill>
+            <a:prstDash val="solid"/>
+          </a:ln>
+        </p:spPr>
+      </p:sp>
+      <p:sp>
+        <p:nvSpPr>
+          <p:cNvPr id="50" name="Text 48"/>
+          <p:cNvSpPr/>
+          <p:nvPr/>
+        </p:nvSpPr>
+        <p:spPr>
+          <a:xfrm>
+            <a:off x="7576947" y="4169664"/>
+            <a:ext cx="685800" cy="475488"/>
+          </a:xfrm>
+          <a:prstGeom prst="rect">
+            <a:avLst/>
+          </a:prstGeom>
+          <a:noFill/>
+          <a:ln/>
+        </p:spPr>
+        <p:txBody>
+          <a:bodyPr wrap="square" lIns="0" tIns="0" rIns="0" bIns="0" rtlCol="0" anchor="ctr"/>
+          <a:lstStyle/>
+          <a:p>
+            <a:pPr algn="ctr" indent="0" marL="0">
+              <a:buNone/>
+            </a:pPr>
+            <a:r>
+              <a:rPr lang="en-US" sz="900" b="1" dirty="0">
+                <a:solidFill>
+                  <a:srgbClr val="9D174D"/>
                 </a:solidFill>
                 <a:latin typeface="Trebuchet MS" pitchFamily="34" charset="0"/>
                 <a:ea typeface="Trebuchet MS" pitchFamily="34" charset="-122"/>
                 <a:cs typeface="Trebuchet MS" pitchFamily="34" charset="-120"/>
               </a:rPr>
-              <a:t>·</a:t>
-            </a:r>
-            <a:endParaRPr lang="en-US" sz="1600" dirty="0"/>
-          </a:p>
-        </p:txBody>
-      </p:sp>
-      <p:sp>
-        <p:nvSpPr>
-          <p:cNvPr id="41" name="Shape 39"/>
-          <p:cNvSpPr/>
-          <p:nvPr/>
-        </p:nvSpPr>
-        <p:spPr>
-          <a:xfrm>
-            <a:off x="5882640" y="3364992"/>
-            <a:ext cx="1225296" cy="475488"/>
-          </a:xfrm>
-          <a:prstGeom prst="rect">
-            <a:avLst>
-              <a:gd name="adj" fmla="val 9615"/>
-            </a:avLst>
-          </a:prstGeom>
-          <a:solidFill>
-            <a:srgbClr val="FFFFFF"/>
-          </a:solidFill>
-          <a:ln w="12700">
-            <a:solidFill>
-              <a:srgbClr val="0D9488"/>
-            </a:solidFill>
-            <a:prstDash val="solid"/>
-          </a:ln>
-        </p:spPr>
-      </p:sp>
-      <p:sp>
-        <p:nvSpPr>
-          <p:cNvPr id="42" name="Text 40"/>
-          <p:cNvSpPr/>
-          <p:nvPr/>
-        </p:nvSpPr>
-        <p:spPr>
-          <a:xfrm>
-            <a:off x="5882640" y="3364992"/>
-            <a:ext cx="1225296" cy="475488"/>
-          </a:xfrm>
-          <a:prstGeom prst="rect">
-            <a:avLst/>
-          </a:prstGeom>
-          <a:noFill/>
-          <a:ln/>
-        </p:spPr>
-        <p:txBody>
-          <a:bodyPr wrap="square" lIns="0" tIns="0" rIns="0" bIns="0" rtlCol="0" anchor="ctr"/>
-          <a:lstStyle/>
-          <a:p>
-            <a:pPr algn="ctr" indent="0" marL="0">
-              <a:buNone/>
-            </a:pPr>
-            <a:r>
-              <a:rPr lang="en-US" sz="1400" b="1" dirty="0">
-                <a:solidFill>
-                  <a:srgbClr val="0D9488"/>
-                </a:solidFill>
-                <a:latin typeface="Trebuchet MS" pitchFamily="34" charset="0"/>
-                <a:ea typeface="Trebuchet MS" pitchFamily="34" charset="-122"/>
-                <a:cs typeface="Trebuchet MS" pitchFamily="34" charset="-120"/>
-              </a:rPr>
-              <a:t>ta</a:t>
-            </a:r>
-            <a:endParaRPr lang="en-US" sz="1400" dirty="0"/>
-          </a:p>
-        </p:txBody>
-      </p:sp>
-      <p:sp>
-        <p:nvSpPr>
-          <p:cNvPr id="43" name="Text 41"/>
-          <p:cNvSpPr/>
-          <p:nvPr/>
-        </p:nvSpPr>
-        <p:spPr>
-          <a:xfrm>
-            <a:off x="7107936" y="3364992"/>
-            <a:ext cx="76200" cy="475488"/>
-          </a:xfrm>
-          <a:prstGeom prst="rect">
-            <a:avLst/>
-          </a:prstGeom>
-          <a:noFill/>
-          <a:ln/>
-        </p:spPr>
-        <p:txBody>
-          <a:bodyPr wrap="square" lIns="0" tIns="0" rIns="0" bIns="0" rtlCol="0" anchor="ctr"/>
-          <a:lstStyle/>
-          <a:p>
-            <a:pPr algn="ctr" indent="0" marL="0">
-              <a:buNone/>
-            </a:pPr>
-            <a:r>
-              <a:rPr lang="en-US" sz="1600" b="1" dirty="0">
-                <a:solidFill>
-                  <a:srgbClr val="0D9488"/>
-                </a:solidFill>
-                <a:latin typeface="Trebuchet MS" pitchFamily="34" charset="0"/>
-                <a:ea typeface="Trebuchet MS" pitchFamily="34" charset="-122"/>
-                <a:cs typeface="Trebuchet MS" pitchFamily="34" charset="-120"/>
-              </a:rPr>
-              <a:t>·</a:t>
-            </a:r>
-            <a:endParaRPr lang="en-US" sz="1600" dirty="0"/>
-          </a:p>
-        </p:txBody>
-      </p:sp>
-      <p:sp>
-        <p:nvSpPr>
-          <p:cNvPr id="44" name="Shape 42"/>
-          <p:cNvSpPr/>
-          <p:nvPr/>
-        </p:nvSpPr>
-        <p:spPr>
-          <a:xfrm>
-            <a:off x="7184136" y="3364992"/>
-            <a:ext cx="1225296" cy="475488"/>
-          </a:xfrm>
-          <a:prstGeom prst="rect">
-            <a:avLst>
-              <a:gd name="adj" fmla="val 9615"/>
-            </a:avLst>
-          </a:prstGeom>
-          <a:solidFill>
-            <a:srgbClr val="FFFFFF"/>
-          </a:solidFill>
-          <a:ln w="12700">
-            <a:solidFill>
-              <a:srgbClr val="0D9488"/>
-            </a:solidFill>
-            <a:prstDash val="solid"/>
-          </a:ln>
-        </p:spPr>
-      </p:sp>
-      <p:sp>
-        <p:nvSpPr>
-          <p:cNvPr id="45" name="Text 43"/>
-          <p:cNvSpPr/>
-          <p:nvPr/>
-        </p:nvSpPr>
-        <p:spPr>
-          <a:xfrm>
-            <a:off x="7184136" y="3364992"/>
-            <a:ext cx="1225296" cy="475488"/>
-          </a:xfrm>
-          <a:prstGeom prst="rect">
-            <a:avLst/>
-          </a:prstGeom>
-          <a:noFill/>
-          <a:ln/>
-        </p:spPr>
-        <p:txBody>
-          <a:bodyPr wrap="square" lIns="0" tIns="0" rIns="0" bIns="0" rtlCol="0" anchor="ctr"/>
-          <a:lstStyle/>
-          <a:p>
-            <a:pPr algn="ctr" indent="0" marL="0">
-              <a:buNone/>
-            </a:pPr>
-            <a:r>
-              <a:rPr lang="en-US" sz="1400" b="1" dirty="0">
-                <a:solidFill>
-                  <a:srgbClr val="0D9488"/>
-                </a:solidFill>
-                <a:latin typeface="Trebuchet MS" pitchFamily="34" charset="0"/>
-                <a:ea typeface="Trebuchet MS" pitchFamily="34" charset="-122"/>
-                <a:cs typeface="Trebuchet MS" pitchFamily="34" charset="-120"/>
-              </a:rPr>
-              <a:t>ble</a:t>
-            </a:r>
-            <a:endParaRPr lang="en-US" sz="1400" dirty="0"/>
-          </a:p>
-        </p:txBody>
-      </p:sp>
-      <p:sp>
-        <p:nvSpPr>
-          <p:cNvPr id="46" name="Shape 44"/>
-          <p:cNvSpPr/>
-          <p:nvPr/>
-        </p:nvSpPr>
-        <p:spPr>
-          <a:xfrm>
-            <a:off x="365760" y="4096512"/>
-            <a:ext cx="1371600" cy="804672"/>
-          </a:xfrm>
-          <a:prstGeom prst="rect">
-            <a:avLst>
-              <a:gd name="adj" fmla="val 6818"/>
-            </a:avLst>
-          </a:prstGeom>
-          <a:solidFill>
-            <a:srgbClr val="E2E8F0"/>
-          </a:solidFill>
-          <a:ln w="12700">
-            <a:solidFill>
-              <a:srgbClr val="E2E8F0"/>
-            </a:solidFill>
-            <a:prstDash val="solid"/>
-          </a:ln>
-        </p:spPr>
-      </p:sp>
-      <p:sp>
-        <p:nvSpPr>
-          <p:cNvPr id="47" name="Text 45"/>
-          <p:cNvSpPr/>
-          <p:nvPr/>
-        </p:nvSpPr>
-        <p:spPr>
-          <a:xfrm>
-            <a:off x="365760" y="4096512"/>
-            <a:ext cx="1371600" cy="804672"/>
-          </a:xfrm>
-          <a:prstGeom prst="rect">
-            <a:avLst/>
-          </a:prstGeom>
-          <a:noFill/>
-          <a:ln/>
-        </p:spPr>
-        <p:txBody>
-          <a:bodyPr wrap="square" lIns="0" tIns="0" rIns="0" bIns="0" rtlCol="0" anchor="ctr"/>
-          <a:lstStyle/>
-          <a:p>
-            <a:pPr algn="ctr" indent="0" marL="0">
-              <a:buNone/>
-            </a:pPr>
-            <a:r>
-              <a:rPr lang="en-US" sz="1100" b="1" dirty="0">
-                <a:solidFill>
-                  <a:srgbClr val="475569"/>
-                </a:solidFill>
-                <a:latin typeface="Trebuchet MS" pitchFamily="34" charset="0"/>
-                <a:ea typeface="Trebuchet MS" pitchFamily="34" charset="-122"/>
-                <a:cs typeface="Trebuchet MS" pitchFamily="34" charset="-120"/>
-              </a:rPr>
-              <a:t>Phonemes</a:t>
-            </a:r>
-            <a:endParaRPr lang="en-US" sz="1100" dirty="0"/>
-          </a:p>
-        </p:txBody>
-      </p:sp>
-      <p:sp>
-        <p:nvSpPr>
-          <p:cNvPr id="48" name="Shape 46"/>
-          <p:cNvSpPr/>
-          <p:nvPr/>
-        </p:nvSpPr>
-        <p:spPr>
-          <a:xfrm>
-            <a:off x="1874520" y="4096512"/>
-            <a:ext cx="6903720" cy="658368"/>
-          </a:xfrm>
-          <a:prstGeom prst="rect">
-            <a:avLst>
-              <a:gd name="adj" fmla="val 8333"/>
-            </a:avLst>
-          </a:prstGeom>
-          <a:solidFill>
-            <a:srgbClr val="FCE7F3"/>
-          </a:solidFill>
-          <a:ln w="12700">
-            <a:solidFill>
-              <a:srgbClr val="DB2777"/>
-            </a:solidFill>
-            <a:prstDash val="solid"/>
-          </a:ln>
-        </p:spPr>
-      </p:sp>
-      <p:sp>
-        <p:nvSpPr>
-          <p:cNvPr id="49" name="Shape 47"/>
-          <p:cNvSpPr/>
-          <p:nvPr/>
-        </p:nvSpPr>
-        <p:spPr>
-          <a:xfrm>
-            <a:off x="1951828" y="4169664"/>
-            <a:ext cx="603504" cy="475488"/>
-          </a:xfrm>
-          <a:prstGeom prst="rect">
-            <a:avLst>
-              <a:gd name="adj" fmla="val 7692"/>
-            </a:avLst>
-          </a:prstGeom>
-          <a:solidFill>
-            <a:srgbClr val="FFFFFF"/>
-          </a:solidFill>
-          <a:ln w="12700">
-            <a:solidFill>
-              <a:srgbClr val="DB2777"/>
-            </a:solidFill>
-            <a:prstDash val="solid"/>
-          </a:ln>
-        </p:spPr>
-      </p:sp>
-      <p:sp>
-        <p:nvSpPr>
-          <p:cNvPr id="50" name="Text 48"/>
-          <p:cNvSpPr/>
-          <p:nvPr/>
-        </p:nvSpPr>
-        <p:spPr>
-          <a:xfrm>
-            <a:off x="1951828" y="4169664"/>
-            <a:ext cx="603504" cy="475488"/>
-          </a:xfrm>
-          <a:prstGeom prst="rect">
-            <a:avLst/>
-          </a:prstGeom>
-          <a:noFill/>
-          <a:ln/>
-        </p:spPr>
-        <p:txBody>
-          <a:bodyPr wrap="square" lIns="0" tIns="0" rIns="0" bIns="0" rtlCol="0" anchor="ctr"/>
-          <a:lstStyle/>
-          <a:p>
-            <a:pPr algn="ctr" indent="0" marL="0">
-              <a:buNone/>
-            </a:pPr>
-            <a:r>
-              <a:rPr lang="en-US" sz="900" b="1" dirty="0">
-                <a:solidFill>
-                  <a:srgbClr val="9D174D"/>
-                </a:solidFill>
-                <a:latin typeface="Trebuchet MS" pitchFamily="34" charset="0"/>
-                <a:ea typeface="Trebuchet MS" pitchFamily="34" charset="-122"/>
-                <a:cs typeface="Trebuchet MS" pitchFamily="34" charset="-120"/>
-              </a:rPr>
-              <a:t>u</a:t>
-            </a:r>
-            <a:endParaRPr lang="en-US" sz="900" dirty="0"/>
-          </a:p>
-        </p:txBody>
-      </p:sp>
-      <p:sp>
-        <p:nvSpPr>
-          <p:cNvPr id="51" name="Shape 49"/>
-          <p:cNvSpPr/>
-          <p:nvPr/>
-        </p:nvSpPr>
-        <p:spPr>
-          <a:xfrm>
-            <a:off x="2605209" y="4169664"/>
-            <a:ext cx="603504" cy="475488"/>
-          </a:xfrm>
-          <a:prstGeom prst="rect">
-            <a:avLst>
-              <a:gd name="adj" fmla="val 7692"/>
-            </a:avLst>
-          </a:prstGeom>
-          <a:solidFill>
-            <a:srgbClr val="FFFFFF"/>
-          </a:solidFill>
-          <a:ln w="12700">
-            <a:solidFill>
-              <a:srgbClr val="DB2777"/>
-            </a:solidFill>
-            <a:prstDash val="solid"/>
-          </a:ln>
-        </p:spPr>
-      </p:sp>
-      <p:sp>
-        <p:nvSpPr>
-          <p:cNvPr id="52" name="Text 50"/>
-          <p:cNvSpPr/>
-          <p:nvPr/>
-        </p:nvSpPr>
-        <p:spPr>
-          <a:xfrm>
-            <a:off x="2605209" y="4169664"/>
-            <a:ext cx="603504" cy="475488"/>
-          </a:xfrm>
-          <a:prstGeom prst="rect">
-            <a:avLst/>
-          </a:prstGeom>
-          <a:noFill/>
-          <a:ln/>
-        </p:spPr>
-        <p:txBody>
-          <a:bodyPr wrap="square" lIns="0" tIns="0" rIns="0" bIns="0" rtlCol="0" anchor="ctr"/>
-          <a:lstStyle/>
-          <a:p>
-            <a:pPr algn="ctr" indent="0" marL="0">
-              <a:buNone/>
-            </a:pPr>
-            <a:r>
-              <a:rPr lang="en-US" sz="900" b="1" dirty="0">
-                <a:solidFill>
-                  <a:srgbClr val="9D174D"/>
-                </a:solidFill>
-                <a:latin typeface="Trebuchet MS" pitchFamily="34" charset="0"/>
-                <a:ea typeface="Trebuchet MS" pitchFamily="34" charset="-122"/>
-                <a:cs typeface="Trebuchet MS" pitchFamily="34" charset="-120"/>
-              </a:rPr>
-              <a:t>n</a:t>
-            </a:r>
-            <a:endParaRPr lang="en-US" sz="900" dirty="0"/>
-          </a:p>
-        </p:txBody>
-      </p:sp>
-      <p:sp>
-        <p:nvSpPr>
-          <p:cNvPr id="53" name="Shape 51"/>
-          <p:cNvSpPr/>
-          <p:nvPr/>
-        </p:nvSpPr>
-        <p:spPr>
-          <a:xfrm>
-            <a:off x="3258589" y="4169664"/>
-            <a:ext cx="603504" cy="475488"/>
-          </a:xfrm>
-          <a:prstGeom prst="rect">
-            <a:avLst>
-              <a:gd name="adj" fmla="val 7692"/>
-            </a:avLst>
-          </a:prstGeom>
-          <a:solidFill>
-            <a:srgbClr val="FFFFFF"/>
-          </a:solidFill>
-          <a:ln w="12700">
-            <a:solidFill>
-              <a:srgbClr val="DB2777"/>
-            </a:solidFill>
-            <a:prstDash val="solid"/>
-          </a:ln>
-        </p:spPr>
-      </p:sp>
-      <p:sp>
-        <p:nvSpPr>
-          <p:cNvPr id="54" name="Text 52"/>
-          <p:cNvSpPr/>
-          <p:nvPr/>
-        </p:nvSpPr>
-        <p:spPr>
-          <a:xfrm>
-            <a:off x="3258589" y="4169664"/>
-            <a:ext cx="603504" cy="475488"/>
-          </a:xfrm>
-          <a:prstGeom prst="rect">
-            <a:avLst/>
-          </a:prstGeom>
-          <a:noFill/>
-          <a:ln/>
-        </p:spPr>
-        <p:txBody>
-          <a:bodyPr wrap="square" lIns="0" tIns="0" rIns="0" bIns="0" rtlCol="0" anchor="ctr"/>
-          <a:lstStyle/>
-          <a:p>
-            <a:pPr algn="ctr" indent="0" marL="0">
-              <a:buNone/>
-            </a:pPr>
-            <a:r>
-              <a:rPr lang="en-US" sz="900" b="1" dirty="0">
-                <a:solidFill>
-                  <a:srgbClr val="9D174D"/>
-                </a:solidFill>
-                <a:latin typeface="Trebuchet MS" pitchFamily="34" charset="0"/>
-                <a:ea typeface="Trebuchet MS" pitchFamily="34" charset="-122"/>
-                <a:cs typeface="Trebuchet MS" pitchFamily="34" charset="-120"/>
-              </a:rPr>
-              <a:t>f</a:t>
-            </a:r>
-            <a:endParaRPr lang="en-US" sz="900" dirty="0"/>
-          </a:p>
-        </p:txBody>
-      </p:sp>
-      <p:sp>
-        <p:nvSpPr>
-          <p:cNvPr id="55" name="Shape 53"/>
-          <p:cNvSpPr/>
-          <p:nvPr/>
-        </p:nvSpPr>
-        <p:spPr>
-          <a:xfrm>
-            <a:off x="3911969" y="4169664"/>
-            <a:ext cx="603504" cy="475488"/>
-          </a:xfrm>
-          <a:prstGeom prst="rect">
-            <a:avLst>
-              <a:gd name="adj" fmla="val 7692"/>
-            </a:avLst>
-          </a:prstGeom>
-          <a:solidFill>
-            <a:srgbClr val="FFFFFF"/>
-          </a:solidFill>
-          <a:ln w="12700">
-            <a:solidFill>
-              <a:srgbClr val="DB2777"/>
-            </a:solidFill>
-            <a:prstDash val="solid"/>
-          </a:ln>
-        </p:spPr>
-      </p:sp>
-      <p:sp>
-        <p:nvSpPr>
-          <p:cNvPr id="56" name="Text 54"/>
-          <p:cNvSpPr/>
-          <p:nvPr/>
-        </p:nvSpPr>
-        <p:spPr>
-          <a:xfrm>
-            <a:off x="3911969" y="4169664"/>
-            <a:ext cx="603504" cy="475488"/>
-          </a:xfrm>
-          <a:prstGeom prst="rect">
-            <a:avLst/>
-          </a:prstGeom>
-          <a:noFill/>
-          <a:ln/>
-        </p:spPr>
-        <p:txBody>
-          <a:bodyPr wrap="square" lIns="0" tIns="0" rIns="0" bIns="0" rtlCol="0" anchor="ctr"/>
-          <a:lstStyle/>
-          <a:p>
-            <a:pPr algn="ctr" indent="0" marL="0">
-              <a:buNone/>
-            </a:pPr>
-            <a:r>
-              <a:rPr lang="en-US" sz="900" b="1" dirty="0">
-                <a:solidFill>
-                  <a:srgbClr val="9D174D"/>
-                </a:solidFill>
-                <a:latin typeface="Trebuchet MS" pitchFamily="34" charset="0"/>
-                <a:ea typeface="Trebuchet MS" pitchFamily="34" charset="-122"/>
-                <a:cs typeface="Trebuchet MS" pitchFamily="34" charset="-120"/>
-              </a:rPr>
-              <a:t>or</a:t>
-            </a:r>
-            <a:endParaRPr lang="en-US" sz="900" dirty="0"/>
-          </a:p>
-        </p:txBody>
-      </p:sp>
-      <p:sp>
-        <p:nvSpPr>
-          <p:cNvPr id="57" name="Shape 55"/>
-          <p:cNvSpPr/>
-          <p:nvPr/>
-        </p:nvSpPr>
-        <p:spPr>
-          <a:xfrm>
-            <a:off x="4565350" y="4169664"/>
-            <a:ext cx="603504" cy="475488"/>
-          </a:xfrm>
-          <a:prstGeom prst="rect">
-            <a:avLst>
-              <a:gd name="adj" fmla="val 7692"/>
-            </a:avLst>
-          </a:prstGeom>
-          <a:solidFill>
-            <a:srgbClr val="FFFFFF"/>
-          </a:solidFill>
-          <a:ln w="12700">
-            <a:solidFill>
-              <a:srgbClr val="DB2777"/>
-            </a:solidFill>
-            <a:prstDash val="solid"/>
-          </a:ln>
-        </p:spPr>
-      </p:sp>
-      <p:sp>
-        <p:nvSpPr>
-          <p:cNvPr id="58" name="Text 56"/>
-          <p:cNvSpPr/>
-          <p:nvPr/>
-        </p:nvSpPr>
-        <p:spPr>
-          <a:xfrm>
-            <a:off x="4565350" y="4169664"/>
-            <a:ext cx="603504" cy="475488"/>
-          </a:xfrm>
-          <a:prstGeom prst="rect">
-            <a:avLst/>
-          </a:prstGeom>
-          <a:noFill/>
-          <a:ln/>
-        </p:spPr>
-        <p:txBody>
-          <a:bodyPr wrap="square" lIns="0" tIns="0" rIns="0" bIns="0" rtlCol="0" anchor="ctr"/>
-          <a:lstStyle/>
-          <a:p>
-            <a:pPr algn="ctr" indent="0" marL="0">
-              <a:buNone/>
-            </a:pPr>
-            <a:r>
-              <a:rPr lang="en-US" sz="900" b="1" dirty="0">
-                <a:solidFill>
-                  <a:srgbClr val="9D174D"/>
-                </a:solidFill>
-                <a:latin typeface="Trebuchet MS" pitchFamily="34" charset="0"/>
-                <a:ea typeface="Trebuchet MS" pitchFamily="34" charset="-122"/>
-                <a:cs typeface="Trebuchet MS" pitchFamily="34" charset="-120"/>
-              </a:rPr>
-              <a:t>g</a:t>
-            </a:r>
-            <a:endParaRPr lang="en-US" sz="900" dirty="0"/>
-          </a:p>
-        </p:txBody>
-      </p:sp>
-      <p:sp>
-        <p:nvSpPr>
-          <p:cNvPr id="59" name="Shape 57"/>
-          <p:cNvSpPr/>
-          <p:nvPr/>
-        </p:nvSpPr>
-        <p:spPr>
-          <a:xfrm>
-            <a:off x="5218730" y="4169664"/>
-            <a:ext cx="603504" cy="475488"/>
-          </a:xfrm>
-          <a:prstGeom prst="rect">
-            <a:avLst>
-              <a:gd name="adj" fmla="val 7692"/>
-            </a:avLst>
-          </a:prstGeom>
-          <a:solidFill>
-            <a:srgbClr val="FFFFFF"/>
-          </a:solidFill>
-          <a:ln w="12700">
-            <a:solidFill>
-              <a:srgbClr val="DB2777"/>
-            </a:solidFill>
-            <a:prstDash val="solid"/>
-          </a:ln>
-        </p:spPr>
-      </p:sp>
-      <p:sp>
-        <p:nvSpPr>
-          <p:cNvPr id="60" name="Text 58"/>
-          <p:cNvSpPr/>
-          <p:nvPr/>
-        </p:nvSpPr>
-        <p:spPr>
-          <a:xfrm>
-            <a:off x="5218730" y="4169664"/>
-            <a:ext cx="603504" cy="475488"/>
-          </a:xfrm>
-          <a:prstGeom prst="rect">
-            <a:avLst/>
-          </a:prstGeom>
-          <a:noFill/>
-          <a:ln/>
-        </p:spPr>
-        <p:txBody>
-          <a:bodyPr wrap="square" lIns="0" tIns="0" rIns="0" bIns="0" rtlCol="0" anchor="ctr"/>
-          <a:lstStyle/>
-          <a:p>
-            <a:pPr algn="ctr" indent="0" marL="0">
-              <a:buNone/>
-            </a:pPr>
-            <a:r>
-              <a:rPr lang="en-US" sz="900" b="1" dirty="0">
-                <a:solidFill>
-                  <a:srgbClr val="9D174D"/>
-                </a:solidFill>
-                <a:latin typeface="Trebuchet MS" pitchFamily="34" charset="0"/>
-                <a:ea typeface="Trebuchet MS" pitchFamily="34" charset="-122"/>
-                <a:cs typeface="Trebuchet MS" pitchFamily="34" charset="-120"/>
-              </a:rPr>
               <a:t>e</a:t>
-            </a:r>
-            <a:endParaRPr lang="en-US" sz="900" dirty="0"/>
-          </a:p>
-        </p:txBody>
-      </p:sp>
-      <p:sp>
-        <p:nvSpPr>
-          <p:cNvPr id="61" name="Shape 59"/>
-          <p:cNvSpPr/>
-          <p:nvPr/>
-        </p:nvSpPr>
-        <p:spPr>
-          <a:xfrm>
-            <a:off x="5872111" y="4169664"/>
-            <a:ext cx="603504" cy="475488"/>
-          </a:xfrm>
-          <a:prstGeom prst="rect">
-            <a:avLst>
-              <a:gd name="adj" fmla="val 7692"/>
-            </a:avLst>
-          </a:prstGeom>
-          <a:solidFill>
-            <a:srgbClr val="FFFFFF"/>
-          </a:solidFill>
-          <a:ln w="12700">
-            <a:solidFill>
-              <a:srgbClr val="DB2777"/>
-            </a:solidFill>
-            <a:prstDash val="solid"/>
-          </a:ln>
-        </p:spPr>
-      </p:sp>
-      <p:sp>
-        <p:nvSpPr>
-          <p:cNvPr id="62" name="Text 60"/>
-          <p:cNvSpPr/>
-          <p:nvPr/>
-        </p:nvSpPr>
-        <p:spPr>
-          <a:xfrm>
-            <a:off x="5872111" y="4169664"/>
-            <a:ext cx="603504" cy="475488"/>
-          </a:xfrm>
-          <a:prstGeom prst="rect">
-            <a:avLst/>
-          </a:prstGeom>
-          <a:noFill/>
-          <a:ln/>
-        </p:spPr>
-        <p:txBody>
-          <a:bodyPr wrap="square" lIns="0" tIns="0" rIns="0" bIns="0" rtlCol="0" anchor="ctr"/>
-          <a:lstStyle/>
-          <a:p>
-            <a:pPr algn="ctr" indent="0" marL="0">
-              <a:buNone/>
-            </a:pPr>
-            <a:r>
-              <a:rPr lang="en-US" sz="900" b="1" dirty="0">
-                <a:solidFill>
-                  <a:srgbClr val="9D174D"/>
-                </a:solidFill>
-                <a:latin typeface="Trebuchet MS" pitchFamily="34" charset="0"/>
-                <a:ea typeface="Trebuchet MS" pitchFamily="34" charset="-122"/>
-                <a:cs typeface="Trebuchet MS" pitchFamily="34" charset="-120"/>
-              </a:rPr>
-              <a:t>tt</a:t>
-            </a:r>
-            <a:endParaRPr lang="en-US" sz="900" dirty="0"/>
-          </a:p>
-        </p:txBody>
-      </p:sp>
-      <p:sp>
-        <p:nvSpPr>
-          <p:cNvPr id="63" name="Shape 61"/>
-          <p:cNvSpPr/>
-          <p:nvPr/>
-        </p:nvSpPr>
-        <p:spPr>
-          <a:xfrm>
-            <a:off x="6525491" y="4169664"/>
-            <a:ext cx="603504" cy="475488"/>
-          </a:xfrm>
-          <a:prstGeom prst="rect">
-            <a:avLst>
-              <a:gd name="adj" fmla="val 7692"/>
-            </a:avLst>
-          </a:prstGeom>
-          <a:solidFill>
-            <a:srgbClr val="FFFFFF"/>
-          </a:solidFill>
-          <a:ln w="12700">
-            <a:solidFill>
-              <a:srgbClr val="DB2777"/>
-            </a:solidFill>
-            <a:prstDash val="solid"/>
-          </a:ln>
-        </p:spPr>
-      </p:sp>
-      <p:sp>
-        <p:nvSpPr>
-          <p:cNvPr id="64" name="Text 62"/>
-          <p:cNvSpPr/>
-          <p:nvPr/>
-        </p:nvSpPr>
-        <p:spPr>
-          <a:xfrm>
-            <a:off x="6525491" y="4169664"/>
-            <a:ext cx="603504" cy="475488"/>
-          </a:xfrm>
-          <a:prstGeom prst="rect">
-            <a:avLst/>
-          </a:prstGeom>
-          <a:noFill/>
-          <a:ln/>
-        </p:spPr>
-        <p:txBody>
-          <a:bodyPr wrap="square" lIns="0" tIns="0" rIns="0" bIns="0" rtlCol="0" anchor="ctr"/>
-          <a:lstStyle/>
-          <a:p>
-            <a:pPr algn="ctr" indent="0" marL="0">
-              <a:buNone/>
-            </a:pPr>
-            <a:r>
-              <a:rPr lang="en-US" sz="900" b="1" dirty="0">
-                <a:solidFill>
-                  <a:srgbClr val="9D174D"/>
-                </a:solidFill>
-                <a:latin typeface="Trebuchet MS" pitchFamily="34" charset="0"/>
-                <a:ea typeface="Trebuchet MS" pitchFamily="34" charset="-122"/>
-                <a:cs typeface="Trebuchet MS" pitchFamily="34" charset="-120"/>
-              </a:rPr>
-              <a:t>a</a:t>
-            </a:r>
-            <a:endParaRPr lang="en-US" sz="900" dirty="0"/>
-          </a:p>
-        </p:txBody>
-      </p:sp>
-      <p:sp>
-        <p:nvSpPr>
-          <p:cNvPr id="65" name="Shape 63"/>
-          <p:cNvSpPr/>
-          <p:nvPr/>
-        </p:nvSpPr>
-        <p:spPr>
-          <a:xfrm>
-            <a:off x="7178871" y="4169664"/>
-            <a:ext cx="603504" cy="475488"/>
-          </a:xfrm>
-          <a:prstGeom prst="rect">
-            <a:avLst>
-              <a:gd name="adj" fmla="val 7692"/>
-            </a:avLst>
-          </a:prstGeom>
-          <a:solidFill>
-            <a:srgbClr val="FFFFFF"/>
-          </a:solidFill>
-          <a:ln w="12700">
-            <a:solidFill>
-              <a:srgbClr val="DB2777"/>
-            </a:solidFill>
-            <a:prstDash val="solid"/>
-          </a:ln>
-        </p:spPr>
-      </p:sp>
-      <p:sp>
-        <p:nvSpPr>
-          <p:cNvPr id="66" name="Text 64"/>
-          <p:cNvSpPr/>
-          <p:nvPr/>
-        </p:nvSpPr>
-        <p:spPr>
-          <a:xfrm>
-            <a:off x="7178871" y="4169664"/>
-            <a:ext cx="603504" cy="475488"/>
-          </a:xfrm>
-          <a:prstGeom prst="rect">
-            <a:avLst/>
-          </a:prstGeom>
-          <a:noFill/>
-          <a:ln/>
-        </p:spPr>
-        <p:txBody>
-          <a:bodyPr wrap="square" lIns="0" tIns="0" rIns="0" bIns="0" rtlCol="0" anchor="ctr"/>
-          <a:lstStyle/>
-          <a:p>
-            <a:pPr algn="ctr" indent="0" marL="0">
-              <a:buNone/>
-            </a:pPr>
-            <a:r>
-              <a:rPr lang="en-US" sz="900" b="1" dirty="0">
-                <a:solidFill>
-                  <a:srgbClr val="9D174D"/>
-                </a:solidFill>
-                <a:latin typeface="Trebuchet MS" pitchFamily="34" charset="0"/>
-                <a:ea typeface="Trebuchet MS" pitchFamily="34" charset="-122"/>
-                <a:cs typeface="Trebuchet MS" pitchFamily="34" charset="-120"/>
-              </a:rPr>
-              <a:t>b</a:t>
-            </a:r>
-            <a:endParaRPr lang="en-US" sz="900" dirty="0"/>
-          </a:p>
-        </p:txBody>
-      </p:sp>
-      <p:sp>
-        <p:nvSpPr>
-          <p:cNvPr id="67" name="Shape 65"/>
-          <p:cNvSpPr/>
-          <p:nvPr/>
-        </p:nvSpPr>
-        <p:spPr>
-          <a:xfrm>
-            <a:off x="7832252" y="4169664"/>
-            <a:ext cx="603504" cy="475488"/>
-          </a:xfrm>
-          <a:prstGeom prst="rect">
-            <a:avLst>
-              <a:gd name="adj" fmla="val 7692"/>
-            </a:avLst>
-          </a:prstGeom>
-          <a:solidFill>
-            <a:srgbClr val="FFFFFF"/>
-          </a:solidFill>
-          <a:ln w="12700">
-            <a:solidFill>
-              <a:srgbClr val="DB2777"/>
-            </a:solidFill>
-            <a:prstDash val="solid"/>
-          </a:ln>
-        </p:spPr>
-      </p:sp>
-      <p:sp>
-        <p:nvSpPr>
-          <p:cNvPr id="68" name="Text 66"/>
-          <p:cNvSpPr/>
-          <p:nvPr/>
-        </p:nvSpPr>
-        <p:spPr>
-          <a:xfrm>
-            <a:off x="7832252" y="4169664"/>
-            <a:ext cx="603504" cy="475488"/>
-          </a:xfrm>
-          <a:prstGeom prst="rect">
-            <a:avLst/>
-          </a:prstGeom>
-          <a:noFill/>
-          <a:ln/>
-        </p:spPr>
-        <p:txBody>
-          <a:bodyPr wrap="square" lIns="0" tIns="0" rIns="0" bIns="0" rtlCol="0" anchor="ctr"/>
-          <a:lstStyle/>
-          <a:p>
-            <a:pPr algn="ctr" indent="0" marL="0">
-              <a:buNone/>
-            </a:pPr>
-            <a:r>
-              <a:rPr lang="en-US" sz="900" b="1" dirty="0">
-                <a:solidFill>
-                  <a:srgbClr val="9D174D"/>
-                </a:solidFill>
-                <a:latin typeface="Trebuchet MS" pitchFamily="34" charset="0"/>
-                <a:ea typeface="Trebuchet MS" pitchFamily="34" charset="-122"/>
-                <a:cs typeface="Trebuchet MS" pitchFamily="34" charset="-120"/>
-              </a:rPr>
-              <a:t>le</a:t>
             </a:r>
             <a:endParaRPr lang="en-US" sz="900" dirty="0"/>
           </a:p>
@@ -36639,7 +35337,7 @@
                 <a:ea typeface="Calibri" pitchFamily="34" charset="-122"/>
                 <a:cs typeface="Calibri" pitchFamily="34" charset="-120"/>
               </a:rPr>
-              <a:t>Word Labs  •  wordlabs.app  •  Suffix: '-able' = able to be done</a:t>
+              <a:t>Word Labs  •  wordlabs.app  •  Suffix: '-able' = can be done; capable of</a:t>
             </a:r>
             <a:endParaRPr lang="en-US" sz="800" dirty="0"/>
           </a:p>
@@ -37808,7 +36506,7 @@
                 <a:ea typeface="Calibri" pitchFamily="34" charset="-122"/>
                 <a:cs typeface="Calibri" pitchFamily="34" charset="-120"/>
               </a:rPr>
-              <a:t>Word Labs  •  wordlabs.app  •  Suffix: '-able' = able to be done</a:t>
+              <a:t>Word Labs  •  wordlabs.app  •  Suffix: '-able' = can be done; capable of</a:t>
             </a:r>
             <a:endParaRPr lang="en-US" sz="800" dirty="0"/>
           </a:p>
@@ -38173,7 +36871,7 @@
                 <a:ea typeface="Trebuchet MS" pitchFamily="34" charset="-122"/>
                 <a:cs typeface="Trebuchet MS" pitchFamily="34" charset="-120"/>
               </a:rPr>
-              <a:t>read</a:t>
+              <a:t>enjoy</a:t>
             </a:r>
             <a:endParaRPr lang="en-US" sz="1300" dirty="0"/>
           </a:p>
@@ -38365,7 +37063,7 @@
                 <a:ea typeface="Trebuchet MS" pitchFamily="34" charset="-122"/>
                 <a:cs typeface="Trebuchet MS" pitchFamily="34" charset="-120"/>
               </a:rPr>
-              <a:t>wash</a:t>
+              <a:t>comfort</a:t>
             </a:r>
             <a:endParaRPr lang="en-US" sz="1300" dirty="0"/>
           </a:p>
@@ -38518,7 +37216,7 @@
                 <a:ea typeface="Trebuchet MS" pitchFamily="34" charset="-122"/>
                 <a:cs typeface="Trebuchet MS" pitchFamily="34" charset="-120"/>
               </a:rPr>
-              <a:t>break</a:t>
+              <a:t>remark</a:t>
             </a:r>
             <a:endParaRPr lang="en-US" sz="1300" dirty="0"/>
           </a:p>
@@ -38607,7 +37305,7 @@
                 <a:ea typeface="Trebuchet MS" pitchFamily="34" charset="-122"/>
                 <a:cs typeface="Trebuchet MS" pitchFamily="34" charset="-120"/>
               </a:rPr>
-              <a:t>pre-</a:t>
+              <a:t>re-</a:t>
             </a:r>
             <a:endParaRPr lang="en-US" sz="1300" dirty="0"/>
           </a:p>
@@ -38760,7 +37458,7 @@
                 <a:ea typeface="Trebuchet MS" pitchFamily="34" charset="-122"/>
                 <a:cs typeface="Trebuchet MS" pitchFamily="34" charset="-120"/>
               </a:rPr>
-              <a:t>in-</a:t>
+              <a:t>pre-</a:t>
             </a:r>
             <a:endParaRPr lang="en-US" sz="1300" dirty="0"/>
           </a:p>
@@ -38824,7 +37522,7 @@
                 <a:ea typeface="Trebuchet MS" pitchFamily="34" charset="-122"/>
                 <a:cs typeface="Trebuchet MS" pitchFamily="34" charset="-120"/>
               </a:rPr>
-              <a:t>comfort</a:t>
+              <a:t>wash</a:t>
             </a:r>
             <a:endParaRPr lang="en-US" sz="1300" dirty="0"/>
           </a:p>
@@ -38954,7 +37652,7 @@
                 <a:ea typeface="Trebuchet MS" pitchFamily="34" charset="-122"/>
                 <a:cs typeface="Trebuchet MS" pitchFamily="34" charset="-120"/>
               </a:rPr>
-              <a:t>readable</a:t>
+              <a:t>enjoyable</a:t>
             </a:r>
             <a:endParaRPr lang="en-US" sz="1200" dirty="0"/>
           </a:p>
@@ -39020,7 +37718,7 @@
                 <a:ea typeface="Trebuchet MS" pitchFamily="34" charset="-122"/>
                 <a:cs typeface="Trebuchet MS" pitchFamily="34" charset="-120"/>
               </a:rPr>
-              <a:t>washable</a:t>
+              <a:t>remarkable</a:t>
             </a:r>
             <a:endParaRPr lang="en-US" sz="1200" dirty="0"/>
           </a:p>
@@ -39086,7 +37784,7 @@
                 <a:ea typeface="Trebuchet MS" pitchFamily="34" charset="-122"/>
                 <a:cs typeface="Trebuchet MS" pitchFamily="34" charset="-120"/>
               </a:rPr>
-              <a:t>breakable</a:t>
+              <a:t>comfortable</a:t>
             </a:r>
             <a:endParaRPr lang="en-US" sz="1200" dirty="0"/>
           </a:p>
@@ -39152,7 +37850,7 @@
                 <a:ea typeface="Trebuchet MS" pitchFamily="34" charset="-122"/>
                 <a:cs typeface="Trebuchet MS" pitchFamily="34" charset="-120"/>
               </a:rPr>
-              <a:t>changeable</a:t>
+              <a:t>washable</a:t>
             </a:r>
             <a:endParaRPr lang="en-US" sz="1200" dirty="0"/>
           </a:p>
@@ -39218,7 +37916,7 @@
                 <a:ea typeface="Trebuchet MS" pitchFamily="34" charset="-122"/>
                 <a:cs typeface="Trebuchet MS" pitchFamily="34" charset="-120"/>
               </a:rPr>
-              <a:t>comfortable</a:t>
+              <a:t>unbelievable</a:t>
             </a:r>
             <a:endParaRPr lang="en-US" sz="1200" dirty="0"/>
           </a:p>
@@ -39284,7 +37982,7 @@
                 <a:ea typeface="Trebuchet MS" pitchFamily="34" charset="-122"/>
                 <a:cs typeface="Trebuchet MS" pitchFamily="34" charset="-120"/>
               </a:rPr>
-              <a:t>remarkable</a:t>
+              <a:t>changeable</a:t>
             </a:r>
             <a:endParaRPr lang="en-US" sz="1200" dirty="0"/>
           </a:p>
@@ -39350,7 +38048,7 @@
                 <a:ea typeface="Trebuchet MS" pitchFamily="34" charset="-122"/>
                 <a:cs typeface="Trebuchet MS" pitchFamily="34" charset="-120"/>
               </a:rPr>
-              <a:t>unbreakable</a:t>
+              <a:t>readable</a:t>
             </a:r>
             <a:endParaRPr lang="en-US" sz="1200" dirty="0"/>
           </a:p>
@@ -39416,7 +38114,7 @@
                 <a:ea typeface="Trebuchet MS" pitchFamily="34" charset="-122"/>
                 <a:cs typeface="Trebuchet MS" pitchFamily="34" charset="-120"/>
               </a:rPr>
-              <a:t>enjoyable</a:t>
+              <a:t>dependable</a:t>
             </a:r>
             <a:endParaRPr lang="en-US" sz="1200" dirty="0"/>
           </a:p>
@@ -39708,7 +38406,7 @@
                 <a:ea typeface="Calibri" pitchFamily="34" charset="-122"/>
                 <a:cs typeface="Calibri" pitchFamily="34" charset="-120"/>
               </a:rPr>
-              <a:t>Word Labs  •  wordlabs.app  •  Suffix: '-able' = able to be done</a:t>
+              <a:t>Word Labs  •  wordlabs.app  •  Suffix: '-able' = can be done; capable of</a:t>
             </a:r>
             <a:endParaRPr lang="en-US" sz="800" dirty="0"/>
           </a:p>
@@ -39872,7 +38570,7 @@
                 <a:ea typeface="Calibri" pitchFamily="34" charset="-122"/>
                 <a:cs typeface="Calibri" pitchFamily="34" charset="-120"/>
               </a:rPr>
-              <a:t>A meaningful word part added to the end of a word to change its meaning or form. The suffix '-able' means 'able to be done'.</a:t>
+              <a:t>A meaningful word part added to the end of a word to change its meaning or form. The suffix '-able' means 'can be done; capable of'.</a:t>
             </a:r>
             <a:endParaRPr lang="en-US" sz="1350" dirty="0"/>
           </a:p>
@@ -40036,7 +38734,7 @@
                 <a:ea typeface="Calibri" pitchFamily="34" charset="-122"/>
                 <a:cs typeface="Calibri" pitchFamily="34" charset="-120"/>
               </a:rPr>
-              <a:t>The core part of a word carrying its basic meaning. In 'readable', the root is the part before the suffix '-able'.</a:t>
+              <a:t>The core part of a word carrying its basic meaning. In 'enjoyable', the root is the part before the suffix '-able'.</a:t>
             </a:r>
             <a:endParaRPr lang="en-US" sz="1350" dirty="0"/>
           </a:p>
@@ -40200,7 +38898,7 @@
                 <a:ea typeface="Calibri" pitchFamily="34" charset="-122"/>
                 <a:cs typeface="Calibri" pitchFamily="34" charset="-120"/>
               </a:rPr>
-              <a:t>A meaningful word part added to the beginning of a root to change its meaning. E.g. 'un-' in 'washable' means 'not'.</a:t>
+              <a:t>A meaningful word part added to the beginning of a root to change its meaning. E.g. 'un-' in 'remarkable' means 'not'.</a:t>
             </a:r>
             <a:endParaRPr lang="en-US" sz="1350" dirty="0"/>
           </a:p>
@@ -40492,7 +39190,7 @@
                 <a:ea typeface="Calibri" pitchFamily="34" charset="-122"/>
                 <a:cs typeface="Calibri" pitchFamily="34" charset="-120"/>
               </a:rPr>
-              <a:t>Word Labs  •  wordlabs.app  •  Suffix: '-able' = able to be done</a:t>
+              <a:t>Word Labs  •  wordlabs.app  •  Suffix: '-able' = can be done; capable of</a:t>
             </a:r>
             <a:endParaRPr lang="en-US" sz="800" dirty="0"/>
           </a:p>
@@ -40604,7 +39302,7 @@
                 <a:ea typeface="Calibri" pitchFamily="34" charset="-122"/>
                 <a:cs typeface="Calibri" pitchFamily="34" charset="-120"/>
               </a:rPr>
-              <a:t>1.  The suffix '-able' means 'able to be done' or 'capable of'.</a:t>
+              <a:t>1.  '-able' means something can be done or is capable of happening.</a:t>
             </a:r>
             <a:endParaRPr lang="en-US" sz="1300" dirty="0"/>
           </a:p>
@@ -40743,7 +39441,7 @@
                 <a:ea typeface="Calibri" pitchFamily="34" charset="-122"/>
                 <a:cs typeface="Calibri" pitchFamily="34" charset="-120"/>
               </a:rPr>
-              <a:t>2.  The suffix '-able' comes from Old English.</a:t>
+              <a:t>2.  The word 'table' contains the suffix '-able'.</a:t>
             </a:r>
             <a:endParaRPr lang="en-US" sz="1300" dirty="0"/>
           </a:p>
@@ -40882,7 +39580,7 @@
                 <a:ea typeface="Calibri" pitchFamily="34" charset="-122"/>
                 <a:cs typeface="Calibri" pitchFamily="34" charset="-120"/>
               </a:rPr>
-              <a:t>3.  You can add '-able' to a base word to make an adjective.</a:t>
+              <a:t>3.  Adding '-able' to a word makes it a noun.</a:t>
             </a:r>
             <a:endParaRPr lang="en-US" sz="1300" dirty="0"/>
           </a:p>
@@ -40905,11 +39603,11 @@
             </a:avLst>
           </a:prstGeom>
           <a:solidFill>
-            <a:srgbClr val="DCFCE7"/>
-          </a:solidFill>
-          <a:ln w="12700">
-            <a:solidFill>
-              <a:srgbClr val="16A34A"/>
+            <a:srgbClr val="FEE2E2"/>
+          </a:solidFill>
+          <a:ln w="12700">
+            <a:solidFill>
+              <a:srgbClr val="DC2626"/>
             </a:solidFill>
             <a:prstDash val="solid"/>
           </a:ln>
@@ -40942,13 +39640,13 @@
             <a:r>
               <a:rPr lang="en-US" sz="1100" b="1" dirty="0">
                 <a:solidFill>
-                  <a:srgbClr val="16A34A"/>
+                  <a:srgbClr val="DC2626"/>
                 </a:solidFill>
                 <a:latin typeface="Trebuchet MS" pitchFamily="34" charset="0"/>
                 <a:ea typeface="Trebuchet MS" pitchFamily="34" charset="-122"/>
                 <a:cs typeface="Trebuchet MS" pitchFamily="34" charset="-120"/>
               </a:rPr>
-              <a:t>TRUE</a:t>
+              <a:t>FALSE</a:t>
             </a:r>
             <a:endParaRPr lang="en-US" sz="1100" dirty="0"/>
           </a:p>
@@ -41021,7 +39719,7 @@
                 <a:ea typeface="Calibri" pitchFamily="34" charset="-122"/>
                 <a:cs typeface="Calibri" pitchFamily="34" charset="-120"/>
               </a:rPr>
-              <a:t>4.  The prefix 'un-' can be added to many '-able' words to mean 'not able to be done'.</a:t>
+              <a:t>4.  The prefix 'un-' can be added to many '-able' words to make their opposite, like 'uncomfortable'.</a:t>
             </a:r>
             <a:endParaRPr lang="en-US" sz="1300" dirty="0"/>
           </a:p>
@@ -41160,7 +39858,7 @@
                 <a:ea typeface="Calibri" pitchFamily="34" charset="-122"/>
                 <a:cs typeface="Calibri" pitchFamily="34" charset="-120"/>
               </a:rPr>
-              <a:t>5.  Words ending in '-able' are always nouns.</a:t>
+              <a:t>5.  The suffix '-able' comes from Latin.</a:t>
             </a:r>
             <a:endParaRPr lang="en-US" sz="1300" dirty="0"/>
           </a:p>
@@ -41183,11 +39881,11 @@
             </a:avLst>
           </a:prstGeom>
           <a:solidFill>
-            <a:srgbClr val="FEE2E2"/>
-          </a:solidFill>
-          <a:ln w="12700">
-            <a:solidFill>
-              <a:srgbClr val="DC2626"/>
+            <a:srgbClr val="DCFCE7"/>
+          </a:solidFill>
+          <a:ln w="12700">
+            <a:solidFill>
+              <a:srgbClr val="16A34A"/>
             </a:solidFill>
             <a:prstDash val="solid"/>
           </a:ln>
@@ -41220,13 +39918,13 @@
             <a:r>
               <a:rPr lang="en-US" sz="1100" b="1" dirty="0">
                 <a:solidFill>
-                  <a:srgbClr val="DC2626"/>
+                  <a:srgbClr val="16A34A"/>
                 </a:solidFill>
                 <a:latin typeface="Trebuchet MS" pitchFamily="34" charset="0"/>
                 <a:ea typeface="Trebuchet MS" pitchFamily="34" charset="-122"/>
                 <a:cs typeface="Trebuchet MS" pitchFamily="34" charset="-120"/>
               </a:rPr>
-              <a:t>FALSE</a:t>
+              <a:t>TRUE</a:t>
             </a:r>
             <a:endParaRPr lang="en-US" sz="1100" dirty="0"/>
           </a:p>
@@ -41518,7 +40216,7 @@
                 <a:ea typeface="Calibri" pitchFamily="34" charset="-122"/>
                 <a:cs typeface="Calibri" pitchFamily="34" charset="-120"/>
               </a:rPr>
-              <a:t>Word Labs  •  wordlabs.app  •  Suffix: '-able' = able to be done</a:t>
+              <a:t>Word Labs  •  wordlabs.app  •  Suffix: '-able' = can be done; capable of</a:t>
             </a:r>
             <a:endParaRPr lang="en-US" sz="800" dirty="0"/>
           </a:p>
@@ -41655,7 +40353,7 @@
                 <a:ea typeface="Trebuchet MS" pitchFamily="34" charset="-122"/>
                 <a:cs typeface="Trebuchet MS" pitchFamily="34" charset="-120"/>
               </a:rPr>
-              <a:t>able to be done</a:t>
+              <a:t>can be done; capable of</a:t>
             </a:r>
             <a:endParaRPr lang="en-US" sz="2000" dirty="0"/>
           </a:p>
@@ -41799,7 +40497,7 @@
                 <a:ea typeface="Trebuchet MS" pitchFamily="34" charset="-122"/>
                 <a:cs typeface="Trebuchet MS" pitchFamily="34" charset="-120"/>
               </a:rPr>
-              <a:t>readable</a:t>
+              <a:t>enjoyable</a:t>
             </a:r>
             <a:endParaRPr lang="en-US" sz="1300" dirty="0"/>
           </a:p>
@@ -41865,7 +40563,7 @@
                 <a:ea typeface="Trebuchet MS" pitchFamily="34" charset="-122"/>
                 <a:cs typeface="Trebuchet MS" pitchFamily="34" charset="-120"/>
               </a:rPr>
-              <a:t>washable</a:t>
+              <a:t>remarkable</a:t>
             </a:r>
             <a:endParaRPr lang="en-US" sz="1300" dirty="0"/>
           </a:p>
@@ -41931,7 +40629,7 @@
                 <a:ea typeface="Trebuchet MS" pitchFamily="34" charset="-122"/>
                 <a:cs typeface="Trebuchet MS" pitchFamily="34" charset="-120"/>
               </a:rPr>
-              <a:t>breakable</a:t>
+              <a:t>comfortable</a:t>
             </a:r>
             <a:endParaRPr lang="en-US" sz="1300" dirty="0"/>
           </a:p>
@@ -41997,7 +40695,7 @@
                 <a:ea typeface="Trebuchet MS" pitchFamily="34" charset="-122"/>
                 <a:cs typeface="Trebuchet MS" pitchFamily="34" charset="-120"/>
               </a:rPr>
-              <a:t>changeable</a:t>
+              <a:t>washable</a:t>
             </a:r>
             <a:endParaRPr lang="en-US" sz="1300" dirty="0"/>
           </a:p>
@@ -42063,7 +40761,7 @@
                 <a:ea typeface="Trebuchet MS" pitchFamily="34" charset="-122"/>
                 <a:cs typeface="Trebuchet MS" pitchFamily="34" charset="-120"/>
               </a:rPr>
-              <a:t>comfortable</a:t>
+              <a:t>unbelievable</a:t>
             </a:r>
             <a:endParaRPr lang="en-US" sz="1300" dirty="0"/>
           </a:p>
@@ -42129,7 +40827,7 @@
                 <a:ea typeface="Trebuchet MS" pitchFamily="34" charset="-122"/>
                 <a:cs typeface="Trebuchet MS" pitchFamily="34" charset="-120"/>
               </a:rPr>
-              <a:t>remarkable</a:t>
+              <a:t>changeable</a:t>
             </a:r>
             <a:endParaRPr lang="en-US" sz="1300" dirty="0"/>
           </a:p>
@@ -42195,7 +40893,7 @@
                 <a:ea typeface="Trebuchet MS" pitchFamily="34" charset="-122"/>
                 <a:cs typeface="Trebuchet MS" pitchFamily="34" charset="-120"/>
               </a:rPr>
-              <a:t>unbreakable</a:t>
+              <a:t>readable</a:t>
             </a:r>
             <a:endParaRPr lang="en-US" sz="1300" dirty="0"/>
           </a:p>
@@ -42487,7 +41185,7 @@
                 <a:ea typeface="Calibri" pitchFamily="34" charset="-122"/>
                 <a:cs typeface="Calibri" pitchFamily="34" charset="-120"/>
               </a:rPr>
-              <a:t>Word Labs  •  wordlabs.app  •  Suffix: '-able' = able to be done</a:t>
+              <a:t>Word Labs  •  wordlabs.app  •  Suffix: '-able' = can be done; capable of</a:t>
             </a:r>
             <a:endParaRPr lang="en-US" sz="800" dirty="0"/>
           </a:p>
@@ -42852,7 +41550,7 @@
                 <a:ea typeface="Trebuchet MS" pitchFamily="34" charset="-122"/>
                 <a:cs typeface="Trebuchet MS" pitchFamily="34" charset="-120"/>
               </a:rPr>
-              <a:t>read</a:t>
+              <a:t>enjoy</a:t>
             </a:r>
             <a:endParaRPr lang="en-US" sz="1300" dirty="0"/>
           </a:p>
@@ -43044,7 +41742,7 @@
                 <a:ea typeface="Trebuchet MS" pitchFamily="34" charset="-122"/>
                 <a:cs typeface="Trebuchet MS" pitchFamily="34" charset="-120"/>
               </a:rPr>
-              <a:t>wash</a:t>
+              <a:t>comfort</a:t>
             </a:r>
             <a:endParaRPr lang="en-US" sz="1300" dirty="0"/>
           </a:p>
@@ -43197,7 +41895,7 @@
                 <a:ea typeface="Trebuchet MS" pitchFamily="34" charset="-122"/>
                 <a:cs typeface="Trebuchet MS" pitchFamily="34" charset="-120"/>
               </a:rPr>
-              <a:t>break</a:t>
+              <a:t>remark</a:t>
             </a:r>
             <a:endParaRPr lang="en-US" sz="1300" dirty="0"/>
           </a:p>
@@ -43286,7 +41984,7 @@
                 <a:ea typeface="Trebuchet MS" pitchFamily="34" charset="-122"/>
                 <a:cs typeface="Trebuchet MS" pitchFamily="34" charset="-120"/>
               </a:rPr>
-              <a:t>pre-</a:t>
+              <a:t>re-</a:t>
             </a:r>
             <a:endParaRPr lang="en-US" sz="1300" dirty="0"/>
           </a:p>
@@ -43439,7 +42137,7 @@
                 <a:ea typeface="Trebuchet MS" pitchFamily="34" charset="-122"/>
                 <a:cs typeface="Trebuchet MS" pitchFamily="34" charset="-120"/>
               </a:rPr>
-              <a:t>in-</a:t>
+              <a:t>pre-</a:t>
             </a:r>
             <a:endParaRPr lang="en-US" sz="1300" dirty="0"/>
           </a:p>
@@ -43503,7 +42201,7 @@
                 <a:ea typeface="Trebuchet MS" pitchFamily="34" charset="-122"/>
                 <a:cs typeface="Trebuchet MS" pitchFamily="34" charset="-120"/>
               </a:rPr>
-              <a:t>comfort</a:t>
+              <a:t>wash</a:t>
             </a:r>
             <a:endParaRPr lang="en-US" sz="1300" dirty="0"/>
           </a:p>
@@ -43694,7 +42392,7 @@
         <p:spPr>
           <a:xfrm>
             <a:off x="2706624" y="4178808"/>
-            <a:ext cx="950976" cy="420624"/>
+            <a:ext cx="1097280" cy="420624"/>
           </a:xfrm>
           <a:prstGeom prst="rect">
             <a:avLst>
@@ -43728,7 +42426,7 @@
         <p:spPr>
           <a:xfrm>
             <a:off x="2706624" y="4178808"/>
-            <a:ext cx="950976" cy="420624"/>
+            <a:ext cx="1097280" cy="420624"/>
           </a:xfrm>
           <a:prstGeom prst="rect">
             <a:avLst/>
@@ -43752,7 +42450,7 @@
                 <a:ea typeface="Trebuchet MS" pitchFamily="34" charset="-122"/>
                 <a:cs typeface="Trebuchet MS" pitchFamily="34" charset="-120"/>
               </a:rPr>
-              <a:t>read</a:t>
+              <a:t>enjoy</a:t>
             </a:r>
             <a:endParaRPr lang="en-US" sz="1300" dirty="0"/>
           </a:p>
@@ -43766,7 +42464,7 @@
         </p:nvSpPr>
         <p:spPr>
           <a:xfrm>
-            <a:off x="3685032" y="4178808"/>
+            <a:off x="3831336" y="4178808"/>
             <a:ext cx="320040" cy="420624"/>
           </a:xfrm>
           <a:prstGeom prst="rect">
@@ -43805,7 +42503,7 @@
         </p:nvSpPr>
         <p:spPr>
           <a:xfrm>
-            <a:off x="4032504" y="4178808"/>
+            <a:off x="4178808" y="4178808"/>
             <a:ext cx="1097280" cy="420624"/>
           </a:xfrm>
           <a:prstGeom prst="rect">
@@ -43839,7 +42537,7 @@
         </p:nvSpPr>
         <p:spPr>
           <a:xfrm>
-            <a:off x="4032504" y="4178808"/>
+            <a:off x="4178808" y="4178808"/>
             <a:ext cx="1097280" cy="420624"/>
           </a:xfrm>
           <a:prstGeom prst="rect">
@@ -43878,7 +42576,7 @@
         </p:nvSpPr>
         <p:spPr>
           <a:xfrm>
-            <a:off x="5202936" y="4178808"/>
+            <a:off x="5349240" y="4178808"/>
             <a:ext cx="365760" cy="420624"/>
           </a:xfrm>
           <a:prstGeom prst="rect">
@@ -43917,7 +42615,7 @@
         </p:nvSpPr>
         <p:spPr>
           <a:xfrm>
-            <a:off x="5614416" y="4178808"/>
+            <a:off x="5760720" y="4178808"/>
             <a:ext cx="2194560" cy="420624"/>
           </a:xfrm>
           <a:prstGeom prst="rect">
@@ -43944,7 +42642,7 @@
         </p:nvSpPr>
         <p:spPr>
           <a:xfrm>
-            <a:off x="5614416" y="4178808"/>
+            <a:off x="5760720" y="4178808"/>
             <a:ext cx="2194560" cy="420624"/>
           </a:xfrm>
           <a:prstGeom prst="rect">
@@ -43969,7 +42667,7 @@
                 <a:ea typeface="Trebuchet MS" pitchFamily="34" charset="-122"/>
                 <a:cs typeface="Trebuchet MS" pitchFamily="34" charset="-120"/>
               </a:rPr>
-              <a:t>readable</a:t>
+              <a:t>enjoyable</a:t>
             </a:r>
             <a:endParaRPr lang="en-US" sz="1400" dirty="0"/>
           </a:p>
@@ -44261,7 +42959,7 @@
                 <a:ea typeface="Calibri" pitchFamily="34" charset="-122"/>
                 <a:cs typeface="Calibri" pitchFamily="34" charset="-120"/>
               </a:rPr>
-              <a:t>Word Labs  •  wordlabs.app  •  Suffix: '-able' = able to be done</a:t>
+              <a:t>Word Labs  •  wordlabs.app  •  Suffix: '-able' = can be done; capable of</a:t>
             </a:r>
             <a:endParaRPr lang="en-US" sz="800" dirty="0"/>
           </a:p>
@@ -44373,7 +43071,7 @@
                 <a:ea typeface="Trebuchet MS" pitchFamily="34" charset="-122"/>
                 <a:cs typeface="Trebuchet MS" pitchFamily="34" charset="-120"/>
               </a:rPr>
-              <a:t>readable</a:t>
+              <a:t>enjoyable</a:t>
             </a:r>
             <a:endParaRPr lang="en-US" sz="1200" dirty="0"/>
           </a:p>
@@ -44439,7 +43137,7 @@
                 <a:ea typeface="Calibri" pitchFamily="34" charset="-122"/>
                 <a:cs typeface="Calibri" pitchFamily="34" charset="-120"/>
               </a:rPr>
-              <a:t>Feeling relaxed and at ease, without pain or worry.</a:t>
+              <a:t>So surprising or amazing that it is hard to believe.</a:t>
             </a:r>
             <a:endParaRPr lang="en-US" sz="1200" dirty="0"/>
           </a:p>
@@ -44512,7 +43210,7 @@
                 <a:ea typeface="Trebuchet MS" pitchFamily="34" charset="-122"/>
                 <a:cs typeface="Trebuchet MS" pitchFamily="34" charset="-120"/>
               </a:rPr>
-              <a:t>washable</a:t>
+              <a:t>remarkable</a:t>
             </a:r>
             <a:endParaRPr lang="en-US" sz="1200" dirty="0"/>
           </a:p>
@@ -44578,7 +43276,7 @@
                 <a:ea typeface="Calibri" pitchFamily="34" charset="-122"/>
                 <a:cs typeface="Calibri" pitchFamily="34" charset="-120"/>
               </a:rPr>
-              <a:t>Likely to change or able to be changed.</a:t>
+              <a:t>Can be washed without being damaged.</a:t>
             </a:r>
             <a:endParaRPr lang="en-US" sz="1200" dirty="0"/>
           </a:p>
@@ -44651,7 +43349,7 @@
                 <a:ea typeface="Trebuchet MS" pitchFamily="34" charset="-122"/>
                 <a:cs typeface="Trebuchet MS" pitchFamily="34" charset="-120"/>
               </a:rPr>
-              <a:t>breakable</a:t>
+              <a:t>comfortable</a:t>
             </a:r>
             <a:endParaRPr lang="en-US" sz="1200" dirty="0"/>
           </a:p>
@@ -44717,7 +43415,7 @@
                 <a:ea typeface="Calibri" pitchFamily="34" charset="-122"/>
                 <a:cs typeface="Calibri" pitchFamily="34" charset="-120"/>
               </a:rPr>
-              <a:t>So unusual or impressive that it deserves to be noticed.</a:t>
+              <a:t>Likely to change often, like the weather on a cloudy day.</a:t>
             </a:r>
             <a:endParaRPr lang="en-US" sz="1200" dirty="0"/>
           </a:p>
@@ -44790,7 +43488,7 @@
                 <a:ea typeface="Trebuchet MS" pitchFamily="34" charset="-122"/>
                 <a:cs typeface="Trebuchet MS" pitchFamily="34" charset="-120"/>
               </a:rPr>
-              <a:t>changeable</a:t>
+              <a:t>washable</a:t>
             </a:r>
             <a:endParaRPr lang="en-US" sz="1200" dirty="0"/>
           </a:p>
@@ -44856,7 +43554,7 @@
                 <a:ea typeface="Calibri" pitchFamily="34" charset="-122"/>
                 <a:cs typeface="Calibri" pitchFamily="34" charset="-120"/>
               </a:rPr>
-              <a:t>Something that can easily be broken.</a:t>
+              <a:t>Feeling relaxed and at ease, with no pain or discomfort.</a:t>
             </a:r>
             <a:endParaRPr lang="en-US" sz="1200" dirty="0"/>
           </a:p>
@@ -44929,7 +43627,7 @@
                 <a:ea typeface="Trebuchet MS" pitchFamily="34" charset="-122"/>
                 <a:cs typeface="Trebuchet MS" pitchFamily="34" charset="-120"/>
               </a:rPr>
-              <a:t>comfortable</a:t>
+              <a:t>unbelievable</a:t>
             </a:r>
             <a:endParaRPr lang="en-US" sz="1200" dirty="0"/>
           </a:p>
@@ -44995,7 +43693,7 @@
                 <a:ea typeface="Calibri" pitchFamily="34" charset="-122"/>
                 <a:cs typeface="Calibri" pitchFamily="34" charset="-120"/>
               </a:rPr>
-              <a:t>Impossible to break, no matter how hard you try.</a:t>
+              <a:t>Easy and pleasant to read.</a:t>
             </a:r>
             <a:endParaRPr lang="en-US" sz="1200" dirty="0"/>
           </a:p>
@@ -45068,7 +43766,7 @@
                 <a:ea typeface="Trebuchet MS" pitchFamily="34" charset="-122"/>
                 <a:cs typeface="Trebuchet MS" pitchFamily="34" charset="-120"/>
               </a:rPr>
-              <a:t>remarkable</a:t>
+              <a:t>changeable</a:t>
             </a:r>
             <a:endParaRPr lang="en-US" sz="1200" dirty="0"/>
           </a:p>
@@ -45134,7 +43832,7 @@
                 <a:ea typeface="Calibri" pitchFamily="34" charset="-122"/>
                 <a:cs typeface="Calibri" pitchFamily="34" charset="-120"/>
               </a:rPr>
-              <a:t>Easy enough to read and understand.</a:t>
+              <a:t>Something that gives you pleasure or is fun to do.</a:t>
             </a:r>
             <a:endParaRPr lang="en-US" sz="1200" dirty="0"/>
           </a:p>
@@ -45207,7 +43905,7 @@
                 <a:ea typeface="Trebuchet MS" pitchFamily="34" charset="-122"/>
                 <a:cs typeface="Trebuchet MS" pitchFamily="34" charset="-120"/>
               </a:rPr>
-              <a:t>unbreakable</a:t>
+              <a:t>readable</a:t>
             </a:r>
             <a:endParaRPr lang="en-US" sz="1200" dirty="0"/>
           </a:p>
@@ -45273,7 +43971,7 @@
                 <a:ea typeface="Calibri" pitchFamily="34" charset="-122"/>
                 <a:cs typeface="Calibri" pitchFamily="34" charset="-120"/>
               </a:rPr>
-              <a:t>Can be washed without being damaged.</a:t>
+              <a:t>Something so special or unusual that people notice it.</a:t>
             </a:r>
             <a:endParaRPr lang="en-US" sz="1200" dirty="0"/>
           </a:p>
@@ -45565,7 +44263,7 @@
                 <a:ea typeface="Calibri" pitchFamily="34" charset="-122"/>
                 <a:cs typeface="Calibri" pitchFamily="34" charset="-120"/>
               </a:rPr>
-              <a:t>Word Labs  •  wordlabs.app  •  Suffix: '-able' = able to be done</a:t>
+              <a:t>Word Labs  •  wordlabs.app  •  Suffix: '-able' = can be done; capable of</a:t>
             </a:r>
             <a:endParaRPr lang="en-US" sz="800" dirty="0"/>
           </a:p>
@@ -45768,7 +44466,7 @@
                 <a:ea typeface="Calibri" pitchFamily="34" charset="-122"/>
                 <a:cs typeface="Calibri" pitchFamily="34" charset="-120"/>
               </a:rPr>
-              <a:t>The instructions were so clear that the task was very manageable for the whole class.</a:t>
+              <a:t>The view from the top of the mountain was absolutely remarkable.</a:t>
             </a:r>
             <a:endParaRPr lang="en-US" sz="1500" dirty="0"/>
           </a:p>
@@ -45932,7 +44630,7 @@
                 <a:ea typeface="Calibri" pitchFamily="34" charset="-122"/>
                 <a:cs typeface="Calibri" pitchFamily="34" charset="-120"/>
               </a:rPr>
-              <a:t>Mia thought the new playground equipment was absolutely remarkable.</a:t>
+              <a:t>Our teacher asked us to bring a washable water bottle to school every day.</a:t>
             </a:r>
             <a:endParaRPr lang="en-US" sz="1500" dirty="0"/>
           </a:p>
@@ -46096,7 +44794,7 @@
                 <a:ea typeface="Calibri" pitchFamily="34" charset="-122"/>
                 <a:cs typeface="Calibri" pitchFamily="34" charset="-120"/>
               </a:rPr>
-              <a:t>These cups are washable, so we can use them again and again.</a:t>
+              <a:t>The book was so readable that I finished it in one afternoon.</a:t>
             </a:r>
             <a:endParaRPr lang="en-US" sz="1500" dirty="0"/>
           </a:p>

--- a/output/wordlabs-able-suffix-3day.pptx
+++ b/output/wordlabs-able-suffix-3day.pptx
@@ -4240,7 +4240,7 @@
                 <a:ea typeface="Calibri" pitchFamily="34" charset="-122"/>
                 <a:cs typeface="Calibri" pitchFamily="34" charset="-120"/>
               </a:rPr>
-              <a:t>"can be done; capable of"</a:t>
+              <a:t>"able to"</a:t>
             </a:r>
             <a:endParaRPr lang="en-US" sz="2200" dirty="0"/>
           </a:p>
@@ -4279,7 +4279,7 @@
                 <a:ea typeface="Calibri" pitchFamily="34" charset="-122"/>
                 <a:cs typeface="Calibri" pitchFamily="34" charset="-120"/>
               </a:rPr>
-              <a:t>Origin: Latin: habilis</a:t>
+              <a:t>Origin: Suffix</a:t>
             </a:r>
             <a:endParaRPr lang="en-US" sz="1300" dirty="0"/>
           </a:p>
@@ -5288,7 +5288,7 @@
                 <a:ea typeface="Calibri" pitchFamily="34" charset="-122"/>
                 <a:cs typeface="Calibri" pitchFamily="34" charset="-120"/>
               </a:rPr>
-              <a:t>Word Labs  •  wordlabs.app  •  Suffix: '-able' = can be done; capable of</a:t>
+              <a:t>Word Labs  •  wordlabs.app  •  Suffix: '-able' = able to</a:t>
             </a:r>
             <a:endParaRPr lang="en-US" sz="800" dirty="0"/>
           </a:p>
@@ -5622,7 +5622,7 @@
                 <a:ea typeface="Trebuchet MS" pitchFamily="34" charset="-122"/>
                 <a:cs typeface="Trebuchet MS" pitchFamily="34" charset="-120"/>
               </a:rPr>
-              <a:t>1</a:t>
+              <a:t>0</a:t>
             </a:r>
             <a:pPr algn="ctr" indent="0" marL="0">
               <a:buNone/>
@@ -5928,7 +5928,7 @@
                 <a:ea typeface="Calibri" pitchFamily="34" charset="-122"/>
                 <a:cs typeface="Calibri" pitchFamily="34" charset="-120"/>
               </a:rPr>
-              <a:t>Word Labs  •  wordlabs.app  •  Suffix: '-able' = can be done; capable of</a:t>
+              <a:t>Word Labs  •  wordlabs.app  •  Suffix: '-able' = able to</a:t>
             </a:r>
             <a:endParaRPr lang="en-US" sz="800" dirty="0"/>
           </a:p>
@@ -6040,7 +6040,7 @@
                 <a:ea typeface="Calibri" pitchFamily="34" charset="-122"/>
                 <a:cs typeface="Calibri" pitchFamily="34" charset="-120"/>
               </a:rPr>
-              <a:t>The weather this week has been very </a:t>
+              <a:t>She shifted </a:t>
             </a:r>
             <a:pPr algn="l" indent="0" marL="0">
               <a:buNone/>
@@ -6057,7 +6057,7 @@
                 <a:ea typeface="Calibri" pitchFamily="34" charset="-122"/>
                 <a:cs typeface="Calibri" pitchFamily="34" charset="-120"/>
               </a:rPr>
-              <a:t>changeable</a:t>
+              <a:t>uncomfortably</a:t>
             </a:r>
             <a:pPr algn="l" indent="0" marL="0">
               <a:buNone/>
@@ -6071,7 +6071,7 @@
                 <a:ea typeface="Calibri" pitchFamily="34" charset="-122"/>
                 <a:cs typeface="Calibri" pitchFamily="34" charset="-120"/>
               </a:rPr>
-              <a:t>, but we still had an </a:t>
+              <a:t> in her seat during the long assembly. Our trip to the museum was a </a:t>
             </a:r>
             <a:pPr algn="l" indent="0" marL="0">
               <a:buNone/>
@@ -6088,7 +6088,7 @@
                 <a:ea typeface="Calibri" pitchFamily="34" charset="-122"/>
                 <a:cs typeface="Calibri" pitchFamily="34" charset="-120"/>
               </a:rPr>
-              <a:t>enjoyable</a:t>
+              <a:t>memorable</a:t>
             </a:r>
             <a:pPr algn="l" indent="0" marL="0">
               <a:buNone/>
@@ -6102,7 +6102,7 @@
                 <a:ea typeface="Calibri" pitchFamily="34" charset="-122"/>
                 <a:cs typeface="Calibri" pitchFamily="34" charset="-120"/>
               </a:rPr>
-              <a:t> picnic in the park.</a:t>
+              <a:t> day out.</a:t>
             </a:r>
             <a:endParaRPr lang="en-US" sz="1800" dirty="0"/>
           </a:p>
@@ -6257,7 +6257,7 @@
                 <a:ea typeface="Trebuchet MS" pitchFamily="34" charset="-122"/>
                 <a:cs typeface="Trebuchet MS" pitchFamily="34" charset="-120"/>
               </a:rPr>
-              <a:t>changeable</a:t>
+              <a:t>uncomfortably</a:t>
             </a:r>
             <a:endParaRPr lang="en-US" sz="1400" dirty="0"/>
           </a:p>
@@ -6385,7 +6385,7 @@
                 <a:ea typeface="Trebuchet MS" pitchFamily="34" charset="-122"/>
                 <a:cs typeface="Trebuchet MS" pitchFamily="34" charset="-120"/>
               </a:rPr>
-              <a:t>enjoyable</a:t>
+              <a:t>memorable</a:t>
             </a:r>
             <a:endParaRPr lang="en-US" sz="1400" dirty="0"/>
           </a:p>
@@ -6716,7 +6716,7 @@
                 <a:ea typeface="Calibri" pitchFamily="34" charset="-122"/>
                 <a:cs typeface="Calibri" pitchFamily="34" charset="-120"/>
               </a:rPr>
-              <a:t>Word Labs  •  wordlabs.app  •  Suffix: '-able' = can be done; capable of</a:t>
+              <a:t>Word Labs  •  wordlabs.app  •  Suffix: '-able' = able to</a:t>
             </a:r>
             <a:endParaRPr lang="en-US" sz="800" dirty="0"/>
           </a:p>
@@ -6855,7 +6855,7 @@
                 <a:ea typeface="Trebuchet MS" pitchFamily="34" charset="-122"/>
                 <a:cs typeface="Trebuchet MS" pitchFamily="34" charset="-120"/>
               </a:rPr>
-              <a:t>changeable</a:t>
+              <a:t>uncomfortably</a:t>
             </a:r>
             <a:endParaRPr lang="en-US" sz="2800" dirty="0"/>
           </a:p>
@@ -7543,7 +7543,7 @@
                 <a:ea typeface="Calibri" pitchFamily="34" charset="-122"/>
                 <a:cs typeface="Calibri" pitchFamily="34" charset="-120"/>
               </a:rPr>
-              <a:t>Word Labs  •  wordlabs.app  •  Suffix: '-able' = can be done; capable of</a:t>
+              <a:t>Word Labs  •  wordlabs.app  •  Suffix: '-able' = able to</a:t>
             </a:r>
             <a:endParaRPr lang="en-US" sz="800" dirty="0"/>
           </a:p>
@@ -7682,7 +7682,7 @@
                 <a:ea typeface="Trebuchet MS" pitchFamily="34" charset="-122"/>
                 <a:cs typeface="Trebuchet MS" pitchFamily="34" charset="-120"/>
               </a:rPr>
-              <a:t>changeable</a:t>
+              <a:t>uncomfortably</a:t>
             </a:r>
             <a:endParaRPr lang="en-US" sz="2800" dirty="0"/>
           </a:p>
@@ -7762,8 +7762,8 @@
         </p:nvSpPr>
         <p:spPr>
           <a:xfrm>
-            <a:off x="2938272" y="2258568"/>
-            <a:ext cx="1828800" cy="292608"/>
+            <a:off x="1989734" y="2258568"/>
+            <a:ext cx="1581912" cy="292608"/>
           </a:xfrm>
           <a:prstGeom prst="rect">
             <a:avLst>
@@ -7796,8 +7796,8 @@
         </p:nvSpPr>
         <p:spPr>
           <a:xfrm>
-            <a:off x="2938272" y="2258568"/>
-            <a:ext cx="1828800" cy="292608"/>
+            <a:off x="1989734" y="2258568"/>
+            <a:ext cx="1581912" cy="292608"/>
           </a:xfrm>
           <a:prstGeom prst="rect">
             <a:avLst/>
@@ -7821,7 +7821,7 @@
                 <a:ea typeface="Trebuchet MS" pitchFamily="34" charset="-122"/>
                 <a:cs typeface="Trebuchet MS" pitchFamily="34" charset="-120"/>
               </a:rPr>
-              <a:t>change</a:t>
+              <a:t>un</a:t>
             </a:r>
             <a:endParaRPr lang="en-US" sz="1300" dirty="0"/>
           </a:p>
@@ -7835,8 +7835,8 @@
         </p:nvSpPr>
         <p:spPr>
           <a:xfrm>
-            <a:off x="2938272" y="2569464"/>
-            <a:ext cx="1828800" cy="201168"/>
+            <a:off x="1989734" y="2569464"/>
+            <a:ext cx="1581912" cy="201168"/>
           </a:xfrm>
           <a:prstGeom prst="rect">
             <a:avLst/>
@@ -7860,7 +7860,7 @@
                 <a:ea typeface="Calibri" pitchFamily="34" charset="-122"/>
                 <a:cs typeface="Calibri" pitchFamily="34" charset="-120"/>
               </a:rPr>
-              <a:t>to alter or vary</a:t>
+              <a:t>not</a:t>
             </a:r>
             <a:endParaRPr lang="en-US" sz="850" dirty="0"/>
           </a:p>
@@ -7874,8 +7874,8 @@
         </p:nvSpPr>
         <p:spPr>
           <a:xfrm>
-            <a:off x="5803392" y="2258568"/>
-            <a:ext cx="1828800" cy="292608"/>
+            <a:off x="3659429" y="2258568"/>
+            <a:ext cx="1581912" cy="292608"/>
           </a:xfrm>
           <a:prstGeom prst="rect">
             <a:avLst>
@@ -7883,11 +7883,11 @@
             </a:avLst>
           </a:prstGeom>
           <a:solidFill>
-            <a:srgbClr val="CCFBF1"/>
+            <a:srgbClr val="FCE7F3"/>
           </a:solidFill>
           <a:ln w="19050">
             <a:solidFill>
-              <a:srgbClr val="0D9488"/>
+              <a:srgbClr val="DB2777"/>
             </a:solidFill>
             <a:prstDash val="solid"/>
           </a:ln>
@@ -7908,8 +7908,8 @@
         </p:nvSpPr>
         <p:spPr>
           <a:xfrm>
-            <a:off x="5803392" y="2258568"/>
-            <a:ext cx="1828800" cy="292608"/>
+            <a:off x="3659429" y="2258568"/>
+            <a:ext cx="1581912" cy="292608"/>
           </a:xfrm>
           <a:prstGeom prst="rect">
             <a:avLst/>
@@ -7927,13 +7927,13 @@
             <a:r>
               <a:rPr lang="en-US" sz="1300" b="1" dirty="0">
                 <a:solidFill>
-                  <a:srgbClr val="0F766E"/>
+                  <a:srgbClr val="9D174D"/>
                 </a:solidFill>
                 <a:latin typeface="Trebuchet MS" pitchFamily="34" charset="0"/>
                 <a:ea typeface="Trebuchet MS" pitchFamily="34" charset="-122"/>
                 <a:cs typeface="Trebuchet MS" pitchFamily="34" charset="-120"/>
               </a:rPr>
-              <a:t>able</a:t>
+              <a:t>comfort</a:t>
             </a:r>
             <a:endParaRPr lang="en-US" sz="1300" dirty="0"/>
           </a:p>
@@ -7947,8 +7947,8 @@
         </p:nvSpPr>
         <p:spPr>
           <a:xfrm>
-            <a:off x="5803392" y="2569464"/>
-            <a:ext cx="1828800" cy="201168"/>
+            <a:off x="3659429" y="2569464"/>
+            <a:ext cx="1581912" cy="201168"/>
           </a:xfrm>
           <a:prstGeom prst="rect">
             <a:avLst/>
@@ -7972,7 +7972,7 @@
                 <a:ea typeface="Calibri" pitchFamily="34" charset="-122"/>
                 <a:cs typeface="Calibri" pitchFamily="34" charset="-120"/>
               </a:rPr>
-              <a:t>can be done; capable of</a:t>
+              <a:t>a state of ease; to soothe</a:t>
             </a:r>
             <a:endParaRPr lang="en-US" sz="850" dirty="0"/>
           </a:p>
@@ -7980,14 +7980,87 @@
       </p:sp>
       <p:sp>
         <p:nvSpPr>
-          <p:cNvPr id="22" name="Text 20"/>
-          <p:cNvSpPr/>
-          <p:nvPr/>
-        </p:nvSpPr>
-        <p:spPr>
-          <a:xfrm>
-            <a:off x="5803392" y="2752344"/>
-            <a:ext cx="1828800" cy="182880"/>
+          <p:cNvPr id="22" name="Shape 20"/>
+          <p:cNvSpPr/>
+          <p:nvPr/>
+        </p:nvSpPr>
+        <p:spPr>
+          <a:xfrm>
+            <a:off x="5329123" y="2258568"/>
+            <a:ext cx="1581912" cy="292608"/>
+          </a:xfrm>
+          <a:prstGeom prst="rect">
+            <a:avLst>
+              <a:gd name="adj" fmla="val 25000"/>
+            </a:avLst>
+          </a:prstGeom>
+          <a:solidFill>
+            <a:srgbClr val="CCFBF1"/>
+          </a:solidFill>
+          <a:ln w="19050">
+            <a:solidFill>
+              <a:srgbClr val="0D9488"/>
+            </a:solidFill>
+            <a:prstDash val="solid"/>
+          </a:ln>
+          <a:effectLst>
+            <a:outerShdw sx="100000" sy="100000" kx="0" ky="0" algn="bl" rotWithShape="0" blurRad="101600" dist="38100" dir="8100000">
+              <a:srgbClr val="000000">
+                <a:alpha val="12000"/>
+              </a:srgbClr>
+            </a:outerShdw>
+          </a:effectLst>
+        </p:spPr>
+      </p:sp>
+      <p:sp>
+        <p:nvSpPr>
+          <p:cNvPr id="23" name="Text 21"/>
+          <p:cNvSpPr/>
+          <p:nvPr/>
+        </p:nvSpPr>
+        <p:spPr>
+          <a:xfrm>
+            <a:off x="5329123" y="2258568"/>
+            <a:ext cx="1581912" cy="292608"/>
+          </a:xfrm>
+          <a:prstGeom prst="rect">
+            <a:avLst/>
+          </a:prstGeom>
+          <a:noFill/>
+          <a:ln/>
+        </p:spPr>
+        <p:txBody>
+          <a:bodyPr wrap="square" lIns="0" tIns="0" rIns="0" bIns="0" rtlCol="0" anchor="ctr"/>
+          <a:lstStyle/>
+          <a:p>
+            <a:pPr algn="ctr" indent="0" marL="0">
+              <a:buNone/>
+            </a:pPr>
+            <a:r>
+              <a:rPr lang="en-US" sz="1300" b="1" dirty="0">
+                <a:solidFill>
+                  <a:srgbClr val="0F766E"/>
+                </a:solidFill>
+                <a:latin typeface="Trebuchet MS" pitchFamily="34" charset="0"/>
+                <a:ea typeface="Trebuchet MS" pitchFamily="34" charset="-122"/>
+                <a:cs typeface="Trebuchet MS" pitchFamily="34" charset="-120"/>
+              </a:rPr>
+              <a:t>able</a:t>
+            </a:r>
+            <a:endParaRPr lang="en-US" sz="1300" dirty="0"/>
+          </a:p>
+        </p:txBody>
+      </p:sp>
+      <p:sp>
+        <p:nvSpPr>
+          <p:cNvPr id="24" name="Text 22"/>
+          <p:cNvSpPr/>
+          <p:nvPr/>
+        </p:nvSpPr>
+        <p:spPr>
+          <a:xfrm>
+            <a:off x="5329123" y="2569464"/>
+            <a:ext cx="1581912" cy="201168"/>
           </a:xfrm>
           <a:prstGeom prst="rect">
             <a:avLst/>
@@ -8003,23 +8076,135 @@
               <a:buNone/>
             </a:pPr>
             <a:r>
-              <a:rPr lang="en-US" sz="700" i="1" dirty="0">
-                <a:solidFill>
-                  <a:srgbClr val="94A3B8"/>
+              <a:rPr lang="en-US" sz="850" dirty="0">
+                <a:solidFill>
+                  <a:srgbClr val="475569"/>
                 </a:solidFill>
                 <a:latin typeface="Calibri" pitchFamily="34" charset="0"/>
                 <a:ea typeface="Calibri" pitchFamily="34" charset="-122"/>
                 <a:cs typeface="Calibri" pitchFamily="34" charset="-120"/>
               </a:rPr>
-              <a:t>'e' kept before '-able' here to preserve the /j/ sound of 'g'</a:t>
-            </a:r>
-            <a:endParaRPr lang="en-US" sz="700" dirty="0"/>
-          </a:p>
-        </p:txBody>
-      </p:sp>
-      <p:sp>
-        <p:nvSpPr>
-          <p:cNvPr id="23" name="Shape 21"/>
+              <a:t>able to</a:t>
+            </a:r>
+            <a:endParaRPr lang="en-US" sz="850" dirty="0"/>
+          </a:p>
+        </p:txBody>
+      </p:sp>
+      <p:sp>
+        <p:nvSpPr>
+          <p:cNvPr id="25" name="Shape 23"/>
+          <p:cNvSpPr/>
+          <p:nvPr/>
+        </p:nvSpPr>
+        <p:spPr>
+          <a:xfrm>
+            <a:off x="6998818" y="2258568"/>
+            <a:ext cx="1581912" cy="292608"/>
+          </a:xfrm>
+          <a:prstGeom prst="rect">
+            <a:avLst>
+              <a:gd name="adj" fmla="val 25000"/>
+            </a:avLst>
+          </a:prstGeom>
+          <a:solidFill>
+            <a:srgbClr val="FCE7F3"/>
+          </a:solidFill>
+          <a:ln w="19050">
+            <a:solidFill>
+              <a:srgbClr val="DB2777"/>
+            </a:solidFill>
+            <a:prstDash val="solid"/>
+          </a:ln>
+          <a:effectLst>
+            <a:outerShdw sx="100000" sy="100000" kx="0" ky="0" algn="bl" rotWithShape="0" blurRad="101600" dist="38100" dir="8100000">
+              <a:srgbClr val="000000">
+                <a:alpha val="12000"/>
+              </a:srgbClr>
+            </a:outerShdw>
+          </a:effectLst>
+        </p:spPr>
+      </p:sp>
+      <p:sp>
+        <p:nvSpPr>
+          <p:cNvPr id="26" name="Text 24"/>
+          <p:cNvSpPr/>
+          <p:nvPr/>
+        </p:nvSpPr>
+        <p:spPr>
+          <a:xfrm>
+            <a:off x="6998818" y="2258568"/>
+            <a:ext cx="1581912" cy="292608"/>
+          </a:xfrm>
+          <a:prstGeom prst="rect">
+            <a:avLst/>
+          </a:prstGeom>
+          <a:noFill/>
+          <a:ln/>
+        </p:spPr>
+        <p:txBody>
+          <a:bodyPr wrap="square" lIns="0" tIns="0" rIns="0" bIns="0" rtlCol="0" anchor="ctr"/>
+          <a:lstStyle/>
+          <a:p>
+            <a:pPr algn="ctr" indent="0" marL="0">
+              <a:buNone/>
+            </a:pPr>
+            <a:r>
+              <a:rPr lang="en-US" sz="1300" b="1" dirty="0">
+                <a:solidFill>
+                  <a:srgbClr val="9D174D"/>
+                </a:solidFill>
+                <a:latin typeface="Trebuchet MS" pitchFamily="34" charset="0"/>
+                <a:ea typeface="Trebuchet MS" pitchFamily="34" charset="-122"/>
+                <a:cs typeface="Trebuchet MS" pitchFamily="34" charset="-120"/>
+              </a:rPr>
+              <a:t>ly</a:t>
+            </a:r>
+            <a:endParaRPr lang="en-US" sz="1300" dirty="0"/>
+          </a:p>
+        </p:txBody>
+      </p:sp>
+      <p:sp>
+        <p:nvSpPr>
+          <p:cNvPr id="27" name="Text 25"/>
+          <p:cNvSpPr/>
+          <p:nvPr/>
+        </p:nvSpPr>
+        <p:spPr>
+          <a:xfrm>
+            <a:off x="6998818" y="2569464"/>
+            <a:ext cx="1581912" cy="201168"/>
+          </a:xfrm>
+          <a:prstGeom prst="rect">
+            <a:avLst/>
+          </a:prstGeom>
+          <a:noFill/>
+          <a:ln/>
+        </p:spPr>
+        <p:txBody>
+          <a:bodyPr wrap="square" lIns="0" tIns="0" rIns="0" bIns="0" rtlCol="0" anchor="t"/>
+          <a:lstStyle/>
+          <a:p>
+            <a:pPr algn="ctr" indent="0" marL="0">
+              <a:buNone/>
+            </a:pPr>
+            <a:r>
+              <a:rPr lang="en-US" sz="850" dirty="0">
+                <a:solidFill>
+                  <a:srgbClr val="475569"/>
+                </a:solidFill>
+                <a:latin typeface="Calibri" pitchFamily="34" charset="0"/>
+                <a:ea typeface="Calibri" pitchFamily="34" charset="-122"/>
+                <a:cs typeface="Calibri" pitchFamily="34" charset="-120"/>
+              </a:rPr>
+              <a:t>in a way</a:t>
+            </a:r>
+            <a:endParaRPr lang="en-US" sz="850" dirty="0"/>
+          </a:p>
+        </p:txBody>
+      </p:sp>
+      <p:sp>
+        <p:nvSpPr>
+          <p:cNvPr id="28" name="Shape 26"/>
           <p:cNvSpPr/>
           <p:nvPr/>
         </p:nvSpPr>
@@ -8046,7 +8231,7 @@
       </p:sp>
       <p:sp>
         <p:nvSpPr>
-          <p:cNvPr id="24" name="Text 22"/>
+          <p:cNvPr id="29" name="Text 27"/>
           <p:cNvSpPr/>
           <p:nvPr/>
         </p:nvSpPr>
@@ -8085,7 +8270,7 @@
       </p:sp>
       <p:sp>
         <p:nvSpPr>
-          <p:cNvPr id="25" name="Shape 23"/>
+          <p:cNvPr id="30" name="Shape 28"/>
           <p:cNvSpPr/>
           <p:nvPr/>
         </p:nvSpPr>
@@ -8112,7 +8297,7 @@
       </p:sp>
       <p:sp>
         <p:nvSpPr>
-          <p:cNvPr id="26" name="Text 24"/>
+          <p:cNvPr id="31" name="Text 29"/>
           <p:cNvSpPr/>
           <p:nvPr/>
         </p:nvSpPr>
@@ -8151,7 +8336,7 @@
       </p:sp>
       <p:sp>
         <p:nvSpPr>
-          <p:cNvPr id="27" name="Shape 25"/>
+          <p:cNvPr id="32" name="Shape 30"/>
           <p:cNvSpPr/>
           <p:nvPr/>
         </p:nvSpPr>
@@ -8178,7 +8363,7 @@
       </p:sp>
       <p:sp>
         <p:nvSpPr>
-          <p:cNvPr id="28" name="Text 26"/>
+          <p:cNvPr id="33" name="Text 31"/>
           <p:cNvSpPr/>
           <p:nvPr/>
         </p:nvSpPr>
@@ -8217,7 +8402,7 @@
       </p:sp>
       <p:sp>
         <p:nvSpPr>
-          <p:cNvPr id="29" name="Shape 27"/>
+          <p:cNvPr id="34" name="Shape 32"/>
           <p:cNvSpPr/>
           <p:nvPr/>
         </p:nvSpPr>
@@ -8244,7 +8429,7 @@
       </p:sp>
       <p:sp>
         <p:nvSpPr>
-          <p:cNvPr id="30" name="Text 28"/>
+          <p:cNvPr id="35" name="Text 33"/>
           <p:cNvSpPr/>
           <p:nvPr/>
         </p:nvSpPr>
@@ -8567,7 +8752,7 @@
                 <a:ea typeface="Calibri" pitchFamily="34" charset="-122"/>
                 <a:cs typeface="Calibri" pitchFamily="34" charset="-120"/>
               </a:rPr>
-              <a:t>Word Labs  •  wordlabs.app  •  Suffix: '-able' = can be done; capable of</a:t>
+              <a:t>Word Labs  •  wordlabs.app  •  Suffix: '-able' = able to</a:t>
             </a:r>
             <a:endParaRPr lang="en-US" sz="800" dirty="0"/>
           </a:p>
@@ -8706,7 +8891,7 @@
                 <a:ea typeface="Trebuchet MS" pitchFamily="34" charset="-122"/>
                 <a:cs typeface="Trebuchet MS" pitchFamily="34" charset="-120"/>
               </a:rPr>
-              <a:t>changeable</a:t>
+              <a:t>uncomfortably</a:t>
             </a:r>
             <a:endParaRPr lang="en-US" sz="2800" dirty="0"/>
           </a:p>
@@ -8786,8 +8971,8 @@
         </p:nvSpPr>
         <p:spPr>
           <a:xfrm>
-            <a:off x="2938272" y="2258568"/>
-            <a:ext cx="1828800" cy="292608"/>
+            <a:off x="1989734" y="2258568"/>
+            <a:ext cx="1581912" cy="292608"/>
           </a:xfrm>
           <a:prstGeom prst="rect">
             <a:avLst>
@@ -8820,8 +9005,8 @@
         </p:nvSpPr>
         <p:spPr>
           <a:xfrm>
-            <a:off x="2938272" y="2258568"/>
-            <a:ext cx="1828800" cy="292608"/>
+            <a:off x="1989734" y="2258568"/>
+            <a:ext cx="1581912" cy="292608"/>
           </a:xfrm>
           <a:prstGeom prst="rect">
             <a:avLst/>
@@ -8845,7 +9030,7 @@
                 <a:ea typeface="Trebuchet MS" pitchFamily="34" charset="-122"/>
                 <a:cs typeface="Trebuchet MS" pitchFamily="34" charset="-120"/>
               </a:rPr>
-              <a:t>change</a:t>
+              <a:t>un</a:t>
             </a:r>
             <a:endParaRPr lang="en-US" sz="1300" dirty="0"/>
           </a:p>
@@ -8859,8 +9044,8 @@
         </p:nvSpPr>
         <p:spPr>
           <a:xfrm>
-            <a:off x="2938272" y="2569464"/>
-            <a:ext cx="1828800" cy="201168"/>
+            <a:off x="1989734" y="2569464"/>
+            <a:ext cx="1581912" cy="201168"/>
           </a:xfrm>
           <a:prstGeom prst="rect">
             <a:avLst/>
@@ -8884,7 +9069,7 @@
                 <a:ea typeface="Calibri" pitchFamily="34" charset="-122"/>
                 <a:cs typeface="Calibri" pitchFamily="34" charset="-120"/>
               </a:rPr>
-              <a:t>to alter or vary</a:t>
+              <a:t>not</a:t>
             </a:r>
             <a:endParaRPr lang="en-US" sz="850" dirty="0"/>
           </a:p>
@@ -8898,8 +9083,8 @@
         </p:nvSpPr>
         <p:spPr>
           <a:xfrm>
-            <a:off x="5803392" y="2258568"/>
-            <a:ext cx="1828800" cy="292608"/>
+            <a:off x="3659429" y="2258568"/>
+            <a:ext cx="1581912" cy="292608"/>
           </a:xfrm>
           <a:prstGeom prst="rect">
             <a:avLst>
@@ -8907,11 +9092,11 @@
             </a:avLst>
           </a:prstGeom>
           <a:solidFill>
-            <a:srgbClr val="CCFBF1"/>
+            <a:srgbClr val="FCE7F3"/>
           </a:solidFill>
           <a:ln w="19050">
             <a:solidFill>
-              <a:srgbClr val="0D9488"/>
+              <a:srgbClr val="DB2777"/>
             </a:solidFill>
             <a:prstDash val="solid"/>
           </a:ln>
@@ -8932,8 +9117,8 @@
         </p:nvSpPr>
         <p:spPr>
           <a:xfrm>
-            <a:off x="5803392" y="2258568"/>
-            <a:ext cx="1828800" cy="292608"/>
+            <a:off x="3659429" y="2258568"/>
+            <a:ext cx="1581912" cy="292608"/>
           </a:xfrm>
           <a:prstGeom prst="rect">
             <a:avLst/>
@@ -8951,13 +9136,13 @@
             <a:r>
               <a:rPr lang="en-US" sz="1300" b="1" dirty="0">
                 <a:solidFill>
-                  <a:srgbClr val="0F766E"/>
+                  <a:srgbClr val="9D174D"/>
                 </a:solidFill>
                 <a:latin typeface="Trebuchet MS" pitchFamily="34" charset="0"/>
                 <a:ea typeface="Trebuchet MS" pitchFamily="34" charset="-122"/>
                 <a:cs typeface="Trebuchet MS" pitchFamily="34" charset="-120"/>
               </a:rPr>
-              <a:t>able</a:t>
+              <a:t>comfort</a:t>
             </a:r>
             <a:endParaRPr lang="en-US" sz="1300" dirty="0"/>
           </a:p>
@@ -8971,8 +9156,8 @@
         </p:nvSpPr>
         <p:spPr>
           <a:xfrm>
-            <a:off x="5803392" y="2569464"/>
-            <a:ext cx="1828800" cy="201168"/>
+            <a:off x="3659429" y="2569464"/>
+            <a:ext cx="1581912" cy="201168"/>
           </a:xfrm>
           <a:prstGeom prst="rect">
             <a:avLst/>
@@ -8996,7 +9181,7 @@
                 <a:ea typeface="Calibri" pitchFamily="34" charset="-122"/>
                 <a:cs typeface="Calibri" pitchFamily="34" charset="-120"/>
               </a:rPr>
-              <a:t>can be done; capable of</a:t>
+              <a:t>a state of ease; to soothe</a:t>
             </a:r>
             <a:endParaRPr lang="en-US" sz="850" dirty="0"/>
           </a:p>
@@ -9004,14 +9189,87 @@
       </p:sp>
       <p:sp>
         <p:nvSpPr>
-          <p:cNvPr id="22" name="Text 20"/>
-          <p:cNvSpPr/>
-          <p:nvPr/>
-        </p:nvSpPr>
-        <p:spPr>
-          <a:xfrm>
-            <a:off x="5803392" y="2752344"/>
-            <a:ext cx="1828800" cy="182880"/>
+          <p:cNvPr id="22" name="Shape 20"/>
+          <p:cNvSpPr/>
+          <p:nvPr/>
+        </p:nvSpPr>
+        <p:spPr>
+          <a:xfrm>
+            <a:off x="5329123" y="2258568"/>
+            <a:ext cx="1581912" cy="292608"/>
+          </a:xfrm>
+          <a:prstGeom prst="rect">
+            <a:avLst>
+              <a:gd name="adj" fmla="val 25000"/>
+            </a:avLst>
+          </a:prstGeom>
+          <a:solidFill>
+            <a:srgbClr val="CCFBF1"/>
+          </a:solidFill>
+          <a:ln w="19050">
+            <a:solidFill>
+              <a:srgbClr val="0D9488"/>
+            </a:solidFill>
+            <a:prstDash val="solid"/>
+          </a:ln>
+          <a:effectLst>
+            <a:outerShdw sx="100000" sy="100000" kx="0" ky="0" algn="bl" rotWithShape="0" blurRad="101600" dist="38100" dir="8100000">
+              <a:srgbClr val="000000">
+                <a:alpha val="12000"/>
+              </a:srgbClr>
+            </a:outerShdw>
+          </a:effectLst>
+        </p:spPr>
+      </p:sp>
+      <p:sp>
+        <p:nvSpPr>
+          <p:cNvPr id="23" name="Text 21"/>
+          <p:cNvSpPr/>
+          <p:nvPr/>
+        </p:nvSpPr>
+        <p:spPr>
+          <a:xfrm>
+            <a:off x="5329123" y="2258568"/>
+            <a:ext cx="1581912" cy="292608"/>
+          </a:xfrm>
+          <a:prstGeom prst="rect">
+            <a:avLst/>
+          </a:prstGeom>
+          <a:noFill/>
+          <a:ln/>
+        </p:spPr>
+        <p:txBody>
+          <a:bodyPr wrap="square" lIns="0" tIns="0" rIns="0" bIns="0" rtlCol="0" anchor="ctr"/>
+          <a:lstStyle/>
+          <a:p>
+            <a:pPr algn="ctr" indent="0" marL="0">
+              <a:buNone/>
+            </a:pPr>
+            <a:r>
+              <a:rPr lang="en-US" sz="1300" b="1" dirty="0">
+                <a:solidFill>
+                  <a:srgbClr val="0F766E"/>
+                </a:solidFill>
+                <a:latin typeface="Trebuchet MS" pitchFamily="34" charset="0"/>
+                <a:ea typeface="Trebuchet MS" pitchFamily="34" charset="-122"/>
+                <a:cs typeface="Trebuchet MS" pitchFamily="34" charset="-120"/>
+              </a:rPr>
+              <a:t>able</a:t>
+            </a:r>
+            <a:endParaRPr lang="en-US" sz="1300" dirty="0"/>
+          </a:p>
+        </p:txBody>
+      </p:sp>
+      <p:sp>
+        <p:nvSpPr>
+          <p:cNvPr id="24" name="Text 22"/>
+          <p:cNvSpPr/>
+          <p:nvPr/>
+        </p:nvSpPr>
+        <p:spPr>
+          <a:xfrm>
+            <a:off x="5329123" y="2569464"/>
+            <a:ext cx="1581912" cy="201168"/>
           </a:xfrm>
           <a:prstGeom prst="rect">
             <a:avLst/>
@@ -9027,23 +9285,135 @@
               <a:buNone/>
             </a:pPr>
             <a:r>
-              <a:rPr lang="en-US" sz="700" i="1" dirty="0">
-                <a:solidFill>
-                  <a:srgbClr val="94A3B8"/>
+              <a:rPr lang="en-US" sz="850" dirty="0">
+                <a:solidFill>
+                  <a:srgbClr val="475569"/>
                 </a:solidFill>
                 <a:latin typeface="Calibri" pitchFamily="34" charset="0"/>
                 <a:ea typeface="Calibri" pitchFamily="34" charset="-122"/>
                 <a:cs typeface="Calibri" pitchFamily="34" charset="-120"/>
               </a:rPr>
-              <a:t>'e' kept before '-able' here to preserve the /j/ sound of 'g'</a:t>
-            </a:r>
-            <a:endParaRPr lang="en-US" sz="700" dirty="0"/>
-          </a:p>
-        </p:txBody>
-      </p:sp>
-      <p:sp>
-        <p:nvSpPr>
-          <p:cNvPr id="23" name="Shape 21"/>
+              <a:t>able to</a:t>
+            </a:r>
+            <a:endParaRPr lang="en-US" sz="850" dirty="0"/>
+          </a:p>
+        </p:txBody>
+      </p:sp>
+      <p:sp>
+        <p:nvSpPr>
+          <p:cNvPr id="25" name="Shape 23"/>
+          <p:cNvSpPr/>
+          <p:nvPr/>
+        </p:nvSpPr>
+        <p:spPr>
+          <a:xfrm>
+            <a:off x="6998818" y="2258568"/>
+            <a:ext cx="1581912" cy="292608"/>
+          </a:xfrm>
+          <a:prstGeom prst="rect">
+            <a:avLst>
+              <a:gd name="adj" fmla="val 25000"/>
+            </a:avLst>
+          </a:prstGeom>
+          <a:solidFill>
+            <a:srgbClr val="FCE7F3"/>
+          </a:solidFill>
+          <a:ln w="19050">
+            <a:solidFill>
+              <a:srgbClr val="DB2777"/>
+            </a:solidFill>
+            <a:prstDash val="solid"/>
+          </a:ln>
+          <a:effectLst>
+            <a:outerShdw sx="100000" sy="100000" kx="0" ky="0" algn="bl" rotWithShape="0" blurRad="101600" dist="38100" dir="8100000">
+              <a:srgbClr val="000000">
+                <a:alpha val="12000"/>
+              </a:srgbClr>
+            </a:outerShdw>
+          </a:effectLst>
+        </p:spPr>
+      </p:sp>
+      <p:sp>
+        <p:nvSpPr>
+          <p:cNvPr id="26" name="Text 24"/>
+          <p:cNvSpPr/>
+          <p:nvPr/>
+        </p:nvSpPr>
+        <p:spPr>
+          <a:xfrm>
+            <a:off x="6998818" y="2258568"/>
+            <a:ext cx="1581912" cy="292608"/>
+          </a:xfrm>
+          <a:prstGeom prst="rect">
+            <a:avLst/>
+          </a:prstGeom>
+          <a:noFill/>
+          <a:ln/>
+        </p:spPr>
+        <p:txBody>
+          <a:bodyPr wrap="square" lIns="0" tIns="0" rIns="0" bIns="0" rtlCol="0" anchor="ctr"/>
+          <a:lstStyle/>
+          <a:p>
+            <a:pPr algn="ctr" indent="0" marL="0">
+              <a:buNone/>
+            </a:pPr>
+            <a:r>
+              <a:rPr lang="en-US" sz="1300" b="1" dirty="0">
+                <a:solidFill>
+                  <a:srgbClr val="9D174D"/>
+                </a:solidFill>
+                <a:latin typeface="Trebuchet MS" pitchFamily="34" charset="0"/>
+                <a:ea typeface="Trebuchet MS" pitchFamily="34" charset="-122"/>
+                <a:cs typeface="Trebuchet MS" pitchFamily="34" charset="-120"/>
+              </a:rPr>
+              <a:t>ly</a:t>
+            </a:r>
+            <a:endParaRPr lang="en-US" sz="1300" dirty="0"/>
+          </a:p>
+        </p:txBody>
+      </p:sp>
+      <p:sp>
+        <p:nvSpPr>
+          <p:cNvPr id="27" name="Text 25"/>
+          <p:cNvSpPr/>
+          <p:nvPr/>
+        </p:nvSpPr>
+        <p:spPr>
+          <a:xfrm>
+            <a:off x="6998818" y="2569464"/>
+            <a:ext cx="1581912" cy="201168"/>
+          </a:xfrm>
+          <a:prstGeom prst="rect">
+            <a:avLst/>
+          </a:prstGeom>
+          <a:noFill/>
+          <a:ln/>
+        </p:spPr>
+        <p:txBody>
+          <a:bodyPr wrap="square" lIns="0" tIns="0" rIns="0" bIns="0" rtlCol="0" anchor="t"/>
+          <a:lstStyle/>
+          <a:p>
+            <a:pPr algn="ctr" indent="0" marL="0">
+              <a:buNone/>
+            </a:pPr>
+            <a:r>
+              <a:rPr lang="en-US" sz="850" dirty="0">
+                <a:solidFill>
+                  <a:srgbClr val="475569"/>
+                </a:solidFill>
+                <a:latin typeface="Calibri" pitchFamily="34" charset="0"/>
+                <a:ea typeface="Calibri" pitchFamily="34" charset="-122"/>
+                <a:cs typeface="Calibri" pitchFamily="34" charset="-120"/>
+              </a:rPr>
+              <a:t>in a way</a:t>
+            </a:r>
+            <a:endParaRPr lang="en-US" sz="850" dirty="0"/>
+          </a:p>
+        </p:txBody>
+      </p:sp>
+      <p:sp>
+        <p:nvSpPr>
+          <p:cNvPr id="28" name="Shape 26"/>
           <p:cNvSpPr/>
           <p:nvPr/>
         </p:nvSpPr>
@@ -9070,7 +9440,7 @@
       </p:sp>
       <p:sp>
         <p:nvSpPr>
-          <p:cNvPr id="24" name="Text 22"/>
+          <p:cNvPr id="29" name="Text 27"/>
           <p:cNvSpPr/>
           <p:nvPr/>
         </p:nvSpPr>
@@ -9109,7 +9479,7 @@
       </p:sp>
       <p:sp>
         <p:nvSpPr>
-          <p:cNvPr id="25" name="Shape 23"/>
+          <p:cNvPr id="30" name="Shape 28"/>
           <p:cNvSpPr/>
           <p:nvPr/>
         </p:nvSpPr>
@@ -9136,14 +9506,14 @@
       </p:sp>
       <p:sp>
         <p:nvSpPr>
-          <p:cNvPr id="26" name="Shape 24"/>
-          <p:cNvSpPr/>
-          <p:nvPr/>
-        </p:nvSpPr>
-        <p:spPr>
-          <a:xfrm>
-            <a:off x="2313432" y="3364992"/>
-            <a:ext cx="1645920" cy="475488"/>
+          <p:cNvPr id="31" name="Shape 29"/>
+          <p:cNvSpPr/>
+          <p:nvPr/>
+        </p:nvSpPr>
+        <p:spPr>
+          <a:xfrm>
+            <a:off x="1978152" y="3364992"/>
+            <a:ext cx="1225296" cy="475488"/>
           </a:xfrm>
           <a:prstGeom prst="rect">
             <a:avLst>
@@ -9163,14 +9533,14 @@
       </p:sp>
       <p:sp>
         <p:nvSpPr>
-          <p:cNvPr id="27" name="Text 25"/>
-          <p:cNvSpPr/>
-          <p:nvPr/>
-        </p:nvSpPr>
-        <p:spPr>
-          <a:xfrm>
-            <a:off x="2313432" y="3364992"/>
-            <a:ext cx="1645920" cy="475488"/>
+          <p:cNvPr id="32" name="Text 30"/>
+          <p:cNvSpPr/>
+          <p:nvPr/>
+        </p:nvSpPr>
+        <p:spPr>
+          <a:xfrm>
+            <a:off x="1978152" y="3364992"/>
+            <a:ext cx="1225296" cy="475488"/>
           </a:xfrm>
           <a:prstGeom prst="rect">
             <a:avLst/>
@@ -9194,7 +9564,7 @@
                 <a:ea typeface="Trebuchet MS" pitchFamily="34" charset="-122"/>
                 <a:cs typeface="Trebuchet MS" pitchFamily="34" charset="-120"/>
               </a:rPr>
-              <a:t>change</a:t>
+              <a:t>un</a:t>
             </a:r>
             <a:endParaRPr lang="en-US" sz="1400" dirty="0"/>
           </a:p>
@@ -9202,14 +9572,14 @@
       </p:sp>
       <p:sp>
         <p:nvSpPr>
-          <p:cNvPr id="28" name="Text 26"/>
-          <p:cNvSpPr/>
-          <p:nvPr/>
-        </p:nvSpPr>
-        <p:spPr>
-          <a:xfrm>
-            <a:off x="3959352" y="3364992"/>
-            <a:ext cx="411480" cy="475488"/>
+          <p:cNvPr id="33" name="Text 31"/>
+          <p:cNvSpPr/>
+          <p:nvPr/>
+        </p:nvSpPr>
+        <p:spPr>
+          <a:xfrm>
+            <a:off x="3203448" y="3364992"/>
+            <a:ext cx="76200" cy="475488"/>
           </a:xfrm>
           <a:prstGeom prst="rect">
             <a:avLst/>
@@ -9241,14 +9611,14 @@
       </p:sp>
       <p:sp>
         <p:nvSpPr>
-          <p:cNvPr id="29" name="Shape 27"/>
-          <p:cNvSpPr/>
-          <p:nvPr/>
-        </p:nvSpPr>
-        <p:spPr>
-          <a:xfrm>
-            <a:off x="4370832" y="3364992"/>
-            <a:ext cx="1645920" cy="475488"/>
+          <p:cNvPr id="34" name="Shape 32"/>
+          <p:cNvSpPr/>
+          <p:nvPr/>
+        </p:nvSpPr>
+        <p:spPr>
+          <a:xfrm>
+            <a:off x="3279648" y="3364992"/>
+            <a:ext cx="1225296" cy="475488"/>
           </a:xfrm>
           <a:prstGeom prst="rect">
             <a:avLst>
@@ -9268,14 +9638,14 @@
       </p:sp>
       <p:sp>
         <p:nvSpPr>
-          <p:cNvPr id="30" name="Text 28"/>
-          <p:cNvSpPr/>
-          <p:nvPr/>
-        </p:nvSpPr>
-        <p:spPr>
-          <a:xfrm>
-            <a:off x="4370832" y="3364992"/>
-            <a:ext cx="1645920" cy="475488"/>
+          <p:cNvPr id="35" name="Text 33"/>
+          <p:cNvSpPr/>
+          <p:nvPr/>
+        </p:nvSpPr>
+        <p:spPr>
+          <a:xfrm>
+            <a:off x="3279648" y="3364992"/>
+            <a:ext cx="1225296" cy="475488"/>
           </a:xfrm>
           <a:prstGeom prst="rect">
             <a:avLst/>
@@ -9299,7 +9669,7 @@
                 <a:ea typeface="Trebuchet MS" pitchFamily="34" charset="-122"/>
                 <a:cs typeface="Trebuchet MS" pitchFamily="34" charset="-120"/>
               </a:rPr>
-              <a:t>a</a:t>
+              <a:t>com</a:t>
             </a:r>
             <a:endParaRPr lang="en-US" sz="1400" dirty="0"/>
           </a:p>
@@ -9307,14 +9677,14 @@
       </p:sp>
       <p:sp>
         <p:nvSpPr>
-          <p:cNvPr id="31" name="Text 29"/>
-          <p:cNvSpPr/>
-          <p:nvPr/>
-        </p:nvSpPr>
-        <p:spPr>
-          <a:xfrm>
-            <a:off x="6016752" y="3364992"/>
-            <a:ext cx="411480" cy="475488"/>
+          <p:cNvPr id="36" name="Text 34"/>
+          <p:cNvSpPr/>
+          <p:nvPr/>
+        </p:nvSpPr>
+        <p:spPr>
+          <a:xfrm>
+            <a:off x="4504944" y="3364992"/>
+            <a:ext cx="76200" cy="475488"/>
           </a:xfrm>
           <a:prstGeom prst="rect">
             <a:avLst/>
@@ -9346,14 +9716,14 @@
       </p:sp>
       <p:sp>
         <p:nvSpPr>
-          <p:cNvPr id="32" name="Shape 30"/>
-          <p:cNvSpPr/>
-          <p:nvPr/>
-        </p:nvSpPr>
-        <p:spPr>
-          <a:xfrm>
-            <a:off x="6428232" y="3364992"/>
-            <a:ext cx="1645920" cy="475488"/>
+          <p:cNvPr id="37" name="Shape 35"/>
+          <p:cNvSpPr/>
+          <p:nvPr/>
+        </p:nvSpPr>
+        <p:spPr>
+          <a:xfrm>
+            <a:off x="4581144" y="3364992"/>
+            <a:ext cx="1225296" cy="475488"/>
           </a:xfrm>
           <a:prstGeom prst="rect">
             <a:avLst>
@@ -9373,14 +9743,14 @@
       </p:sp>
       <p:sp>
         <p:nvSpPr>
-          <p:cNvPr id="33" name="Text 31"/>
-          <p:cNvSpPr/>
-          <p:nvPr/>
-        </p:nvSpPr>
-        <p:spPr>
-          <a:xfrm>
-            <a:off x="6428232" y="3364992"/>
-            <a:ext cx="1645920" cy="475488"/>
+          <p:cNvPr id="38" name="Text 36"/>
+          <p:cNvSpPr/>
+          <p:nvPr/>
+        </p:nvSpPr>
+        <p:spPr>
+          <a:xfrm>
+            <a:off x="4581144" y="3364992"/>
+            <a:ext cx="1225296" cy="475488"/>
           </a:xfrm>
           <a:prstGeom prst="rect">
             <a:avLst/>
@@ -9404,7 +9774,7 @@
                 <a:ea typeface="Trebuchet MS" pitchFamily="34" charset="-122"/>
                 <a:cs typeface="Trebuchet MS" pitchFamily="34" charset="-120"/>
               </a:rPr>
-              <a:t>ble</a:t>
+              <a:t>fort</a:t>
             </a:r>
             <a:endParaRPr lang="en-US" sz="1400" dirty="0"/>
           </a:p>
@@ -9412,7 +9782,217 @@
       </p:sp>
       <p:sp>
         <p:nvSpPr>
-          <p:cNvPr id="34" name="Shape 32"/>
+          <p:cNvPr id="39" name="Text 37"/>
+          <p:cNvSpPr/>
+          <p:nvPr/>
+        </p:nvSpPr>
+        <p:spPr>
+          <a:xfrm>
+            <a:off x="5806440" y="3364992"/>
+            <a:ext cx="76200" cy="475488"/>
+          </a:xfrm>
+          <a:prstGeom prst="rect">
+            <a:avLst/>
+          </a:prstGeom>
+          <a:noFill/>
+          <a:ln/>
+        </p:spPr>
+        <p:txBody>
+          <a:bodyPr wrap="square" lIns="0" tIns="0" rIns="0" bIns="0" rtlCol="0" anchor="ctr"/>
+          <a:lstStyle/>
+          <a:p>
+            <a:pPr algn="ctr" indent="0" marL="0">
+              <a:buNone/>
+            </a:pPr>
+            <a:r>
+              <a:rPr lang="en-US" sz="1600" b="1" dirty="0">
+                <a:solidFill>
+                  <a:srgbClr val="0D9488"/>
+                </a:solidFill>
+                <a:latin typeface="Trebuchet MS" pitchFamily="34" charset="0"/>
+                <a:ea typeface="Trebuchet MS" pitchFamily="34" charset="-122"/>
+                <a:cs typeface="Trebuchet MS" pitchFamily="34" charset="-120"/>
+              </a:rPr>
+              <a:t>·</a:t>
+            </a:r>
+            <a:endParaRPr lang="en-US" sz="1600" dirty="0"/>
+          </a:p>
+        </p:txBody>
+      </p:sp>
+      <p:sp>
+        <p:nvSpPr>
+          <p:cNvPr id="40" name="Shape 38"/>
+          <p:cNvSpPr/>
+          <p:nvPr/>
+        </p:nvSpPr>
+        <p:spPr>
+          <a:xfrm>
+            <a:off x="5882640" y="3364992"/>
+            <a:ext cx="1225296" cy="475488"/>
+          </a:xfrm>
+          <a:prstGeom prst="rect">
+            <a:avLst>
+              <a:gd name="adj" fmla="val 9615"/>
+            </a:avLst>
+          </a:prstGeom>
+          <a:solidFill>
+            <a:srgbClr val="FFFFFF"/>
+          </a:solidFill>
+          <a:ln w="12700">
+            <a:solidFill>
+              <a:srgbClr val="0D9488"/>
+            </a:solidFill>
+            <a:prstDash val="solid"/>
+          </a:ln>
+        </p:spPr>
+      </p:sp>
+      <p:sp>
+        <p:nvSpPr>
+          <p:cNvPr id="41" name="Text 39"/>
+          <p:cNvSpPr/>
+          <p:nvPr/>
+        </p:nvSpPr>
+        <p:spPr>
+          <a:xfrm>
+            <a:off x="5882640" y="3364992"/>
+            <a:ext cx="1225296" cy="475488"/>
+          </a:xfrm>
+          <a:prstGeom prst="rect">
+            <a:avLst/>
+          </a:prstGeom>
+          <a:noFill/>
+          <a:ln/>
+        </p:spPr>
+        <p:txBody>
+          <a:bodyPr wrap="square" lIns="0" tIns="0" rIns="0" bIns="0" rtlCol="0" anchor="ctr"/>
+          <a:lstStyle/>
+          <a:p>
+            <a:pPr algn="ctr" indent="0" marL="0">
+              <a:buNone/>
+            </a:pPr>
+            <a:r>
+              <a:rPr lang="en-US" sz="1400" b="1" dirty="0">
+                <a:solidFill>
+                  <a:srgbClr val="0D9488"/>
+                </a:solidFill>
+                <a:latin typeface="Trebuchet MS" pitchFamily="34" charset="0"/>
+                <a:ea typeface="Trebuchet MS" pitchFamily="34" charset="-122"/>
+                <a:cs typeface="Trebuchet MS" pitchFamily="34" charset="-120"/>
+              </a:rPr>
+              <a:t>a</a:t>
+            </a:r>
+            <a:endParaRPr lang="en-US" sz="1400" dirty="0"/>
+          </a:p>
+        </p:txBody>
+      </p:sp>
+      <p:sp>
+        <p:nvSpPr>
+          <p:cNvPr id="42" name="Text 40"/>
+          <p:cNvSpPr/>
+          <p:nvPr/>
+        </p:nvSpPr>
+        <p:spPr>
+          <a:xfrm>
+            <a:off x="7107936" y="3364992"/>
+            <a:ext cx="76200" cy="475488"/>
+          </a:xfrm>
+          <a:prstGeom prst="rect">
+            <a:avLst/>
+          </a:prstGeom>
+          <a:noFill/>
+          <a:ln/>
+        </p:spPr>
+        <p:txBody>
+          <a:bodyPr wrap="square" lIns="0" tIns="0" rIns="0" bIns="0" rtlCol="0" anchor="ctr"/>
+          <a:lstStyle/>
+          <a:p>
+            <a:pPr algn="ctr" indent="0" marL="0">
+              <a:buNone/>
+            </a:pPr>
+            <a:r>
+              <a:rPr lang="en-US" sz="1600" b="1" dirty="0">
+                <a:solidFill>
+                  <a:srgbClr val="0D9488"/>
+                </a:solidFill>
+                <a:latin typeface="Trebuchet MS" pitchFamily="34" charset="0"/>
+                <a:ea typeface="Trebuchet MS" pitchFamily="34" charset="-122"/>
+                <a:cs typeface="Trebuchet MS" pitchFamily="34" charset="-120"/>
+              </a:rPr>
+              <a:t>·</a:t>
+            </a:r>
+            <a:endParaRPr lang="en-US" sz="1600" dirty="0"/>
+          </a:p>
+        </p:txBody>
+      </p:sp>
+      <p:sp>
+        <p:nvSpPr>
+          <p:cNvPr id="43" name="Shape 41"/>
+          <p:cNvSpPr/>
+          <p:nvPr/>
+        </p:nvSpPr>
+        <p:spPr>
+          <a:xfrm>
+            <a:off x="7184136" y="3364992"/>
+            <a:ext cx="1225296" cy="475488"/>
+          </a:xfrm>
+          <a:prstGeom prst="rect">
+            <a:avLst>
+              <a:gd name="adj" fmla="val 9615"/>
+            </a:avLst>
+          </a:prstGeom>
+          <a:solidFill>
+            <a:srgbClr val="FFFFFF"/>
+          </a:solidFill>
+          <a:ln w="12700">
+            <a:solidFill>
+              <a:srgbClr val="0D9488"/>
+            </a:solidFill>
+            <a:prstDash val="solid"/>
+          </a:ln>
+        </p:spPr>
+      </p:sp>
+      <p:sp>
+        <p:nvSpPr>
+          <p:cNvPr id="44" name="Text 42"/>
+          <p:cNvSpPr/>
+          <p:nvPr/>
+        </p:nvSpPr>
+        <p:spPr>
+          <a:xfrm>
+            <a:off x="7184136" y="3364992"/>
+            <a:ext cx="1225296" cy="475488"/>
+          </a:xfrm>
+          <a:prstGeom prst="rect">
+            <a:avLst/>
+          </a:prstGeom>
+          <a:noFill/>
+          <a:ln/>
+        </p:spPr>
+        <p:txBody>
+          <a:bodyPr wrap="square" lIns="0" tIns="0" rIns="0" bIns="0" rtlCol="0" anchor="ctr"/>
+          <a:lstStyle/>
+          <a:p>
+            <a:pPr algn="ctr" indent="0" marL="0">
+              <a:buNone/>
+            </a:pPr>
+            <a:r>
+              <a:rPr lang="en-US" sz="1400" b="1" dirty="0">
+                <a:solidFill>
+                  <a:srgbClr val="0D9488"/>
+                </a:solidFill>
+                <a:latin typeface="Trebuchet MS" pitchFamily="34" charset="0"/>
+                <a:ea typeface="Trebuchet MS" pitchFamily="34" charset="-122"/>
+                <a:cs typeface="Trebuchet MS" pitchFamily="34" charset="-120"/>
+              </a:rPr>
+              <a:t>bly</a:t>
+            </a:r>
+            <a:endParaRPr lang="en-US" sz="1400" dirty="0"/>
+          </a:p>
+        </p:txBody>
+      </p:sp>
+      <p:sp>
+        <p:nvSpPr>
+          <p:cNvPr id="45" name="Shape 43"/>
           <p:cNvSpPr/>
           <p:nvPr/>
         </p:nvSpPr>
@@ -9439,7 +10019,7 @@
       </p:sp>
       <p:sp>
         <p:nvSpPr>
-          <p:cNvPr id="35" name="Text 33"/>
+          <p:cNvPr id="46" name="Text 44"/>
           <p:cNvSpPr/>
           <p:nvPr/>
         </p:nvSpPr>
@@ -9478,7 +10058,7 @@
       </p:sp>
       <p:sp>
         <p:nvSpPr>
-          <p:cNvPr id="36" name="Shape 34"/>
+          <p:cNvPr id="47" name="Shape 45"/>
           <p:cNvSpPr/>
           <p:nvPr/>
         </p:nvSpPr>
@@ -9505,7 +10085,7 @@
       </p:sp>
       <p:sp>
         <p:nvSpPr>
-          <p:cNvPr id="37" name="Text 35"/>
+          <p:cNvPr id="48" name="Text 46"/>
           <p:cNvSpPr/>
           <p:nvPr/>
         </p:nvSpPr>
@@ -9828,7 +10408,7 @@
                 <a:ea typeface="Calibri" pitchFamily="34" charset="-122"/>
                 <a:cs typeface="Calibri" pitchFamily="34" charset="-120"/>
               </a:rPr>
-              <a:t>Word Labs  •  wordlabs.app  •  Suffix: '-able' = can be done; capable of</a:t>
+              <a:t>Word Labs  •  wordlabs.app  •  Suffix: '-able' = able to</a:t>
             </a:r>
             <a:endParaRPr lang="en-US" sz="800" dirty="0"/>
           </a:p>
@@ -9967,7 +10547,7 @@
                 <a:ea typeface="Trebuchet MS" pitchFamily="34" charset="-122"/>
                 <a:cs typeface="Trebuchet MS" pitchFamily="34" charset="-120"/>
               </a:rPr>
-              <a:t>changeable</a:t>
+              <a:t>uncomfortably</a:t>
             </a:r>
             <a:endParaRPr lang="en-US" sz="2800" dirty="0"/>
           </a:p>
@@ -10047,8 +10627,8 @@
         </p:nvSpPr>
         <p:spPr>
           <a:xfrm>
-            <a:off x="2938272" y="2258568"/>
-            <a:ext cx="1828800" cy="292608"/>
+            <a:off x="1989734" y="2258568"/>
+            <a:ext cx="1581912" cy="292608"/>
           </a:xfrm>
           <a:prstGeom prst="rect">
             <a:avLst>
@@ -10081,8 +10661,8 @@
         </p:nvSpPr>
         <p:spPr>
           <a:xfrm>
-            <a:off x="2938272" y="2258568"/>
-            <a:ext cx="1828800" cy="292608"/>
+            <a:off x="1989734" y="2258568"/>
+            <a:ext cx="1581912" cy="292608"/>
           </a:xfrm>
           <a:prstGeom prst="rect">
             <a:avLst/>
@@ -10106,7 +10686,7 @@
                 <a:ea typeface="Trebuchet MS" pitchFamily="34" charset="-122"/>
                 <a:cs typeface="Trebuchet MS" pitchFamily="34" charset="-120"/>
               </a:rPr>
-              <a:t>change</a:t>
+              <a:t>un</a:t>
             </a:r>
             <a:endParaRPr lang="en-US" sz="1300" dirty="0"/>
           </a:p>
@@ -10120,8 +10700,8 @@
         </p:nvSpPr>
         <p:spPr>
           <a:xfrm>
-            <a:off x="2938272" y="2569464"/>
-            <a:ext cx="1828800" cy="201168"/>
+            <a:off x="1989734" y="2569464"/>
+            <a:ext cx="1581912" cy="201168"/>
           </a:xfrm>
           <a:prstGeom prst="rect">
             <a:avLst/>
@@ -10145,7 +10725,7 @@
                 <a:ea typeface="Calibri" pitchFamily="34" charset="-122"/>
                 <a:cs typeface="Calibri" pitchFamily="34" charset="-120"/>
               </a:rPr>
-              <a:t>to alter or vary</a:t>
+              <a:t>not</a:t>
             </a:r>
             <a:endParaRPr lang="en-US" sz="850" dirty="0"/>
           </a:p>
@@ -10159,8 +10739,8 @@
         </p:nvSpPr>
         <p:spPr>
           <a:xfrm>
-            <a:off x="5803392" y="2258568"/>
-            <a:ext cx="1828800" cy="292608"/>
+            <a:off x="3659429" y="2258568"/>
+            <a:ext cx="1581912" cy="292608"/>
           </a:xfrm>
           <a:prstGeom prst="rect">
             <a:avLst>
@@ -10168,11 +10748,11 @@
             </a:avLst>
           </a:prstGeom>
           <a:solidFill>
-            <a:srgbClr val="CCFBF1"/>
+            <a:srgbClr val="FCE7F3"/>
           </a:solidFill>
           <a:ln w="19050">
             <a:solidFill>
-              <a:srgbClr val="0D9488"/>
+              <a:srgbClr val="DB2777"/>
             </a:solidFill>
             <a:prstDash val="solid"/>
           </a:ln>
@@ -10193,8 +10773,8 @@
         </p:nvSpPr>
         <p:spPr>
           <a:xfrm>
-            <a:off x="5803392" y="2258568"/>
-            <a:ext cx="1828800" cy="292608"/>
+            <a:off x="3659429" y="2258568"/>
+            <a:ext cx="1581912" cy="292608"/>
           </a:xfrm>
           <a:prstGeom prst="rect">
             <a:avLst/>
@@ -10212,13 +10792,13 @@
             <a:r>
               <a:rPr lang="en-US" sz="1300" b="1" dirty="0">
                 <a:solidFill>
-                  <a:srgbClr val="0F766E"/>
+                  <a:srgbClr val="9D174D"/>
                 </a:solidFill>
                 <a:latin typeface="Trebuchet MS" pitchFamily="34" charset="0"/>
                 <a:ea typeface="Trebuchet MS" pitchFamily="34" charset="-122"/>
                 <a:cs typeface="Trebuchet MS" pitchFamily="34" charset="-120"/>
               </a:rPr>
-              <a:t>able</a:t>
+              <a:t>comfort</a:t>
             </a:r>
             <a:endParaRPr lang="en-US" sz="1300" dirty="0"/>
           </a:p>
@@ -10232,8 +10812,8 @@
         </p:nvSpPr>
         <p:spPr>
           <a:xfrm>
-            <a:off x="5803392" y="2569464"/>
-            <a:ext cx="1828800" cy="201168"/>
+            <a:off x="3659429" y="2569464"/>
+            <a:ext cx="1581912" cy="201168"/>
           </a:xfrm>
           <a:prstGeom prst="rect">
             <a:avLst/>
@@ -10257,7 +10837,7 @@
                 <a:ea typeface="Calibri" pitchFamily="34" charset="-122"/>
                 <a:cs typeface="Calibri" pitchFamily="34" charset="-120"/>
               </a:rPr>
-              <a:t>can be done; capable of</a:t>
+              <a:t>a state of ease; to soothe</a:t>
             </a:r>
             <a:endParaRPr lang="en-US" sz="850" dirty="0"/>
           </a:p>
@@ -10265,14 +10845,87 @@
       </p:sp>
       <p:sp>
         <p:nvSpPr>
-          <p:cNvPr id="22" name="Text 20"/>
-          <p:cNvSpPr/>
-          <p:nvPr/>
-        </p:nvSpPr>
-        <p:spPr>
-          <a:xfrm>
-            <a:off x="5803392" y="2752344"/>
-            <a:ext cx="1828800" cy="182880"/>
+          <p:cNvPr id="22" name="Shape 20"/>
+          <p:cNvSpPr/>
+          <p:nvPr/>
+        </p:nvSpPr>
+        <p:spPr>
+          <a:xfrm>
+            <a:off x="5329123" y="2258568"/>
+            <a:ext cx="1581912" cy="292608"/>
+          </a:xfrm>
+          <a:prstGeom prst="rect">
+            <a:avLst>
+              <a:gd name="adj" fmla="val 25000"/>
+            </a:avLst>
+          </a:prstGeom>
+          <a:solidFill>
+            <a:srgbClr val="CCFBF1"/>
+          </a:solidFill>
+          <a:ln w="19050">
+            <a:solidFill>
+              <a:srgbClr val="0D9488"/>
+            </a:solidFill>
+            <a:prstDash val="solid"/>
+          </a:ln>
+          <a:effectLst>
+            <a:outerShdw sx="100000" sy="100000" kx="0" ky="0" algn="bl" rotWithShape="0" blurRad="101600" dist="38100" dir="8100000">
+              <a:srgbClr val="000000">
+                <a:alpha val="12000"/>
+              </a:srgbClr>
+            </a:outerShdw>
+          </a:effectLst>
+        </p:spPr>
+      </p:sp>
+      <p:sp>
+        <p:nvSpPr>
+          <p:cNvPr id="23" name="Text 21"/>
+          <p:cNvSpPr/>
+          <p:nvPr/>
+        </p:nvSpPr>
+        <p:spPr>
+          <a:xfrm>
+            <a:off x="5329123" y="2258568"/>
+            <a:ext cx="1581912" cy="292608"/>
+          </a:xfrm>
+          <a:prstGeom prst="rect">
+            <a:avLst/>
+          </a:prstGeom>
+          <a:noFill/>
+          <a:ln/>
+        </p:spPr>
+        <p:txBody>
+          <a:bodyPr wrap="square" lIns="0" tIns="0" rIns="0" bIns="0" rtlCol="0" anchor="ctr"/>
+          <a:lstStyle/>
+          <a:p>
+            <a:pPr algn="ctr" indent="0" marL="0">
+              <a:buNone/>
+            </a:pPr>
+            <a:r>
+              <a:rPr lang="en-US" sz="1300" b="1" dirty="0">
+                <a:solidFill>
+                  <a:srgbClr val="0F766E"/>
+                </a:solidFill>
+                <a:latin typeface="Trebuchet MS" pitchFamily="34" charset="0"/>
+                <a:ea typeface="Trebuchet MS" pitchFamily="34" charset="-122"/>
+                <a:cs typeface="Trebuchet MS" pitchFamily="34" charset="-120"/>
+              </a:rPr>
+              <a:t>able</a:t>
+            </a:r>
+            <a:endParaRPr lang="en-US" sz="1300" dirty="0"/>
+          </a:p>
+        </p:txBody>
+      </p:sp>
+      <p:sp>
+        <p:nvSpPr>
+          <p:cNvPr id="24" name="Text 22"/>
+          <p:cNvSpPr/>
+          <p:nvPr/>
+        </p:nvSpPr>
+        <p:spPr>
+          <a:xfrm>
+            <a:off x="5329123" y="2569464"/>
+            <a:ext cx="1581912" cy="201168"/>
           </a:xfrm>
           <a:prstGeom prst="rect">
             <a:avLst/>
@@ -10288,23 +10941,135 @@
               <a:buNone/>
             </a:pPr>
             <a:r>
-              <a:rPr lang="en-US" sz="700" i="1" dirty="0">
-                <a:solidFill>
-                  <a:srgbClr val="94A3B8"/>
+              <a:rPr lang="en-US" sz="850" dirty="0">
+                <a:solidFill>
+                  <a:srgbClr val="475569"/>
                 </a:solidFill>
                 <a:latin typeface="Calibri" pitchFamily="34" charset="0"/>
                 <a:ea typeface="Calibri" pitchFamily="34" charset="-122"/>
                 <a:cs typeface="Calibri" pitchFamily="34" charset="-120"/>
               </a:rPr>
-              <a:t>'e' kept before '-able' here to preserve the /j/ sound of 'g'</a:t>
-            </a:r>
-            <a:endParaRPr lang="en-US" sz="700" dirty="0"/>
-          </a:p>
-        </p:txBody>
-      </p:sp>
-      <p:sp>
-        <p:nvSpPr>
-          <p:cNvPr id="23" name="Shape 21"/>
+              <a:t>able to</a:t>
+            </a:r>
+            <a:endParaRPr lang="en-US" sz="850" dirty="0"/>
+          </a:p>
+        </p:txBody>
+      </p:sp>
+      <p:sp>
+        <p:nvSpPr>
+          <p:cNvPr id="25" name="Shape 23"/>
+          <p:cNvSpPr/>
+          <p:nvPr/>
+        </p:nvSpPr>
+        <p:spPr>
+          <a:xfrm>
+            <a:off x="6998818" y="2258568"/>
+            <a:ext cx="1581912" cy="292608"/>
+          </a:xfrm>
+          <a:prstGeom prst="rect">
+            <a:avLst>
+              <a:gd name="adj" fmla="val 25000"/>
+            </a:avLst>
+          </a:prstGeom>
+          <a:solidFill>
+            <a:srgbClr val="FCE7F3"/>
+          </a:solidFill>
+          <a:ln w="19050">
+            <a:solidFill>
+              <a:srgbClr val="DB2777"/>
+            </a:solidFill>
+            <a:prstDash val="solid"/>
+          </a:ln>
+          <a:effectLst>
+            <a:outerShdw sx="100000" sy="100000" kx="0" ky="0" algn="bl" rotWithShape="0" blurRad="101600" dist="38100" dir="8100000">
+              <a:srgbClr val="000000">
+                <a:alpha val="12000"/>
+              </a:srgbClr>
+            </a:outerShdw>
+          </a:effectLst>
+        </p:spPr>
+      </p:sp>
+      <p:sp>
+        <p:nvSpPr>
+          <p:cNvPr id="26" name="Text 24"/>
+          <p:cNvSpPr/>
+          <p:nvPr/>
+        </p:nvSpPr>
+        <p:spPr>
+          <a:xfrm>
+            <a:off x="6998818" y="2258568"/>
+            <a:ext cx="1581912" cy="292608"/>
+          </a:xfrm>
+          <a:prstGeom prst="rect">
+            <a:avLst/>
+          </a:prstGeom>
+          <a:noFill/>
+          <a:ln/>
+        </p:spPr>
+        <p:txBody>
+          <a:bodyPr wrap="square" lIns="0" tIns="0" rIns="0" bIns="0" rtlCol="0" anchor="ctr"/>
+          <a:lstStyle/>
+          <a:p>
+            <a:pPr algn="ctr" indent="0" marL="0">
+              <a:buNone/>
+            </a:pPr>
+            <a:r>
+              <a:rPr lang="en-US" sz="1300" b="1" dirty="0">
+                <a:solidFill>
+                  <a:srgbClr val="9D174D"/>
+                </a:solidFill>
+                <a:latin typeface="Trebuchet MS" pitchFamily="34" charset="0"/>
+                <a:ea typeface="Trebuchet MS" pitchFamily="34" charset="-122"/>
+                <a:cs typeface="Trebuchet MS" pitchFamily="34" charset="-120"/>
+              </a:rPr>
+              <a:t>ly</a:t>
+            </a:r>
+            <a:endParaRPr lang="en-US" sz="1300" dirty="0"/>
+          </a:p>
+        </p:txBody>
+      </p:sp>
+      <p:sp>
+        <p:nvSpPr>
+          <p:cNvPr id="27" name="Text 25"/>
+          <p:cNvSpPr/>
+          <p:nvPr/>
+        </p:nvSpPr>
+        <p:spPr>
+          <a:xfrm>
+            <a:off x="6998818" y="2569464"/>
+            <a:ext cx="1581912" cy="201168"/>
+          </a:xfrm>
+          <a:prstGeom prst="rect">
+            <a:avLst/>
+          </a:prstGeom>
+          <a:noFill/>
+          <a:ln/>
+        </p:spPr>
+        <p:txBody>
+          <a:bodyPr wrap="square" lIns="0" tIns="0" rIns="0" bIns="0" rtlCol="0" anchor="t"/>
+          <a:lstStyle/>
+          <a:p>
+            <a:pPr algn="ctr" indent="0" marL="0">
+              <a:buNone/>
+            </a:pPr>
+            <a:r>
+              <a:rPr lang="en-US" sz="850" dirty="0">
+                <a:solidFill>
+                  <a:srgbClr val="475569"/>
+                </a:solidFill>
+                <a:latin typeface="Calibri" pitchFamily="34" charset="0"/>
+                <a:ea typeface="Calibri" pitchFamily="34" charset="-122"/>
+                <a:cs typeface="Calibri" pitchFamily="34" charset="-120"/>
+              </a:rPr>
+              <a:t>in a way</a:t>
+            </a:r>
+            <a:endParaRPr lang="en-US" sz="850" dirty="0"/>
+          </a:p>
+        </p:txBody>
+      </p:sp>
+      <p:sp>
+        <p:nvSpPr>
+          <p:cNvPr id="28" name="Shape 26"/>
           <p:cNvSpPr/>
           <p:nvPr/>
         </p:nvSpPr>
@@ -10331,7 +11096,7 @@
       </p:sp>
       <p:sp>
         <p:nvSpPr>
-          <p:cNvPr id="24" name="Text 22"/>
+          <p:cNvPr id="29" name="Text 27"/>
           <p:cNvSpPr/>
           <p:nvPr/>
         </p:nvSpPr>
@@ -10370,7 +11135,7 @@
       </p:sp>
       <p:sp>
         <p:nvSpPr>
-          <p:cNvPr id="25" name="Shape 23"/>
+          <p:cNvPr id="30" name="Shape 28"/>
           <p:cNvSpPr/>
           <p:nvPr/>
         </p:nvSpPr>
@@ -10397,14 +11162,14 @@
       </p:sp>
       <p:sp>
         <p:nvSpPr>
-          <p:cNvPr id="26" name="Shape 24"/>
-          <p:cNvSpPr/>
-          <p:nvPr/>
-        </p:nvSpPr>
-        <p:spPr>
-          <a:xfrm>
-            <a:off x="2313432" y="3364992"/>
-            <a:ext cx="1645920" cy="475488"/>
+          <p:cNvPr id="31" name="Shape 29"/>
+          <p:cNvSpPr/>
+          <p:nvPr/>
+        </p:nvSpPr>
+        <p:spPr>
+          <a:xfrm>
+            <a:off x="1978152" y="3364992"/>
+            <a:ext cx="1225296" cy="475488"/>
           </a:xfrm>
           <a:prstGeom prst="rect">
             <a:avLst>
@@ -10424,14 +11189,14 @@
       </p:sp>
       <p:sp>
         <p:nvSpPr>
-          <p:cNvPr id="27" name="Text 25"/>
-          <p:cNvSpPr/>
-          <p:nvPr/>
-        </p:nvSpPr>
-        <p:spPr>
-          <a:xfrm>
-            <a:off x="2313432" y="3364992"/>
-            <a:ext cx="1645920" cy="475488"/>
+          <p:cNvPr id="32" name="Text 30"/>
+          <p:cNvSpPr/>
+          <p:nvPr/>
+        </p:nvSpPr>
+        <p:spPr>
+          <a:xfrm>
+            <a:off x="1978152" y="3364992"/>
+            <a:ext cx="1225296" cy="475488"/>
           </a:xfrm>
           <a:prstGeom prst="rect">
             <a:avLst/>
@@ -10455,7 +11220,7 @@
                 <a:ea typeface="Trebuchet MS" pitchFamily="34" charset="-122"/>
                 <a:cs typeface="Trebuchet MS" pitchFamily="34" charset="-120"/>
               </a:rPr>
-              <a:t>change</a:t>
+              <a:t>un</a:t>
             </a:r>
             <a:endParaRPr lang="en-US" sz="1400" dirty="0"/>
           </a:p>
@@ -10463,14 +11228,14 @@
       </p:sp>
       <p:sp>
         <p:nvSpPr>
-          <p:cNvPr id="28" name="Text 26"/>
-          <p:cNvSpPr/>
-          <p:nvPr/>
-        </p:nvSpPr>
-        <p:spPr>
-          <a:xfrm>
-            <a:off x="3959352" y="3364992"/>
-            <a:ext cx="411480" cy="475488"/>
+          <p:cNvPr id="33" name="Text 31"/>
+          <p:cNvSpPr/>
+          <p:nvPr/>
+        </p:nvSpPr>
+        <p:spPr>
+          <a:xfrm>
+            <a:off x="3203448" y="3364992"/>
+            <a:ext cx="76200" cy="475488"/>
           </a:xfrm>
           <a:prstGeom prst="rect">
             <a:avLst/>
@@ -10502,14 +11267,14 @@
       </p:sp>
       <p:sp>
         <p:nvSpPr>
-          <p:cNvPr id="29" name="Shape 27"/>
-          <p:cNvSpPr/>
-          <p:nvPr/>
-        </p:nvSpPr>
-        <p:spPr>
-          <a:xfrm>
-            <a:off x="4370832" y="3364992"/>
-            <a:ext cx="1645920" cy="475488"/>
+          <p:cNvPr id="34" name="Shape 32"/>
+          <p:cNvSpPr/>
+          <p:nvPr/>
+        </p:nvSpPr>
+        <p:spPr>
+          <a:xfrm>
+            <a:off x="3279648" y="3364992"/>
+            <a:ext cx="1225296" cy="475488"/>
           </a:xfrm>
           <a:prstGeom prst="rect">
             <a:avLst>
@@ -10529,14 +11294,14 @@
       </p:sp>
       <p:sp>
         <p:nvSpPr>
-          <p:cNvPr id="30" name="Text 28"/>
-          <p:cNvSpPr/>
-          <p:nvPr/>
-        </p:nvSpPr>
-        <p:spPr>
-          <a:xfrm>
-            <a:off x="4370832" y="3364992"/>
-            <a:ext cx="1645920" cy="475488"/>
+          <p:cNvPr id="35" name="Text 33"/>
+          <p:cNvSpPr/>
+          <p:nvPr/>
+        </p:nvSpPr>
+        <p:spPr>
+          <a:xfrm>
+            <a:off x="3279648" y="3364992"/>
+            <a:ext cx="1225296" cy="475488"/>
           </a:xfrm>
           <a:prstGeom prst="rect">
             <a:avLst/>
@@ -10560,7 +11325,7 @@
                 <a:ea typeface="Trebuchet MS" pitchFamily="34" charset="-122"/>
                 <a:cs typeface="Trebuchet MS" pitchFamily="34" charset="-120"/>
               </a:rPr>
-              <a:t>a</a:t>
+              <a:t>com</a:t>
             </a:r>
             <a:endParaRPr lang="en-US" sz="1400" dirty="0"/>
           </a:p>
@@ -10568,14 +11333,14 @@
       </p:sp>
       <p:sp>
         <p:nvSpPr>
-          <p:cNvPr id="31" name="Text 29"/>
-          <p:cNvSpPr/>
-          <p:nvPr/>
-        </p:nvSpPr>
-        <p:spPr>
-          <a:xfrm>
-            <a:off x="6016752" y="3364992"/>
-            <a:ext cx="411480" cy="475488"/>
+          <p:cNvPr id="36" name="Text 34"/>
+          <p:cNvSpPr/>
+          <p:nvPr/>
+        </p:nvSpPr>
+        <p:spPr>
+          <a:xfrm>
+            <a:off x="4504944" y="3364992"/>
+            <a:ext cx="76200" cy="475488"/>
           </a:xfrm>
           <a:prstGeom prst="rect">
             <a:avLst/>
@@ -10607,14 +11372,14 @@
       </p:sp>
       <p:sp>
         <p:nvSpPr>
-          <p:cNvPr id="32" name="Shape 30"/>
-          <p:cNvSpPr/>
-          <p:nvPr/>
-        </p:nvSpPr>
-        <p:spPr>
-          <a:xfrm>
-            <a:off x="6428232" y="3364992"/>
-            <a:ext cx="1645920" cy="475488"/>
+          <p:cNvPr id="37" name="Shape 35"/>
+          <p:cNvSpPr/>
+          <p:nvPr/>
+        </p:nvSpPr>
+        <p:spPr>
+          <a:xfrm>
+            <a:off x="4581144" y="3364992"/>
+            <a:ext cx="1225296" cy="475488"/>
           </a:xfrm>
           <a:prstGeom prst="rect">
             <a:avLst>
@@ -10634,14 +11399,14 @@
       </p:sp>
       <p:sp>
         <p:nvSpPr>
-          <p:cNvPr id="33" name="Text 31"/>
-          <p:cNvSpPr/>
-          <p:nvPr/>
-        </p:nvSpPr>
-        <p:spPr>
-          <a:xfrm>
-            <a:off x="6428232" y="3364992"/>
-            <a:ext cx="1645920" cy="475488"/>
+          <p:cNvPr id="38" name="Text 36"/>
+          <p:cNvSpPr/>
+          <p:nvPr/>
+        </p:nvSpPr>
+        <p:spPr>
+          <a:xfrm>
+            <a:off x="4581144" y="3364992"/>
+            <a:ext cx="1225296" cy="475488"/>
           </a:xfrm>
           <a:prstGeom prst="rect">
             <a:avLst/>
@@ -10665,7 +11430,7 @@
                 <a:ea typeface="Trebuchet MS" pitchFamily="34" charset="-122"/>
                 <a:cs typeface="Trebuchet MS" pitchFamily="34" charset="-120"/>
               </a:rPr>
-              <a:t>ble</a:t>
+              <a:t>fort</a:t>
             </a:r>
             <a:endParaRPr lang="en-US" sz="1400" dirty="0"/>
           </a:p>
@@ -10673,7 +11438,217 @@
       </p:sp>
       <p:sp>
         <p:nvSpPr>
-          <p:cNvPr id="34" name="Shape 32"/>
+          <p:cNvPr id="39" name="Text 37"/>
+          <p:cNvSpPr/>
+          <p:nvPr/>
+        </p:nvSpPr>
+        <p:spPr>
+          <a:xfrm>
+            <a:off x="5806440" y="3364992"/>
+            <a:ext cx="76200" cy="475488"/>
+          </a:xfrm>
+          <a:prstGeom prst="rect">
+            <a:avLst/>
+          </a:prstGeom>
+          <a:noFill/>
+          <a:ln/>
+        </p:spPr>
+        <p:txBody>
+          <a:bodyPr wrap="square" lIns="0" tIns="0" rIns="0" bIns="0" rtlCol="0" anchor="ctr"/>
+          <a:lstStyle/>
+          <a:p>
+            <a:pPr algn="ctr" indent="0" marL="0">
+              <a:buNone/>
+            </a:pPr>
+            <a:r>
+              <a:rPr lang="en-US" sz="1600" b="1" dirty="0">
+                <a:solidFill>
+                  <a:srgbClr val="0D9488"/>
+                </a:solidFill>
+                <a:latin typeface="Trebuchet MS" pitchFamily="34" charset="0"/>
+                <a:ea typeface="Trebuchet MS" pitchFamily="34" charset="-122"/>
+                <a:cs typeface="Trebuchet MS" pitchFamily="34" charset="-120"/>
+              </a:rPr>
+              <a:t>·</a:t>
+            </a:r>
+            <a:endParaRPr lang="en-US" sz="1600" dirty="0"/>
+          </a:p>
+        </p:txBody>
+      </p:sp>
+      <p:sp>
+        <p:nvSpPr>
+          <p:cNvPr id="40" name="Shape 38"/>
+          <p:cNvSpPr/>
+          <p:nvPr/>
+        </p:nvSpPr>
+        <p:spPr>
+          <a:xfrm>
+            <a:off x="5882640" y="3364992"/>
+            <a:ext cx="1225296" cy="475488"/>
+          </a:xfrm>
+          <a:prstGeom prst="rect">
+            <a:avLst>
+              <a:gd name="adj" fmla="val 9615"/>
+            </a:avLst>
+          </a:prstGeom>
+          <a:solidFill>
+            <a:srgbClr val="FFFFFF"/>
+          </a:solidFill>
+          <a:ln w="12700">
+            <a:solidFill>
+              <a:srgbClr val="0D9488"/>
+            </a:solidFill>
+            <a:prstDash val="solid"/>
+          </a:ln>
+        </p:spPr>
+      </p:sp>
+      <p:sp>
+        <p:nvSpPr>
+          <p:cNvPr id="41" name="Text 39"/>
+          <p:cNvSpPr/>
+          <p:nvPr/>
+        </p:nvSpPr>
+        <p:spPr>
+          <a:xfrm>
+            <a:off x="5882640" y="3364992"/>
+            <a:ext cx="1225296" cy="475488"/>
+          </a:xfrm>
+          <a:prstGeom prst="rect">
+            <a:avLst/>
+          </a:prstGeom>
+          <a:noFill/>
+          <a:ln/>
+        </p:spPr>
+        <p:txBody>
+          <a:bodyPr wrap="square" lIns="0" tIns="0" rIns="0" bIns="0" rtlCol="0" anchor="ctr"/>
+          <a:lstStyle/>
+          <a:p>
+            <a:pPr algn="ctr" indent="0" marL="0">
+              <a:buNone/>
+            </a:pPr>
+            <a:r>
+              <a:rPr lang="en-US" sz="1400" b="1" dirty="0">
+                <a:solidFill>
+                  <a:srgbClr val="0D9488"/>
+                </a:solidFill>
+                <a:latin typeface="Trebuchet MS" pitchFamily="34" charset="0"/>
+                <a:ea typeface="Trebuchet MS" pitchFamily="34" charset="-122"/>
+                <a:cs typeface="Trebuchet MS" pitchFamily="34" charset="-120"/>
+              </a:rPr>
+              <a:t>a</a:t>
+            </a:r>
+            <a:endParaRPr lang="en-US" sz="1400" dirty="0"/>
+          </a:p>
+        </p:txBody>
+      </p:sp>
+      <p:sp>
+        <p:nvSpPr>
+          <p:cNvPr id="42" name="Text 40"/>
+          <p:cNvSpPr/>
+          <p:nvPr/>
+        </p:nvSpPr>
+        <p:spPr>
+          <a:xfrm>
+            <a:off x="7107936" y="3364992"/>
+            <a:ext cx="76200" cy="475488"/>
+          </a:xfrm>
+          <a:prstGeom prst="rect">
+            <a:avLst/>
+          </a:prstGeom>
+          <a:noFill/>
+          <a:ln/>
+        </p:spPr>
+        <p:txBody>
+          <a:bodyPr wrap="square" lIns="0" tIns="0" rIns="0" bIns="0" rtlCol="0" anchor="ctr"/>
+          <a:lstStyle/>
+          <a:p>
+            <a:pPr algn="ctr" indent="0" marL="0">
+              <a:buNone/>
+            </a:pPr>
+            <a:r>
+              <a:rPr lang="en-US" sz="1600" b="1" dirty="0">
+                <a:solidFill>
+                  <a:srgbClr val="0D9488"/>
+                </a:solidFill>
+                <a:latin typeface="Trebuchet MS" pitchFamily="34" charset="0"/>
+                <a:ea typeface="Trebuchet MS" pitchFamily="34" charset="-122"/>
+                <a:cs typeface="Trebuchet MS" pitchFamily="34" charset="-120"/>
+              </a:rPr>
+              <a:t>·</a:t>
+            </a:r>
+            <a:endParaRPr lang="en-US" sz="1600" dirty="0"/>
+          </a:p>
+        </p:txBody>
+      </p:sp>
+      <p:sp>
+        <p:nvSpPr>
+          <p:cNvPr id="43" name="Shape 41"/>
+          <p:cNvSpPr/>
+          <p:nvPr/>
+        </p:nvSpPr>
+        <p:spPr>
+          <a:xfrm>
+            <a:off x="7184136" y="3364992"/>
+            <a:ext cx="1225296" cy="475488"/>
+          </a:xfrm>
+          <a:prstGeom prst="rect">
+            <a:avLst>
+              <a:gd name="adj" fmla="val 9615"/>
+            </a:avLst>
+          </a:prstGeom>
+          <a:solidFill>
+            <a:srgbClr val="FFFFFF"/>
+          </a:solidFill>
+          <a:ln w="12700">
+            <a:solidFill>
+              <a:srgbClr val="0D9488"/>
+            </a:solidFill>
+            <a:prstDash val="solid"/>
+          </a:ln>
+        </p:spPr>
+      </p:sp>
+      <p:sp>
+        <p:nvSpPr>
+          <p:cNvPr id="44" name="Text 42"/>
+          <p:cNvSpPr/>
+          <p:nvPr/>
+        </p:nvSpPr>
+        <p:spPr>
+          <a:xfrm>
+            <a:off x="7184136" y="3364992"/>
+            <a:ext cx="1225296" cy="475488"/>
+          </a:xfrm>
+          <a:prstGeom prst="rect">
+            <a:avLst/>
+          </a:prstGeom>
+          <a:noFill/>
+          <a:ln/>
+        </p:spPr>
+        <p:txBody>
+          <a:bodyPr wrap="square" lIns="0" tIns="0" rIns="0" bIns="0" rtlCol="0" anchor="ctr"/>
+          <a:lstStyle/>
+          <a:p>
+            <a:pPr algn="ctr" indent="0" marL="0">
+              <a:buNone/>
+            </a:pPr>
+            <a:r>
+              <a:rPr lang="en-US" sz="1400" b="1" dirty="0">
+                <a:solidFill>
+                  <a:srgbClr val="0D9488"/>
+                </a:solidFill>
+                <a:latin typeface="Trebuchet MS" pitchFamily="34" charset="0"/>
+                <a:ea typeface="Trebuchet MS" pitchFamily="34" charset="-122"/>
+                <a:cs typeface="Trebuchet MS" pitchFamily="34" charset="-120"/>
+              </a:rPr>
+              <a:t>bly</a:t>
+            </a:r>
+            <a:endParaRPr lang="en-US" sz="1400" dirty="0"/>
+          </a:p>
+        </p:txBody>
+      </p:sp>
+      <p:sp>
+        <p:nvSpPr>
+          <p:cNvPr id="45" name="Shape 43"/>
           <p:cNvSpPr/>
           <p:nvPr/>
         </p:nvSpPr>
@@ -10700,7 +11675,7 @@
       </p:sp>
       <p:sp>
         <p:nvSpPr>
-          <p:cNvPr id="35" name="Text 33"/>
+          <p:cNvPr id="46" name="Text 44"/>
           <p:cNvSpPr/>
           <p:nvPr/>
         </p:nvSpPr>
@@ -10739,18 +11714,18 @@
       </p:sp>
       <p:sp>
         <p:nvSpPr>
-          <p:cNvPr id="36" name="Shape 34"/>
+          <p:cNvPr id="47" name="Shape 45"/>
           <p:cNvSpPr/>
           <p:nvPr/>
         </p:nvSpPr>
         <p:spPr>
           <a:xfrm>
             <a:off x="1874520" y="4096512"/>
-            <a:ext cx="6903720" cy="804672"/>
+            <a:ext cx="6903720" cy="658368"/>
           </a:xfrm>
           <a:prstGeom prst="rect">
             <a:avLst>
-              <a:gd name="adj" fmla="val 6818"/>
+              <a:gd name="adj" fmla="val 8333"/>
             </a:avLst>
           </a:prstGeom>
           <a:solidFill>
@@ -10766,18 +11741,18 @@
       </p:sp>
       <p:sp>
         <p:nvSpPr>
-          <p:cNvPr id="37" name="Shape 35"/>
-          <p:cNvSpPr/>
-          <p:nvPr/>
-        </p:nvSpPr>
-        <p:spPr>
-          <a:xfrm>
-            <a:off x="2023872" y="4169664"/>
-            <a:ext cx="685800" cy="384048"/>
+          <p:cNvPr id="48" name="Shape 46"/>
+          <p:cNvSpPr/>
+          <p:nvPr/>
+        </p:nvSpPr>
+        <p:spPr>
+          <a:xfrm>
+            <a:off x="1952596" y="4169664"/>
+            <a:ext cx="493776" cy="475488"/>
           </a:xfrm>
           <a:prstGeom prst="rect">
             <a:avLst>
-              <a:gd name="adj" fmla="val 9524"/>
+              <a:gd name="adj" fmla="val 7692"/>
             </a:avLst>
           </a:prstGeom>
           <a:solidFill>
@@ -10793,14 +11768,14 @@
       </p:sp>
       <p:sp>
         <p:nvSpPr>
-          <p:cNvPr id="38" name="Text 36"/>
-          <p:cNvSpPr/>
-          <p:nvPr/>
-        </p:nvSpPr>
-        <p:spPr>
-          <a:xfrm>
-            <a:off x="2023872" y="4169664"/>
-            <a:ext cx="685800" cy="384048"/>
+          <p:cNvPr id="49" name="Text 47"/>
+          <p:cNvSpPr/>
+          <p:nvPr/>
+        </p:nvSpPr>
+        <p:spPr>
+          <a:xfrm>
+            <a:off x="1952596" y="4169664"/>
+            <a:ext cx="493776" cy="475488"/>
           </a:xfrm>
           <a:prstGeom prst="rect">
             <a:avLst/>
@@ -10824,7 +11799,7 @@
                 <a:ea typeface="Trebuchet MS" pitchFamily="34" charset="-122"/>
                 <a:cs typeface="Trebuchet MS" pitchFamily="34" charset="-120"/>
               </a:rPr>
-              <a:t>ch</a:t>
+              <a:t>u</a:t>
             </a:r>
             <a:endParaRPr lang="en-US" sz="900" dirty="0"/>
           </a:p>
@@ -10832,18 +11807,18 @@
       </p:sp>
       <p:sp>
         <p:nvSpPr>
-          <p:cNvPr id="39" name="Shape 37"/>
-          <p:cNvSpPr/>
-          <p:nvPr/>
-        </p:nvSpPr>
-        <p:spPr>
-          <a:xfrm>
-            <a:off x="2831592" y="4169664"/>
-            <a:ext cx="685800" cy="384048"/>
+          <p:cNvPr id="50" name="Shape 48"/>
+          <p:cNvSpPr/>
+          <p:nvPr/>
+        </p:nvSpPr>
+        <p:spPr>
+          <a:xfrm>
+            <a:off x="2497015" y="4169664"/>
+            <a:ext cx="493776" cy="475488"/>
           </a:xfrm>
           <a:prstGeom prst="rect">
             <a:avLst>
-              <a:gd name="adj" fmla="val 9524"/>
+              <a:gd name="adj" fmla="val 7692"/>
             </a:avLst>
           </a:prstGeom>
           <a:solidFill>
@@ -10859,14 +11834,14 @@
       </p:sp>
       <p:sp>
         <p:nvSpPr>
-          <p:cNvPr id="40" name="Text 38"/>
-          <p:cNvSpPr/>
-          <p:nvPr/>
-        </p:nvSpPr>
-        <p:spPr>
-          <a:xfrm>
-            <a:off x="2831592" y="4169664"/>
-            <a:ext cx="685800" cy="384048"/>
+          <p:cNvPr id="51" name="Text 49"/>
+          <p:cNvSpPr/>
+          <p:nvPr/>
+        </p:nvSpPr>
+        <p:spPr>
+          <a:xfrm>
+            <a:off x="2497015" y="4169664"/>
+            <a:ext cx="493776" cy="475488"/>
           </a:xfrm>
           <a:prstGeom prst="rect">
             <a:avLst/>
@@ -10890,7 +11865,7 @@
                 <a:ea typeface="Trebuchet MS" pitchFamily="34" charset="-122"/>
                 <a:cs typeface="Trebuchet MS" pitchFamily="34" charset="-120"/>
               </a:rPr>
-              <a:t>a</a:t>
+              <a:t>n</a:t>
             </a:r>
             <a:endParaRPr lang="en-US" sz="900" dirty="0"/>
           </a:p>
@@ -10898,18 +11873,18 @@
       </p:sp>
       <p:sp>
         <p:nvSpPr>
-          <p:cNvPr id="41" name="Shape 39"/>
-          <p:cNvSpPr/>
-          <p:nvPr/>
-        </p:nvSpPr>
-        <p:spPr>
-          <a:xfrm>
-            <a:off x="3639312" y="4169664"/>
-            <a:ext cx="685800" cy="384048"/>
+          <p:cNvPr id="52" name="Shape 50"/>
+          <p:cNvSpPr/>
+          <p:nvPr/>
+        </p:nvSpPr>
+        <p:spPr>
+          <a:xfrm>
+            <a:off x="3041435" y="4169664"/>
+            <a:ext cx="493776" cy="475488"/>
           </a:xfrm>
           <a:prstGeom prst="rect">
             <a:avLst>
-              <a:gd name="adj" fmla="val 9524"/>
+              <a:gd name="adj" fmla="val 7692"/>
             </a:avLst>
           </a:prstGeom>
           <a:solidFill>
@@ -10925,14 +11900,14 @@
       </p:sp>
       <p:sp>
         <p:nvSpPr>
-          <p:cNvPr id="42" name="Text 40"/>
-          <p:cNvSpPr/>
-          <p:nvPr/>
-        </p:nvSpPr>
-        <p:spPr>
-          <a:xfrm>
-            <a:off x="3639312" y="4169664"/>
-            <a:ext cx="685800" cy="384048"/>
+          <p:cNvPr id="53" name="Text 51"/>
+          <p:cNvSpPr/>
+          <p:nvPr/>
+        </p:nvSpPr>
+        <p:spPr>
+          <a:xfrm>
+            <a:off x="3041435" y="4169664"/>
+            <a:ext cx="493776" cy="475488"/>
           </a:xfrm>
           <a:prstGeom prst="rect">
             <a:avLst/>
@@ -10956,7 +11931,7 @@
                 <a:ea typeface="Trebuchet MS" pitchFamily="34" charset="-122"/>
                 <a:cs typeface="Trebuchet MS" pitchFamily="34" charset="-120"/>
               </a:rPr>
-              <a:t>ng</a:t>
+              <a:t>c</a:t>
             </a:r>
             <a:endParaRPr lang="en-US" sz="900" dirty="0"/>
           </a:p>
@@ -10964,18 +11939,18 @@
       </p:sp>
       <p:sp>
         <p:nvSpPr>
-          <p:cNvPr id="43" name="Shape 41"/>
-          <p:cNvSpPr/>
-          <p:nvPr/>
-        </p:nvSpPr>
-        <p:spPr>
-          <a:xfrm>
-            <a:off x="4447032" y="4169664"/>
-            <a:ext cx="685800" cy="384048"/>
+          <p:cNvPr id="54" name="Shape 52"/>
+          <p:cNvSpPr/>
+          <p:nvPr/>
+        </p:nvSpPr>
+        <p:spPr>
+          <a:xfrm>
+            <a:off x="3585855" y="4169664"/>
+            <a:ext cx="493776" cy="475488"/>
           </a:xfrm>
           <a:prstGeom prst="rect">
             <a:avLst>
-              <a:gd name="adj" fmla="val 9524"/>
+              <a:gd name="adj" fmla="val 7692"/>
             </a:avLst>
           </a:prstGeom>
           <a:solidFill>
@@ -10991,14 +11966,14 @@
       </p:sp>
       <p:sp>
         <p:nvSpPr>
-          <p:cNvPr id="44" name="Text 42"/>
-          <p:cNvSpPr/>
-          <p:nvPr/>
-        </p:nvSpPr>
-        <p:spPr>
-          <a:xfrm>
-            <a:off x="4447032" y="4169664"/>
-            <a:ext cx="685800" cy="384048"/>
+          <p:cNvPr id="55" name="Text 53"/>
+          <p:cNvSpPr/>
+          <p:nvPr/>
+        </p:nvSpPr>
+        <p:spPr>
+          <a:xfrm>
+            <a:off x="3585855" y="4169664"/>
+            <a:ext cx="493776" cy="475488"/>
           </a:xfrm>
           <a:prstGeom prst="rect">
             <a:avLst/>
@@ -11022,7 +11997,7 @@
                 <a:ea typeface="Trebuchet MS" pitchFamily="34" charset="-122"/>
                 <a:cs typeface="Trebuchet MS" pitchFamily="34" charset="-120"/>
               </a:rPr>
-              <a:t>e</a:t>
+              <a:t>o</a:t>
             </a:r>
             <a:endParaRPr lang="en-US" sz="900" dirty="0"/>
           </a:p>
@@ -11030,57 +12005,18 @@
       </p:sp>
       <p:sp>
         <p:nvSpPr>
-          <p:cNvPr id="45" name="Text 43"/>
-          <p:cNvSpPr/>
-          <p:nvPr/>
-        </p:nvSpPr>
-        <p:spPr>
-          <a:xfrm>
-            <a:off x="4447032" y="4572000"/>
-            <a:ext cx="685800" cy="219456"/>
-          </a:xfrm>
-          <a:prstGeom prst="rect">
-            <a:avLst/>
-          </a:prstGeom>
-          <a:noFill/>
-          <a:ln/>
-        </p:spPr>
-        <p:txBody>
-          <a:bodyPr wrap="square" lIns="0" tIns="0" rIns="0" bIns="0" rtlCol="0" anchor="t"/>
-          <a:lstStyle/>
-          <a:p>
-            <a:pPr algn="ctr" indent="0" marL="0">
-              <a:buNone/>
-            </a:pPr>
-            <a:r>
-              <a:rPr lang="en-US" sz="750" i="1" dirty="0">
-                <a:solidFill>
-                  <a:srgbClr val="94A3B8"/>
-                </a:solidFill>
-                <a:latin typeface="Calibri" pitchFamily="34" charset="0"/>
-                <a:ea typeface="Calibri" pitchFamily="34" charset="-122"/>
-                <a:cs typeface="Calibri" pitchFamily="34" charset="-120"/>
-              </a:rPr>
-              <a:t>/j/ keeper</a:t>
-            </a:r>
-            <a:endParaRPr lang="en-US" sz="750" dirty="0"/>
-          </a:p>
-        </p:txBody>
-      </p:sp>
-      <p:sp>
-        <p:nvSpPr>
-          <p:cNvPr id="46" name="Shape 44"/>
-          <p:cNvSpPr/>
-          <p:nvPr/>
-        </p:nvSpPr>
-        <p:spPr>
-          <a:xfrm>
-            <a:off x="5254752" y="4169664"/>
-            <a:ext cx="685800" cy="384048"/>
+          <p:cNvPr id="56" name="Shape 54"/>
+          <p:cNvSpPr/>
+          <p:nvPr/>
+        </p:nvSpPr>
+        <p:spPr>
+          <a:xfrm>
+            <a:off x="4130274" y="4169664"/>
+            <a:ext cx="493776" cy="475488"/>
           </a:xfrm>
           <a:prstGeom prst="rect">
             <a:avLst>
-              <a:gd name="adj" fmla="val 9524"/>
+              <a:gd name="adj" fmla="val 7692"/>
             </a:avLst>
           </a:prstGeom>
           <a:solidFill>
@@ -11096,14 +12032,14 @@
       </p:sp>
       <p:sp>
         <p:nvSpPr>
-          <p:cNvPr id="47" name="Text 45"/>
-          <p:cNvSpPr/>
-          <p:nvPr/>
-        </p:nvSpPr>
-        <p:spPr>
-          <a:xfrm>
-            <a:off x="5254752" y="4169664"/>
-            <a:ext cx="685800" cy="384048"/>
+          <p:cNvPr id="57" name="Text 55"/>
+          <p:cNvSpPr/>
+          <p:nvPr/>
+        </p:nvSpPr>
+        <p:spPr>
+          <a:xfrm>
+            <a:off x="4130274" y="4169664"/>
+            <a:ext cx="493776" cy="475488"/>
           </a:xfrm>
           <a:prstGeom prst="rect">
             <a:avLst/>
@@ -11127,7 +12063,7 @@
                 <a:ea typeface="Trebuchet MS" pitchFamily="34" charset="-122"/>
                 <a:cs typeface="Trebuchet MS" pitchFamily="34" charset="-120"/>
               </a:rPr>
-              <a:t>a</a:t>
+              <a:t>m</a:t>
             </a:r>
             <a:endParaRPr lang="en-US" sz="900" dirty="0"/>
           </a:p>
@@ -11135,18 +12071,18 @@
       </p:sp>
       <p:sp>
         <p:nvSpPr>
-          <p:cNvPr id="48" name="Shape 46"/>
-          <p:cNvSpPr/>
-          <p:nvPr/>
-        </p:nvSpPr>
-        <p:spPr>
-          <a:xfrm>
-            <a:off x="6062472" y="4169664"/>
-            <a:ext cx="685800" cy="384048"/>
+          <p:cNvPr id="58" name="Shape 56"/>
+          <p:cNvSpPr/>
+          <p:nvPr/>
+        </p:nvSpPr>
+        <p:spPr>
+          <a:xfrm>
+            <a:off x="4674694" y="4169664"/>
+            <a:ext cx="493776" cy="475488"/>
           </a:xfrm>
           <a:prstGeom prst="rect">
             <a:avLst>
-              <a:gd name="adj" fmla="val 9524"/>
+              <a:gd name="adj" fmla="val 7692"/>
             </a:avLst>
           </a:prstGeom>
           <a:solidFill>
@@ -11162,14 +12098,14 @@
       </p:sp>
       <p:sp>
         <p:nvSpPr>
-          <p:cNvPr id="49" name="Text 47"/>
-          <p:cNvSpPr/>
-          <p:nvPr/>
-        </p:nvSpPr>
-        <p:spPr>
-          <a:xfrm>
-            <a:off x="6062472" y="4169664"/>
-            <a:ext cx="685800" cy="384048"/>
+          <p:cNvPr id="59" name="Text 57"/>
+          <p:cNvSpPr/>
+          <p:nvPr/>
+        </p:nvSpPr>
+        <p:spPr>
+          <a:xfrm>
+            <a:off x="4674694" y="4169664"/>
+            <a:ext cx="493776" cy="475488"/>
           </a:xfrm>
           <a:prstGeom prst="rect">
             <a:avLst/>
@@ -11193,7 +12129,7 @@
                 <a:ea typeface="Trebuchet MS" pitchFamily="34" charset="-122"/>
                 <a:cs typeface="Trebuchet MS" pitchFamily="34" charset="-120"/>
               </a:rPr>
-              <a:t>b</a:t>
+              <a:t>f</a:t>
             </a:r>
             <a:endParaRPr lang="en-US" sz="900" dirty="0"/>
           </a:p>
@@ -11201,18 +12137,18 @@
       </p:sp>
       <p:sp>
         <p:nvSpPr>
-          <p:cNvPr id="50" name="Shape 48"/>
-          <p:cNvSpPr/>
-          <p:nvPr/>
-        </p:nvSpPr>
-        <p:spPr>
-          <a:xfrm>
-            <a:off x="6870192" y="4169664"/>
-            <a:ext cx="685800" cy="384048"/>
+          <p:cNvPr id="60" name="Shape 58"/>
+          <p:cNvSpPr/>
+          <p:nvPr/>
+        </p:nvSpPr>
+        <p:spPr>
+          <a:xfrm>
+            <a:off x="5219114" y="4169664"/>
+            <a:ext cx="493776" cy="475488"/>
           </a:xfrm>
           <a:prstGeom prst="rect">
             <a:avLst>
-              <a:gd name="adj" fmla="val 9524"/>
+              <a:gd name="adj" fmla="val 7692"/>
             </a:avLst>
           </a:prstGeom>
           <a:solidFill>
@@ -11228,14 +12164,14 @@
       </p:sp>
       <p:sp>
         <p:nvSpPr>
-          <p:cNvPr id="51" name="Text 49"/>
-          <p:cNvSpPr/>
-          <p:nvPr/>
-        </p:nvSpPr>
-        <p:spPr>
-          <a:xfrm>
-            <a:off x="6870192" y="4169664"/>
-            <a:ext cx="685800" cy="384048"/>
+          <p:cNvPr id="61" name="Text 59"/>
+          <p:cNvSpPr/>
+          <p:nvPr/>
+        </p:nvSpPr>
+        <p:spPr>
+          <a:xfrm>
+            <a:off x="5219114" y="4169664"/>
+            <a:ext cx="493776" cy="475488"/>
           </a:xfrm>
           <a:prstGeom prst="rect">
             <a:avLst/>
@@ -11259,7 +12195,7 @@
                 <a:ea typeface="Trebuchet MS" pitchFamily="34" charset="-122"/>
                 <a:cs typeface="Trebuchet MS" pitchFamily="34" charset="-120"/>
               </a:rPr>
-              <a:t>l</a:t>
+              <a:t>or</a:t>
             </a:r>
             <a:endParaRPr lang="en-US" sz="900" dirty="0"/>
           </a:p>
@@ -11267,18 +12203,18 @@
       </p:sp>
       <p:sp>
         <p:nvSpPr>
-          <p:cNvPr id="52" name="Shape 50"/>
-          <p:cNvSpPr/>
-          <p:nvPr/>
-        </p:nvSpPr>
-        <p:spPr>
-          <a:xfrm>
-            <a:off x="7677912" y="4169664"/>
-            <a:ext cx="685800" cy="384048"/>
+          <p:cNvPr id="62" name="Shape 60"/>
+          <p:cNvSpPr/>
+          <p:nvPr/>
+        </p:nvSpPr>
+        <p:spPr>
+          <a:xfrm>
+            <a:off x="5763534" y="4169664"/>
+            <a:ext cx="493776" cy="475488"/>
           </a:xfrm>
           <a:prstGeom prst="rect">
             <a:avLst>
-              <a:gd name="adj" fmla="val 9524"/>
+              <a:gd name="adj" fmla="val 7692"/>
             </a:avLst>
           </a:prstGeom>
           <a:solidFill>
@@ -11294,14 +12230,14 @@
       </p:sp>
       <p:sp>
         <p:nvSpPr>
-          <p:cNvPr id="53" name="Text 51"/>
-          <p:cNvSpPr/>
-          <p:nvPr/>
-        </p:nvSpPr>
-        <p:spPr>
-          <a:xfrm>
-            <a:off x="7677912" y="4169664"/>
-            <a:ext cx="685800" cy="384048"/>
+          <p:cNvPr id="63" name="Text 61"/>
+          <p:cNvSpPr/>
+          <p:nvPr/>
+        </p:nvSpPr>
+        <p:spPr>
+          <a:xfrm>
+            <a:off x="5763534" y="4169664"/>
+            <a:ext cx="493776" cy="475488"/>
           </a:xfrm>
           <a:prstGeom prst="rect">
             <a:avLst/>
@@ -11325,7 +12261,271 @@
                 <a:ea typeface="Trebuchet MS" pitchFamily="34" charset="-122"/>
                 <a:cs typeface="Trebuchet MS" pitchFamily="34" charset="-120"/>
               </a:rPr>
-              <a:t>e</a:t>
+              <a:t>t</a:t>
+            </a:r>
+            <a:endParaRPr lang="en-US" sz="900" dirty="0"/>
+          </a:p>
+        </p:txBody>
+      </p:sp>
+      <p:sp>
+        <p:nvSpPr>
+          <p:cNvPr id="64" name="Shape 62"/>
+          <p:cNvSpPr/>
+          <p:nvPr/>
+        </p:nvSpPr>
+        <p:spPr>
+          <a:xfrm>
+            <a:off x="6307953" y="4169664"/>
+            <a:ext cx="493776" cy="475488"/>
+          </a:xfrm>
+          <a:prstGeom prst="rect">
+            <a:avLst>
+              <a:gd name="adj" fmla="val 7692"/>
+            </a:avLst>
+          </a:prstGeom>
+          <a:solidFill>
+            <a:srgbClr val="FFFFFF"/>
+          </a:solidFill>
+          <a:ln w="12700">
+            <a:solidFill>
+              <a:srgbClr val="DB2777"/>
+            </a:solidFill>
+            <a:prstDash val="solid"/>
+          </a:ln>
+        </p:spPr>
+      </p:sp>
+      <p:sp>
+        <p:nvSpPr>
+          <p:cNvPr id="65" name="Text 63"/>
+          <p:cNvSpPr/>
+          <p:nvPr/>
+        </p:nvSpPr>
+        <p:spPr>
+          <a:xfrm>
+            <a:off x="6307953" y="4169664"/>
+            <a:ext cx="493776" cy="475488"/>
+          </a:xfrm>
+          <a:prstGeom prst="rect">
+            <a:avLst/>
+          </a:prstGeom>
+          <a:noFill/>
+          <a:ln/>
+        </p:spPr>
+        <p:txBody>
+          <a:bodyPr wrap="square" lIns="0" tIns="0" rIns="0" bIns="0" rtlCol="0" anchor="ctr"/>
+          <a:lstStyle/>
+          <a:p>
+            <a:pPr algn="ctr" indent="0" marL="0">
+              <a:buNone/>
+            </a:pPr>
+            <a:r>
+              <a:rPr lang="en-US" sz="900" b="1" dirty="0">
+                <a:solidFill>
+                  <a:srgbClr val="9D174D"/>
+                </a:solidFill>
+                <a:latin typeface="Trebuchet MS" pitchFamily="34" charset="0"/>
+                <a:ea typeface="Trebuchet MS" pitchFamily="34" charset="-122"/>
+                <a:cs typeface="Trebuchet MS" pitchFamily="34" charset="-120"/>
+              </a:rPr>
+              <a:t>a</a:t>
+            </a:r>
+            <a:endParaRPr lang="en-US" sz="900" dirty="0"/>
+          </a:p>
+        </p:txBody>
+      </p:sp>
+      <p:sp>
+        <p:nvSpPr>
+          <p:cNvPr id="66" name="Shape 64"/>
+          <p:cNvSpPr/>
+          <p:nvPr/>
+        </p:nvSpPr>
+        <p:spPr>
+          <a:xfrm>
+            <a:off x="6852373" y="4169664"/>
+            <a:ext cx="493776" cy="475488"/>
+          </a:xfrm>
+          <a:prstGeom prst="rect">
+            <a:avLst>
+              <a:gd name="adj" fmla="val 7692"/>
+            </a:avLst>
+          </a:prstGeom>
+          <a:solidFill>
+            <a:srgbClr val="FFFFFF"/>
+          </a:solidFill>
+          <a:ln w="12700">
+            <a:solidFill>
+              <a:srgbClr val="DB2777"/>
+            </a:solidFill>
+            <a:prstDash val="solid"/>
+          </a:ln>
+        </p:spPr>
+      </p:sp>
+      <p:sp>
+        <p:nvSpPr>
+          <p:cNvPr id="67" name="Text 65"/>
+          <p:cNvSpPr/>
+          <p:nvPr/>
+        </p:nvSpPr>
+        <p:spPr>
+          <a:xfrm>
+            <a:off x="6852373" y="4169664"/>
+            <a:ext cx="493776" cy="475488"/>
+          </a:xfrm>
+          <a:prstGeom prst="rect">
+            <a:avLst/>
+          </a:prstGeom>
+          <a:noFill/>
+          <a:ln/>
+        </p:spPr>
+        <p:txBody>
+          <a:bodyPr wrap="square" lIns="0" tIns="0" rIns="0" bIns="0" rtlCol="0" anchor="ctr"/>
+          <a:lstStyle/>
+          <a:p>
+            <a:pPr algn="ctr" indent="0" marL="0">
+              <a:buNone/>
+            </a:pPr>
+            <a:r>
+              <a:rPr lang="en-US" sz="900" b="1" dirty="0">
+                <a:solidFill>
+                  <a:srgbClr val="9D174D"/>
+                </a:solidFill>
+                <a:latin typeface="Trebuchet MS" pitchFamily="34" charset="0"/>
+                <a:ea typeface="Trebuchet MS" pitchFamily="34" charset="-122"/>
+                <a:cs typeface="Trebuchet MS" pitchFamily="34" charset="-120"/>
+              </a:rPr>
+              <a:t>b</a:t>
+            </a:r>
+            <a:endParaRPr lang="en-US" sz="900" dirty="0"/>
+          </a:p>
+        </p:txBody>
+      </p:sp>
+      <p:sp>
+        <p:nvSpPr>
+          <p:cNvPr id="68" name="Shape 66"/>
+          <p:cNvSpPr/>
+          <p:nvPr/>
+        </p:nvSpPr>
+        <p:spPr>
+          <a:xfrm>
+            <a:off x="7396793" y="4169664"/>
+            <a:ext cx="493776" cy="475488"/>
+          </a:xfrm>
+          <a:prstGeom prst="rect">
+            <a:avLst>
+              <a:gd name="adj" fmla="val 7692"/>
+            </a:avLst>
+          </a:prstGeom>
+          <a:solidFill>
+            <a:srgbClr val="FFFFFF"/>
+          </a:solidFill>
+          <a:ln w="12700">
+            <a:solidFill>
+              <a:srgbClr val="DB2777"/>
+            </a:solidFill>
+            <a:prstDash val="solid"/>
+          </a:ln>
+        </p:spPr>
+      </p:sp>
+      <p:sp>
+        <p:nvSpPr>
+          <p:cNvPr id="69" name="Text 67"/>
+          <p:cNvSpPr/>
+          <p:nvPr/>
+        </p:nvSpPr>
+        <p:spPr>
+          <a:xfrm>
+            <a:off x="7396793" y="4169664"/>
+            <a:ext cx="493776" cy="475488"/>
+          </a:xfrm>
+          <a:prstGeom prst="rect">
+            <a:avLst/>
+          </a:prstGeom>
+          <a:noFill/>
+          <a:ln/>
+        </p:spPr>
+        <p:txBody>
+          <a:bodyPr wrap="square" lIns="0" tIns="0" rIns="0" bIns="0" rtlCol="0" anchor="ctr"/>
+          <a:lstStyle/>
+          <a:p>
+            <a:pPr algn="ctr" indent="0" marL="0">
+              <a:buNone/>
+            </a:pPr>
+            <a:r>
+              <a:rPr lang="en-US" sz="900" b="1" dirty="0">
+                <a:solidFill>
+                  <a:srgbClr val="9D174D"/>
+                </a:solidFill>
+                <a:latin typeface="Trebuchet MS" pitchFamily="34" charset="0"/>
+                <a:ea typeface="Trebuchet MS" pitchFamily="34" charset="-122"/>
+                <a:cs typeface="Trebuchet MS" pitchFamily="34" charset="-120"/>
+              </a:rPr>
+              <a:t>l</a:t>
+            </a:r>
+            <a:endParaRPr lang="en-US" sz="900" dirty="0"/>
+          </a:p>
+        </p:txBody>
+      </p:sp>
+      <p:sp>
+        <p:nvSpPr>
+          <p:cNvPr id="70" name="Shape 68"/>
+          <p:cNvSpPr/>
+          <p:nvPr/>
+        </p:nvSpPr>
+        <p:spPr>
+          <a:xfrm>
+            <a:off x="7941212" y="4169664"/>
+            <a:ext cx="493776" cy="475488"/>
+          </a:xfrm>
+          <a:prstGeom prst="rect">
+            <a:avLst>
+              <a:gd name="adj" fmla="val 7692"/>
+            </a:avLst>
+          </a:prstGeom>
+          <a:solidFill>
+            <a:srgbClr val="FFFFFF"/>
+          </a:solidFill>
+          <a:ln w="12700">
+            <a:solidFill>
+              <a:srgbClr val="DB2777"/>
+            </a:solidFill>
+            <a:prstDash val="solid"/>
+          </a:ln>
+        </p:spPr>
+      </p:sp>
+      <p:sp>
+        <p:nvSpPr>
+          <p:cNvPr id="71" name="Text 69"/>
+          <p:cNvSpPr/>
+          <p:nvPr/>
+        </p:nvSpPr>
+        <p:spPr>
+          <a:xfrm>
+            <a:off x="7941212" y="4169664"/>
+            <a:ext cx="493776" cy="475488"/>
+          </a:xfrm>
+          <a:prstGeom prst="rect">
+            <a:avLst/>
+          </a:prstGeom>
+          <a:noFill/>
+          <a:ln/>
+        </p:spPr>
+        <p:txBody>
+          <a:bodyPr wrap="square" lIns="0" tIns="0" rIns="0" bIns="0" rtlCol="0" anchor="ctr"/>
+          <a:lstStyle/>
+          <a:p>
+            <a:pPr algn="ctr" indent="0" marL="0">
+              <a:buNone/>
+            </a:pPr>
+            <a:r>
+              <a:rPr lang="en-US" sz="900" b="1" dirty="0">
+                <a:solidFill>
+                  <a:srgbClr val="9D174D"/>
+                </a:solidFill>
+                <a:latin typeface="Trebuchet MS" pitchFamily="34" charset="0"/>
+                <a:ea typeface="Trebuchet MS" pitchFamily="34" charset="-122"/>
+                <a:cs typeface="Trebuchet MS" pitchFamily="34" charset="-120"/>
+              </a:rPr>
+              <a:t>y</a:t>
             </a:r>
             <a:endParaRPr lang="en-US" sz="900" dirty="0"/>
           </a:p>
@@ -11617,7 +12817,7 @@
                 <a:ea typeface="Calibri" pitchFamily="34" charset="-122"/>
                 <a:cs typeface="Calibri" pitchFamily="34" charset="-120"/>
               </a:rPr>
-              <a:t>Word Labs  •  wordlabs.app  •  Suffix: '-able' = can be done; capable of</a:t>
+              <a:t>Word Labs  •  wordlabs.app  •  Suffix: '-able' = able to</a:t>
             </a:r>
             <a:endParaRPr lang="en-US" sz="800" dirty="0"/>
           </a:p>
@@ -11756,7 +12956,7 @@
                 <a:ea typeface="Trebuchet MS" pitchFamily="34" charset="-122"/>
                 <a:cs typeface="Trebuchet MS" pitchFamily="34" charset="-120"/>
               </a:rPr>
-              <a:t>enjoyable</a:t>
+              <a:t>memorable</a:t>
             </a:r>
             <a:endParaRPr lang="en-US" sz="2800" dirty="0"/>
           </a:p>
@@ -12444,7 +13644,7 @@
                 <a:ea typeface="Calibri" pitchFamily="34" charset="-122"/>
                 <a:cs typeface="Calibri" pitchFamily="34" charset="-120"/>
               </a:rPr>
-              <a:t>Word Labs  •  wordlabs.app  •  Suffix: '-able' = can be done; capable of</a:t>
+              <a:t>Word Labs  •  wordlabs.app  •  Suffix: '-able' = able to</a:t>
             </a:r>
             <a:endParaRPr lang="en-US" sz="800" dirty="0"/>
           </a:p>
@@ -12583,7 +13783,7 @@
                 <a:ea typeface="Trebuchet MS" pitchFamily="34" charset="-122"/>
                 <a:cs typeface="Trebuchet MS" pitchFamily="34" charset="-120"/>
               </a:rPr>
-              <a:t>enjoyable</a:t>
+              <a:t>memorable</a:t>
             </a:r>
             <a:endParaRPr lang="en-US" sz="2800" dirty="0"/>
           </a:p>
@@ -12722,7 +13922,7 @@
                 <a:ea typeface="Trebuchet MS" pitchFamily="34" charset="-122"/>
                 <a:cs typeface="Trebuchet MS" pitchFamily="34" charset="-120"/>
               </a:rPr>
-              <a:t>en</a:t>
+              <a:t>mem</a:t>
             </a:r>
             <a:endParaRPr lang="en-US" sz="1300" dirty="0"/>
           </a:p>
@@ -12761,7 +13961,7 @@
                 <a:ea typeface="Calibri" pitchFamily="34" charset="-122"/>
                 <a:cs typeface="Calibri" pitchFamily="34" charset="-120"/>
               </a:rPr>
-              <a:t>to put into or make</a:t>
+              <a:t>memory; remember</a:t>
             </a:r>
             <a:endParaRPr lang="en-US" sz="850" dirty="0"/>
           </a:p>
@@ -12834,7 +14034,7 @@
                 <a:ea typeface="Trebuchet MS" pitchFamily="34" charset="-122"/>
                 <a:cs typeface="Trebuchet MS" pitchFamily="34" charset="-120"/>
               </a:rPr>
-              <a:t>joy</a:t>
+              <a:t>or</a:t>
             </a:r>
             <a:endParaRPr lang="en-US" sz="1300" dirty="0"/>
           </a:p>
@@ -12873,7 +14073,7 @@
                 <a:ea typeface="Calibri" pitchFamily="34" charset="-122"/>
                 <a:cs typeface="Calibri" pitchFamily="34" charset="-120"/>
               </a:rPr>
-              <a:t>happiness or pleasure</a:t>
+              <a:t>person who</a:t>
             </a:r>
             <a:endParaRPr lang="en-US" sz="850" dirty="0"/>
           </a:p>
@@ -12985,7 +14185,7 @@
                 <a:ea typeface="Calibri" pitchFamily="34" charset="-122"/>
                 <a:cs typeface="Calibri" pitchFamily="34" charset="-120"/>
               </a:rPr>
-              <a:t>can be done; capable of</a:t>
+              <a:t>able to</a:t>
             </a:r>
             <a:endParaRPr lang="en-US" sz="850" dirty="0"/>
           </a:p>
@@ -13541,7 +14741,7 @@
                 <a:ea typeface="Calibri" pitchFamily="34" charset="-122"/>
                 <a:cs typeface="Calibri" pitchFamily="34" charset="-120"/>
               </a:rPr>
-              <a:t>Word Labs  •  wordlabs.app  •  Suffix: '-able' = can be done; capable of</a:t>
+              <a:t>Word Labs  •  wordlabs.app  •  Suffix: '-able' = able to</a:t>
             </a:r>
             <a:endParaRPr lang="en-US" sz="800" dirty="0"/>
           </a:p>
@@ -13680,7 +14880,7 @@
                 <a:ea typeface="Trebuchet MS" pitchFamily="34" charset="-122"/>
                 <a:cs typeface="Trebuchet MS" pitchFamily="34" charset="-120"/>
               </a:rPr>
-              <a:t>enjoyable</a:t>
+              <a:t>memorable</a:t>
             </a:r>
             <a:endParaRPr lang="en-US" sz="2800" dirty="0"/>
           </a:p>
@@ -13819,7 +15019,7 @@
                 <a:ea typeface="Trebuchet MS" pitchFamily="34" charset="-122"/>
                 <a:cs typeface="Trebuchet MS" pitchFamily="34" charset="-120"/>
               </a:rPr>
-              <a:t>en</a:t>
+              <a:t>mem</a:t>
             </a:r>
             <a:endParaRPr lang="en-US" sz="1300" dirty="0"/>
           </a:p>
@@ -13858,7 +15058,7 @@
                 <a:ea typeface="Calibri" pitchFamily="34" charset="-122"/>
                 <a:cs typeface="Calibri" pitchFamily="34" charset="-120"/>
               </a:rPr>
-              <a:t>to put into or make</a:t>
+              <a:t>memory; remember</a:t>
             </a:r>
             <a:endParaRPr lang="en-US" sz="850" dirty="0"/>
           </a:p>
@@ -13931,7 +15131,7 @@
                 <a:ea typeface="Trebuchet MS" pitchFamily="34" charset="-122"/>
                 <a:cs typeface="Trebuchet MS" pitchFamily="34" charset="-120"/>
               </a:rPr>
-              <a:t>joy</a:t>
+              <a:t>or</a:t>
             </a:r>
             <a:endParaRPr lang="en-US" sz="1300" dirty="0"/>
           </a:p>
@@ -13970,7 +15170,7 @@
                 <a:ea typeface="Calibri" pitchFamily="34" charset="-122"/>
                 <a:cs typeface="Calibri" pitchFamily="34" charset="-120"/>
               </a:rPr>
-              <a:t>happiness or pleasure</a:t>
+              <a:t>person who</a:t>
             </a:r>
             <a:endParaRPr lang="en-US" sz="850" dirty="0"/>
           </a:p>
@@ -14082,7 +15282,7 @@
                 <a:ea typeface="Calibri" pitchFamily="34" charset="-122"/>
                 <a:cs typeface="Calibri" pitchFamily="34" charset="-120"/>
               </a:rPr>
-              <a:t>can be done; capable of</a:t>
+              <a:t>able to</a:t>
             </a:r>
             <a:endParaRPr lang="en-US" sz="850" dirty="0"/>
           </a:p>
@@ -14241,7 +15441,7 @@
                 <a:ea typeface="Trebuchet MS" pitchFamily="34" charset="-122"/>
                 <a:cs typeface="Trebuchet MS" pitchFamily="34" charset="-120"/>
               </a:rPr>
-              <a:t>en</a:t>
+              <a:t>mem</a:t>
             </a:r>
             <a:endParaRPr lang="en-US" sz="1400" dirty="0"/>
           </a:p>
@@ -14346,7 +15546,7 @@
                 <a:ea typeface="Trebuchet MS" pitchFamily="34" charset="-122"/>
                 <a:cs typeface="Trebuchet MS" pitchFamily="34" charset="-120"/>
               </a:rPr>
-              <a:t>joy</a:t>
+              <a:t>o</a:t>
             </a:r>
             <a:endParaRPr lang="en-US" sz="1400" dirty="0"/>
           </a:p>
@@ -14451,7 +15651,7 @@
                 <a:ea typeface="Trebuchet MS" pitchFamily="34" charset="-122"/>
                 <a:cs typeface="Trebuchet MS" pitchFamily="34" charset="-120"/>
               </a:rPr>
-              <a:t>a</a:t>
+              <a:t>ra</a:t>
             </a:r>
             <a:endParaRPr lang="en-US" sz="1400" dirty="0"/>
           </a:p>
@@ -14889,7 +16089,7 @@
                 <a:ea typeface="Calibri" pitchFamily="34" charset="-122"/>
                 <a:cs typeface="Calibri" pitchFamily="34" charset="-120"/>
               </a:rPr>
-              <a:t>Suffix '-able' — can be done; capable of</a:t>
+              <a:t>Suffix '-able' — able to</a:t>
             </a:r>
             <a:endParaRPr lang="en-US" sz="1600" dirty="0"/>
           </a:p>
@@ -15245,7 +16445,7 @@
                 <a:ea typeface="Calibri" pitchFamily="34" charset="-122"/>
                 <a:cs typeface="Calibri" pitchFamily="34" charset="-120"/>
               </a:rPr>
-              <a:t>Word Labs  •  wordlabs.app  •  Suffix: '-able' = can be done; capable of</a:t>
+              <a:t>Word Labs  •  wordlabs.app  •  Suffix: '-able' = able to</a:t>
             </a:r>
             <a:endParaRPr lang="en-US" sz="800" dirty="0"/>
           </a:p>
@@ -15384,7 +16584,7 @@
                 <a:ea typeface="Trebuchet MS" pitchFamily="34" charset="-122"/>
                 <a:cs typeface="Trebuchet MS" pitchFamily="34" charset="-120"/>
               </a:rPr>
-              <a:t>enjoyable</a:t>
+              <a:t>memorable</a:t>
             </a:r>
             <a:endParaRPr lang="en-US" sz="2800" dirty="0"/>
           </a:p>
@@ -15523,7 +16723,7 @@
                 <a:ea typeface="Trebuchet MS" pitchFamily="34" charset="-122"/>
                 <a:cs typeface="Trebuchet MS" pitchFamily="34" charset="-120"/>
               </a:rPr>
-              <a:t>en</a:t>
+              <a:t>mem</a:t>
             </a:r>
             <a:endParaRPr lang="en-US" sz="1300" dirty="0"/>
           </a:p>
@@ -15562,7 +16762,7 @@
                 <a:ea typeface="Calibri" pitchFamily="34" charset="-122"/>
                 <a:cs typeface="Calibri" pitchFamily="34" charset="-120"/>
               </a:rPr>
-              <a:t>to put into or make</a:t>
+              <a:t>memory; remember</a:t>
             </a:r>
             <a:endParaRPr lang="en-US" sz="850" dirty="0"/>
           </a:p>
@@ -15635,7 +16835,7 @@
                 <a:ea typeface="Trebuchet MS" pitchFamily="34" charset="-122"/>
                 <a:cs typeface="Trebuchet MS" pitchFamily="34" charset="-120"/>
               </a:rPr>
-              <a:t>joy</a:t>
+              <a:t>or</a:t>
             </a:r>
             <a:endParaRPr lang="en-US" sz="1300" dirty="0"/>
           </a:p>
@@ -15674,7 +16874,7 @@
                 <a:ea typeface="Calibri" pitchFamily="34" charset="-122"/>
                 <a:cs typeface="Calibri" pitchFamily="34" charset="-120"/>
               </a:rPr>
-              <a:t>happiness or pleasure</a:t>
+              <a:t>person who</a:t>
             </a:r>
             <a:endParaRPr lang="en-US" sz="850" dirty="0"/>
           </a:p>
@@ -15786,7 +16986,7 @@
                 <a:ea typeface="Calibri" pitchFamily="34" charset="-122"/>
                 <a:cs typeface="Calibri" pitchFamily="34" charset="-120"/>
               </a:rPr>
-              <a:t>can be done; capable of</a:t>
+              <a:t>able to</a:t>
             </a:r>
             <a:endParaRPr lang="en-US" sz="850" dirty="0"/>
           </a:p>
@@ -15945,7 +17145,7 @@
                 <a:ea typeface="Trebuchet MS" pitchFamily="34" charset="-122"/>
                 <a:cs typeface="Trebuchet MS" pitchFamily="34" charset="-120"/>
               </a:rPr>
-              <a:t>en</a:t>
+              <a:t>mem</a:t>
             </a:r>
             <a:endParaRPr lang="en-US" sz="1400" dirty="0"/>
           </a:p>
@@ -16050,7 +17250,7 @@
                 <a:ea typeface="Trebuchet MS" pitchFamily="34" charset="-122"/>
                 <a:cs typeface="Trebuchet MS" pitchFamily="34" charset="-120"/>
               </a:rPr>
-              <a:t>joy</a:t>
+              <a:t>o</a:t>
             </a:r>
             <a:endParaRPr lang="en-US" sz="1400" dirty="0"/>
           </a:p>
@@ -16155,7 +17355,7 @@
                 <a:ea typeface="Trebuchet MS" pitchFamily="34" charset="-122"/>
                 <a:cs typeface="Trebuchet MS" pitchFamily="34" charset="-120"/>
               </a:rPr>
-              <a:t>a</a:t>
+              <a:t>ra</a:t>
             </a:r>
             <a:endParaRPr lang="en-US" sz="1400" dirty="0"/>
           </a:p>
@@ -16419,7 +17619,7 @@
                 <a:ea typeface="Trebuchet MS" pitchFamily="34" charset="-122"/>
                 <a:cs typeface="Trebuchet MS" pitchFamily="34" charset="-120"/>
               </a:rPr>
-              <a:t>e</a:t>
+              <a:t>m</a:t>
             </a:r>
             <a:endParaRPr lang="en-US" sz="900" dirty="0"/>
           </a:p>
@@ -16485,7 +17685,7 @@
                 <a:ea typeface="Trebuchet MS" pitchFamily="34" charset="-122"/>
                 <a:cs typeface="Trebuchet MS" pitchFamily="34" charset="-120"/>
               </a:rPr>
-              <a:t>n</a:t>
+              <a:t>e</a:t>
             </a:r>
             <a:endParaRPr lang="en-US" sz="900" dirty="0"/>
           </a:p>
@@ -16551,7 +17751,7 @@
                 <a:ea typeface="Trebuchet MS" pitchFamily="34" charset="-122"/>
                 <a:cs typeface="Trebuchet MS" pitchFamily="34" charset="-120"/>
               </a:rPr>
-              <a:t>j</a:t>
+              <a:t>m</a:t>
             </a:r>
             <a:endParaRPr lang="en-US" sz="900" dirty="0"/>
           </a:p>
@@ -16617,7 +17817,7 @@
                 <a:ea typeface="Trebuchet MS" pitchFamily="34" charset="-122"/>
                 <a:cs typeface="Trebuchet MS" pitchFamily="34" charset="-120"/>
               </a:rPr>
-              <a:t>oy</a:t>
+              <a:t>o</a:t>
             </a:r>
             <a:endParaRPr lang="en-US" sz="900" dirty="0"/>
           </a:p>
@@ -16683,7 +17883,7 @@
                 <a:ea typeface="Trebuchet MS" pitchFamily="34" charset="-122"/>
                 <a:cs typeface="Trebuchet MS" pitchFamily="34" charset="-120"/>
               </a:rPr>
-              <a:t>a</a:t>
+              <a:t>r</a:t>
             </a:r>
             <a:endParaRPr lang="en-US" sz="900" dirty="0"/>
           </a:p>
@@ -16749,7 +17949,7 @@
                 <a:ea typeface="Trebuchet MS" pitchFamily="34" charset="-122"/>
                 <a:cs typeface="Trebuchet MS" pitchFamily="34" charset="-120"/>
               </a:rPr>
-              <a:t>b</a:t>
+              <a:t>a</a:t>
             </a:r>
             <a:endParaRPr lang="en-US" sz="900" dirty="0"/>
           </a:p>
@@ -16815,7 +18015,7 @@
                 <a:ea typeface="Trebuchet MS" pitchFamily="34" charset="-122"/>
                 <a:cs typeface="Trebuchet MS" pitchFamily="34" charset="-120"/>
               </a:rPr>
-              <a:t>l</a:t>
+              <a:t>b</a:t>
             </a:r>
             <a:endParaRPr lang="en-US" sz="900" dirty="0"/>
           </a:p>
@@ -16881,7 +18081,7 @@
                 <a:ea typeface="Trebuchet MS" pitchFamily="34" charset="-122"/>
                 <a:cs typeface="Trebuchet MS" pitchFamily="34" charset="-120"/>
               </a:rPr>
-              <a:t>e</a:t>
+              <a:t>le</a:t>
             </a:r>
             <a:endParaRPr lang="en-US" sz="900" dirty="0"/>
           </a:p>
@@ -17455,7 +18655,7 @@
                 <a:ea typeface="Calibri" pitchFamily="34" charset="-122"/>
                 <a:cs typeface="Calibri" pitchFamily="34" charset="-120"/>
               </a:rPr>
-              <a:t>Word Labs  •  wordlabs.app  •  Suffix: '-able' = can be done; capable of</a:t>
+              <a:t>Word Labs  •  wordlabs.app  •  Suffix: '-able' = able to</a:t>
             </a:r>
             <a:endParaRPr lang="en-US" sz="800" dirty="0"/>
           </a:p>
@@ -17789,7 +18989,7 @@
                 <a:ea typeface="Trebuchet MS" pitchFamily="34" charset="-122"/>
                 <a:cs typeface="Trebuchet MS" pitchFamily="34" charset="-120"/>
               </a:rPr>
-              <a:t>2</a:t>
+              <a:t>0</a:t>
             </a:r>
             <a:pPr algn="ctr" indent="0" marL="0">
               <a:buNone/>
@@ -17803,7 +19003,7 @@
                 <a:ea typeface="Trebuchet MS" pitchFamily="34" charset="-122"/>
                 <a:cs typeface="Trebuchet MS" pitchFamily="34" charset="-120"/>
               </a:rPr>
-              <a:t>  punctuation marks</a:t>
+              <a:t>  punctuation mark</a:t>
             </a:r>
             <a:endParaRPr lang="en-US" sz="2800" dirty="0"/>
           </a:p>
@@ -18095,7 +19295,7 @@
                 <a:ea typeface="Calibri" pitchFamily="34" charset="-122"/>
                 <a:cs typeface="Calibri" pitchFamily="34" charset="-120"/>
               </a:rPr>
-              <a:t>Word Labs  •  wordlabs.app  •  Suffix: '-able' = can be done; capable of</a:t>
+              <a:t>Word Labs  •  wordlabs.app  •  Suffix: '-able' = able to</a:t>
             </a:r>
             <a:endParaRPr lang="en-US" sz="800" dirty="0"/>
           </a:p>
@@ -18207,7 +19407,7 @@
                 <a:ea typeface="Calibri" pitchFamily="34" charset="-122"/>
                 <a:cs typeface="Calibri" pitchFamily="34" charset="-120"/>
               </a:rPr>
-              <a:t>It is </a:t>
+              <a:t>Turning your homework in a day late is not </a:t>
             </a:r>
             <a:pPr algn="l" indent="0" marL="0">
               <a:buNone/>
@@ -18224,7 +19424,7 @@
                 <a:ea typeface="Calibri" pitchFamily="34" charset="-122"/>
                 <a:cs typeface="Calibri" pitchFamily="34" charset="-120"/>
               </a:rPr>
-              <a:t>remarkable</a:t>
+              <a:t>acceptable</a:t>
             </a:r>
             <a:pPr algn="l" indent="0" marL="0">
               <a:buNone/>
@@ -18238,7 +19438,7 @@
                 <a:ea typeface="Calibri" pitchFamily="34" charset="-122"/>
                 <a:cs typeface="Calibri" pitchFamily="34" charset="-120"/>
               </a:rPr>
-              <a:t> how </a:t>
+              <a:t>. My grandmother is always </a:t>
             </a:r>
             <a:pPr algn="l" indent="0" marL="0">
               <a:buNone/>
@@ -18269,7 +19469,7 @@
                 <a:ea typeface="Calibri" pitchFamily="34" charset="-122"/>
                 <a:cs typeface="Calibri" pitchFamily="34" charset="-120"/>
               </a:rPr>
-              <a:t> she is, and her </a:t>
+              <a:t> when I need help. His rude comments were considered </a:t>
             </a:r>
             <a:pPr algn="l" indent="0" marL="0">
               <a:buNone/>
@@ -18286,7 +19486,7 @@
                 <a:ea typeface="Calibri" pitchFamily="34" charset="-122"/>
                 <a:cs typeface="Calibri" pitchFamily="34" charset="-120"/>
               </a:rPr>
-              <a:t>readable</a:t>
+              <a:t>objectionable</a:t>
             </a:r>
             <a:pPr algn="l" indent="0" marL="0">
               <a:buNone/>
@@ -18300,7 +19500,7 @@
                 <a:ea typeface="Calibri" pitchFamily="34" charset="-122"/>
                 <a:cs typeface="Calibri" pitchFamily="34" charset="-120"/>
               </a:rPr>
-              <a:t> handwriting makes marking so much easier.</a:t>
+              <a:t> by the whole class.</a:t>
             </a:r>
             <a:endParaRPr lang="en-US" sz="1800" dirty="0"/>
           </a:p>
@@ -18455,7 +19655,7 @@
                 <a:ea typeface="Trebuchet MS" pitchFamily="34" charset="-122"/>
                 <a:cs typeface="Trebuchet MS" pitchFamily="34" charset="-120"/>
               </a:rPr>
-              <a:t>remarkable</a:t>
+              <a:t>acceptable</a:t>
             </a:r>
             <a:endParaRPr lang="en-US" sz="1400" dirty="0"/>
           </a:p>
@@ -18711,7 +19911,7 @@
                 <a:ea typeface="Trebuchet MS" pitchFamily="34" charset="-122"/>
                 <a:cs typeface="Trebuchet MS" pitchFamily="34" charset="-120"/>
               </a:rPr>
-              <a:t>readable</a:t>
+              <a:t>objectionable</a:t>
             </a:r>
             <a:endParaRPr lang="en-US" sz="1400" dirty="0"/>
           </a:p>
@@ -19042,7 +20242,7 @@
                 <a:ea typeface="Calibri" pitchFamily="34" charset="-122"/>
                 <a:cs typeface="Calibri" pitchFamily="34" charset="-120"/>
               </a:rPr>
-              <a:t>Word Labs  •  wordlabs.app  •  Suffix: '-able' = can be done; capable of</a:t>
+              <a:t>Word Labs  •  wordlabs.app  •  Suffix: '-able' = able to</a:t>
             </a:r>
             <a:endParaRPr lang="en-US" sz="800" dirty="0"/>
           </a:p>
@@ -19181,7 +20381,7 @@
                 <a:ea typeface="Trebuchet MS" pitchFamily="34" charset="-122"/>
                 <a:cs typeface="Trebuchet MS" pitchFamily="34" charset="-120"/>
               </a:rPr>
-              <a:t>remarkable</a:t>
+              <a:t>acceptable</a:t>
             </a:r>
             <a:endParaRPr lang="en-US" sz="2800" dirty="0"/>
           </a:p>
@@ -19869,7 +21069,7 @@
                 <a:ea typeface="Calibri" pitchFamily="34" charset="-122"/>
                 <a:cs typeface="Calibri" pitchFamily="34" charset="-120"/>
               </a:rPr>
-              <a:t>Word Labs  •  wordlabs.app  •  Suffix: '-able' = can be done; capable of</a:t>
+              <a:t>Word Labs  •  wordlabs.app  •  Suffix: '-able' = able to</a:t>
             </a:r>
             <a:endParaRPr lang="en-US" sz="800" dirty="0"/>
           </a:p>
@@ -20008,7 +21208,7 @@
                 <a:ea typeface="Trebuchet MS" pitchFamily="34" charset="-122"/>
                 <a:cs typeface="Trebuchet MS" pitchFamily="34" charset="-120"/>
               </a:rPr>
-              <a:t>remarkable</a:t>
+              <a:t>acceptable</a:t>
             </a:r>
             <a:endParaRPr lang="en-US" sz="2800" dirty="0"/>
           </a:p>
@@ -20147,7 +21347,7 @@
                 <a:ea typeface="Trebuchet MS" pitchFamily="34" charset="-122"/>
                 <a:cs typeface="Trebuchet MS" pitchFamily="34" charset="-120"/>
               </a:rPr>
-              <a:t>re</a:t>
+              <a:t>ad</a:t>
             </a:r>
             <a:endParaRPr lang="en-US" sz="1300" dirty="0"/>
           </a:p>
@@ -20186,7 +21386,7 @@
                 <a:ea typeface="Calibri" pitchFamily="34" charset="-122"/>
                 <a:cs typeface="Calibri" pitchFamily="34" charset="-120"/>
               </a:rPr>
-              <a:t>again</a:t>
+              <a:t>towards; to</a:t>
             </a:r>
             <a:endParaRPr lang="en-US" sz="850" dirty="0"/>
           </a:p>
@@ -20209,11 +21409,11 @@
             </a:avLst>
           </a:prstGeom>
           <a:solidFill>
-            <a:srgbClr val="DDD6FE"/>
+            <a:srgbClr val="FCE7F3"/>
           </a:solidFill>
           <a:ln w="19050">
             <a:solidFill>
-              <a:srgbClr val="7C3AED"/>
+              <a:srgbClr val="DB2777"/>
             </a:solidFill>
             <a:prstDash val="solid"/>
           </a:ln>
@@ -20253,13 +21453,13 @@
             <a:r>
               <a:rPr lang="en-US" sz="1300" b="1" dirty="0">
                 <a:solidFill>
-                  <a:srgbClr val="4C1D95"/>
+                  <a:srgbClr val="9D174D"/>
                 </a:solidFill>
                 <a:latin typeface="Trebuchet MS" pitchFamily="34" charset="0"/>
                 <a:ea typeface="Trebuchet MS" pitchFamily="34" charset="-122"/>
                 <a:cs typeface="Trebuchet MS" pitchFamily="34" charset="-120"/>
               </a:rPr>
-              <a:t>mark</a:t>
+              <a:t>cept</a:t>
             </a:r>
             <a:endParaRPr lang="en-US" sz="1300" dirty="0"/>
           </a:p>
@@ -20298,7 +21498,7 @@
                 <a:ea typeface="Calibri" pitchFamily="34" charset="-122"/>
                 <a:cs typeface="Calibri" pitchFamily="34" charset="-120"/>
               </a:rPr>
-              <a:t>to notice or pay attention to</a:t>
+              <a:t>take; receive</a:t>
             </a:r>
             <a:endParaRPr lang="en-US" sz="850" dirty="0"/>
           </a:p>
@@ -20410,7 +21610,7 @@
                 <a:ea typeface="Calibri" pitchFamily="34" charset="-122"/>
                 <a:cs typeface="Calibri" pitchFamily="34" charset="-120"/>
               </a:rPr>
-              <a:t>can be done; capable of</a:t>
+              <a:t>able to</a:t>
             </a:r>
             <a:endParaRPr lang="en-US" sz="850" dirty="0"/>
           </a:p>
@@ -20966,7 +22166,7 @@
                 <a:ea typeface="Calibri" pitchFamily="34" charset="-122"/>
                 <a:cs typeface="Calibri" pitchFamily="34" charset="-120"/>
               </a:rPr>
-              <a:t>Word Labs  •  wordlabs.app  •  Suffix: '-able' = can be done; capable of</a:t>
+              <a:t>Word Labs  •  wordlabs.app  •  Suffix: '-able' = able to</a:t>
             </a:r>
             <a:endParaRPr lang="en-US" sz="800" dirty="0"/>
           </a:p>
@@ -21105,7 +22305,7 @@
                 <a:ea typeface="Trebuchet MS" pitchFamily="34" charset="-122"/>
                 <a:cs typeface="Trebuchet MS" pitchFamily="34" charset="-120"/>
               </a:rPr>
-              <a:t>remarkable</a:t>
+              <a:t>acceptable</a:t>
             </a:r>
             <a:endParaRPr lang="en-US" sz="2800" dirty="0"/>
           </a:p>
@@ -21244,7 +22444,7 @@
                 <a:ea typeface="Trebuchet MS" pitchFamily="34" charset="-122"/>
                 <a:cs typeface="Trebuchet MS" pitchFamily="34" charset="-120"/>
               </a:rPr>
-              <a:t>re</a:t>
+              <a:t>ad</a:t>
             </a:r>
             <a:endParaRPr lang="en-US" sz="1300" dirty="0"/>
           </a:p>
@@ -21283,7 +22483,7 @@
                 <a:ea typeface="Calibri" pitchFamily="34" charset="-122"/>
                 <a:cs typeface="Calibri" pitchFamily="34" charset="-120"/>
               </a:rPr>
-              <a:t>again</a:t>
+              <a:t>towards; to</a:t>
             </a:r>
             <a:endParaRPr lang="en-US" sz="850" dirty="0"/>
           </a:p>
@@ -21306,11 +22506,11 @@
             </a:avLst>
           </a:prstGeom>
           <a:solidFill>
-            <a:srgbClr val="DDD6FE"/>
+            <a:srgbClr val="FCE7F3"/>
           </a:solidFill>
           <a:ln w="19050">
             <a:solidFill>
-              <a:srgbClr val="7C3AED"/>
+              <a:srgbClr val="DB2777"/>
             </a:solidFill>
             <a:prstDash val="solid"/>
           </a:ln>
@@ -21350,13 +22550,13 @@
             <a:r>
               <a:rPr lang="en-US" sz="1300" b="1" dirty="0">
                 <a:solidFill>
-                  <a:srgbClr val="4C1D95"/>
+                  <a:srgbClr val="9D174D"/>
                 </a:solidFill>
                 <a:latin typeface="Trebuchet MS" pitchFamily="34" charset="0"/>
                 <a:ea typeface="Trebuchet MS" pitchFamily="34" charset="-122"/>
                 <a:cs typeface="Trebuchet MS" pitchFamily="34" charset="-120"/>
               </a:rPr>
-              <a:t>mark</a:t>
+              <a:t>cept</a:t>
             </a:r>
             <a:endParaRPr lang="en-US" sz="1300" dirty="0"/>
           </a:p>
@@ -21395,7 +22595,7 @@
                 <a:ea typeface="Calibri" pitchFamily="34" charset="-122"/>
                 <a:cs typeface="Calibri" pitchFamily="34" charset="-120"/>
               </a:rPr>
-              <a:t>to notice or pay attention to</a:t>
+              <a:t>take; receive</a:t>
             </a:r>
             <a:endParaRPr lang="en-US" sz="850" dirty="0"/>
           </a:p>
@@ -21507,7 +22707,7 @@
                 <a:ea typeface="Calibri" pitchFamily="34" charset="-122"/>
                 <a:cs typeface="Calibri" pitchFamily="34" charset="-120"/>
               </a:rPr>
-              <a:t>can be done; capable of</a:t>
+              <a:t>able to</a:t>
             </a:r>
             <a:endParaRPr lang="en-US" sz="850" dirty="0"/>
           </a:p>
@@ -21666,7 +22866,7 @@
                 <a:ea typeface="Trebuchet MS" pitchFamily="34" charset="-122"/>
                 <a:cs typeface="Trebuchet MS" pitchFamily="34" charset="-120"/>
               </a:rPr>
-              <a:t>re</a:t>
+              <a:t>ac</a:t>
             </a:r>
             <a:endParaRPr lang="en-US" sz="1400" dirty="0"/>
           </a:p>
@@ -21771,7 +22971,7 @@
                 <a:ea typeface="Trebuchet MS" pitchFamily="34" charset="-122"/>
                 <a:cs typeface="Trebuchet MS" pitchFamily="34" charset="-120"/>
               </a:rPr>
-              <a:t>mark</a:t>
+              <a:t>cept</a:t>
             </a:r>
             <a:endParaRPr lang="en-US" sz="1400" dirty="0"/>
           </a:p>
@@ -22405,7 +23605,7 @@
                 <a:ea typeface="Calibri" pitchFamily="34" charset="-122"/>
                 <a:cs typeface="Calibri" pitchFamily="34" charset="-120"/>
               </a:rPr>
-              <a:t>Word Labs  •  wordlabs.app  •  Suffix: '-able' = can be done; capable of</a:t>
+              <a:t>Word Labs  •  wordlabs.app  •  Suffix: '-able' = able to</a:t>
             </a:r>
             <a:endParaRPr lang="en-US" sz="800" dirty="0"/>
           </a:p>
@@ -22544,7 +23744,7 @@
                 <a:ea typeface="Trebuchet MS" pitchFamily="34" charset="-122"/>
                 <a:cs typeface="Trebuchet MS" pitchFamily="34" charset="-120"/>
               </a:rPr>
-              <a:t>remarkable</a:t>
+              <a:t>acceptable</a:t>
             </a:r>
             <a:endParaRPr lang="en-US" sz="2800" dirty="0"/>
           </a:p>
@@ -22683,7 +23883,7 @@
                 <a:ea typeface="Trebuchet MS" pitchFamily="34" charset="-122"/>
                 <a:cs typeface="Trebuchet MS" pitchFamily="34" charset="-120"/>
               </a:rPr>
-              <a:t>re</a:t>
+              <a:t>ad</a:t>
             </a:r>
             <a:endParaRPr lang="en-US" sz="1300" dirty="0"/>
           </a:p>
@@ -22722,7 +23922,7 @@
                 <a:ea typeface="Calibri" pitchFamily="34" charset="-122"/>
                 <a:cs typeface="Calibri" pitchFamily="34" charset="-120"/>
               </a:rPr>
-              <a:t>again</a:t>
+              <a:t>towards; to</a:t>
             </a:r>
             <a:endParaRPr lang="en-US" sz="850" dirty="0"/>
           </a:p>
@@ -22745,11 +23945,11 @@
             </a:avLst>
           </a:prstGeom>
           <a:solidFill>
-            <a:srgbClr val="DDD6FE"/>
+            <a:srgbClr val="FCE7F3"/>
           </a:solidFill>
           <a:ln w="19050">
             <a:solidFill>
-              <a:srgbClr val="7C3AED"/>
+              <a:srgbClr val="DB2777"/>
             </a:solidFill>
             <a:prstDash val="solid"/>
           </a:ln>
@@ -22789,13 +23989,13 @@
             <a:r>
               <a:rPr lang="en-US" sz="1300" b="1" dirty="0">
                 <a:solidFill>
-                  <a:srgbClr val="4C1D95"/>
+                  <a:srgbClr val="9D174D"/>
                 </a:solidFill>
                 <a:latin typeface="Trebuchet MS" pitchFamily="34" charset="0"/>
                 <a:ea typeface="Trebuchet MS" pitchFamily="34" charset="-122"/>
                 <a:cs typeface="Trebuchet MS" pitchFamily="34" charset="-120"/>
               </a:rPr>
-              <a:t>mark</a:t>
+              <a:t>cept</a:t>
             </a:r>
             <a:endParaRPr lang="en-US" sz="1300" dirty="0"/>
           </a:p>
@@ -22834,7 +24034,7 @@
                 <a:ea typeface="Calibri" pitchFamily="34" charset="-122"/>
                 <a:cs typeface="Calibri" pitchFamily="34" charset="-120"/>
               </a:rPr>
-              <a:t>to notice or pay attention to</a:t>
+              <a:t>take; receive</a:t>
             </a:r>
             <a:endParaRPr lang="en-US" sz="850" dirty="0"/>
           </a:p>
@@ -22946,7 +24146,7 @@
                 <a:ea typeface="Calibri" pitchFamily="34" charset="-122"/>
                 <a:cs typeface="Calibri" pitchFamily="34" charset="-120"/>
               </a:rPr>
-              <a:t>can be done; capable of</a:t>
+              <a:t>able to</a:t>
             </a:r>
             <a:endParaRPr lang="en-US" sz="850" dirty="0"/>
           </a:p>
@@ -23105,7 +24305,7 @@
                 <a:ea typeface="Trebuchet MS" pitchFamily="34" charset="-122"/>
                 <a:cs typeface="Trebuchet MS" pitchFamily="34" charset="-120"/>
               </a:rPr>
-              <a:t>re</a:t>
+              <a:t>ac</a:t>
             </a:r>
             <a:endParaRPr lang="en-US" sz="1400" dirty="0"/>
           </a:p>
@@ -23210,7 +24410,7 @@
                 <a:ea typeface="Trebuchet MS" pitchFamily="34" charset="-122"/>
                 <a:cs typeface="Trebuchet MS" pitchFamily="34" charset="-120"/>
               </a:rPr>
-              <a:t>mark</a:t>
+              <a:t>cept</a:t>
             </a:r>
             <a:endParaRPr lang="en-US" sz="1400" dirty="0"/>
           </a:p>
@@ -23579,7 +24779,7 @@
                 <a:ea typeface="Trebuchet MS" pitchFamily="34" charset="-122"/>
                 <a:cs typeface="Trebuchet MS" pitchFamily="34" charset="-120"/>
               </a:rPr>
-              <a:t>r</a:t>
+              <a:t>a</a:t>
             </a:r>
             <a:endParaRPr lang="en-US" sz="900" dirty="0"/>
           </a:p>
@@ -23645,7 +24845,7 @@
                 <a:ea typeface="Trebuchet MS" pitchFamily="34" charset="-122"/>
                 <a:cs typeface="Trebuchet MS" pitchFamily="34" charset="-120"/>
               </a:rPr>
-              <a:t>e</a:t>
+              <a:t>c</a:t>
             </a:r>
             <a:endParaRPr lang="en-US" sz="900" dirty="0"/>
           </a:p>
@@ -23711,7 +24911,7 @@
                 <a:ea typeface="Trebuchet MS" pitchFamily="34" charset="-122"/>
                 <a:cs typeface="Trebuchet MS" pitchFamily="34" charset="-120"/>
               </a:rPr>
-              <a:t>m</a:t>
+              <a:t>c</a:t>
             </a:r>
             <a:endParaRPr lang="en-US" sz="900" dirty="0"/>
           </a:p>
@@ -23777,7 +24977,7 @@
                 <a:ea typeface="Trebuchet MS" pitchFamily="34" charset="-122"/>
                 <a:cs typeface="Trebuchet MS" pitchFamily="34" charset="-120"/>
               </a:rPr>
-              <a:t>ar</a:t>
+              <a:t>e</a:t>
             </a:r>
             <a:endParaRPr lang="en-US" sz="900" dirty="0"/>
           </a:p>
@@ -23843,7 +25043,7 @@
                 <a:ea typeface="Trebuchet MS" pitchFamily="34" charset="-122"/>
                 <a:cs typeface="Trebuchet MS" pitchFamily="34" charset="-120"/>
               </a:rPr>
-              <a:t>k</a:t>
+              <a:t>p</a:t>
             </a:r>
             <a:endParaRPr lang="en-US" sz="900" dirty="0"/>
           </a:p>
@@ -23909,7 +25109,7 @@
                 <a:ea typeface="Trebuchet MS" pitchFamily="34" charset="-122"/>
                 <a:cs typeface="Trebuchet MS" pitchFamily="34" charset="-120"/>
               </a:rPr>
-              <a:t>a</a:t>
+              <a:t>t</a:t>
             </a:r>
             <a:endParaRPr lang="en-US" sz="900" dirty="0"/>
           </a:p>
@@ -23975,7 +25175,7 @@
                 <a:ea typeface="Trebuchet MS" pitchFamily="34" charset="-122"/>
                 <a:cs typeface="Trebuchet MS" pitchFamily="34" charset="-120"/>
               </a:rPr>
-              <a:t>b</a:t>
+              <a:t>a</a:t>
             </a:r>
             <a:endParaRPr lang="en-US" sz="900" dirty="0"/>
           </a:p>
@@ -24041,7 +25241,7 @@
                 <a:ea typeface="Trebuchet MS" pitchFamily="34" charset="-122"/>
                 <a:cs typeface="Trebuchet MS" pitchFamily="34" charset="-120"/>
               </a:rPr>
-              <a:t>l</a:t>
+              <a:t>b</a:t>
             </a:r>
             <a:endParaRPr lang="en-US" sz="900" dirty="0"/>
           </a:p>
@@ -24107,7 +25307,7 @@
                 <a:ea typeface="Trebuchet MS" pitchFamily="34" charset="-122"/>
                 <a:cs typeface="Trebuchet MS" pitchFamily="34" charset="-120"/>
               </a:rPr>
-              <a:t>e</a:t>
+              <a:t>le</a:t>
             </a:r>
             <a:endParaRPr lang="en-US" sz="900" dirty="0"/>
           </a:p>
@@ -24399,7 +25599,7 @@
                 <a:ea typeface="Calibri" pitchFamily="34" charset="-122"/>
                 <a:cs typeface="Calibri" pitchFamily="34" charset="-120"/>
               </a:rPr>
-              <a:t>Word Labs  •  wordlabs.app  •  Suffix: '-able' = can be done; capable of</a:t>
+              <a:t>Word Labs  •  wordlabs.app  •  Suffix: '-able' = able to</a:t>
             </a:r>
             <a:endParaRPr lang="en-US" sz="800" dirty="0"/>
           </a:p>
@@ -25226,7 +26426,7 @@
                 <a:ea typeface="Calibri" pitchFamily="34" charset="-122"/>
                 <a:cs typeface="Calibri" pitchFamily="34" charset="-120"/>
               </a:rPr>
-              <a:t>Word Labs  •  wordlabs.app  •  Suffix: '-able' = can be done; capable of</a:t>
+              <a:t>Word Labs  •  wordlabs.app  •  Suffix: '-able' = able to</a:t>
             </a:r>
             <a:endParaRPr lang="en-US" sz="800" dirty="0"/>
           </a:p>
@@ -25543,7 +26743,7 @@
                 <a:ea typeface="Calibri" pitchFamily="34" charset="-122"/>
                 <a:cs typeface="Calibri" pitchFamily="34" charset="-120"/>
               </a:rPr>
-              <a:t>from or down</a:t>
+              <a:t>undo; remove; down</a:t>
             </a:r>
             <a:endParaRPr lang="en-US" sz="850" dirty="0"/>
           </a:p>
@@ -25655,7 +26855,7 @@
                 <a:ea typeface="Calibri" pitchFamily="34" charset="-122"/>
                 <a:cs typeface="Calibri" pitchFamily="34" charset="-120"/>
               </a:rPr>
-              <a:t>to hang; to rely on</a:t>
+              <a:t>hang; weigh</a:t>
             </a:r>
             <a:endParaRPr lang="en-US" sz="850" dirty="0"/>
           </a:p>
@@ -25767,7 +26967,7 @@
                 <a:ea typeface="Calibri" pitchFamily="34" charset="-122"/>
                 <a:cs typeface="Calibri" pitchFamily="34" charset="-120"/>
               </a:rPr>
-              <a:t>can be done; capable of</a:t>
+              <a:t>able to</a:t>
             </a:r>
             <a:endParaRPr lang="en-US" sz="850" dirty="0"/>
           </a:p>
@@ -26323,7 +27523,7 @@
                 <a:ea typeface="Calibri" pitchFamily="34" charset="-122"/>
                 <a:cs typeface="Calibri" pitchFamily="34" charset="-120"/>
               </a:rPr>
-              <a:t>Word Labs  •  wordlabs.app  •  Suffix: '-able' = can be done; capable of</a:t>
+              <a:t>Word Labs  •  wordlabs.app  •  Suffix: '-able' = able to</a:t>
             </a:r>
             <a:endParaRPr lang="en-US" sz="800" dirty="0"/>
           </a:p>
@@ -26396,7 +27596,7 @@
                 <a:ea typeface="Trebuchet MS" pitchFamily="34" charset="-122"/>
                 <a:cs typeface="Trebuchet MS" pitchFamily="34" charset="-120"/>
               </a:rPr>
-              <a:t>We are learning that the suffix '-able' means 'can be done; capable of'.</a:t>
+              <a:t>We are learning that the suffix '-able' means 'able to'.</a:t>
             </a:r>
             <a:endParaRPr lang="en-US" sz="2000" dirty="0"/>
           </a:p>
@@ -27042,7 +28242,7 @@
                 <a:ea typeface="Calibri" pitchFamily="34" charset="-122"/>
                 <a:cs typeface="Calibri" pitchFamily="34" charset="-120"/>
               </a:rPr>
-              <a:t>Word Labs  •  wordlabs.app  •  Suffix: '-able' = can be done; capable of</a:t>
+              <a:t>Word Labs  •  wordlabs.app  •  Suffix: '-able' = able to</a:t>
             </a:r>
             <a:endParaRPr lang="en-US" sz="800" dirty="0"/>
           </a:p>
@@ -27359,7 +28559,7 @@
                 <a:ea typeface="Calibri" pitchFamily="34" charset="-122"/>
                 <a:cs typeface="Calibri" pitchFamily="34" charset="-120"/>
               </a:rPr>
-              <a:t>from or down</a:t>
+              <a:t>undo; remove; down</a:t>
             </a:r>
             <a:endParaRPr lang="en-US" sz="850" dirty="0"/>
           </a:p>
@@ -27471,7 +28671,7 @@
                 <a:ea typeface="Calibri" pitchFamily="34" charset="-122"/>
                 <a:cs typeface="Calibri" pitchFamily="34" charset="-120"/>
               </a:rPr>
-              <a:t>to hang; to rely on</a:t>
+              <a:t>hang; weigh</a:t>
             </a:r>
             <a:endParaRPr lang="en-US" sz="850" dirty="0"/>
           </a:p>
@@ -27583,7 +28783,7 @@
                 <a:ea typeface="Calibri" pitchFamily="34" charset="-122"/>
                 <a:cs typeface="Calibri" pitchFamily="34" charset="-120"/>
               </a:rPr>
-              <a:t>can be done; capable of</a:t>
+              <a:t>able to</a:t>
             </a:r>
             <a:endParaRPr lang="en-US" sz="850" dirty="0"/>
           </a:p>
@@ -28481,7 +29681,7 @@
                 <a:ea typeface="Calibri" pitchFamily="34" charset="-122"/>
                 <a:cs typeface="Calibri" pitchFamily="34" charset="-120"/>
               </a:rPr>
-              <a:t>Word Labs  •  wordlabs.app  •  Suffix: '-able' = can be done; capable of</a:t>
+              <a:t>Word Labs  •  wordlabs.app  •  Suffix: '-able' = able to</a:t>
             </a:r>
             <a:endParaRPr lang="en-US" sz="800" dirty="0"/>
           </a:p>
@@ -28798,7 +29998,7 @@
                 <a:ea typeface="Calibri" pitchFamily="34" charset="-122"/>
                 <a:cs typeface="Calibri" pitchFamily="34" charset="-120"/>
               </a:rPr>
-              <a:t>from or down</a:t>
+              <a:t>undo; remove; down</a:t>
             </a:r>
             <a:endParaRPr lang="en-US" sz="850" dirty="0"/>
           </a:p>
@@ -28910,7 +30110,7 @@
                 <a:ea typeface="Calibri" pitchFamily="34" charset="-122"/>
                 <a:cs typeface="Calibri" pitchFamily="34" charset="-120"/>
               </a:rPr>
-              <a:t>to hang; to rely on</a:t>
+              <a:t>hang; weigh</a:t>
             </a:r>
             <a:endParaRPr lang="en-US" sz="850" dirty="0"/>
           </a:p>
@@ -29022,7 +30222,7 @@
                 <a:ea typeface="Calibri" pitchFamily="34" charset="-122"/>
                 <a:cs typeface="Calibri" pitchFamily="34" charset="-120"/>
               </a:rPr>
-              <a:t>can be done; capable of</a:t>
+              <a:t>able to</a:t>
             </a:r>
             <a:endParaRPr lang="en-US" sz="850" dirty="0"/>
           </a:p>
@@ -30541,7 +31741,7 @@
                 <a:ea typeface="Calibri" pitchFamily="34" charset="-122"/>
                 <a:cs typeface="Calibri" pitchFamily="34" charset="-120"/>
               </a:rPr>
-              <a:t>Word Labs  •  wordlabs.app  •  Suffix: '-able' = can be done; capable of</a:t>
+              <a:t>Word Labs  •  wordlabs.app  •  Suffix: '-able' = able to</a:t>
             </a:r>
             <a:endParaRPr lang="en-US" sz="800" dirty="0"/>
           </a:p>
@@ -30680,7 +31880,7 @@
                 <a:ea typeface="Trebuchet MS" pitchFamily="34" charset="-122"/>
                 <a:cs typeface="Trebuchet MS" pitchFamily="34" charset="-120"/>
               </a:rPr>
-              <a:t>readable</a:t>
+              <a:t>objectionable</a:t>
             </a:r>
             <a:endParaRPr lang="en-US" sz="2800" dirty="0"/>
           </a:p>
@@ -31368,7 +32568,7 @@
                 <a:ea typeface="Calibri" pitchFamily="34" charset="-122"/>
                 <a:cs typeface="Calibri" pitchFamily="34" charset="-120"/>
               </a:rPr>
-              <a:t>Word Labs  •  wordlabs.app  •  Suffix: '-able' = can be done; capable of</a:t>
+              <a:t>Word Labs  •  wordlabs.app  •  Suffix: '-able' = able to</a:t>
             </a:r>
             <a:endParaRPr lang="en-US" sz="800" dirty="0"/>
           </a:p>
@@ -31507,7 +32707,7 @@
                 <a:ea typeface="Trebuchet MS" pitchFamily="34" charset="-122"/>
                 <a:cs typeface="Trebuchet MS" pitchFamily="34" charset="-120"/>
               </a:rPr>
-              <a:t>readable</a:t>
+              <a:t>objectionable</a:t>
             </a:r>
             <a:endParaRPr lang="en-US" sz="2800" dirty="0"/>
           </a:p>
@@ -31587,8 +32787,8 @@
         </p:nvSpPr>
         <p:spPr>
           <a:xfrm>
-            <a:off x="2938272" y="2258568"/>
-            <a:ext cx="1828800" cy="292608"/>
+            <a:off x="1989734" y="2258568"/>
+            <a:ext cx="1581912" cy="292608"/>
           </a:xfrm>
           <a:prstGeom prst="rect">
             <a:avLst>
@@ -31621,8 +32821,8 @@
         </p:nvSpPr>
         <p:spPr>
           <a:xfrm>
-            <a:off x="2938272" y="2258568"/>
-            <a:ext cx="1828800" cy="292608"/>
+            <a:off x="1989734" y="2258568"/>
+            <a:ext cx="1581912" cy="292608"/>
           </a:xfrm>
           <a:prstGeom prst="rect">
             <a:avLst/>
@@ -31646,7 +32846,7 @@
                 <a:ea typeface="Trebuchet MS" pitchFamily="34" charset="-122"/>
                 <a:cs typeface="Trebuchet MS" pitchFamily="34" charset="-120"/>
               </a:rPr>
-              <a:t>read</a:t>
+              <a:t>ob</a:t>
             </a:r>
             <a:endParaRPr lang="en-US" sz="1300" dirty="0"/>
           </a:p>
@@ -31660,8 +32860,8 @@
         </p:nvSpPr>
         <p:spPr>
           <a:xfrm>
-            <a:off x="2938272" y="2569464"/>
-            <a:ext cx="1828800" cy="201168"/>
+            <a:off x="1989734" y="2569464"/>
+            <a:ext cx="1581912" cy="201168"/>
           </a:xfrm>
           <a:prstGeom prst="rect">
             <a:avLst/>
@@ -31685,7 +32885,7 @@
                 <a:ea typeface="Calibri" pitchFamily="34" charset="-122"/>
                 <a:cs typeface="Calibri" pitchFamily="34" charset="-120"/>
               </a:rPr>
-              <a:t>to look at and understand written words</a:t>
+              <a:t>against; in the way of; towards</a:t>
             </a:r>
             <a:endParaRPr lang="en-US" sz="850" dirty="0"/>
           </a:p>
@@ -31699,8 +32899,8 @@
         </p:nvSpPr>
         <p:spPr>
           <a:xfrm>
-            <a:off x="5803392" y="2258568"/>
-            <a:ext cx="1828800" cy="292608"/>
+            <a:off x="3659429" y="2258568"/>
+            <a:ext cx="1581912" cy="292608"/>
           </a:xfrm>
           <a:prstGeom prst="rect">
             <a:avLst>
@@ -31708,11 +32908,11 @@
             </a:avLst>
           </a:prstGeom>
           <a:solidFill>
-            <a:srgbClr val="CCFBF1"/>
+            <a:srgbClr val="FCE7F3"/>
           </a:solidFill>
           <a:ln w="19050">
             <a:solidFill>
-              <a:srgbClr val="0D9488"/>
+              <a:srgbClr val="DB2777"/>
             </a:solidFill>
             <a:prstDash val="solid"/>
           </a:ln>
@@ -31733,8 +32933,8 @@
         </p:nvSpPr>
         <p:spPr>
           <a:xfrm>
-            <a:off x="5803392" y="2258568"/>
-            <a:ext cx="1828800" cy="292608"/>
+            <a:off x="3659429" y="2258568"/>
+            <a:ext cx="1581912" cy="292608"/>
           </a:xfrm>
           <a:prstGeom prst="rect">
             <a:avLst/>
@@ -31752,13 +32952,13 @@
             <a:r>
               <a:rPr lang="en-US" sz="1300" b="1" dirty="0">
                 <a:solidFill>
-                  <a:srgbClr val="0F766E"/>
+                  <a:srgbClr val="9D174D"/>
                 </a:solidFill>
                 <a:latin typeface="Trebuchet MS" pitchFamily="34" charset="0"/>
                 <a:ea typeface="Trebuchet MS" pitchFamily="34" charset="-122"/>
                 <a:cs typeface="Trebuchet MS" pitchFamily="34" charset="-120"/>
               </a:rPr>
-              <a:t>able</a:t>
+              <a:t>ject</a:t>
             </a:r>
             <a:endParaRPr lang="en-US" sz="1300" dirty="0"/>
           </a:p>
@@ -31772,8 +32972,8 @@
         </p:nvSpPr>
         <p:spPr>
           <a:xfrm>
-            <a:off x="5803392" y="2569464"/>
-            <a:ext cx="1828800" cy="201168"/>
+            <a:off x="3659429" y="2569464"/>
+            <a:ext cx="1581912" cy="201168"/>
           </a:xfrm>
           <a:prstGeom prst="rect">
             <a:avLst/>
@@ -31797,7 +32997,7 @@
                 <a:ea typeface="Calibri" pitchFamily="34" charset="-122"/>
                 <a:cs typeface="Calibri" pitchFamily="34" charset="-120"/>
               </a:rPr>
-              <a:t>can be done; capable of</a:t>
+              <a:t>throw</a:t>
             </a:r>
             <a:endParaRPr lang="en-US" sz="850" dirty="0"/>
           </a:p>
@@ -31805,14 +33005,87 @@
       </p:sp>
       <p:sp>
         <p:nvSpPr>
-          <p:cNvPr id="22" name="Text 20"/>
-          <p:cNvSpPr/>
-          <p:nvPr/>
-        </p:nvSpPr>
-        <p:spPr>
-          <a:xfrm>
-            <a:off x="5803392" y="2752344"/>
-            <a:ext cx="1828800" cy="182880"/>
+          <p:cNvPr id="22" name="Shape 20"/>
+          <p:cNvSpPr/>
+          <p:nvPr/>
+        </p:nvSpPr>
+        <p:spPr>
+          <a:xfrm>
+            <a:off x="5329123" y="2258568"/>
+            <a:ext cx="1581912" cy="292608"/>
+          </a:xfrm>
+          <a:prstGeom prst="rect">
+            <a:avLst>
+              <a:gd name="adj" fmla="val 25000"/>
+            </a:avLst>
+          </a:prstGeom>
+          <a:solidFill>
+            <a:srgbClr val="FCE7F3"/>
+          </a:solidFill>
+          <a:ln w="19050">
+            <a:solidFill>
+              <a:srgbClr val="DB2777"/>
+            </a:solidFill>
+            <a:prstDash val="solid"/>
+          </a:ln>
+          <a:effectLst>
+            <a:outerShdw sx="100000" sy="100000" kx="0" ky="0" algn="bl" rotWithShape="0" blurRad="101600" dist="38100" dir="8100000">
+              <a:srgbClr val="000000">
+                <a:alpha val="12000"/>
+              </a:srgbClr>
+            </a:outerShdw>
+          </a:effectLst>
+        </p:spPr>
+      </p:sp>
+      <p:sp>
+        <p:nvSpPr>
+          <p:cNvPr id="23" name="Text 21"/>
+          <p:cNvSpPr/>
+          <p:nvPr/>
+        </p:nvSpPr>
+        <p:spPr>
+          <a:xfrm>
+            <a:off x="5329123" y="2258568"/>
+            <a:ext cx="1581912" cy="292608"/>
+          </a:xfrm>
+          <a:prstGeom prst="rect">
+            <a:avLst/>
+          </a:prstGeom>
+          <a:noFill/>
+          <a:ln/>
+        </p:spPr>
+        <p:txBody>
+          <a:bodyPr wrap="square" lIns="0" tIns="0" rIns="0" bIns="0" rtlCol="0" anchor="ctr"/>
+          <a:lstStyle/>
+          <a:p>
+            <a:pPr algn="ctr" indent="0" marL="0">
+              <a:buNone/>
+            </a:pPr>
+            <a:r>
+              <a:rPr lang="en-US" sz="1300" b="1" dirty="0">
+                <a:solidFill>
+                  <a:srgbClr val="9D174D"/>
+                </a:solidFill>
+                <a:latin typeface="Trebuchet MS" pitchFamily="34" charset="0"/>
+                <a:ea typeface="Trebuchet MS" pitchFamily="34" charset="-122"/>
+                <a:cs typeface="Trebuchet MS" pitchFamily="34" charset="-120"/>
+              </a:rPr>
+              <a:t>ion</a:t>
+            </a:r>
+            <a:endParaRPr lang="en-US" sz="1300" dirty="0"/>
+          </a:p>
+        </p:txBody>
+      </p:sp>
+      <p:sp>
+        <p:nvSpPr>
+          <p:cNvPr id="24" name="Text 22"/>
+          <p:cNvSpPr/>
+          <p:nvPr/>
+        </p:nvSpPr>
+        <p:spPr>
+          <a:xfrm>
+            <a:off x="5329123" y="2569464"/>
+            <a:ext cx="1581912" cy="201168"/>
           </a:xfrm>
           <a:prstGeom prst="rect">
             <a:avLst/>
@@ -31828,23 +33101,135 @@
               <a:buNone/>
             </a:pPr>
             <a:r>
-              <a:rPr lang="en-US" sz="700" i="1" dirty="0">
-                <a:solidFill>
-                  <a:srgbClr val="94A3B8"/>
+              <a:rPr lang="en-US" sz="850" dirty="0">
+                <a:solidFill>
+                  <a:srgbClr val="475569"/>
                 </a:solidFill>
                 <a:latin typeface="Calibri" pitchFamily="34" charset="0"/>
                 <a:ea typeface="Calibri" pitchFamily="34" charset="-122"/>
                 <a:cs typeface="Calibri" pitchFamily="34" charset="-120"/>
               </a:rPr>
-              <a:t>'e' dropped from 'reade' before vowel suffix '-able'</a:t>
-            </a:r>
-            <a:endParaRPr lang="en-US" sz="700" dirty="0"/>
-          </a:p>
-        </p:txBody>
-      </p:sp>
-      <p:sp>
-        <p:nvSpPr>
-          <p:cNvPr id="23" name="Shape 21"/>
+              <a:t>act or result of</a:t>
+            </a:r>
+            <a:endParaRPr lang="en-US" sz="850" dirty="0"/>
+          </a:p>
+        </p:txBody>
+      </p:sp>
+      <p:sp>
+        <p:nvSpPr>
+          <p:cNvPr id="25" name="Shape 23"/>
+          <p:cNvSpPr/>
+          <p:nvPr/>
+        </p:nvSpPr>
+        <p:spPr>
+          <a:xfrm>
+            <a:off x="6998818" y="2258568"/>
+            <a:ext cx="1581912" cy="292608"/>
+          </a:xfrm>
+          <a:prstGeom prst="rect">
+            <a:avLst>
+              <a:gd name="adj" fmla="val 25000"/>
+            </a:avLst>
+          </a:prstGeom>
+          <a:solidFill>
+            <a:srgbClr val="CCFBF1"/>
+          </a:solidFill>
+          <a:ln w="19050">
+            <a:solidFill>
+              <a:srgbClr val="0D9488"/>
+            </a:solidFill>
+            <a:prstDash val="solid"/>
+          </a:ln>
+          <a:effectLst>
+            <a:outerShdw sx="100000" sy="100000" kx="0" ky="0" algn="bl" rotWithShape="0" blurRad="101600" dist="38100" dir="8100000">
+              <a:srgbClr val="000000">
+                <a:alpha val="12000"/>
+              </a:srgbClr>
+            </a:outerShdw>
+          </a:effectLst>
+        </p:spPr>
+      </p:sp>
+      <p:sp>
+        <p:nvSpPr>
+          <p:cNvPr id="26" name="Text 24"/>
+          <p:cNvSpPr/>
+          <p:nvPr/>
+        </p:nvSpPr>
+        <p:spPr>
+          <a:xfrm>
+            <a:off x="6998818" y="2258568"/>
+            <a:ext cx="1581912" cy="292608"/>
+          </a:xfrm>
+          <a:prstGeom prst="rect">
+            <a:avLst/>
+          </a:prstGeom>
+          <a:noFill/>
+          <a:ln/>
+        </p:spPr>
+        <p:txBody>
+          <a:bodyPr wrap="square" lIns="0" tIns="0" rIns="0" bIns="0" rtlCol="0" anchor="ctr"/>
+          <a:lstStyle/>
+          <a:p>
+            <a:pPr algn="ctr" indent="0" marL="0">
+              <a:buNone/>
+            </a:pPr>
+            <a:r>
+              <a:rPr lang="en-US" sz="1300" b="1" dirty="0">
+                <a:solidFill>
+                  <a:srgbClr val="0F766E"/>
+                </a:solidFill>
+                <a:latin typeface="Trebuchet MS" pitchFamily="34" charset="0"/>
+                <a:ea typeface="Trebuchet MS" pitchFamily="34" charset="-122"/>
+                <a:cs typeface="Trebuchet MS" pitchFamily="34" charset="-120"/>
+              </a:rPr>
+              <a:t>able</a:t>
+            </a:r>
+            <a:endParaRPr lang="en-US" sz="1300" dirty="0"/>
+          </a:p>
+        </p:txBody>
+      </p:sp>
+      <p:sp>
+        <p:nvSpPr>
+          <p:cNvPr id="27" name="Text 25"/>
+          <p:cNvSpPr/>
+          <p:nvPr/>
+        </p:nvSpPr>
+        <p:spPr>
+          <a:xfrm>
+            <a:off x="6998818" y="2569464"/>
+            <a:ext cx="1581912" cy="201168"/>
+          </a:xfrm>
+          <a:prstGeom prst="rect">
+            <a:avLst/>
+          </a:prstGeom>
+          <a:noFill/>
+          <a:ln/>
+        </p:spPr>
+        <p:txBody>
+          <a:bodyPr wrap="square" lIns="0" tIns="0" rIns="0" bIns="0" rtlCol="0" anchor="t"/>
+          <a:lstStyle/>
+          <a:p>
+            <a:pPr algn="ctr" indent="0" marL="0">
+              <a:buNone/>
+            </a:pPr>
+            <a:r>
+              <a:rPr lang="en-US" sz="850" dirty="0">
+                <a:solidFill>
+                  <a:srgbClr val="475569"/>
+                </a:solidFill>
+                <a:latin typeface="Calibri" pitchFamily="34" charset="0"/>
+                <a:ea typeface="Calibri" pitchFamily="34" charset="-122"/>
+                <a:cs typeface="Calibri" pitchFamily="34" charset="-120"/>
+              </a:rPr>
+              <a:t>able to</a:t>
+            </a:r>
+            <a:endParaRPr lang="en-US" sz="850" dirty="0"/>
+          </a:p>
+        </p:txBody>
+      </p:sp>
+      <p:sp>
+        <p:nvSpPr>
+          <p:cNvPr id="28" name="Shape 26"/>
           <p:cNvSpPr/>
           <p:nvPr/>
         </p:nvSpPr>
@@ -31871,7 +33256,7 @@
       </p:sp>
       <p:sp>
         <p:nvSpPr>
-          <p:cNvPr id="24" name="Text 22"/>
+          <p:cNvPr id="29" name="Text 27"/>
           <p:cNvSpPr/>
           <p:nvPr/>
         </p:nvSpPr>
@@ -31910,7 +33295,7 @@
       </p:sp>
       <p:sp>
         <p:nvSpPr>
-          <p:cNvPr id="25" name="Shape 23"/>
+          <p:cNvPr id="30" name="Shape 28"/>
           <p:cNvSpPr/>
           <p:nvPr/>
         </p:nvSpPr>
@@ -31937,7 +33322,7 @@
       </p:sp>
       <p:sp>
         <p:nvSpPr>
-          <p:cNvPr id="26" name="Text 24"/>
+          <p:cNvPr id="31" name="Text 29"/>
           <p:cNvSpPr/>
           <p:nvPr/>
         </p:nvSpPr>
@@ -31976,7 +33361,7 @@
       </p:sp>
       <p:sp>
         <p:nvSpPr>
-          <p:cNvPr id="27" name="Shape 25"/>
+          <p:cNvPr id="32" name="Shape 30"/>
           <p:cNvSpPr/>
           <p:nvPr/>
         </p:nvSpPr>
@@ -32003,7 +33388,7 @@
       </p:sp>
       <p:sp>
         <p:nvSpPr>
-          <p:cNvPr id="28" name="Text 26"/>
+          <p:cNvPr id="33" name="Text 31"/>
           <p:cNvSpPr/>
           <p:nvPr/>
         </p:nvSpPr>
@@ -32042,7 +33427,7 @@
       </p:sp>
       <p:sp>
         <p:nvSpPr>
-          <p:cNvPr id="29" name="Shape 27"/>
+          <p:cNvPr id="34" name="Shape 32"/>
           <p:cNvSpPr/>
           <p:nvPr/>
         </p:nvSpPr>
@@ -32069,7 +33454,7 @@
       </p:sp>
       <p:sp>
         <p:nvSpPr>
-          <p:cNvPr id="30" name="Text 28"/>
+          <p:cNvPr id="35" name="Text 33"/>
           <p:cNvSpPr/>
           <p:nvPr/>
         </p:nvSpPr>
@@ -32392,7 +33777,7 @@
                 <a:ea typeface="Calibri" pitchFamily="34" charset="-122"/>
                 <a:cs typeface="Calibri" pitchFamily="34" charset="-120"/>
               </a:rPr>
-              <a:t>Word Labs  •  wordlabs.app  •  Suffix: '-able' = can be done; capable of</a:t>
+              <a:t>Word Labs  •  wordlabs.app  •  Suffix: '-able' = able to</a:t>
             </a:r>
             <a:endParaRPr lang="en-US" sz="800" dirty="0"/>
           </a:p>
@@ -32531,7 +33916,7 @@
                 <a:ea typeface="Trebuchet MS" pitchFamily="34" charset="-122"/>
                 <a:cs typeface="Trebuchet MS" pitchFamily="34" charset="-120"/>
               </a:rPr>
-              <a:t>readable</a:t>
+              <a:t>objectionable</a:t>
             </a:r>
             <a:endParaRPr lang="en-US" sz="2800" dirty="0"/>
           </a:p>
@@ -32611,8 +33996,8 @@
         </p:nvSpPr>
         <p:spPr>
           <a:xfrm>
-            <a:off x="2938272" y="2258568"/>
-            <a:ext cx="1828800" cy="292608"/>
+            <a:off x="1989734" y="2258568"/>
+            <a:ext cx="1581912" cy="292608"/>
           </a:xfrm>
           <a:prstGeom prst="rect">
             <a:avLst>
@@ -32645,8 +34030,8 @@
         </p:nvSpPr>
         <p:spPr>
           <a:xfrm>
-            <a:off x="2938272" y="2258568"/>
-            <a:ext cx="1828800" cy="292608"/>
+            <a:off x="1989734" y="2258568"/>
+            <a:ext cx="1581912" cy="292608"/>
           </a:xfrm>
           <a:prstGeom prst="rect">
             <a:avLst/>
@@ -32670,7 +34055,7 @@
                 <a:ea typeface="Trebuchet MS" pitchFamily="34" charset="-122"/>
                 <a:cs typeface="Trebuchet MS" pitchFamily="34" charset="-120"/>
               </a:rPr>
-              <a:t>read</a:t>
+              <a:t>ob</a:t>
             </a:r>
             <a:endParaRPr lang="en-US" sz="1300" dirty="0"/>
           </a:p>
@@ -32684,8 +34069,8 @@
         </p:nvSpPr>
         <p:spPr>
           <a:xfrm>
-            <a:off x="2938272" y="2569464"/>
-            <a:ext cx="1828800" cy="201168"/>
+            <a:off x="1989734" y="2569464"/>
+            <a:ext cx="1581912" cy="201168"/>
           </a:xfrm>
           <a:prstGeom prst="rect">
             <a:avLst/>
@@ -32709,7 +34094,7 @@
                 <a:ea typeface="Calibri" pitchFamily="34" charset="-122"/>
                 <a:cs typeface="Calibri" pitchFamily="34" charset="-120"/>
               </a:rPr>
-              <a:t>to look at and understand written words</a:t>
+              <a:t>against; in the way of; towards</a:t>
             </a:r>
             <a:endParaRPr lang="en-US" sz="850" dirty="0"/>
           </a:p>
@@ -32723,8 +34108,8 @@
         </p:nvSpPr>
         <p:spPr>
           <a:xfrm>
-            <a:off x="5803392" y="2258568"/>
-            <a:ext cx="1828800" cy="292608"/>
+            <a:off x="3659429" y="2258568"/>
+            <a:ext cx="1581912" cy="292608"/>
           </a:xfrm>
           <a:prstGeom prst="rect">
             <a:avLst>
@@ -32732,11 +34117,11 @@
             </a:avLst>
           </a:prstGeom>
           <a:solidFill>
-            <a:srgbClr val="CCFBF1"/>
+            <a:srgbClr val="FCE7F3"/>
           </a:solidFill>
           <a:ln w="19050">
             <a:solidFill>
-              <a:srgbClr val="0D9488"/>
+              <a:srgbClr val="DB2777"/>
             </a:solidFill>
             <a:prstDash val="solid"/>
           </a:ln>
@@ -32757,8 +34142,8 @@
         </p:nvSpPr>
         <p:spPr>
           <a:xfrm>
-            <a:off x="5803392" y="2258568"/>
-            <a:ext cx="1828800" cy="292608"/>
+            <a:off x="3659429" y="2258568"/>
+            <a:ext cx="1581912" cy="292608"/>
           </a:xfrm>
           <a:prstGeom prst="rect">
             <a:avLst/>
@@ -32776,13 +34161,13 @@
             <a:r>
               <a:rPr lang="en-US" sz="1300" b="1" dirty="0">
                 <a:solidFill>
-                  <a:srgbClr val="0F766E"/>
+                  <a:srgbClr val="9D174D"/>
                 </a:solidFill>
                 <a:latin typeface="Trebuchet MS" pitchFamily="34" charset="0"/>
                 <a:ea typeface="Trebuchet MS" pitchFamily="34" charset="-122"/>
                 <a:cs typeface="Trebuchet MS" pitchFamily="34" charset="-120"/>
               </a:rPr>
-              <a:t>able</a:t>
+              <a:t>ject</a:t>
             </a:r>
             <a:endParaRPr lang="en-US" sz="1300" dirty="0"/>
           </a:p>
@@ -32796,8 +34181,8 @@
         </p:nvSpPr>
         <p:spPr>
           <a:xfrm>
-            <a:off x="5803392" y="2569464"/>
-            <a:ext cx="1828800" cy="201168"/>
+            <a:off x="3659429" y="2569464"/>
+            <a:ext cx="1581912" cy="201168"/>
           </a:xfrm>
           <a:prstGeom prst="rect">
             <a:avLst/>
@@ -32821,7 +34206,7 @@
                 <a:ea typeface="Calibri" pitchFamily="34" charset="-122"/>
                 <a:cs typeface="Calibri" pitchFamily="34" charset="-120"/>
               </a:rPr>
-              <a:t>can be done; capable of</a:t>
+              <a:t>throw</a:t>
             </a:r>
             <a:endParaRPr lang="en-US" sz="850" dirty="0"/>
           </a:p>
@@ -32829,14 +34214,87 @@
       </p:sp>
       <p:sp>
         <p:nvSpPr>
-          <p:cNvPr id="22" name="Text 20"/>
-          <p:cNvSpPr/>
-          <p:nvPr/>
-        </p:nvSpPr>
-        <p:spPr>
-          <a:xfrm>
-            <a:off x="5803392" y="2752344"/>
-            <a:ext cx="1828800" cy="182880"/>
+          <p:cNvPr id="22" name="Shape 20"/>
+          <p:cNvSpPr/>
+          <p:nvPr/>
+        </p:nvSpPr>
+        <p:spPr>
+          <a:xfrm>
+            <a:off x="5329123" y="2258568"/>
+            <a:ext cx="1581912" cy="292608"/>
+          </a:xfrm>
+          <a:prstGeom prst="rect">
+            <a:avLst>
+              <a:gd name="adj" fmla="val 25000"/>
+            </a:avLst>
+          </a:prstGeom>
+          <a:solidFill>
+            <a:srgbClr val="FCE7F3"/>
+          </a:solidFill>
+          <a:ln w="19050">
+            <a:solidFill>
+              <a:srgbClr val="DB2777"/>
+            </a:solidFill>
+            <a:prstDash val="solid"/>
+          </a:ln>
+          <a:effectLst>
+            <a:outerShdw sx="100000" sy="100000" kx="0" ky="0" algn="bl" rotWithShape="0" blurRad="101600" dist="38100" dir="8100000">
+              <a:srgbClr val="000000">
+                <a:alpha val="12000"/>
+              </a:srgbClr>
+            </a:outerShdw>
+          </a:effectLst>
+        </p:spPr>
+      </p:sp>
+      <p:sp>
+        <p:nvSpPr>
+          <p:cNvPr id="23" name="Text 21"/>
+          <p:cNvSpPr/>
+          <p:nvPr/>
+        </p:nvSpPr>
+        <p:spPr>
+          <a:xfrm>
+            <a:off x="5329123" y="2258568"/>
+            <a:ext cx="1581912" cy="292608"/>
+          </a:xfrm>
+          <a:prstGeom prst="rect">
+            <a:avLst/>
+          </a:prstGeom>
+          <a:noFill/>
+          <a:ln/>
+        </p:spPr>
+        <p:txBody>
+          <a:bodyPr wrap="square" lIns="0" tIns="0" rIns="0" bIns="0" rtlCol="0" anchor="ctr"/>
+          <a:lstStyle/>
+          <a:p>
+            <a:pPr algn="ctr" indent="0" marL="0">
+              <a:buNone/>
+            </a:pPr>
+            <a:r>
+              <a:rPr lang="en-US" sz="1300" b="1" dirty="0">
+                <a:solidFill>
+                  <a:srgbClr val="9D174D"/>
+                </a:solidFill>
+                <a:latin typeface="Trebuchet MS" pitchFamily="34" charset="0"/>
+                <a:ea typeface="Trebuchet MS" pitchFamily="34" charset="-122"/>
+                <a:cs typeface="Trebuchet MS" pitchFamily="34" charset="-120"/>
+              </a:rPr>
+              <a:t>ion</a:t>
+            </a:r>
+            <a:endParaRPr lang="en-US" sz="1300" dirty="0"/>
+          </a:p>
+        </p:txBody>
+      </p:sp>
+      <p:sp>
+        <p:nvSpPr>
+          <p:cNvPr id="24" name="Text 22"/>
+          <p:cNvSpPr/>
+          <p:nvPr/>
+        </p:nvSpPr>
+        <p:spPr>
+          <a:xfrm>
+            <a:off x="5329123" y="2569464"/>
+            <a:ext cx="1581912" cy="201168"/>
           </a:xfrm>
           <a:prstGeom prst="rect">
             <a:avLst/>
@@ -32852,23 +34310,135 @@
               <a:buNone/>
             </a:pPr>
             <a:r>
-              <a:rPr lang="en-US" sz="700" i="1" dirty="0">
-                <a:solidFill>
-                  <a:srgbClr val="94A3B8"/>
+              <a:rPr lang="en-US" sz="850" dirty="0">
+                <a:solidFill>
+                  <a:srgbClr val="475569"/>
                 </a:solidFill>
                 <a:latin typeface="Calibri" pitchFamily="34" charset="0"/>
                 <a:ea typeface="Calibri" pitchFamily="34" charset="-122"/>
                 <a:cs typeface="Calibri" pitchFamily="34" charset="-120"/>
               </a:rPr>
-              <a:t>'e' dropped from 'reade' before vowel suffix '-able'</a:t>
-            </a:r>
-            <a:endParaRPr lang="en-US" sz="700" dirty="0"/>
-          </a:p>
-        </p:txBody>
-      </p:sp>
-      <p:sp>
-        <p:nvSpPr>
-          <p:cNvPr id="23" name="Shape 21"/>
+              <a:t>act or result of</a:t>
+            </a:r>
+            <a:endParaRPr lang="en-US" sz="850" dirty="0"/>
+          </a:p>
+        </p:txBody>
+      </p:sp>
+      <p:sp>
+        <p:nvSpPr>
+          <p:cNvPr id="25" name="Shape 23"/>
+          <p:cNvSpPr/>
+          <p:nvPr/>
+        </p:nvSpPr>
+        <p:spPr>
+          <a:xfrm>
+            <a:off x="6998818" y="2258568"/>
+            <a:ext cx="1581912" cy="292608"/>
+          </a:xfrm>
+          <a:prstGeom prst="rect">
+            <a:avLst>
+              <a:gd name="adj" fmla="val 25000"/>
+            </a:avLst>
+          </a:prstGeom>
+          <a:solidFill>
+            <a:srgbClr val="CCFBF1"/>
+          </a:solidFill>
+          <a:ln w="19050">
+            <a:solidFill>
+              <a:srgbClr val="0D9488"/>
+            </a:solidFill>
+            <a:prstDash val="solid"/>
+          </a:ln>
+          <a:effectLst>
+            <a:outerShdw sx="100000" sy="100000" kx="0" ky="0" algn="bl" rotWithShape="0" blurRad="101600" dist="38100" dir="8100000">
+              <a:srgbClr val="000000">
+                <a:alpha val="12000"/>
+              </a:srgbClr>
+            </a:outerShdw>
+          </a:effectLst>
+        </p:spPr>
+      </p:sp>
+      <p:sp>
+        <p:nvSpPr>
+          <p:cNvPr id="26" name="Text 24"/>
+          <p:cNvSpPr/>
+          <p:nvPr/>
+        </p:nvSpPr>
+        <p:spPr>
+          <a:xfrm>
+            <a:off x="6998818" y="2258568"/>
+            <a:ext cx="1581912" cy="292608"/>
+          </a:xfrm>
+          <a:prstGeom prst="rect">
+            <a:avLst/>
+          </a:prstGeom>
+          <a:noFill/>
+          <a:ln/>
+        </p:spPr>
+        <p:txBody>
+          <a:bodyPr wrap="square" lIns="0" tIns="0" rIns="0" bIns="0" rtlCol="0" anchor="ctr"/>
+          <a:lstStyle/>
+          <a:p>
+            <a:pPr algn="ctr" indent="0" marL="0">
+              <a:buNone/>
+            </a:pPr>
+            <a:r>
+              <a:rPr lang="en-US" sz="1300" b="1" dirty="0">
+                <a:solidFill>
+                  <a:srgbClr val="0F766E"/>
+                </a:solidFill>
+                <a:latin typeface="Trebuchet MS" pitchFamily="34" charset="0"/>
+                <a:ea typeface="Trebuchet MS" pitchFamily="34" charset="-122"/>
+                <a:cs typeface="Trebuchet MS" pitchFamily="34" charset="-120"/>
+              </a:rPr>
+              <a:t>able</a:t>
+            </a:r>
+            <a:endParaRPr lang="en-US" sz="1300" dirty="0"/>
+          </a:p>
+        </p:txBody>
+      </p:sp>
+      <p:sp>
+        <p:nvSpPr>
+          <p:cNvPr id="27" name="Text 25"/>
+          <p:cNvSpPr/>
+          <p:nvPr/>
+        </p:nvSpPr>
+        <p:spPr>
+          <a:xfrm>
+            <a:off x="6998818" y="2569464"/>
+            <a:ext cx="1581912" cy="201168"/>
+          </a:xfrm>
+          <a:prstGeom prst="rect">
+            <a:avLst/>
+          </a:prstGeom>
+          <a:noFill/>
+          <a:ln/>
+        </p:spPr>
+        <p:txBody>
+          <a:bodyPr wrap="square" lIns="0" tIns="0" rIns="0" bIns="0" rtlCol="0" anchor="t"/>
+          <a:lstStyle/>
+          <a:p>
+            <a:pPr algn="ctr" indent="0" marL="0">
+              <a:buNone/>
+            </a:pPr>
+            <a:r>
+              <a:rPr lang="en-US" sz="850" dirty="0">
+                <a:solidFill>
+                  <a:srgbClr val="475569"/>
+                </a:solidFill>
+                <a:latin typeface="Calibri" pitchFamily="34" charset="0"/>
+                <a:ea typeface="Calibri" pitchFamily="34" charset="-122"/>
+                <a:cs typeface="Calibri" pitchFamily="34" charset="-120"/>
+              </a:rPr>
+              <a:t>able to</a:t>
+            </a:r>
+            <a:endParaRPr lang="en-US" sz="850" dirty="0"/>
+          </a:p>
+        </p:txBody>
+      </p:sp>
+      <p:sp>
+        <p:nvSpPr>
+          <p:cNvPr id="28" name="Shape 26"/>
           <p:cNvSpPr/>
           <p:nvPr/>
         </p:nvSpPr>
@@ -32895,7 +34465,7 @@
       </p:sp>
       <p:sp>
         <p:nvSpPr>
-          <p:cNvPr id="24" name="Text 22"/>
+          <p:cNvPr id="29" name="Text 27"/>
           <p:cNvSpPr/>
           <p:nvPr/>
         </p:nvSpPr>
@@ -32934,7 +34504,7 @@
       </p:sp>
       <p:sp>
         <p:nvSpPr>
-          <p:cNvPr id="25" name="Shape 23"/>
+          <p:cNvPr id="30" name="Shape 28"/>
           <p:cNvSpPr/>
           <p:nvPr/>
         </p:nvSpPr>
@@ -32961,14 +34531,14 @@
       </p:sp>
       <p:sp>
         <p:nvSpPr>
-          <p:cNvPr id="26" name="Shape 24"/>
-          <p:cNvSpPr/>
-          <p:nvPr/>
-        </p:nvSpPr>
-        <p:spPr>
-          <a:xfrm>
-            <a:off x="2313432" y="3364992"/>
-            <a:ext cx="1645920" cy="475488"/>
+          <p:cNvPr id="31" name="Shape 29"/>
+          <p:cNvSpPr/>
+          <p:nvPr/>
+        </p:nvSpPr>
+        <p:spPr>
+          <a:xfrm>
+            <a:off x="1978152" y="3364992"/>
+            <a:ext cx="1225296" cy="475488"/>
           </a:xfrm>
           <a:prstGeom prst="rect">
             <a:avLst>
@@ -32988,14 +34558,14 @@
       </p:sp>
       <p:sp>
         <p:nvSpPr>
-          <p:cNvPr id="27" name="Text 25"/>
-          <p:cNvSpPr/>
-          <p:nvPr/>
-        </p:nvSpPr>
-        <p:spPr>
-          <a:xfrm>
-            <a:off x="2313432" y="3364992"/>
-            <a:ext cx="1645920" cy="475488"/>
+          <p:cNvPr id="32" name="Text 30"/>
+          <p:cNvSpPr/>
+          <p:nvPr/>
+        </p:nvSpPr>
+        <p:spPr>
+          <a:xfrm>
+            <a:off x="1978152" y="3364992"/>
+            <a:ext cx="1225296" cy="475488"/>
           </a:xfrm>
           <a:prstGeom prst="rect">
             <a:avLst/>
@@ -33019,7 +34589,7 @@
                 <a:ea typeface="Trebuchet MS" pitchFamily="34" charset="-122"/>
                 <a:cs typeface="Trebuchet MS" pitchFamily="34" charset="-120"/>
               </a:rPr>
-              <a:t>read</a:t>
+              <a:t>ob</a:t>
             </a:r>
             <a:endParaRPr lang="en-US" sz="1400" dirty="0"/>
           </a:p>
@@ -33027,14 +34597,14 @@
       </p:sp>
       <p:sp>
         <p:nvSpPr>
-          <p:cNvPr id="28" name="Text 26"/>
-          <p:cNvSpPr/>
-          <p:nvPr/>
-        </p:nvSpPr>
-        <p:spPr>
-          <a:xfrm>
-            <a:off x="3959352" y="3364992"/>
-            <a:ext cx="411480" cy="475488"/>
+          <p:cNvPr id="33" name="Text 31"/>
+          <p:cNvSpPr/>
+          <p:nvPr/>
+        </p:nvSpPr>
+        <p:spPr>
+          <a:xfrm>
+            <a:off x="3203448" y="3364992"/>
+            <a:ext cx="76200" cy="475488"/>
           </a:xfrm>
           <a:prstGeom prst="rect">
             <a:avLst/>
@@ -33066,14 +34636,14 @@
       </p:sp>
       <p:sp>
         <p:nvSpPr>
-          <p:cNvPr id="29" name="Shape 27"/>
-          <p:cNvSpPr/>
-          <p:nvPr/>
-        </p:nvSpPr>
-        <p:spPr>
-          <a:xfrm>
-            <a:off x="4370832" y="3364992"/>
-            <a:ext cx="1645920" cy="475488"/>
+          <p:cNvPr id="34" name="Shape 32"/>
+          <p:cNvSpPr/>
+          <p:nvPr/>
+        </p:nvSpPr>
+        <p:spPr>
+          <a:xfrm>
+            <a:off x="3279648" y="3364992"/>
+            <a:ext cx="1225296" cy="475488"/>
           </a:xfrm>
           <a:prstGeom prst="rect">
             <a:avLst>
@@ -33093,14 +34663,14 @@
       </p:sp>
       <p:sp>
         <p:nvSpPr>
-          <p:cNvPr id="30" name="Text 28"/>
-          <p:cNvSpPr/>
-          <p:nvPr/>
-        </p:nvSpPr>
-        <p:spPr>
-          <a:xfrm>
-            <a:off x="4370832" y="3364992"/>
-            <a:ext cx="1645920" cy="475488"/>
+          <p:cNvPr id="35" name="Text 33"/>
+          <p:cNvSpPr/>
+          <p:nvPr/>
+        </p:nvSpPr>
+        <p:spPr>
+          <a:xfrm>
+            <a:off x="3279648" y="3364992"/>
+            <a:ext cx="1225296" cy="475488"/>
           </a:xfrm>
           <a:prstGeom prst="rect">
             <a:avLst/>
@@ -33124,7 +34694,7 @@
                 <a:ea typeface="Trebuchet MS" pitchFamily="34" charset="-122"/>
                 <a:cs typeface="Trebuchet MS" pitchFamily="34" charset="-120"/>
               </a:rPr>
-              <a:t>a</a:t>
+              <a:t>jec</a:t>
             </a:r>
             <a:endParaRPr lang="en-US" sz="1400" dirty="0"/>
           </a:p>
@@ -33132,14 +34702,14 @@
       </p:sp>
       <p:sp>
         <p:nvSpPr>
-          <p:cNvPr id="31" name="Text 29"/>
-          <p:cNvSpPr/>
-          <p:nvPr/>
-        </p:nvSpPr>
-        <p:spPr>
-          <a:xfrm>
-            <a:off x="6016752" y="3364992"/>
-            <a:ext cx="411480" cy="475488"/>
+          <p:cNvPr id="36" name="Text 34"/>
+          <p:cNvSpPr/>
+          <p:nvPr/>
+        </p:nvSpPr>
+        <p:spPr>
+          <a:xfrm>
+            <a:off x="4504944" y="3364992"/>
+            <a:ext cx="76200" cy="475488"/>
           </a:xfrm>
           <a:prstGeom prst="rect">
             <a:avLst/>
@@ -33171,14 +34741,14 @@
       </p:sp>
       <p:sp>
         <p:nvSpPr>
-          <p:cNvPr id="32" name="Shape 30"/>
-          <p:cNvSpPr/>
-          <p:nvPr/>
-        </p:nvSpPr>
-        <p:spPr>
-          <a:xfrm>
-            <a:off x="6428232" y="3364992"/>
-            <a:ext cx="1645920" cy="475488"/>
+          <p:cNvPr id="37" name="Shape 35"/>
+          <p:cNvSpPr/>
+          <p:nvPr/>
+        </p:nvSpPr>
+        <p:spPr>
+          <a:xfrm>
+            <a:off x="4581144" y="3364992"/>
+            <a:ext cx="1225296" cy="475488"/>
           </a:xfrm>
           <a:prstGeom prst="rect">
             <a:avLst>
@@ -33198,14 +34768,14 @@
       </p:sp>
       <p:sp>
         <p:nvSpPr>
-          <p:cNvPr id="33" name="Text 31"/>
-          <p:cNvSpPr/>
-          <p:nvPr/>
-        </p:nvSpPr>
-        <p:spPr>
-          <a:xfrm>
-            <a:off x="6428232" y="3364992"/>
-            <a:ext cx="1645920" cy="475488"/>
+          <p:cNvPr id="38" name="Text 36"/>
+          <p:cNvSpPr/>
+          <p:nvPr/>
+        </p:nvSpPr>
+        <p:spPr>
+          <a:xfrm>
+            <a:off x="4581144" y="3364992"/>
+            <a:ext cx="1225296" cy="475488"/>
           </a:xfrm>
           <a:prstGeom prst="rect">
             <a:avLst/>
@@ -33229,6 +34799,216 @@
                 <a:ea typeface="Trebuchet MS" pitchFamily="34" charset="-122"/>
                 <a:cs typeface="Trebuchet MS" pitchFamily="34" charset="-120"/>
               </a:rPr>
+              <a:t>tion</a:t>
+            </a:r>
+            <a:endParaRPr lang="en-US" sz="1400" dirty="0"/>
+          </a:p>
+        </p:txBody>
+      </p:sp>
+      <p:sp>
+        <p:nvSpPr>
+          <p:cNvPr id="39" name="Text 37"/>
+          <p:cNvSpPr/>
+          <p:nvPr/>
+        </p:nvSpPr>
+        <p:spPr>
+          <a:xfrm>
+            <a:off x="5806440" y="3364992"/>
+            <a:ext cx="76200" cy="475488"/>
+          </a:xfrm>
+          <a:prstGeom prst="rect">
+            <a:avLst/>
+          </a:prstGeom>
+          <a:noFill/>
+          <a:ln/>
+        </p:spPr>
+        <p:txBody>
+          <a:bodyPr wrap="square" lIns="0" tIns="0" rIns="0" bIns="0" rtlCol="0" anchor="ctr"/>
+          <a:lstStyle/>
+          <a:p>
+            <a:pPr algn="ctr" indent="0" marL="0">
+              <a:buNone/>
+            </a:pPr>
+            <a:r>
+              <a:rPr lang="en-US" sz="1600" b="1" dirty="0">
+                <a:solidFill>
+                  <a:srgbClr val="0D9488"/>
+                </a:solidFill>
+                <a:latin typeface="Trebuchet MS" pitchFamily="34" charset="0"/>
+                <a:ea typeface="Trebuchet MS" pitchFamily="34" charset="-122"/>
+                <a:cs typeface="Trebuchet MS" pitchFamily="34" charset="-120"/>
+              </a:rPr>
+              <a:t>·</a:t>
+            </a:r>
+            <a:endParaRPr lang="en-US" sz="1600" dirty="0"/>
+          </a:p>
+        </p:txBody>
+      </p:sp>
+      <p:sp>
+        <p:nvSpPr>
+          <p:cNvPr id="40" name="Shape 38"/>
+          <p:cNvSpPr/>
+          <p:nvPr/>
+        </p:nvSpPr>
+        <p:spPr>
+          <a:xfrm>
+            <a:off x="5882640" y="3364992"/>
+            <a:ext cx="1225296" cy="475488"/>
+          </a:xfrm>
+          <a:prstGeom prst="rect">
+            <a:avLst>
+              <a:gd name="adj" fmla="val 9615"/>
+            </a:avLst>
+          </a:prstGeom>
+          <a:solidFill>
+            <a:srgbClr val="FFFFFF"/>
+          </a:solidFill>
+          <a:ln w="12700">
+            <a:solidFill>
+              <a:srgbClr val="0D9488"/>
+            </a:solidFill>
+            <a:prstDash val="solid"/>
+          </a:ln>
+        </p:spPr>
+      </p:sp>
+      <p:sp>
+        <p:nvSpPr>
+          <p:cNvPr id="41" name="Text 39"/>
+          <p:cNvSpPr/>
+          <p:nvPr/>
+        </p:nvSpPr>
+        <p:spPr>
+          <a:xfrm>
+            <a:off x="5882640" y="3364992"/>
+            <a:ext cx="1225296" cy="475488"/>
+          </a:xfrm>
+          <a:prstGeom prst="rect">
+            <a:avLst/>
+          </a:prstGeom>
+          <a:noFill/>
+          <a:ln/>
+        </p:spPr>
+        <p:txBody>
+          <a:bodyPr wrap="square" lIns="0" tIns="0" rIns="0" bIns="0" rtlCol="0" anchor="ctr"/>
+          <a:lstStyle/>
+          <a:p>
+            <a:pPr algn="ctr" indent="0" marL="0">
+              <a:buNone/>
+            </a:pPr>
+            <a:r>
+              <a:rPr lang="en-US" sz="1400" b="1" dirty="0">
+                <a:solidFill>
+                  <a:srgbClr val="0D9488"/>
+                </a:solidFill>
+                <a:latin typeface="Trebuchet MS" pitchFamily="34" charset="0"/>
+                <a:ea typeface="Trebuchet MS" pitchFamily="34" charset="-122"/>
+                <a:cs typeface="Trebuchet MS" pitchFamily="34" charset="-120"/>
+              </a:rPr>
+              <a:t>a</a:t>
+            </a:r>
+            <a:endParaRPr lang="en-US" sz="1400" dirty="0"/>
+          </a:p>
+        </p:txBody>
+      </p:sp>
+      <p:sp>
+        <p:nvSpPr>
+          <p:cNvPr id="42" name="Text 40"/>
+          <p:cNvSpPr/>
+          <p:nvPr/>
+        </p:nvSpPr>
+        <p:spPr>
+          <a:xfrm>
+            <a:off x="7107936" y="3364992"/>
+            <a:ext cx="76200" cy="475488"/>
+          </a:xfrm>
+          <a:prstGeom prst="rect">
+            <a:avLst/>
+          </a:prstGeom>
+          <a:noFill/>
+          <a:ln/>
+        </p:spPr>
+        <p:txBody>
+          <a:bodyPr wrap="square" lIns="0" tIns="0" rIns="0" bIns="0" rtlCol="0" anchor="ctr"/>
+          <a:lstStyle/>
+          <a:p>
+            <a:pPr algn="ctr" indent="0" marL="0">
+              <a:buNone/>
+            </a:pPr>
+            <a:r>
+              <a:rPr lang="en-US" sz="1600" b="1" dirty="0">
+                <a:solidFill>
+                  <a:srgbClr val="0D9488"/>
+                </a:solidFill>
+                <a:latin typeface="Trebuchet MS" pitchFamily="34" charset="0"/>
+                <a:ea typeface="Trebuchet MS" pitchFamily="34" charset="-122"/>
+                <a:cs typeface="Trebuchet MS" pitchFamily="34" charset="-120"/>
+              </a:rPr>
+              <a:t>·</a:t>
+            </a:r>
+            <a:endParaRPr lang="en-US" sz="1600" dirty="0"/>
+          </a:p>
+        </p:txBody>
+      </p:sp>
+      <p:sp>
+        <p:nvSpPr>
+          <p:cNvPr id="43" name="Shape 41"/>
+          <p:cNvSpPr/>
+          <p:nvPr/>
+        </p:nvSpPr>
+        <p:spPr>
+          <a:xfrm>
+            <a:off x="7184136" y="3364992"/>
+            <a:ext cx="1225296" cy="475488"/>
+          </a:xfrm>
+          <a:prstGeom prst="rect">
+            <a:avLst>
+              <a:gd name="adj" fmla="val 9615"/>
+            </a:avLst>
+          </a:prstGeom>
+          <a:solidFill>
+            <a:srgbClr val="FFFFFF"/>
+          </a:solidFill>
+          <a:ln w="12700">
+            <a:solidFill>
+              <a:srgbClr val="0D9488"/>
+            </a:solidFill>
+            <a:prstDash val="solid"/>
+          </a:ln>
+        </p:spPr>
+      </p:sp>
+      <p:sp>
+        <p:nvSpPr>
+          <p:cNvPr id="44" name="Text 42"/>
+          <p:cNvSpPr/>
+          <p:nvPr/>
+        </p:nvSpPr>
+        <p:spPr>
+          <a:xfrm>
+            <a:off x="7184136" y="3364992"/>
+            <a:ext cx="1225296" cy="475488"/>
+          </a:xfrm>
+          <a:prstGeom prst="rect">
+            <a:avLst/>
+          </a:prstGeom>
+          <a:noFill/>
+          <a:ln/>
+        </p:spPr>
+        <p:txBody>
+          <a:bodyPr wrap="square" lIns="0" tIns="0" rIns="0" bIns="0" rtlCol="0" anchor="ctr"/>
+          <a:lstStyle/>
+          <a:p>
+            <a:pPr algn="ctr" indent="0" marL="0">
+              <a:buNone/>
+            </a:pPr>
+            <a:r>
+              <a:rPr lang="en-US" sz="1400" b="1" dirty="0">
+                <a:solidFill>
+                  <a:srgbClr val="0D9488"/>
+                </a:solidFill>
+                <a:latin typeface="Trebuchet MS" pitchFamily="34" charset="0"/>
+                <a:ea typeface="Trebuchet MS" pitchFamily="34" charset="-122"/>
+                <a:cs typeface="Trebuchet MS" pitchFamily="34" charset="-120"/>
+              </a:rPr>
               <a:t>ble</a:t>
             </a:r>
             <a:endParaRPr lang="en-US" sz="1400" dirty="0"/>
@@ -33237,7 +35017,7 @@
       </p:sp>
       <p:sp>
         <p:nvSpPr>
-          <p:cNvPr id="34" name="Shape 32"/>
+          <p:cNvPr id="45" name="Shape 43"/>
           <p:cNvSpPr/>
           <p:nvPr/>
         </p:nvSpPr>
@@ -33264,7 +35044,7 @@
       </p:sp>
       <p:sp>
         <p:nvSpPr>
-          <p:cNvPr id="35" name="Text 33"/>
+          <p:cNvPr id="46" name="Text 44"/>
           <p:cNvSpPr/>
           <p:nvPr/>
         </p:nvSpPr>
@@ -33303,7 +35083,7 @@
       </p:sp>
       <p:sp>
         <p:nvSpPr>
-          <p:cNvPr id="36" name="Shape 34"/>
+          <p:cNvPr id="47" name="Shape 45"/>
           <p:cNvSpPr/>
           <p:nvPr/>
         </p:nvSpPr>
@@ -33330,7 +35110,7 @@
       </p:sp>
       <p:sp>
         <p:nvSpPr>
-          <p:cNvPr id="37" name="Text 35"/>
+          <p:cNvPr id="48" name="Text 46"/>
           <p:cNvSpPr/>
           <p:nvPr/>
         </p:nvSpPr>
@@ -33653,7 +35433,7 @@
                 <a:ea typeface="Calibri" pitchFamily="34" charset="-122"/>
                 <a:cs typeface="Calibri" pitchFamily="34" charset="-120"/>
               </a:rPr>
-              <a:t>Word Labs  •  wordlabs.app  •  Suffix: '-able' = can be done; capable of</a:t>
+              <a:t>Word Labs  •  wordlabs.app  •  Suffix: '-able' = able to</a:t>
             </a:r>
             <a:endParaRPr lang="en-US" sz="800" dirty="0"/>
           </a:p>
@@ -33792,7 +35572,7 @@
                 <a:ea typeface="Trebuchet MS" pitchFamily="34" charset="-122"/>
                 <a:cs typeface="Trebuchet MS" pitchFamily="34" charset="-120"/>
               </a:rPr>
-              <a:t>readable</a:t>
+              <a:t>objectionable</a:t>
             </a:r>
             <a:endParaRPr lang="en-US" sz="2800" dirty="0"/>
           </a:p>
@@ -33872,8 +35652,8 @@
         </p:nvSpPr>
         <p:spPr>
           <a:xfrm>
-            <a:off x="2938272" y="2258568"/>
-            <a:ext cx="1828800" cy="292608"/>
+            <a:off x="1989734" y="2258568"/>
+            <a:ext cx="1581912" cy="292608"/>
           </a:xfrm>
           <a:prstGeom prst="rect">
             <a:avLst>
@@ -33906,8 +35686,8 @@
         </p:nvSpPr>
         <p:spPr>
           <a:xfrm>
-            <a:off x="2938272" y="2258568"/>
-            <a:ext cx="1828800" cy="292608"/>
+            <a:off x="1989734" y="2258568"/>
+            <a:ext cx="1581912" cy="292608"/>
           </a:xfrm>
           <a:prstGeom prst="rect">
             <a:avLst/>
@@ -33931,7 +35711,7 @@
                 <a:ea typeface="Trebuchet MS" pitchFamily="34" charset="-122"/>
                 <a:cs typeface="Trebuchet MS" pitchFamily="34" charset="-120"/>
               </a:rPr>
-              <a:t>read</a:t>
+              <a:t>ob</a:t>
             </a:r>
             <a:endParaRPr lang="en-US" sz="1300" dirty="0"/>
           </a:p>
@@ -33945,8 +35725,8 @@
         </p:nvSpPr>
         <p:spPr>
           <a:xfrm>
-            <a:off x="2938272" y="2569464"/>
-            <a:ext cx="1828800" cy="201168"/>
+            <a:off x="1989734" y="2569464"/>
+            <a:ext cx="1581912" cy="201168"/>
           </a:xfrm>
           <a:prstGeom prst="rect">
             <a:avLst/>
@@ -33970,7 +35750,7 @@
                 <a:ea typeface="Calibri" pitchFamily="34" charset="-122"/>
                 <a:cs typeface="Calibri" pitchFamily="34" charset="-120"/>
               </a:rPr>
-              <a:t>to look at and understand written words</a:t>
+              <a:t>against; in the way of; towards</a:t>
             </a:r>
             <a:endParaRPr lang="en-US" sz="850" dirty="0"/>
           </a:p>
@@ -33984,8 +35764,8 @@
         </p:nvSpPr>
         <p:spPr>
           <a:xfrm>
-            <a:off x="5803392" y="2258568"/>
-            <a:ext cx="1828800" cy="292608"/>
+            <a:off x="3659429" y="2258568"/>
+            <a:ext cx="1581912" cy="292608"/>
           </a:xfrm>
           <a:prstGeom prst="rect">
             <a:avLst>
@@ -33993,11 +35773,11 @@
             </a:avLst>
           </a:prstGeom>
           <a:solidFill>
-            <a:srgbClr val="CCFBF1"/>
+            <a:srgbClr val="FCE7F3"/>
           </a:solidFill>
           <a:ln w="19050">
             <a:solidFill>
-              <a:srgbClr val="0D9488"/>
+              <a:srgbClr val="DB2777"/>
             </a:solidFill>
             <a:prstDash val="solid"/>
           </a:ln>
@@ -34018,8 +35798,8 @@
         </p:nvSpPr>
         <p:spPr>
           <a:xfrm>
-            <a:off x="5803392" y="2258568"/>
-            <a:ext cx="1828800" cy="292608"/>
+            <a:off x="3659429" y="2258568"/>
+            <a:ext cx="1581912" cy="292608"/>
           </a:xfrm>
           <a:prstGeom prst="rect">
             <a:avLst/>
@@ -34037,13 +35817,13 @@
             <a:r>
               <a:rPr lang="en-US" sz="1300" b="1" dirty="0">
                 <a:solidFill>
-                  <a:srgbClr val="0F766E"/>
+                  <a:srgbClr val="9D174D"/>
                 </a:solidFill>
                 <a:latin typeface="Trebuchet MS" pitchFamily="34" charset="0"/>
                 <a:ea typeface="Trebuchet MS" pitchFamily="34" charset="-122"/>
                 <a:cs typeface="Trebuchet MS" pitchFamily="34" charset="-120"/>
               </a:rPr>
-              <a:t>able</a:t>
+              <a:t>ject</a:t>
             </a:r>
             <a:endParaRPr lang="en-US" sz="1300" dirty="0"/>
           </a:p>
@@ -34057,8 +35837,8 @@
         </p:nvSpPr>
         <p:spPr>
           <a:xfrm>
-            <a:off x="5803392" y="2569464"/>
-            <a:ext cx="1828800" cy="201168"/>
+            <a:off x="3659429" y="2569464"/>
+            <a:ext cx="1581912" cy="201168"/>
           </a:xfrm>
           <a:prstGeom prst="rect">
             <a:avLst/>
@@ -34082,7 +35862,7 @@
                 <a:ea typeface="Calibri" pitchFamily="34" charset="-122"/>
                 <a:cs typeface="Calibri" pitchFamily="34" charset="-120"/>
               </a:rPr>
-              <a:t>can be done; capable of</a:t>
+              <a:t>throw</a:t>
             </a:r>
             <a:endParaRPr lang="en-US" sz="850" dirty="0"/>
           </a:p>
@@ -34090,14 +35870,87 @@
       </p:sp>
       <p:sp>
         <p:nvSpPr>
-          <p:cNvPr id="22" name="Text 20"/>
-          <p:cNvSpPr/>
-          <p:nvPr/>
-        </p:nvSpPr>
-        <p:spPr>
-          <a:xfrm>
-            <a:off x="5803392" y="2752344"/>
-            <a:ext cx="1828800" cy="182880"/>
+          <p:cNvPr id="22" name="Shape 20"/>
+          <p:cNvSpPr/>
+          <p:nvPr/>
+        </p:nvSpPr>
+        <p:spPr>
+          <a:xfrm>
+            <a:off x="5329123" y="2258568"/>
+            <a:ext cx="1581912" cy="292608"/>
+          </a:xfrm>
+          <a:prstGeom prst="rect">
+            <a:avLst>
+              <a:gd name="adj" fmla="val 25000"/>
+            </a:avLst>
+          </a:prstGeom>
+          <a:solidFill>
+            <a:srgbClr val="FCE7F3"/>
+          </a:solidFill>
+          <a:ln w="19050">
+            <a:solidFill>
+              <a:srgbClr val="DB2777"/>
+            </a:solidFill>
+            <a:prstDash val="solid"/>
+          </a:ln>
+          <a:effectLst>
+            <a:outerShdw sx="100000" sy="100000" kx="0" ky="0" algn="bl" rotWithShape="0" blurRad="101600" dist="38100" dir="8100000">
+              <a:srgbClr val="000000">
+                <a:alpha val="12000"/>
+              </a:srgbClr>
+            </a:outerShdw>
+          </a:effectLst>
+        </p:spPr>
+      </p:sp>
+      <p:sp>
+        <p:nvSpPr>
+          <p:cNvPr id="23" name="Text 21"/>
+          <p:cNvSpPr/>
+          <p:nvPr/>
+        </p:nvSpPr>
+        <p:spPr>
+          <a:xfrm>
+            <a:off x="5329123" y="2258568"/>
+            <a:ext cx="1581912" cy="292608"/>
+          </a:xfrm>
+          <a:prstGeom prst="rect">
+            <a:avLst/>
+          </a:prstGeom>
+          <a:noFill/>
+          <a:ln/>
+        </p:spPr>
+        <p:txBody>
+          <a:bodyPr wrap="square" lIns="0" tIns="0" rIns="0" bIns="0" rtlCol="0" anchor="ctr"/>
+          <a:lstStyle/>
+          <a:p>
+            <a:pPr algn="ctr" indent="0" marL="0">
+              <a:buNone/>
+            </a:pPr>
+            <a:r>
+              <a:rPr lang="en-US" sz="1300" b="1" dirty="0">
+                <a:solidFill>
+                  <a:srgbClr val="9D174D"/>
+                </a:solidFill>
+                <a:latin typeface="Trebuchet MS" pitchFamily="34" charset="0"/>
+                <a:ea typeface="Trebuchet MS" pitchFamily="34" charset="-122"/>
+                <a:cs typeface="Trebuchet MS" pitchFamily="34" charset="-120"/>
+              </a:rPr>
+              <a:t>ion</a:t>
+            </a:r>
+            <a:endParaRPr lang="en-US" sz="1300" dirty="0"/>
+          </a:p>
+        </p:txBody>
+      </p:sp>
+      <p:sp>
+        <p:nvSpPr>
+          <p:cNvPr id="24" name="Text 22"/>
+          <p:cNvSpPr/>
+          <p:nvPr/>
+        </p:nvSpPr>
+        <p:spPr>
+          <a:xfrm>
+            <a:off x="5329123" y="2569464"/>
+            <a:ext cx="1581912" cy="201168"/>
           </a:xfrm>
           <a:prstGeom prst="rect">
             <a:avLst/>
@@ -34113,23 +35966,135 @@
               <a:buNone/>
             </a:pPr>
             <a:r>
-              <a:rPr lang="en-US" sz="700" i="1" dirty="0">
-                <a:solidFill>
-                  <a:srgbClr val="94A3B8"/>
+              <a:rPr lang="en-US" sz="850" dirty="0">
+                <a:solidFill>
+                  <a:srgbClr val="475569"/>
                 </a:solidFill>
                 <a:latin typeface="Calibri" pitchFamily="34" charset="0"/>
                 <a:ea typeface="Calibri" pitchFamily="34" charset="-122"/>
                 <a:cs typeface="Calibri" pitchFamily="34" charset="-120"/>
               </a:rPr>
-              <a:t>'e' dropped from 'reade' before vowel suffix '-able'</a:t>
-            </a:r>
-            <a:endParaRPr lang="en-US" sz="700" dirty="0"/>
-          </a:p>
-        </p:txBody>
-      </p:sp>
-      <p:sp>
-        <p:nvSpPr>
-          <p:cNvPr id="23" name="Shape 21"/>
+              <a:t>act or result of</a:t>
+            </a:r>
+            <a:endParaRPr lang="en-US" sz="850" dirty="0"/>
+          </a:p>
+        </p:txBody>
+      </p:sp>
+      <p:sp>
+        <p:nvSpPr>
+          <p:cNvPr id="25" name="Shape 23"/>
+          <p:cNvSpPr/>
+          <p:nvPr/>
+        </p:nvSpPr>
+        <p:spPr>
+          <a:xfrm>
+            <a:off x="6998818" y="2258568"/>
+            <a:ext cx="1581912" cy="292608"/>
+          </a:xfrm>
+          <a:prstGeom prst="rect">
+            <a:avLst>
+              <a:gd name="adj" fmla="val 25000"/>
+            </a:avLst>
+          </a:prstGeom>
+          <a:solidFill>
+            <a:srgbClr val="CCFBF1"/>
+          </a:solidFill>
+          <a:ln w="19050">
+            <a:solidFill>
+              <a:srgbClr val="0D9488"/>
+            </a:solidFill>
+            <a:prstDash val="solid"/>
+          </a:ln>
+          <a:effectLst>
+            <a:outerShdw sx="100000" sy="100000" kx="0" ky="0" algn="bl" rotWithShape="0" blurRad="101600" dist="38100" dir="8100000">
+              <a:srgbClr val="000000">
+                <a:alpha val="12000"/>
+              </a:srgbClr>
+            </a:outerShdw>
+          </a:effectLst>
+        </p:spPr>
+      </p:sp>
+      <p:sp>
+        <p:nvSpPr>
+          <p:cNvPr id="26" name="Text 24"/>
+          <p:cNvSpPr/>
+          <p:nvPr/>
+        </p:nvSpPr>
+        <p:spPr>
+          <a:xfrm>
+            <a:off x="6998818" y="2258568"/>
+            <a:ext cx="1581912" cy="292608"/>
+          </a:xfrm>
+          <a:prstGeom prst="rect">
+            <a:avLst/>
+          </a:prstGeom>
+          <a:noFill/>
+          <a:ln/>
+        </p:spPr>
+        <p:txBody>
+          <a:bodyPr wrap="square" lIns="0" tIns="0" rIns="0" bIns="0" rtlCol="0" anchor="ctr"/>
+          <a:lstStyle/>
+          <a:p>
+            <a:pPr algn="ctr" indent="0" marL="0">
+              <a:buNone/>
+            </a:pPr>
+            <a:r>
+              <a:rPr lang="en-US" sz="1300" b="1" dirty="0">
+                <a:solidFill>
+                  <a:srgbClr val="0F766E"/>
+                </a:solidFill>
+                <a:latin typeface="Trebuchet MS" pitchFamily="34" charset="0"/>
+                <a:ea typeface="Trebuchet MS" pitchFamily="34" charset="-122"/>
+                <a:cs typeface="Trebuchet MS" pitchFamily="34" charset="-120"/>
+              </a:rPr>
+              <a:t>able</a:t>
+            </a:r>
+            <a:endParaRPr lang="en-US" sz="1300" dirty="0"/>
+          </a:p>
+        </p:txBody>
+      </p:sp>
+      <p:sp>
+        <p:nvSpPr>
+          <p:cNvPr id="27" name="Text 25"/>
+          <p:cNvSpPr/>
+          <p:nvPr/>
+        </p:nvSpPr>
+        <p:spPr>
+          <a:xfrm>
+            <a:off x="6998818" y="2569464"/>
+            <a:ext cx="1581912" cy="201168"/>
+          </a:xfrm>
+          <a:prstGeom prst="rect">
+            <a:avLst/>
+          </a:prstGeom>
+          <a:noFill/>
+          <a:ln/>
+        </p:spPr>
+        <p:txBody>
+          <a:bodyPr wrap="square" lIns="0" tIns="0" rIns="0" bIns="0" rtlCol="0" anchor="t"/>
+          <a:lstStyle/>
+          <a:p>
+            <a:pPr algn="ctr" indent="0" marL="0">
+              <a:buNone/>
+            </a:pPr>
+            <a:r>
+              <a:rPr lang="en-US" sz="850" dirty="0">
+                <a:solidFill>
+                  <a:srgbClr val="475569"/>
+                </a:solidFill>
+                <a:latin typeface="Calibri" pitchFamily="34" charset="0"/>
+                <a:ea typeface="Calibri" pitchFamily="34" charset="-122"/>
+                <a:cs typeface="Calibri" pitchFamily="34" charset="-120"/>
+              </a:rPr>
+              <a:t>able to</a:t>
+            </a:r>
+            <a:endParaRPr lang="en-US" sz="850" dirty="0"/>
+          </a:p>
+        </p:txBody>
+      </p:sp>
+      <p:sp>
+        <p:nvSpPr>
+          <p:cNvPr id="28" name="Shape 26"/>
           <p:cNvSpPr/>
           <p:nvPr/>
         </p:nvSpPr>
@@ -34156,7 +36121,7 @@
       </p:sp>
       <p:sp>
         <p:nvSpPr>
-          <p:cNvPr id="24" name="Text 22"/>
+          <p:cNvPr id="29" name="Text 27"/>
           <p:cNvSpPr/>
           <p:nvPr/>
         </p:nvSpPr>
@@ -34195,7 +36160,7 @@
       </p:sp>
       <p:sp>
         <p:nvSpPr>
-          <p:cNvPr id="25" name="Shape 23"/>
+          <p:cNvPr id="30" name="Shape 28"/>
           <p:cNvSpPr/>
           <p:nvPr/>
         </p:nvSpPr>
@@ -34222,14 +36187,14 @@
       </p:sp>
       <p:sp>
         <p:nvSpPr>
-          <p:cNvPr id="26" name="Shape 24"/>
-          <p:cNvSpPr/>
-          <p:nvPr/>
-        </p:nvSpPr>
-        <p:spPr>
-          <a:xfrm>
-            <a:off x="2313432" y="3364992"/>
-            <a:ext cx="1645920" cy="475488"/>
+          <p:cNvPr id="31" name="Shape 29"/>
+          <p:cNvSpPr/>
+          <p:nvPr/>
+        </p:nvSpPr>
+        <p:spPr>
+          <a:xfrm>
+            <a:off x="1978152" y="3364992"/>
+            <a:ext cx="1225296" cy="475488"/>
           </a:xfrm>
           <a:prstGeom prst="rect">
             <a:avLst>
@@ -34249,14 +36214,14 @@
       </p:sp>
       <p:sp>
         <p:nvSpPr>
-          <p:cNvPr id="27" name="Text 25"/>
-          <p:cNvSpPr/>
-          <p:nvPr/>
-        </p:nvSpPr>
-        <p:spPr>
-          <a:xfrm>
-            <a:off x="2313432" y="3364992"/>
-            <a:ext cx="1645920" cy="475488"/>
+          <p:cNvPr id="32" name="Text 30"/>
+          <p:cNvSpPr/>
+          <p:nvPr/>
+        </p:nvSpPr>
+        <p:spPr>
+          <a:xfrm>
+            <a:off x="1978152" y="3364992"/>
+            <a:ext cx="1225296" cy="475488"/>
           </a:xfrm>
           <a:prstGeom prst="rect">
             <a:avLst/>
@@ -34280,7 +36245,7 @@
                 <a:ea typeface="Trebuchet MS" pitchFamily="34" charset="-122"/>
                 <a:cs typeface="Trebuchet MS" pitchFamily="34" charset="-120"/>
               </a:rPr>
-              <a:t>read</a:t>
+              <a:t>ob</a:t>
             </a:r>
             <a:endParaRPr lang="en-US" sz="1400" dirty="0"/>
           </a:p>
@@ -34288,14 +36253,14 @@
       </p:sp>
       <p:sp>
         <p:nvSpPr>
-          <p:cNvPr id="28" name="Text 26"/>
-          <p:cNvSpPr/>
-          <p:nvPr/>
-        </p:nvSpPr>
-        <p:spPr>
-          <a:xfrm>
-            <a:off x="3959352" y="3364992"/>
-            <a:ext cx="411480" cy="475488"/>
+          <p:cNvPr id="33" name="Text 31"/>
+          <p:cNvSpPr/>
+          <p:nvPr/>
+        </p:nvSpPr>
+        <p:spPr>
+          <a:xfrm>
+            <a:off x="3203448" y="3364992"/>
+            <a:ext cx="76200" cy="475488"/>
           </a:xfrm>
           <a:prstGeom prst="rect">
             <a:avLst/>
@@ -34327,14 +36292,14 @@
       </p:sp>
       <p:sp>
         <p:nvSpPr>
-          <p:cNvPr id="29" name="Shape 27"/>
-          <p:cNvSpPr/>
-          <p:nvPr/>
-        </p:nvSpPr>
-        <p:spPr>
-          <a:xfrm>
-            <a:off x="4370832" y="3364992"/>
-            <a:ext cx="1645920" cy="475488"/>
+          <p:cNvPr id="34" name="Shape 32"/>
+          <p:cNvSpPr/>
+          <p:nvPr/>
+        </p:nvSpPr>
+        <p:spPr>
+          <a:xfrm>
+            <a:off x="3279648" y="3364992"/>
+            <a:ext cx="1225296" cy="475488"/>
           </a:xfrm>
           <a:prstGeom prst="rect">
             <a:avLst>
@@ -34354,14 +36319,14 @@
       </p:sp>
       <p:sp>
         <p:nvSpPr>
-          <p:cNvPr id="30" name="Text 28"/>
-          <p:cNvSpPr/>
-          <p:nvPr/>
-        </p:nvSpPr>
-        <p:spPr>
-          <a:xfrm>
-            <a:off x="4370832" y="3364992"/>
-            <a:ext cx="1645920" cy="475488"/>
+          <p:cNvPr id="35" name="Text 33"/>
+          <p:cNvSpPr/>
+          <p:nvPr/>
+        </p:nvSpPr>
+        <p:spPr>
+          <a:xfrm>
+            <a:off x="3279648" y="3364992"/>
+            <a:ext cx="1225296" cy="475488"/>
           </a:xfrm>
           <a:prstGeom prst="rect">
             <a:avLst/>
@@ -34385,7 +36350,7 @@
                 <a:ea typeface="Trebuchet MS" pitchFamily="34" charset="-122"/>
                 <a:cs typeface="Trebuchet MS" pitchFamily="34" charset="-120"/>
               </a:rPr>
-              <a:t>a</a:t>
+              <a:t>jec</a:t>
             </a:r>
             <a:endParaRPr lang="en-US" sz="1400" dirty="0"/>
           </a:p>
@@ -34393,14 +36358,14 @@
       </p:sp>
       <p:sp>
         <p:nvSpPr>
-          <p:cNvPr id="31" name="Text 29"/>
-          <p:cNvSpPr/>
-          <p:nvPr/>
-        </p:nvSpPr>
-        <p:spPr>
-          <a:xfrm>
-            <a:off x="6016752" y="3364992"/>
-            <a:ext cx="411480" cy="475488"/>
+          <p:cNvPr id="36" name="Text 34"/>
+          <p:cNvSpPr/>
+          <p:nvPr/>
+        </p:nvSpPr>
+        <p:spPr>
+          <a:xfrm>
+            <a:off x="4504944" y="3364992"/>
+            <a:ext cx="76200" cy="475488"/>
           </a:xfrm>
           <a:prstGeom prst="rect">
             <a:avLst/>
@@ -34432,14 +36397,14 @@
       </p:sp>
       <p:sp>
         <p:nvSpPr>
-          <p:cNvPr id="32" name="Shape 30"/>
-          <p:cNvSpPr/>
-          <p:nvPr/>
-        </p:nvSpPr>
-        <p:spPr>
-          <a:xfrm>
-            <a:off x="6428232" y="3364992"/>
-            <a:ext cx="1645920" cy="475488"/>
+          <p:cNvPr id="37" name="Shape 35"/>
+          <p:cNvSpPr/>
+          <p:nvPr/>
+        </p:nvSpPr>
+        <p:spPr>
+          <a:xfrm>
+            <a:off x="4581144" y="3364992"/>
+            <a:ext cx="1225296" cy="475488"/>
           </a:xfrm>
           <a:prstGeom prst="rect">
             <a:avLst>
@@ -34459,14 +36424,14 @@
       </p:sp>
       <p:sp>
         <p:nvSpPr>
-          <p:cNvPr id="33" name="Text 31"/>
-          <p:cNvSpPr/>
-          <p:nvPr/>
-        </p:nvSpPr>
-        <p:spPr>
-          <a:xfrm>
-            <a:off x="6428232" y="3364992"/>
-            <a:ext cx="1645920" cy="475488"/>
+          <p:cNvPr id="38" name="Text 36"/>
+          <p:cNvSpPr/>
+          <p:nvPr/>
+        </p:nvSpPr>
+        <p:spPr>
+          <a:xfrm>
+            <a:off x="4581144" y="3364992"/>
+            <a:ext cx="1225296" cy="475488"/>
           </a:xfrm>
           <a:prstGeom prst="rect">
             <a:avLst/>
@@ -34490,6 +36455,216 @@
                 <a:ea typeface="Trebuchet MS" pitchFamily="34" charset="-122"/>
                 <a:cs typeface="Trebuchet MS" pitchFamily="34" charset="-120"/>
               </a:rPr>
+              <a:t>tion</a:t>
+            </a:r>
+            <a:endParaRPr lang="en-US" sz="1400" dirty="0"/>
+          </a:p>
+        </p:txBody>
+      </p:sp>
+      <p:sp>
+        <p:nvSpPr>
+          <p:cNvPr id="39" name="Text 37"/>
+          <p:cNvSpPr/>
+          <p:nvPr/>
+        </p:nvSpPr>
+        <p:spPr>
+          <a:xfrm>
+            <a:off x="5806440" y="3364992"/>
+            <a:ext cx="76200" cy="475488"/>
+          </a:xfrm>
+          <a:prstGeom prst="rect">
+            <a:avLst/>
+          </a:prstGeom>
+          <a:noFill/>
+          <a:ln/>
+        </p:spPr>
+        <p:txBody>
+          <a:bodyPr wrap="square" lIns="0" tIns="0" rIns="0" bIns="0" rtlCol="0" anchor="ctr"/>
+          <a:lstStyle/>
+          <a:p>
+            <a:pPr algn="ctr" indent="0" marL="0">
+              <a:buNone/>
+            </a:pPr>
+            <a:r>
+              <a:rPr lang="en-US" sz="1600" b="1" dirty="0">
+                <a:solidFill>
+                  <a:srgbClr val="0D9488"/>
+                </a:solidFill>
+                <a:latin typeface="Trebuchet MS" pitchFamily="34" charset="0"/>
+                <a:ea typeface="Trebuchet MS" pitchFamily="34" charset="-122"/>
+                <a:cs typeface="Trebuchet MS" pitchFamily="34" charset="-120"/>
+              </a:rPr>
+              <a:t>·</a:t>
+            </a:r>
+            <a:endParaRPr lang="en-US" sz="1600" dirty="0"/>
+          </a:p>
+        </p:txBody>
+      </p:sp>
+      <p:sp>
+        <p:nvSpPr>
+          <p:cNvPr id="40" name="Shape 38"/>
+          <p:cNvSpPr/>
+          <p:nvPr/>
+        </p:nvSpPr>
+        <p:spPr>
+          <a:xfrm>
+            <a:off x="5882640" y="3364992"/>
+            <a:ext cx="1225296" cy="475488"/>
+          </a:xfrm>
+          <a:prstGeom prst="rect">
+            <a:avLst>
+              <a:gd name="adj" fmla="val 9615"/>
+            </a:avLst>
+          </a:prstGeom>
+          <a:solidFill>
+            <a:srgbClr val="FFFFFF"/>
+          </a:solidFill>
+          <a:ln w="12700">
+            <a:solidFill>
+              <a:srgbClr val="0D9488"/>
+            </a:solidFill>
+            <a:prstDash val="solid"/>
+          </a:ln>
+        </p:spPr>
+      </p:sp>
+      <p:sp>
+        <p:nvSpPr>
+          <p:cNvPr id="41" name="Text 39"/>
+          <p:cNvSpPr/>
+          <p:nvPr/>
+        </p:nvSpPr>
+        <p:spPr>
+          <a:xfrm>
+            <a:off x="5882640" y="3364992"/>
+            <a:ext cx="1225296" cy="475488"/>
+          </a:xfrm>
+          <a:prstGeom prst="rect">
+            <a:avLst/>
+          </a:prstGeom>
+          <a:noFill/>
+          <a:ln/>
+        </p:spPr>
+        <p:txBody>
+          <a:bodyPr wrap="square" lIns="0" tIns="0" rIns="0" bIns="0" rtlCol="0" anchor="ctr"/>
+          <a:lstStyle/>
+          <a:p>
+            <a:pPr algn="ctr" indent="0" marL="0">
+              <a:buNone/>
+            </a:pPr>
+            <a:r>
+              <a:rPr lang="en-US" sz="1400" b="1" dirty="0">
+                <a:solidFill>
+                  <a:srgbClr val="0D9488"/>
+                </a:solidFill>
+                <a:latin typeface="Trebuchet MS" pitchFamily="34" charset="0"/>
+                <a:ea typeface="Trebuchet MS" pitchFamily="34" charset="-122"/>
+                <a:cs typeface="Trebuchet MS" pitchFamily="34" charset="-120"/>
+              </a:rPr>
+              <a:t>a</a:t>
+            </a:r>
+            <a:endParaRPr lang="en-US" sz="1400" dirty="0"/>
+          </a:p>
+        </p:txBody>
+      </p:sp>
+      <p:sp>
+        <p:nvSpPr>
+          <p:cNvPr id="42" name="Text 40"/>
+          <p:cNvSpPr/>
+          <p:nvPr/>
+        </p:nvSpPr>
+        <p:spPr>
+          <a:xfrm>
+            <a:off x="7107936" y="3364992"/>
+            <a:ext cx="76200" cy="475488"/>
+          </a:xfrm>
+          <a:prstGeom prst="rect">
+            <a:avLst/>
+          </a:prstGeom>
+          <a:noFill/>
+          <a:ln/>
+        </p:spPr>
+        <p:txBody>
+          <a:bodyPr wrap="square" lIns="0" tIns="0" rIns="0" bIns="0" rtlCol="0" anchor="ctr"/>
+          <a:lstStyle/>
+          <a:p>
+            <a:pPr algn="ctr" indent="0" marL="0">
+              <a:buNone/>
+            </a:pPr>
+            <a:r>
+              <a:rPr lang="en-US" sz="1600" b="1" dirty="0">
+                <a:solidFill>
+                  <a:srgbClr val="0D9488"/>
+                </a:solidFill>
+                <a:latin typeface="Trebuchet MS" pitchFamily="34" charset="0"/>
+                <a:ea typeface="Trebuchet MS" pitchFamily="34" charset="-122"/>
+                <a:cs typeface="Trebuchet MS" pitchFamily="34" charset="-120"/>
+              </a:rPr>
+              <a:t>·</a:t>
+            </a:r>
+            <a:endParaRPr lang="en-US" sz="1600" dirty="0"/>
+          </a:p>
+        </p:txBody>
+      </p:sp>
+      <p:sp>
+        <p:nvSpPr>
+          <p:cNvPr id="43" name="Shape 41"/>
+          <p:cNvSpPr/>
+          <p:nvPr/>
+        </p:nvSpPr>
+        <p:spPr>
+          <a:xfrm>
+            <a:off x="7184136" y="3364992"/>
+            <a:ext cx="1225296" cy="475488"/>
+          </a:xfrm>
+          <a:prstGeom prst="rect">
+            <a:avLst>
+              <a:gd name="adj" fmla="val 9615"/>
+            </a:avLst>
+          </a:prstGeom>
+          <a:solidFill>
+            <a:srgbClr val="FFFFFF"/>
+          </a:solidFill>
+          <a:ln w="12700">
+            <a:solidFill>
+              <a:srgbClr val="0D9488"/>
+            </a:solidFill>
+            <a:prstDash val="solid"/>
+          </a:ln>
+        </p:spPr>
+      </p:sp>
+      <p:sp>
+        <p:nvSpPr>
+          <p:cNvPr id="44" name="Text 42"/>
+          <p:cNvSpPr/>
+          <p:nvPr/>
+        </p:nvSpPr>
+        <p:spPr>
+          <a:xfrm>
+            <a:off x="7184136" y="3364992"/>
+            <a:ext cx="1225296" cy="475488"/>
+          </a:xfrm>
+          <a:prstGeom prst="rect">
+            <a:avLst/>
+          </a:prstGeom>
+          <a:noFill/>
+          <a:ln/>
+        </p:spPr>
+        <p:txBody>
+          <a:bodyPr wrap="square" lIns="0" tIns="0" rIns="0" bIns="0" rtlCol="0" anchor="ctr"/>
+          <a:lstStyle/>
+          <a:p>
+            <a:pPr algn="ctr" indent="0" marL="0">
+              <a:buNone/>
+            </a:pPr>
+            <a:r>
+              <a:rPr lang="en-US" sz="1400" b="1" dirty="0">
+                <a:solidFill>
+                  <a:srgbClr val="0D9488"/>
+                </a:solidFill>
+                <a:latin typeface="Trebuchet MS" pitchFamily="34" charset="0"/>
+                <a:ea typeface="Trebuchet MS" pitchFamily="34" charset="-122"/>
+                <a:cs typeface="Trebuchet MS" pitchFamily="34" charset="-120"/>
+              </a:rPr>
               <a:t>ble</a:t>
             </a:r>
             <a:endParaRPr lang="en-US" sz="1400" dirty="0"/>
@@ -34498,7 +36673,7 @@
       </p:sp>
       <p:sp>
         <p:nvSpPr>
-          <p:cNvPr id="34" name="Shape 32"/>
+          <p:cNvPr id="45" name="Shape 43"/>
           <p:cNvSpPr/>
           <p:nvPr/>
         </p:nvSpPr>
@@ -34525,7 +36700,7 @@
       </p:sp>
       <p:sp>
         <p:nvSpPr>
-          <p:cNvPr id="35" name="Text 33"/>
+          <p:cNvPr id="46" name="Text 44"/>
           <p:cNvSpPr/>
           <p:nvPr/>
         </p:nvSpPr>
@@ -34564,7 +36739,7 @@
       </p:sp>
       <p:sp>
         <p:nvSpPr>
-          <p:cNvPr id="36" name="Shape 34"/>
+          <p:cNvPr id="47" name="Shape 45"/>
           <p:cNvSpPr/>
           <p:nvPr/>
         </p:nvSpPr>
@@ -34591,14 +36766,14 @@
       </p:sp>
       <p:sp>
         <p:nvSpPr>
-          <p:cNvPr id="37" name="Shape 35"/>
-          <p:cNvSpPr/>
-          <p:nvPr/>
-        </p:nvSpPr>
-        <p:spPr>
-          <a:xfrm>
-            <a:off x="2124837" y="4169664"/>
-            <a:ext cx="685800" cy="475488"/>
+          <p:cNvPr id="48" name="Shape 46"/>
+          <p:cNvSpPr/>
+          <p:nvPr/>
+        </p:nvSpPr>
+        <p:spPr>
+          <a:xfrm>
+            <a:off x="1952244" y="4169664"/>
+            <a:ext cx="543652" cy="475488"/>
           </a:xfrm>
           <a:prstGeom prst="rect">
             <a:avLst>
@@ -34618,14 +36793,14 @@
       </p:sp>
       <p:sp>
         <p:nvSpPr>
-          <p:cNvPr id="38" name="Text 36"/>
-          <p:cNvSpPr/>
-          <p:nvPr/>
-        </p:nvSpPr>
-        <p:spPr>
-          <a:xfrm>
-            <a:off x="2124837" y="4169664"/>
-            <a:ext cx="685800" cy="475488"/>
+          <p:cNvPr id="49" name="Text 47"/>
+          <p:cNvSpPr/>
+          <p:nvPr/>
+        </p:nvSpPr>
+        <p:spPr>
+          <a:xfrm>
+            <a:off x="1952244" y="4169664"/>
+            <a:ext cx="543652" cy="475488"/>
           </a:xfrm>
           <a:prstGeom prst="rect">
             <a:avLst/>
@@ -34649,7 +36824,7 @@
                 <a:ea typeface="Trebuchet MS" pitchFamily="34" charset="-122"/>
                 <a:cs typeface="Trebuchet MS" pitchFamily="34" charset="-120"/>
               </a:rPr>
-              <a:t>r</a:t>
+              <a:t>o</a:t>
             </a:r>
             <a:endParaRPr lang="en-US" sz="900" dirty="0"/>
           </a:p>
@@ -34657,14 +36832,14 @@
       </p:sp>
       <p:sp>
         <p:nvSpPr>
-          <p:cNvPr id="39" name="Shape 37"/>
-          <p:cNvSpPr/>
-          <p:nvPr/>
-        </p:nvSpPr>
-        <p:spPr>
-          <a:xfrm>
-            <a:off x="3033522" y="4169664"/>
-            <a:ext cx="685800" cy="475488"/>
+          <p:cNvPr id="50" name="Shape 48"/>
+          <p:cNvSpPr/>
+          <p:nvPr/>
+        </p:nvSpPr>
+        <p:spPr>
+          <a:xfrm>
+            <a:off x="2546188" y="4169664"/>
+            <a:ext cx="543652" cy="475488"/>
           </a:xfrm>
           <a:prstGeom prst="rect">
             <a:avLst>
@@ -34684,14 +36859,14 @@
       </p:sp>
       <p:sp>
         <p:nvSpPr>
-          <p:cNvPr id="40" name="Text 38"/>
-          <p:cNvSpPr/>
-          <p:nvPr/>
-        </p:nvSpPr>
-        <p:spPr>
-          <a:xfrm>
-            <a:off x="3033522" y="4169664"/>
-            <a:ext cx="685800" cy="475488"/>
+          <p:cNvPr id="51" name="Text 49"/>
+          <p:cNvSpPr/>
+          <p:nvPr/>
+        </p:nvSpPr>
+        <p:spPr>
+          <a:xfrm>
+            <a:off x="2546188" y="4169664"/>
+            <a:ext cx="543652" cy="475488"/>
           </a:xfrm>
           <a:prstGeom prst="rect">
             <a:avLst/>
@@ -34715,7 +36890,7 @@
                 <a:ea typeface="Trebuchet MS" pitchFamily="34" charset="-122"/>
                 <a:cs typeface="Trebuchet MS" pitchFamily="34" charset="-120"/>
               </a:rPr>
-              <a:t>ea</a:t>
+              <a:t>b</a:t>
             </a:r>
             <a:endParaRPr lang="en-US" sz="900" dirty="0"/>
           </a:p>
@@ -34723,14 +36898,14 @@
       </p:sp>
       <p:sp>
         <p:nvSpPr>
-          <p:cNvPr id="41" name="Shape 39"/>
-          <p:cNvSpPr/>
-          <p:nvPr/>
-        </p:nvSpPr>
-        <p:spPr>
-          <a:xfrm>
-            <a:off x="3942207" y="4169664"/>
-            <a:ext cx="685800" cy="475488"/>
+          <p:cNvPr id="52" name="Shape 50"/>
+          <p:cNvSpPr/>
+          <p:nvPr/>
+        </p:nvSpPr>
+        <p:spPr>
+          <a:xfrm>
+            <a:off x="3140133" y="4169664"/>
+            <a:ext cx="543652" cy="475488"/>
           </a:xfrm>
           <a:prstGeom prst="rect">
             <a:avLst>
@@ -34750,14 +36925,14 @@
       </p:sp>
       <p:sp>
         <p:nvSpPr>
-          <p:cNvPr id="42" name="Text 40"/>
-          <p:cNvSpPr/>
-          <p:nvPr/>
-        </p:nvSpPr>
-        <p:spPr>
-          <a:xfrm>
-            <a:off x="3942207" y="4169664"/>
-            <a:ext cx="685800" cy="475488"/>
+          <p:cNvPr id="53" name="Text 51"/>
+          <p:cNvSpPr/>
+          <p:nvPr/>
+        </p:nvSpPr>
+        <p:spPr>
+          <a:xfrm>
+            <a:off x="3140133" y="4169664"/>
+            <a:ext cx="543652" cy="475488"/>
           </a:xfrm>
           <a:prstGeom prst="rect">
             <a:avLst/>
@@ -34781,7 +36956,7 @@
                 <a:ea typeface="Trebuchet MS" pitchFamily="34" charset="-122"/>
                 <a:cs typeface="Trebuchet MS" pitchFamily="34" charset="-120"/>
               </a:rPr>
-              <a:t>d</a:t>
+              <a:t>j</a:t>
             </a:r>
             <a:endParaRPr lang="en-US" sz="900" dirty="0"/>
           </a:p>
@@ -34789,14 +36964,14 @@
       </p:sp>
       <p:sp>
         <p:nvSpPr>
-          <p:cNvPr id="43" name="Shape 41"/>
-          <p:cNvSpPr/>
-          <p:nvPr/>
-        </p:nvSpPr>
-        <p:spPr>
-          <a:xfrm>
-            <a:off x="4850892" y="4169664"/>
-            <a:ext cx="685800" cy="475488"/>
+          <p:cNvPr id="54" name="Shape 52"/>
+          <p:cNvSpPr/>
+          <p:nvPr/>
+        </p:nvSpPr>
+        <p:spPr>
+          <a:xfrm>
+            <a:off x="3734077" y="4169664"/>
+            <a:ext cx="543652" cy="475488"/>
           </a:xfrm>
           <a:prstGeom prst="rect">
             <a:avLst>
@@ -34816,14 +36991,14 @@
       </p:sp>
       <p:sp>
         <p:nvSpPr>
-          <p:cNvPr id="44" name="Text 42"/>
-          <p:cNvSpPr/>
-          <p:nvPr/>
-        </p:nvSpPr>
-        <p:spPr>
-          <a:xfrm>
-            <a:off x="4850892" y="4169664"/>
-            <a:ext cx="685800" cy="475488"/>
+          <p:cNvPr id="55" name="Text 53"/>
+          <p:cNvSpPr/>
+          <p:nvPr/>
+        </p:nvSpPr>
+        <p:spPr>
+          <a:xfrm>
+            <a:off x="3734077" y="4169664"/>
+            <a:ext cx="543652" cy="475488"/>
           </a:xfrm>
           <a:prstGeom prst="rect">
             <a:avLst/>
@@ -34847,7 +37022,7 @@
                 <a:ea typeface="Trebuchet MS" pitchFamily="34" charset="-122"/>
                 <a:cs typeface="Trebuchet MS" pitchFamily="34" charset="-120"/>
               </a:rPr>
-              <a:t>a</a:t>
+              <a:t>e</a:t>
             </a:r>
             <a:endParaRPr lang="en-US" sz="900" dirty="0"/>
           </a:p>
@@ -34855,14 +37030,14 @@
       </p:sp>
       <p:sp>
         <p:nvSpPr>
-          <p:cNvPr id="45" name="Shape 43"/>
-          <p:cNvSpPr/>
-          <p:nvPr/>
-        </p:nvSpPr>
-        <p:spPr>
-          <a:xfrm>
-            <a:off x="5759577" y="4169664"/>
-            <a:ext cx="685800" cy="475488"/>
+          <p:cNvPr id="56" name="Shape 54"/>
+          <p:cNvSpPr/>
+          <p:nvPr/>
+        </p:nvSpPr>
+        <p:spPr>
+          <a:xfrm>
+            <a:off x="4328021" y="4169664"/>
+            <a:ext cx="543652" cy="475488"/>
           </a:xfrm>
           <a:prstGeom prst="rect">
             <a:avLst>
@@ -34882,14 +37057,14 @@
       </p:sp>
       <p:sp>
         <p:nvSpPr>
-          <p:cNvPr id="46" name="Text 44"/>
-          <p:cNvSpPr/>
-          <p:nvPr/>
-        </p:nvSpPr>
-        <p:spPr>
-          <a:xfrm>
-            <a:off x="5759577" y="4169664"/>
-            <a:ext cx="685800" cy="475488"/>
+          <p:cNvPr id="57" name="Text 55"/>
+          <p:cNvSpPr/>
+          <p:nvPr/>
+        </p:nvSpPr>
+        <p:spPr>
+          <a:xfrm>
+            <a:off x="4328021" y="4169664"/>
+            <a:ext cx="543652" cy="475488"/>
           </a:xfrm>
           <a:prstGeom prst="rect">
             <a:avLst/>
@@ -34913,7 +37088,7 @@
                 <a:ea typeface="Trebuchet MS" pitchFamily="34" charset="-122"/>
                 <a:cs typeface="Trebuchet MS" pitchFamily="34" charset="-120"/>
               </a:rPr>
-              <a:t>b</a:t>
+              <a:t>c</a:t>
             </a:r>
             <a:endParaRPr lang="en-US" sz="900" dirty="0"/>
           </a:p>
@@ -34921,14 +37096,14 @@
       </p:sp>
       <p:sp>
         <p:nvSpPr>
-          <p:cNvPr id="47" name="Shape 45"/>
-          <p:cNvSpPr/>
-          <p:nvPr/>
-        </p:nvSpPr>
-        <p:spPr>
-          <a:xfrm>
-            <a:off x="6668262" y="4169664"/>
-            <a:ext cx="685800" cy="475488"/>
+          <p:cNvPr id="58" name="Shape 56"/>
+          <p:cNvSpPr/>
+          <p:nvPr/>
+        </p:nvSpPr>
+        <p:spPr>
+          <a:xfrm>
+            <a:off x="4921966" y="4169664"/>
+            <a:ext cx="543652" cy="475488"/>
           </a:xfrm>
           <a:prstGeom prst="rect">
             <a:avLst>
@@ -34948,14 +37123,14 @@
       </p:sp>
       <p:sp>
         <p:nvSpPr>
-          <p:cNvPr id="48" name="Text 46"/>
-          <p:cNvSpPr/>
-          <p:nvPr/>
-        </p:nvSpPr>
-        <p:spPr>
-          <a:xfrm>
-            <a:off x="6668262" y="4169664"/>
-            <a:ext cx="685800" cy="475488"/>
+          <p:cNvPr id="59" name="Text 57"/>
+          <p:cNvSpPr/>
+          <p:nvPr/>
+        </p:nvSpPr>
+        <p:spPr>
+          <a:xfrm>
+            <a:off x="4921966" y="4169664"/>
+            <a:ext cx="543652" cy="475488"/>
           </a:xfrm>
           <a:prstGeom prst="rect">
             <a:avLst/>
@@ -34979,7 +37154,7 @@
                 <a:ea typeface="Trebuchet MS" pitchFamily="34" charset="-122"/>
                 <a:cs typeface="Trebuchet MS" pitchFamily="34" charset="-120"/>
               </a:rPr>
-              <a:t>l</a:t>
+              <a:t>ti</a:t>
             </a:r>
             <a:endParaRPr lang="en-US" sz="900" dirty="0"/>
           </a:p>
@@ -34987,14 +37162,14 @@
       </p:sp>
       <p:sp>
         <p:nvSpPr>
-          <p:cNvPr id="49" name="Shape 47"/>
-          <p:cNvSpPr/>
-          <p:nvPr/>
-        </p:nvSpPr>
-        <p:spPr>
-          <a:xfrm>
-            <a:off x="7576947" y="4169664"/>
-            <a:ext cx="685800" cy="475488"/>
+          <p:cNvPr id="60" name="Shape 58"/>
+          <p:cNvSpPr/>
+          <p:nvPr/>
+        </p:nvSpPr>
+        <p:spPr>
+          <a:xfrm>
+            <a:off x="5515910" y="4169664"/>
+            <a:ext cx="543652" cy="475488"/>
           </a:xfrm>
           <a:prstGeom prst="rect">
             <a:avLst>
@@ -35014,14 +37189,14 @@
       </p:sp>
       <p:sp>
         <p:nvSpPr>
-          <p:cNvPr id="50" name="Text 48"/>
-          <p:cNvSpPr/>
-          <p:nvPr/>
-        </p:nvSpPr>
-        <p:spPr>
-          <a:xfrm>
-            <a:off x="7576947" y="4169664"/>
-            <a:ext cx="685800" cy="475488"/>
+          <p:cNvPr id="61" name="Text 59"/>
+          <p:cNvSpPr/>
+          <p:nvPr/>
+        </p:nvSpPr>
+        <p:spPr>
+          <a:xfrm>
+            <a:off x="5515910" y="4169664"/>
+            <a:ext cx="543652" cy="475488"/>
           </a:xfrm>
           <a:prstGeom prst="rect">
             <a:avLst/>
@@ -35045,7 +37220,271 @@
                 <a:ea typeface="Trebuchet MS" pitchFamily="34" charset="-122"/>
                 <a:cs typeface="Trebuchet MS" pitchFamily="34" charset="-120"/>
               </a:rPr>
-              <a:t>e</a:t>
+              <a:t>o</a:t>
+            </a:r>
+            <a:endParaRPr lang="en-US" sz="900" dirty="0"/>
+          </a:p>
+        </p:txBody>
+      </p:sp>
+      <p:sp>
+        <p:nvSpPr>
+          <p:cNvPr id="62" name="Shape 60"/>
+          <p:cNvSpPr/>
+          <p:nvPr/>
+        </p:nvSpPr>
+        <p:spPr>
+          <a:xfrm>
+            <a:off x="6109855" y="4169664"/>
+            <a:ext cx="543652" cy="475488"/>
+          </a:xfrm>
+          <a:prstGeom prst="rect">
+            <a:avLst>
+              <a:gd name="adj" fmla="val 7692"/>
+            </a:avLst>
+          </a:prstGeom>
+          <a:solidFill>
+            <a:srgbClr val="FFFFFF"/>
+          </a:solidFill>
+          <a:ln w="12700">
+            <a:solidFill>
+              <a:srgbClr val="DB2777"/>
+            </a:solidFill>
+            <a:prstDash val="solid"/>
+          </a:ln>
+        </p:spPr>
+      </p:sp>
+      <p:sp>
+        <p:nvSpPr>
+          <p:cNvPr id="63" name="Text 61"/>
+          <p:cNvSpPr/>
+          <p:nvPr/>
+        </p:nvSpPr>
+        <p:spPr>
+          <a:xfrm>
+            <a:off x="6109855" y="4169664"/>
+            <a:ext cx="543652" cy="475488"/>
+          </a:xfrm>
+          <a:prstGeom prst="rect">
+            <a:avLst/>
+          </a:prstGeom>
+          <a:noFill/>
+          <a:ln/>
+        </p:spPr>
+        <p:txBody>
+          <a:bodyPr wrap="square" lIns="0" tIns="0" rIns="0" bIns="0" rtlCol="0" anchor="ctr"/>
+          <a:lstStyle/>
+          <a:p>
+            <a:pPr algn="ctr" indent="0" marL="0">
+              <a:buNone/>
+            </a:pPr>
+            <a:r>
+              <a:rPr lang="en-US" sz="900" b="1" dirty="0">
+                <a:solidFill>
+                  <a:srgbClr val="9D174D"/>
+                </a:solidFill>
+                <a:latin typeface="Trebuchet MS" pitchFamily="34" charset="0"/>
+                <a:ea typeface="Trebuchet MS" pitchFamily="34" charset="-122"/>
+                <a:cs typeface="Trebuchet MS" pitchFamily="34" charset="-120"/>
+              </a:rPr>
+              <a:t>n</a:t>
+            </a:r>
+            <a:endParaRPr lang="en-US" sz="900" dirty="0"/>
+          </a:p>
+        </p:txBody>
+      </p:sp>
+      <p:sp>
+        <p:nvSpPr>
+          <p:cNvPr id="64" name="Shape 62"/>
+          <p:cNvSpPr/>
+          <p:nvPr/>
+        </p:nvSpPr>
+        <p:spPr>
+          <a:xfrm>
+            <a:off x="6703799" y="4169664"/>
+            <a:ext cx="543652" cy="475488"/>
+          </a:xfrm>
+          <a:prstGeom prst="rect">
+            <a:avLst>
+              <a:gd name="adj" fmla="val 7692"/>
+            </a:avLst>
+          </a:prstGeom>
+          <a:solidFill>
+            <a:srgbClr val="FFFFFF"/>
+          </a:solidFill>
+          <a:ln w="12700">
+            <a:solidFill>
+              <a:srgbClr val="DB2777"/>
+            </a:solidFill>
+            <a:prstDash val="solid"/>
+          </a:ln>
+        </p:spPr>
+      </p:sp>
+      <p:sp>
+        <p:nvSpPr>
+          <p:cNvPr id="65" name="Text 63"/>
+          <p:cNvSpPr/>
+          <p:nvPr/>
+        </p:nvSpPr>
+        <p:spPr>
+          <a:xfrm>
+            <a:off x="6703799" y="4169664"/>
+            <a:ext cx="543652" cy="475488"/>
+          </a:xfrm>
+          <a:prstGeom prst="rect">
+            <a:avLst/>
+          </a:prstGeom>
+          <a:noFill/>
+          <a:ln/>
+        </p:spPr>
+        <p:txBody>
+          <a:bodyPr wrap="square" lIns="0" tIns="0" rIns="0" bIns="0" rtlCol="0" anchor="ctr"/>
+          <a:lstStyle/>
+          <a:p>
+            <a:pPr algn="ctr" indent="0" marL="0">
+              <a:buNone/>
+            </a:pPr>
+            <a:r>
+              <a:rPr lang="en-US" sz="900" b="1" dirty="0">
+                <a:solidFill>
+                  <a:srgbClr val="9D174D"/>
+                </a:solidFill>
+                <a:latin typeface="Trebuchet MS" pitchFamily="34" charset="0"/>
+                <a:ea typeface="Trebuchet MS" pitchFamily="34" charset="-122"/>
+                <a:cs typeface="Trebuchet MS" pitchFamily="34" charset="-120"/>
+              </a:rPr>
+              <a:t>a</a:t>
+            </a:r>
+            <a:endParaRPr lang="en-US" sz="900" dirty="0"/>
+          </a:p>
+        </p:txBody>
+      </p:sp>
+      <p:sp>
+        <p:nvSpPr>
+          <p:cNvPr id="66" name="Shape 64"/>
+          <p:cNvSpPr/>
+          <p:nvPr/>
+        </p:nvSpPr>
+        <p:spPr>
+          <a:xfrm>
+            <a:off x="7297743" y="4169664"/>
+            <a:ext cx="543652" cy="475488"/>
+          </a:xfrm>
+          <a:prstGeom prst="rect">
+            <a:avLst>
+              <a:gd name="adj" fmla="val 7692"/>
+            </a:avLst>
+          </a:prstGeom>
+          <a:solidFill>
+            <a:srgbClr val="FFFFFF"/>
+          </a:solidFill>
+          <a:ln w="12700">
+            <a:solidFill>
+              <a:srgbClr val="DB2777"/>
+            </a:solidFill>
+            <a:prstDash val="solid"/>
+          </a:ln>
+        </p:spPr>
+      </p:sp>
+      <p:sp>
+        <p:nvSpPr>
+          <p:cNvPr id="67" name="Text 65"/>
+          <p:cNvSpPr/>
+          <p:nvPr/>
+        </p:nvSpPr>
+        <p:spPr>
+          <a:xfrm>
+            <a:off x="7297743" y="4169664"/>
+            <a:ext cx="543652" cy="475488"/>
+          </a:xfrm>
+          <a:prstGeom prst="rect">
+            <a:avLst/>
+          </a:prstGeom>
+          <a:noFill/>
+          <a:ln/>
+        </p:spPr>
+        <p:txBody>
+          <a:bodyPr wrap="square" lIns="0" tIns="0" rIns="0" bIns="0" rtlCol="0" anchor="ctr"/>
+          <a:lstStyle/>
+          <a:p>
+            <a:pPr algn="ctr" indent="0" marL="0">
+              <a:buNone/>
+            </a:pPr>
+            <a:r>
+              <a:rPr lang="en-US" sz="900" b="1" dirty="0">
+                <a:solidFill>
+                  <a:srgbClr val="9D174D"/>
+                </a:solidFill>
+                <a:latin typeface="Trebuchet MS" pitchFamily="34" charset="0"/>
+                <a:ea typeface="Trebuchet MS" pitchFamily="34" charset="-122"/>
+                <a:cs typeface="Trebuchet MS" pitchFamily="34" charset="-120"/>
+              </a:rPr>
+              <a:t>b</a:t>
+            </a:r>
+            <a:endParaRPr lang="en-US" sz="900" dirty="0"/>
+          </a:p>
+        </p:txBody>
+      </p:sp>
+      <p:sp>
+        <p:nvSpPr>
+          <p:cNvPr id="68" name="Shape 66"/>
+          <p:cNvSpPr/>
+          <p:nvPr/>
+        </p:nvSpPr>
+        <p:spPr>
+          <a:xfrm>
+            <a:off x="7891688" y="4169664"/>
+            <a:ext cx="543652" cy="475488"/>
+          </a:xfrm>
+          <a:prstGeom prst="rect">
+            <a:avLst>
+              <a:gd name="adj" fmla="val 7692"/>
+            </a:avLst>
+          </a:prstGeom>
+          <a:solidFill>
+            <a:srgbClr val="FFFFFF"/>
+          </a:solidFill>
+          <a:ln w="12700">
+            <a:solidFill>
+              <a:srgbClr val="DB2777"/>
+            </a:solidFill>
+            <a:prstDash val="solid"/>
+          </a:ln>
+        </p:spPr>
+      </p:sp>
+      <p:sp>
+        <p:nvSpPr>
+          <p:cNvPr id="69" name="Text 67"/>
+          <p:cNvSpPr/>
+          <p:nvPr/>
+        </p:nvSpPr>
+        <p:spPr>
+          <a:xfrm>
+            <a:off x="7891688" y="4169664"/>
+            <a:ext cx="543652" cy="475488"/>
+          </a:xfrm>
+          <a:prstGeom prst="rect">
+            <a:avLst/>
+          </a:prstGeom>
+          <a:noFill/>
+          <a:ln/>
+        </p:spPr>
+        <p:txBody>
+          <a:bodyPr wrap="square" lIns="0" tIns="0" rIns="0" bIns="0" rtlCol="0" anchor="ctr"/>
+          <a:lstStyle/>
+          <a:p>
+            <a:pPr algn="ctr" indent="0" marL="0">
+              <a:buNone/>
+            </a:pPr>
+            <a:r>
+              <a:rPr lang="en-US" sz="900" b="1" dirty="0">
+                <a:solidFill>
+                  <a:srgbClr val="9D174D"/>
+                </a:solidFill>
+                <a:latin typeface="Trebuchet MS" pitchFamily="34" charset="0"/>
+                <a:ea typeface="Trebuchet MS" pitchFamily="34" charset="-122"/>
+                <a:cs typeface="Trebuchet MS" pitchFamily="34" charset="-120"/>
+              </a:rPr>
+              <a:t>le</a:t>
             </a:r>
             <a:endParaRPr lang="en-US" sz="900" dirty="0"/>
           </a:p>
@@ -35337,7 +37776,7 @@
                 <a:ea typeface="Calibri" pitchFamily="34" charset="-122"/>
                 <a:cs typeface="Calibri" pitchFamily="34" charset="-120"/>
               </a:rPr>
-              <a:t>Word Labs  •  wordlabs.app  •  Suffix: '-able' = can be done; capable of</a:t>
+              <a:t>Word Labs  •  wordlabs.app  •  Suffix: '-able' = able to</a:t>
             </a:r>
             <a:endParaRPr lang="en-US" sz="800" dirty="0"/>
           </a:p>
@@ -36506,7 +38945,7 @@
                 <a:ea typeface="Calibri" pitchFamily="34" charset="-122"/>
                 <a:cs typeface="Calibri" pitchFamily="34" charset="-120"/>
               </a:rPr>
-              <a:t>Word Labs  •  wordlabs.app  •  Suffix: '-able' = can be done; capable of</a:t>
+              <a:t>Word Labs  •  wordlabs.app  •  Suffix: '-able' = able to</a:t>
             </a:r>
             <a:endParaRPr lang="en-US" sz="800" dirty="0"/>
           </a:p>
@@ -36807,7 +39246,7 @@
                 <a:ea typeface="Trebuchet MS" pitchFamily="34" charset="-122"/>
                 <a:cs typeface="Trebuchet MS" pitchFamily="34" charset="-120"/>
               </a:rPr>
-              <a:t>un-</a:t>
+              <a:t>ad-</a:t>
             </a:r>
             <a:endParaRPr lang="en-US" sz="1300" dirty="0"/>
           </a:p>
@@ -36871,7 +39310,7 @@
                 <a:ea typeface="Trebuchet MS" pitchFamily="34" charset="-122"/>
                 <a:cs typeface="Trebuchet MS" pitchFamily="34" charset="-120"/>
               </a:rPr>
-              <a:t>enjoy</a:t>
+              <a:t>cept</a:t>
             </a:r>
             <a:endParaRPr lang="en-US" sz="1300" dirty="0"/>
           </a:p>
@@ -36999,7 +39438,7 @@
                 <a:ea typeface="Trebuchet MS" pitchFamily="34" charset="-122"/>
                 <a:cs typeface="Trebuchet MS" pitchFamily="34" charset="-120"/>
               </a:rPr>
-              <a:t>re-</a:t>
+              <a:t>de-</a:t>
             </a:r>
             <a:endParaRPr lang="en-US" sz="1300" dirty="0"/>
           </a:p>
@@ -37063,7 +39502,7 @@
                 <a:ea typeface="Trebuchet MS" pitchFamily="34" charset="-122"/>
                 <a:cs typeface="Trebuchet MS" pitchFamily="34" charset="-120"/>
               </a:rPr>
-              <a:t>comfort</a:t>
+              <a:t>count</a:t>
             </a:r>
             <a:endParaRPr lang="en-US" sz="1300" dirty="0"/>
           </a:p>
@@ -37216,7 +39655,7 @@
                 <a:ea typeface="Trebuchet MS" pitchFamily="34" charset="-122"/>
                 <a:cs typeface="Trebuchet MS" pitchFamily="34" charset="-120"/>
               </a:rPr>
-              <a:t>remark</a:t>
+              <a:t>agree</a:t>
             </a:r>
             <a:endParaRPr lang="en-US" sz="1300" dirty="0"/>
           </a:p>
@@ -37305,7 +39744,7 @@
                 <a:ea typeface="Trebuchet MS" pitchFamily="34" charset="-122"/>
                 <a:cs typeface="Trebuchet MS" pitchFamily="34" charset="-120"/>
               </a:rPr>
-              <a:t>re-</a:t>
+              <a:t>in-</a:t>
             </a:r>
             <a:endParaRPr lang="en-US" sz="1300" dirty="0"/>
           </a:p>
@@ -37369,7 +39808,7 @@
                 <a:ea typeface="Trebuchet MS" pitchFamily="34" charset="-122"/>
                 <a:cs typeface="Trebuchet MS" pitchFamily="34" charset="-120"/>
               </a:rPr>
-              <a:t>change</a:t>
+              <a:t>argue</a:t>
             </a:r>
             <a:endParaRPr lang="en-US" sz="1300" dirty="0"/>
           </a:p>
@@ -37458,7 +39897,7 @@
                 <a:ea typeface="Trebuchet MS" pitchFamily="34" charset="-122"/>
                 <a:cs typeface="Trebuchet MS" pitchFamily="34" charset="-120"/>
               </a:rPr>
-              <a:t>pre-</a:t>
+              <a:t>ob-</a:t>
             </a:r>
             <a:endParaRPr lang="en-US" sz="1300" dirty="0"/>
           </a:p>
@@ -37522,7 +39961,7 @@
                 <a:ea typeface="Trebuchet MS" pitchFamily="34" charset="-122"/>
                 <a:cs typeface="Trebuchet MS" pitchFamily="34" charset="-120"/>
               </a:rPr>
-              <a:t>wash</a:t>
+              <a:t>believe</a:t>
             </a:r>
             <a:endParaRPr lang="en-US" sz="1300" dirty="0"/>
           </a:p>
@@ -37555,37 +39994,190 @@
       </p:sp>
       <p:sp>
         <p:nvSpPr>
-          <p:cNvPr id="43" name="Text 41"/>
-          <p:cNvSpPr/>
-          <p:nvPr/>
-        </p:nvSpPr>
-        <p:spPr>
-          <a:xfrm>
-            <a:off x="365760" y="3611880"/>
-            <a:ext cx="1828800" cy="347472"/>
-          </a:xfrm>
-          <a:prstGeom prst="rect">
-            <a:avLst/>
-          </a:prstGeom>
-          <a:noFill/>
-          <a:ln/>
-        </p:spPr>
-        <p:txBody>
-          <a:bodyPr wrap="square" lIns="0" tIns="0" rIns="0" bIns="0" rtlCol="0" anchor="ctr"/>
-          <a:lstStyle/>
-          <a:p>
-            <a:pPr algn="l" indent="0" marL="0">
-              <a:buNone/>
-            </a:pPr>
-            <a:r>
-              <a:rPr lang="en-US" sz="1200" b="1" dirty="0">
-                <a:solidFill>
-                  <a:srgbClr val="0F172A"/>
+          <p:cNvPr id="43" name="Shape 41"/>
+          <p:cNvSpPr/>
+          <p:nvPr/>
+        </p:nvSpPr>
+        <p:spPr>
+          <a:xfrm>
+            <a:off x="365760" y="3666744"/>
+            <a:ext cx="2468880" cy="402336"/>
+          </a:xfrm>
+          <a:prstGeom prst="rect">
+            <a:avLst/>
+          </a:prstGeom>
+          <a:solidFill>
+            <a:srgbClr val="DDD6FE"/>
+          </a:solidFill>
+          <a:ln w="12700">
+            <a:solidFill>
+              <a:srgbClr val="E2E8F0"/>
+            </a:solidFill>
+            <a:prstDash val="solid"/>
+          </a:ln>
+        </p:spPr>
+      </p:sp>
+      <p:sp>
+        <p:nvSpPr>
+          <p:cNvPr id="44" name="Text 42"/>
+          <p:cNvSpPr/>
+          <p:nvPr/>
+        </p:nvSpPr>
+        <p:spPr>
+          <a:xfrm>
+            <a:off x="365760" y="3666744"/>
+            <a:ext cx="2468880" cy="402336"/>
+          </a:xfrm>
+          <a:prstGeom prst="rect">
+            <a:avLst/>
+          </a:prstGeom>
+          <a:noFill/>
+          <a:ln/>
+        </p:spPr>
+        <p:txBody>
+          <a:bodyPr wrap="square" lIns="0" tIns="0" rIns="0" bIns="0" rtlCol="0" anchor="ctr"/>
+          <a:lstStyle/>
+          <a:p>
+            <a:pPr algn="ctr" indent="0" marL="0">
+              <a:buNone/>
+            </a:pPr>
+            <a:r>
+              <a:rPr lang="en-US" sz="1300" b="1" dirty="0">
+                <a:solidFill>
+                  <a:srgbClr val="4C1D95"/>
                 </a:solidFill>
                 <a:latin typeface="Trebuchet MS" pitchFamily="34" charset="0"/>
                 <a:ea typeface="Trebuchet MS" pitchFamily="34" charset="-122"/>
                 <a:cs typeface="Trebuchet MS" pitchFamily="34" charset="-120"/>
               </a:rPr>
+              <a:t>pre-</a:t>
+            </a:r>
+            <a:endParaRPr lang="en-US" sz="1300" dirty="0"/>
+          </a:p>
+        </p:txBody>
+      </p:sp>
+      <p:sp>
+        <p:nvSpPr>
+          <p:cNvPr id="45" name="Shape 43"/>
+          <p:cNvSpPr/>
+          <p:nvPr/>
+        </p:nvSpPr>
+        <p:spPr>
+          <a:xfrm>
+            <a:off x="2971800" y="3666744"/>
+            <a:ext cx="2834640" cy="402336"/>
+          </a:xfrm>
+          <a:prstGeom prst="rect">
+            <a:avLst/>
+          </a:prstGeom>
+          <a:solidFill>
+            <a:srgbClr val="CCFBF1"/>
+          </a:solidFill>
+          <a:ln w="12700">
+            <a:solidFill>
+              <a:srgbClr val="E2E8F0"/>
+            </a:solidFill>
+            <a:prstDash val="solid"/>
+          </a:ln>
+        </p:spPr>
+      </p:sp>
+      <p:sp>
+        <p:nvSpPr>
+          <p:cNvPr id="46" name="Text 44"/>
+          <p:cNvSpPr/>
+          <p:nvPr/>
+        </p:nvSpPr>
+        <p:spPr>
+          <a:xfrm>
+            <a:off x="2971800" y="3666744"/>
+            <a:ext cx="2834640" cy="402336"/>
+          </a:xfrm>
+          <a:prstGeom prst="rect">
+            <a:avLst/>
+          </a:prstGeom>
+          <a:noFill/>
+          <a:ln/>
+        </p:spPr>
+        <p:txBody>
+          <a:bodyPr wrap="square" lIns="0" tIns="0" rIns="0" bIns="0" rtlCol="0" anchor="ctr"/>
+          <a:lstStyle/>
+          <a:p>
+            <a:pPr algn="ctr" indent="0" marL="0">
+              <a:buNone/>
+            </a:pPr>
+            <a:r>
+              <a:rPr lang="en-US" sz="1300" b="1" dirty="0">
+                <a:solidFill>
+                  <a:srgbClr val="0F766E"/>
+                </a:solidFill>
+                <a:latin typeface="Trebuchet MS" pitchFamily="34" charset="0"/>
+                <a:ea typeface="Trebuchet MS" pitchFamily="34" charset="-122"/>
+                <a:cs typeface="Trebuchet MS" pitchFamily="34" charset="-120"/>
+              </a:rPr>
+              <a:t>collect</a:t>
+            </a:r>
+            <a:endParaRPr lang="en-US" sz="1300" dirty="0"/>
+          </a:p>
+        </p:txBody>
+      </p:sp>
+      <p:sp>
+        <p:nvSpPr>
+          <p:cNvPr id="47" name="Shape 45"/>
+          <p:cNvSpPr/>
+          <p:nvPr/>
+        </p:nvSpPr>
+        <p:spPr>
+          <a:xfrm>
+            <a:off x="5943600" y="3666744"/>
+            <a:ext cx="2834640" cy="402336"/>
+          </a:xfrm>
+          <a:prstGeom prst="rect">
+            <a:avLst/>
+          </a:prstGeom>
+          <a:solidFill>
+            <a:srgbClr val="F1F5F9"/>
+          </a:solidFill>
+          <a:ln w="12700">
+            <a:solidFill>
+              <a:srgbClr val="E2E8F0"/>
+            </a:solidFill>
+            <a:prstDash val="solid"/>
+          </a:ln>
+        </p:spPr>
+      </p:sp>
+      <p:sp>
+        <p:nvSpPr>
+          <p:cNvPr id="48" name="Text 46"/>
+          <p:cNvSpPr/>
+          <p:nvPr/>
+        </p:nvSpPr>
+        <p:spPr>
+          <a:xfrm>
+            <a:off x="365760" y="3611880"/>
+            <a:ext cx="1828800" cy="347472"/>
+          </a:xfrm>
+          <a:prstGeom prst="rect">
+            <a:avLst/>
+          </a:prstGeom>
+          <a:noFill/>
+          <a:ln/>
+        </p:spPr>
+        <p:txBody>
+          <a:bodyPr wrap="square" lIns="0" tIns="0" rIns="0" bIns="0" rtlCol="0" anchor="ctr"/>
+          <a:lstStyle/>
+          <a:p>
+            <a:pPr algn="l" indent="0" marL="0">
+              <a:buNone/>
+            </a:pPr>
+            <a:r>
+              <a:rPr lang="en-US" sz="1200" b="1" dirty="0">
+                <a:solidFill>
+                  <a:srgbClr val="0F172A"/>
+                </a:solidFill>
+                <a:latin typeface="Trebuchet MS" pitchFamily="34" charset="0"/>
+                <a:ea typeface="Trebuchet MS" pitchFamily="34" charset="-122"/>
+                <a:cs typeface="Trebuchet MS" pitchFamily="34" charset="-120"/>
+              </a:rPr>
               <a:t>Sample words:</a:t>
             </a:r>
             <a:endParaRPr lang="en-US" sz="1200" dirty="0"/>
@@ -37594,7 +40186,7 @@
       </p:sp>
       <p:sp>
         <p:nvSpPr>
-          <p:cNvPr id="44" name="Shape 42"/>
+          <p:cNvPr id="49" name="Shape 47"/>
           <p:cNvSpPr/>
           <p:nvPr/>
         </p:nvSpPr>
@@ -37621,7 +40213,7 @@
       </p:sp>
       <p:sp>
         <p:nvSpPr>
-          <p:cNvPr id="45" name="Text 43"/>
+          <p:cNvPr id="50" name="Text 48"/>
           <p:cNvSpPr/>
           <p:nvPr/>
         </p:nvSpPr>
@@ -37652,7 +40244,7 @@
                 <a:ea typeface="Trebuchet MS" pitchFamily="34" charset="-122"/>
                 <a:cs typeface="Trebuchet MS" pitchFamily="34" charset="-120"/>
               </a:rPr>
-              <a:t>enjoyable</a:t>
+              <a:t>usable</a:t>
             </a:r>
             <a:endParaRPr lang="en-US" sz="1200" dirty="0"/>
           </a:p>
@@ -37660,7 +40252,7 @@
       </p:sp>
       <p:sp>
         <p:nvSpPr>
-          <p:cNvPr id="46" name="Shape 44"/>
+          <p:cNvPr id="51" name="Shape 49"/>
           <p:cNvSpPr/>
           <p:nvPr/>
         </p:nvSpPr>
@@ -37687,7 +40279,7 @@
       </p:sp>
       <p:sp>
         <p:nvSpPr>
-          <p:cNvPr id="47" name="Text 45"/>
+          <p:cNvPr id="52" name="Text 50"/>
           <p:cNvSpPr/>
           <p:nvPr/>
         </p:nvSpPr>
@@ -37718,7 +40310,7 @@
                 <a:ea typeface="Trebuchet MS" pitchFamily="34" charset="-122"/>
                 <a:cs typeface="Trebuchet MS" pitchFamily="34" charset="-120"/>
               </a:rPr>
-              <a:t>remarkable</a:t>
+              <a:t>likable</a:t>
             </a:r>
             <a:endParaRPr lang="en-US" sz="1200" dirty="0"/>
           </a:p>
@@ -37726,7 +40318,7 @@
       </p:sp>
       <p:sp>
         <p:nvSpPr>
-          <p:cNvPr id="48" name="Shape 46"/>
+          <p:cNvPr id="53" name="Shape 51"/>
           <p:cNvSpPr/>
           <p:nvPr/>
         </p:nvSpPr>
@@ -37753,7 +40345,7 @@
       </p:sp>
       <p:sp>
         <p:nvSpPr>
-          <p:cNvPr id="49" name="Text 47"/>
+          <p:cNvPr id="54" name="Text 52"/>
           <p:cNvSpPr/>
           <p:nvPr/>
         </p:nvSpPr>
@@ -37784,7 +40376,7 @@
                 <a:ea typeface="Trebuchet MS" pitchFamily="34" charset="-122"/>
                 <a:cs typeface="Trebuchet MS" pitchFamily="34" charset="-120"/>
               </a:rPr>
-              <a:t>comfortable</a:t>
+              <a:t>movable</a:t>
             </a:r>
             <a:endParaRPr lang="en-US" sz="1200" dirty="0"/>
           </a:p>
@@ -37792,7 +40384,7 @@
       </p:sp>
       <p:sp>
         <p:nvSpPr>
-          <p:cNvPr id="50" name="Shape 48"/>
+          <p:cNvPr id="55" name="Shape 53"/>
           <p:cNvSpPr/>
           <p:nvPr/>
         </p:nvSpPr>
@@ -37819,7 +40411,7 @@
       </p:sp>
       <p:sp>
         <p:nvSpPr>
-          <p:cNvPr id="51" name="Text 49"/>
+          <p:cNvPr id="56" name="Text 54"/>
           <p:cNvSpPr/>
           <p:nvPr/>
         </p:nvSpPr>
@@ -37850,7 +40442,7 @@
                 <a:ea typeface="Trebuchet MS" pitchFamily="34" charset="-122"/>
                 <a:cs typeface="Trebuchet MS" pitchFamily="34" charset="-120"/>
               </a:rPr>
-              <a:t>washable</a:t>
+              <a:t>payable</a:t>
             </a:r>
             <a:endParaRPr lang="en-US" sz="1200" dirty="0"/>
           </a:p>
@@ -37858,7 +40450,7 @@
       </p:sp>
       <p:sp>
         <p:nvSpPr>
-          <p:cNvPr id="52" name="Shape 50"/>
+          <p:cNvPr id="57" name="Shape 55"/>
           <p:cNvSpPr/>
           <p:nvPr/>
         </p:nvSpPr>
@@ -37885,7 +40477,7 @@
       </p:sp>
       <p:sp>
         <p:nvSpPr>
-          <p:cNvPr id="53" name="Text 51"/>
+          <p:cNvPr id="58" name="Text 56"/>
           <p:cNvSpPr/>
           <p:nvPr/>
         </p:nvSpPr>
@@ -37916,7 +40508,7 @@
                 <a:ea typeface="Trebuchet MS" pitchFamily="34" charset="-122"/>
                 <a:cs typeface="Trebuchet MS" pitchFamily="34" charset="-120"/>
               </a:rPr>
-              <a:t>unbelievable</a:t>
+              <a:t>arguable</a:t>
             </a:r>
             <a:endParaRPr lang="en-US" sz="1200" dirty="0"/>
           </a:p>
@@ -37924,7 +40516,7 @@
       </p:sp>
       <p:sp>
         <p:nvSpPr>
-          <p:cNvPr id="54" name="Shape 52"/>
+          <p:cNvPr id="59" name="Shape 57"/>
           <p:cNvSpPr/>
           <p:nvPr/>
         </p:nvSpPr>
@@ -37951,7 +40543,7 @@
       </p:sp>
       <p:sp>
         <p:nvSpPr>
-          <p:cNvPr id="55" name="Text 53"/>
+          <p:cNvPr id="60" name="Text 58"/>
           <p:cNvSpPr/>
           <p:nvPr/>
         </p:nvSpPr>
@@ -37982,7 +40574,7 @@
                 <a:ea typeface="Trebuchet MS" pitchFamily="34" charset="-122"/>
                 <a:cs typeface="Trebuchet MS" pitchFamily="34" charset="-120"/>
               </a:rPr>
-              <a:t>changeable</a:t>
+              <a:t>arguably</a:t>
             </a:r>
             <a:endParaRPr lang="en-US" sz="1200" dirty="0"/>
           </a:p>
@@ -37990,7 +40582,7 @@
       </p:sp>
       <p:sp>
         <p:nvSpPr>
-          <p:cNvPr id="56" name="Shape 54"/>
+          <p:cNvPr id="61" name="Shape 59"/>
           <p:cNvSpPr/>
           <p:nvPr/>
         </p:nvSpPr>
@@ -38017,7 +40609,7 @@
       </p:sp>
       <p:sp>
         <p:nvSpPr>
-          <p:cNvPr id="57" name="Text 55"/>
+          <p:cNvPr id="62" name="Text 60"/>
           <p:cNvSpPr/>
           <p:nvPr/>
         </p:nvSpPr>
@@ -38048,73 +40640,7 @@
                 <a:ea typeface="Trebuchet MS" pitchFamily="34" charset="-122"/>
                 <a:cs typeface="Trebuchet MS" pitchFamily="34" charset="-120"/>
               </a:rPr>
-              <a:t>readable</a:t>
-            </a:r>
-            <a:endParaRPr lang="en-US" sz="1200" dirty="0"/>
-          </a:p>
-        </p:txBody>
-      </p:sp>
-      <p:sp>
-        <p:nvSpPr>
-          <p:cNvPr id="58" name="Shape 56"/>
-          <p:cNvSpPr/>
-          <p:nvPr/>
-        </p:nvSpPr>
-        <p:spPr>
-          <a:xfrm>
-            <a:off x="6894576" y="4498848"/>
-            <a:ext cx="2011680" cy="402336"/>
-          </a:xfrm>
-          <a:prstGeom prst="rect">
-            <a:avLst>
-              <a:gd name="adj" fmla="val 13636"/>
-            </a:avLst>
-          </a:prstGeom>
-          <a:solidFill>
-            <a:srgbClr val="EEF2FF"/>
-          </a:solidFill>
-          <a:ln w="12700">
-            <a:solidFill>
-              <a:srgbClr val="6366F1"/>
-            </a:solidFill>
-            <a:prstDash val="solid"/>
-          </a:ln>
-        </p:spPr>
-      </p:sp>
-      <p:sp>
-        <p:nvSpPr>
-          <p:cNvPr id="59" name="Text 57"/>
-          <p:cNvSpPr/>
-          <p:nvPr/>
-        </p:nvSpPr>
-        <p:spPr>
-          <a:xfrm>
-            <a:off x="6894576" y="4498848"/>
-            <a:ext cx="2011680" cy="402336"/>
-          </a:xfrm>
-          <a:prstGeom prst="rect">
-            <a:avLst/>
-          </a:prstGeom>
-          <a:noFill/>
-          <a:ln/>
-        </p:spPr>
-        <p:txBody>
-          <a:bodyPr wrap="square" lIns="0" tIns="0" rIns="0" bIns="0" rtlCol="0" anchor="ctr"/>
-          <a:lstStyle/>
-          <a:p>
-            <a:pPr algn="ctr" indent="0" marL="0">
-              <a:buNone/>
-            </a:pPr>
-            <a:r>
-              <a:rPr lang="en-US" sz="1200" b="1" dirty="0">
-                <a:solidFill>
-                  <a:srgbClr val="4338CA"/>
-                </a:solidFill>
-                <a:latin typeface="Trebuchet MS" pitchFamily="34" charset="0"/>
-                <a:ea typeface="Trebuchet MS" pitchFamily="34" charset="-122"/>
-                <a:cs typeface="Trebuchet MS" pitchFamily="34" charset="-120"/>
-              </a:rPr>
-              <a:t>dependable</a:t>
+              <a:t>formable</a:t>
             </a:r>
             <a:endParaRPr lang="en-US" sz="1200" dirty="0"/>
           </a:p>
@@ -38406,7 +40932,7 @@
                 <a:ea typeface="Calibri" pitchFamily="34" charset="-122"/>
                 <a:cs typeface="Calibri" pitchFamily="34" charset="-120"/>
               </a:rPr>
-              <a:t>Word Labs  •  wordlabs.app  •  Suffix: '-able' = can be done; capable of</a:t>
+              <a:t>Word Labs  •  wordlabs.app  •  Suffix: '-able' = able to</a:t>
             </a:r>
             <a:endParaRPr lang="en-US" sz="800" dirty="0"/>
           </a:p>
@@ -38570,7 +41096,7 @@
                 <a:ea typeface="Calibri" pitchFamily="34" charset="-122"/>
                 <a:cs typeface="Calibri" pitchFamily="34" charset="-120"/>
               </a:rPr>
-              <a:t>A meaningful word part added to the end of a word to change its meaning or form. The suffix '-able' means 'can be done; capable of'.</a:t>
+              <a:t>A meaningful word part added to the end of a word to change its meaning or form. The suffix '-able' means 'able to'.</a:t>
             </a:r>
             <a:endParaRPr lang="en-US" sz="1350" dirty="0"/>
           </a:p>
@@ -38734,7 +41260,7 @@
                 <a:ea typeface="Calibri" pitchFamily="34" charset="-122"/>
                 <a:cs typeface="Calibri" pitchFamily="34" charset="-120"/>
               </a:rPr>
-              <a:t>The core part of a word carrying its basic meaning. In 'enjoyable', the root is the part before the suffix '-able'.</a:t>
+              <a:t>The core part of a word carrying its basic meaning. In 'usable', the root is the part before the suffix '-able'.</a:t>
             </a:r>
             <a:endParaRPr lang="en-US" sz="1350" dirty="0"/>
           </a:p>
@@ -38898,7 +41424,7 @@
                 <a:ea typeface="Calibri" pitchFamily="34" charset="-122"/>
                 <a:cs typeface="Calibri" pitchFamily="34" charset="-120"/>
               </a:rPr>
-              <a:t>A meaningful word part added to the beginning of a root to change its meaning. E.g. 'un-' in 'remarkable' means 'not'.</a:t>
+              <a:t>A meaningful word part added to the beginning of a root to change its meaning. E.g. 'un-' in 'likable' means 'not'.</a:t>
             </a:r>
             <a:endParaRPr lang="en-US" sz="1350" dirty="0"/>
           </a:p>
@@ -39190,7 +41716,7 @@
                 <a:ea typeface="Calibri" pitchFamily="34" charset="-122"/>
                 <a:cs typeface="Calibri" pitchFamily="34" charset="-120"/>
               </a:rPr>
-              <a:t>Word Labs  •  wordlabs.app  •  Suffix: '-able' = can be done; capable of</a:t>
+              <a:t>Word Labs  •  wordlabs.app  •  Suffix: '-able' = able to</a:t>
             </a:r>
             <a:endParaRPr lang="en-US" sz="800" dirty="0"/>
           </a:p>
@@ -39302,7 +41828,7 @@
                 <a:ea typeface="Calibri" pitchFamily="34" charset="-122"/>
                 <a:cs typeface="Calibri" pitchFamily="34" charset="-120"/>
               </a:rPr>
-              <a:t>1.  '-able' means something can be done or is capable of happening.</a:t>
+              <a:t>1.  'likable' means 'difficult and unpleasant to be around'.</a:t>
             </a:r>
             <a:endParaRPr lang="en-US" sz="1300" dirty="0"/>
           </a:p>
@@ -39325,11 +41851,11 @@
             </a:avLst>
           </a:prstGeom>
           <a:solidFill>
-            <a:srgbClr val="DCFCE7"/>
-          </a:solidFill>
-          <a:ln w="12700">
-            <a:solidFill>
-              <a:srgbClr val="16A34A"/>
+            <a:srgbClr val="FEE2E2"/>
+          </a:solidFill>
+          <a:ln w="12700">
+            <a:solidFill>
+              <a:srgbClr val="DC2626"/>
             </a:solidFill>
             <a:prstDash val="solid"/>
           </a:ln>
@@ -39362,13 +41888,13 @@
             <a:r>
               <a:rPr lang="en-US" sz="1100" b="1" dirty="0">
                 <a:solidFill>
-                  <a:srgbClr val="16A34A"/>
+                  <a:srgbClr val="DC2626"/>
                 </a:solidFill>
                 <a:latin typeface="Trebuchet MS" pitchFamily="34" charset="0"/>
                 <a:ea typeface="Trebuchet MS" pitchFamily="34" charset="-122"/>
                 <a:cs typeface="Trebuchet MS" pitchFamily="34" charset="-120"/>
               </a:rPr>
-              <a:t>TRUE</a:t>
+              <a:t>FALSE</a:t>
             </a:r>
             <a:endParaRPr lang="en-US" sz="1100" dirty="0"/>
           </a:p>
@@ -39441,7 +41967,7 @@
                 <a:ea typeface="Calibri" pitchFamily="34" charset="-122"/>
                 <a:cs typeface="Calibri" pitchFamily="34" charset="-120"/>
               </a:rPr>
-              <a:t>2.  The word 'table' contains the suffix '-able'.</a:t>
+              <a:t>2.  'likable' means 'pleasant and easy to like'.</a:t>
             </a:r>
             <a:endParaRPr lang="en-US" sz="1300" dirty="0"/>
           </a:p>
@@ -39464,11 +41990,11 @@
             </a:avLst>
           </a:prstGeom>
           <a:solidFill>
-            <a:srgbClr val="FEE2E2"/>
-          </a:solidFill>
-          <a:ln w="12700">
-            <a:solidFill>
-              <a:srgbClr val="DC2626"/>
+            <a:srgbClr val="DCFCE7"/>
+          </a:solidFill>
+          <a:ln w="12700">
+            <a:solidFill>
+              <a:srgbClr val="16A34A"/>
             </a:solidFill>
             <a:prstDash val="solid"/>
           </a:ln>
@@ -39501,13 +42027,13 @@
             <a:r>
               <a:rPr lang="en-US" sz="1100" b="1" dirty="0">
                 <a:solidFill>
-                  <a:srgbClr val="DC2626"/>
+                  <a:srgbClr val="16A34A"/>
                 </a:solidFill>
                 <a:latin typeface="Trebuchet MS" pitchFamily="34" charset="0"/>
                 <a:ea typeface="Trebuchet MS" pitchFamily="34" charset="-122"/>
                 <a:cs typeface="Trebuchet MS" pitchFamily="34" charset="-120"/>
               </a:rPr>
-              <a:t>FALSE</a:t>
+              <a:t>TRUE</a:t>
             </a:r>
             <a:endParaRPr lang="en-US" sz="1100" dirty="0"/>
           </a:p>
@@ -39580,7 +42106,7 @@
                 <a:ea typeface="Calibri" pitchFamily="34" charset="-122"/>
                 <a:cs typeface="Calibri" pitchFamily="34" charset="-120"/>
               </a:rPr>
-              <a:t>3.  Adding '-able' to a word makes it a noun.</a:t>
+              <a:t>3.  'usable' means 'impossible to use'.</a:t>
             </a:r>
             <a:endParaRPr lang="en-US" sz="1300" dirty="0"/>
           </a:p>
@@ -39719,7 +42245,7 @@
                 <a:ea typeface="Calibri" pitchFamily="34" charset="-122"/>
                 <a:cs typeface="Calibri" pitchFamily="34" charset="-120"/>
               </a:rPr>
-              <a:t>4.  The prefix 'un-' can be added to many '-able' words to make their opposite, like 'uncomfortable'.</a:t>
+              <a:t>4.  'usable' means 'able to be used'.</a:t>
             </a:r>
             <a:endParaRPr lang="en-US" sz="1300" dirty="0"/>
           </a:p>
@@ -39858,7 +42384,7 @@
                 <a:ea typeface="Calibri" pitchFamily="34" charset="-122"/>
                 <a:cs typeface="Calibri" pitchFamily="34" charset="-120"/>
               </a:rPr>
-              <a:t>5.  The suffix '-able' comes from Latin.</a:t>
+              <a:t>5.  'able' means 'able to'.</a:t>
             </a:r>
             <a:endParaRPr lang="en-US" sz="1300" dirty="0"/>
           </a:p>
@@ -40216,7 +42742,7 @@
                 <a:ea typeface="Calibri" pitchFamily="34" charset="-122"/>
                 <a:cs typeface="Calibri" pitchFamily="34" charset="-120"/>
               </a:rPr>
-              <a:t>Word Labs  •  wordlabs.app  •  Suffix: '-able' = can be done; capable of</a:t>
+              <a:t>Word Labs  •  wordlabs.app  •  Suffix: '-able' = able to</a:t>
             </a:r>
             <a:endParaRPr lang="en-US" sz="800" dirty="0"/>
           </a:p>
@@ -40353,7 +42879,7 @@
                 <a:ea typeface="Trebuchet MS" pitchFamily="34" charset="-122"/>
                 <a:cs typeface="Trebuchet MS" pitchFamily="34" charset="-120"/>
               </a:rPr>
-              <a:t>can be done; capable of</a:t>
+              <a:t>able to</a:t>
             </a:r>
             <a:endParaRPr lang="en-US" sz="2000" dirty="0"/>
           </a:p>
@@ -40392,7 +42918,7 @@
                 <a:ea typeface="Calibri" pitchFamily="34" charset="-122"/>
                 <a:cs typeface="Calibri" pitchFamily="34" charset="-120"/>
               </a:rPr>
-              <a:t>Origin: Latin: habilis</a:t>
+              <a:t>Origin: Suffix</a:t>
             </a:r>
             <a:endParaRPr lang="en-US" sz="1100" dirty="0"/>
           </a:p>
@@ -40497,7 +43023,7 @@
                 <a:ea typeface="Trebuchet MS" pitchFamily="34" charset="-122"/>
                 <a:cs typeface="Trebuchet MS" pitchFamily="34" charset="-120"/>
               </a:rPr>
-              <a:t>enjoyable</a:t>
+              <a:t>usable</a:t>
             </a:r>
             <a:endParaRPr lang="en-US" sz="1300" dirty="0"/>
           </a:p>
@@ -40563,7 +43089,7 @@
                 <a:ea typeface="Trebuchet MS" pitchFamily="34" charset="-122"/>
                 <a:cs typeface="Trebuchet MS" pitchFamily="34" charset="-120"/>
               </a:rPr>
-              <a:t>remarkable</a:t>
+              <a:t>likable</a:t>
             </a:r>
             <a:endParaRPr lang="en-US" sz="1300" dirty="0"/>
           </a:p>
@@ -40629,7 +43155,7 @@
                 <a:ea typeface="Trebuchet MS" pitchFamily="34" charset="-122"/>
                 <a:cs typeface="Trebuchet MS" pitchFamily="34" charset="-120"/>
               </a:rPr>
-              <a:t>comfortable</a:t>
+              <a:t>movable</a:t>
             </a:r>
             <a:endParaRPr lang="en-US" sz="1300" dirty="0"/>
           </a:p>
@@ -40695,7 +43221,7 @@
                 <a:ea typeface="Trebuchet MS" pitchFamily="34" charset="-122"/>
                 <a:cs typeface="Trebuchet MS" pitchFamily="34" charset="-120"/>
               </a:rPr>
-              <a:t>washable</a:t>
+              <a:t>payable</a:t>
             </a:r>
             <a:endParaRPr lang="en-US" sz="1300" dirty="0"/>
           </a:p>
@@ -40761,7 +43287,7 @@
                 <a:ea typeface="Trebuchet MS" pitchFamily="34" charset="-122"/>
                 <a:cs typeface="Trebuchet MS" pitchFamily="34" charset="-120"/>
               </a:rPr>
-              <a:t>unbelievable</a:t>
+              <a:t>arguable</a:t>
             </a:r>
             <a:endParaRPr lang="en-US" sz="1300" dirty="0"/>
           </a:p>
@@ -40827,7 +43353,7 @@
                 <a:ea typeface="Trebuchet MS" pitchFamily="34" charset="-122"/>
                 <a:cs typeface="Trebuchet MS" pitchFamily="34" charset="-120"/>
               </a:rPr>
-              <a:t>changeable</a:t>
+              <a:t>arguably</a:t>
             </a:r>
             <a:endParaRPr lang="en-US" sz="1300" dirty="0"/>
           </a:p>
@@ -40893,7 +43419,7 @@
                 <a:ea typeface="Trebuchet MS" pitchFamily="34" charset="-122"/>
                 <a:cs typeface="Trebuchet MS" pitchFamily="34" charset="-120"/>
               </a:rPr>
-              <a:t>readable</a:t>
+              <a:t>formable</a:t>
             </a:r>
             <a:endParaRPr lang="en-US" sz="1300" dirty="0"/>
           </a:p>
@@ -41185,7 +43711,7 @@
                 <a:ea typeface="Calibri" pitchFamily="34" charset="-122"/>
                 <a:cs typeface="Calibri" pitchFamily="34" charset="-120"/>
               </a:rPr>
-              <a:t>Word Labs  •  wordlabs.app  •  Suffix: '-able' = can be done; capable of</a:t>
+              <a:t>Word Labs  •  wordlabs.app  •  Suffix: '-able' = able to</a:t>
             </a:r>
             <a:endParaRPr lang="en-US" sz="800" dirty="0"/>
           </a:p>
@@ -41486,7 +44012,7 @@
                 <a:ea typeface="Trebuchet MS" pitchFamily="34" charset="-122"/>
                 <a:cs typeface="Trebuchet MS" pitchFamily="34" charset="-120"/>
               </a:rPr>
-              <a:t>un-</a:t>
+              <a:t>ad-</a:t>
             </a:r>
             <a:endParaRPr lang="en-US" sz="1300" dirty="0"/>
           </a:p>
@@ -41550,7 +44076,7 @@
                 <a:ea typeface="Trebuchet MS" pitchFamily="34" charset="-122"/>
                 <a:cs typeface="Trebuchet MS" pitchFamily="34" charset="-120"/>
               </a:rPr>
-              <a:t>enjoy</a:t>
+              <a:t>cept</a:t>
             </a:r>
             <a:endParaRPr lang="en-US" sz="1300" dirty="0"/>
           </a:p>
@@ -41678,7 +44204,7 @@
                 <a:ea typeface="Trebuchet MS" pitchFamily="34" charset="-122"/>
                 <a:cs typeface="Trebuchet MS" pitchFamily="34" charset="-120"/>
               </a:rPr>
-              <a:t>re-</a:t>
+              <a:t>de-</a:t>
             </a:r>
             <a:endParaRPr lang="en-US" sz="1300" dirty="0"/>
           </a:p>
@@ -41742,7 +44268,7 @@
                 <a:ea typeface="Trebuchet MS" pitchFamily="34" charset="-122"/>
                 <a:cs typeface="Trebuchet MS" pitchFamily="34" charset="-120"/>
               </a:rPr>
-              <a:t>comfort</a:t>
+              <a:t>count</a:t>
             </a:r>
             <a:endParaRPr lang="en-US" sz="1300" dirty="0"/>
           </a:p>
@@ -41895,7 +44421,7 @@
                 <a:ea typeface="Trebuchet MS" pitchFamily="34" charset="-122"/>
                 <a:cs typeface="Trebuchet MS" pitchFamily="34" charset="-120"/>
               </a:rPr>
-              <a:t>remark</a:t>
+              <a:t>agree</a:t>
             </a:r>
             <a:endParaRPr lang="en-US" sz="1300" dirty="0"/>
           </a:p>
@@ -41984,7 +44510,7 @@
                 <a:ea typeface="Trebuchet MS" pitchFamily="34" charset="-122"/>
                 <a:cs typeface="Trebuchet MS" pitchFamily="34" charset="-120"/>
               </a:rPr>
-              <a:t>re-</a:t>
+              <a:t>in-</a:t>
             </a:r>
             <a:endParaRPr lang="en-US" sz="1300" dirty="0"/>
           </a:p>
@@ -42048,7 +44574,7 @@
                 <a:ea typeface="Trebuchet MS" pitchFamily="34" charset="-122"/>
                 <a:cs typeface="Trebuchet MS" pitchFamily="34" charset="-120"/>
               </a:rPr>
-              <a:t>change</a:t>
+              <a:t>argue</a:t>
             </a:r>
             <a:endParaRPr lang="en-US" sz="1300" dirty="0"/>
           </a:p>
@@ -42137,7 +44663,7 @@
                 <a:ea typeface="Trebuchet MS" pitchFamily="34" charset="-122"/>
                 <a:cs typeface="Trebuchet MS" pitchFamily="34" charset="-120"/>
               </a:rPr>
-              <a:t>pre-</a:t>
+              <a:t>ob-</a:t>
             </a:r>
             <a:endParaRPr lang="en-US" sz="1300" dirty="0"/>
           </a:p>
@@ -42201,7 +44727,7 @@
                 <a:ea typeface="Trebuchet MS" pitchFamily="34" charset="-122"/>
                 <a:cs typeface="Trebuchet MS" pitchFamily="34" charset="-120"/>
               </a:rPr>
-              <a:t>wash</a:t>
+              <a:t>believe</a:t>
             </a:r>
             <a:endParaRPr lang="en-US" sz="1300" dirty="0"/>
           </a:p>
@@ -42234,13 +44760,166 @@
       </p:sp>
       <p:sp>
         <p:nvSpPr>
-          <p:cNvPr id="43" name="Text 41"/>
-          <p:cNvSpPr/>
-          <p:nvPr/>
-        </p:nvSpPr>
-        <p:spPr>
-          <a:xfrm>
-            <a:off x="365760" y="4178808"/>
+          <p:cNvPr id="43" name="Shape 41"/>
+          <p:cNvSpPr/>
+          <p:nvPr/>
+        </p:nvSpPr>
+        <p:spPr>
+          <a:xfrm>
+            <a:off x="640080" y="4041648"/>
+            <a:ext cx="1463040" cy="420624"/>
+          </a:xfrm>
+          <a:prstGeom prst="rect">
+            <a:avLst/>
+          </a:prstGeom>
+          <a:solidFill>
+            <a:srgbClr val="DDD6FE"/>
+          </a:solidFill>
+          <a:ln w="12700">
+            <a:solidFill>
+              <a:srgbClr val="E5E7EB"/>
+            </a:solidFill>
+            <a:prstDash val="solid"/>
+          </a:ln>
+        </p:spPr>
+      </p:sp>
+      <p:sp>
+        <p:nvSpPr>
+          <p:cNvPr id="44" name="Text 42"/>
+          <p:cNvSpPr/>
+          <p:nvPr/>
+        </p:nvSpPr>
+        <p:spPr>
+          <a:xfrm>
+            <a:off x="640080" y="4041648"/>
+            <a:ext cx="1463040" cy="420624"/>
+          </a:xfrm>
+          <a:prstGeom prst="rect">
+            <a:avLst/>
+          </a:prstGeom>
+          <a:noFill/>
+          <a:ln/>
+        </p:spPr>
+        <p:txBody>
+          <a:bodyPr wrap="square" lIns="0" tIns="0" rIns="0" bIns="0" rtlCol="0" anchor="ctr"/>
+          <a:lstStyle/>
+          <a:p>
+            <a:pPr algn="ctr" indent="0" marL="0">
+              <a:buNone/>
+            </a:pPr>
+            <a:r>
+              <a:rPr lang="en-US" sz="1300" b="1" dirty="0">
+                <a:solidFill>
+                  <a:srgbClr val="4C1D95"/>
+                </a:solidFill>
+                <a:latin typeface="Trebuchet MS" pitchFamily="34" charset="0"/>
+                <a:ea typeface="Trebuchet MS" pitchFamily="34" charset="-122"/>
+                <a:cs typeface="Trebuchet MS" pitchFamily="34" charset="-120"/>
+              </a:rPr>
+              <a:t>pre-</a:t>
+            </a:r>
+            <a:endParaRPr lang="en-US" sz="1300" dirty="0"/>
+          </a:p>
+        </p:txBody>
+      </p:sp>
+      <p:sp>
+        <p:nvSpPr>
+          <p:cNvPr id="45" name="Shape 43"/>
+          <p:cNvSpPr/>
+          <p:nvPr/>
+        </p:nvSpPr>
+        <p:spPr>
+          <a:xfrm>
+            <a:off x="3291840" y="4041648"/>
+            <a:ext cx="1645920" cy="420624"/>
+          </a:xfrm>
+          <a:prstGeom prst="rect">
+            <a:avLst/>
+          </a:prstGeom>
+          <a:solidFill>
+            <a:srgbClr val="CCFBF1"/>
+          </a:solidFill>
+          <a:ln w="12700">
+            <a:solidFill>
+              <a:srgbClr val="E5E7EB"/>
+            </a:solidFill>
+            <a:prstDash val="solid"/>
+          </a:ln>
+        </p:spPr>
+      </p:sp>
+      <p:sp>
+        <p:nvSpPr>
+          <p:cNvPr id="46" name="Text 44"/>
+          <p:cNvSpPr/>
+          <p:nvPr/>
+        </p:nvSpPr>
+        <p:spPr>
+          <a:xfrm>
+            <a:off x="3291840" y="4041648"/>
+            <a:ext cx="1645920" cy="420624"/>
+          </a:xfrm>
+          <a:prstGeom prst="rect">
+            <a:avLst/>
+          </a:prstGeom>
+          <a:noFill/>
+          <a:ln/>
+        </p:spPr>
+        <p:txBody>
+          <a:bodyPr wrap="square" lIns="0" tIns="0" rIns="0" bIns="0" rtlCol="0" anchor="ctr"/>
+          <a:lstStyle/>
+          <a:p>
+            <a:pPr algn="ctr" indent="0" marL="0">
+              <a:buNone/>
+            </a:pPr>
+            <a:r>
+              <a:rPr lang="en-US" sz="1300" b="1" dirty="0">
+                <a:solidFill>
+                  <a:srgbClr val="0F766E"/>
+                </a:solidFill>
+                <a:latin typeface="Trebuchet MS" pitchFamily="34" charset="0"/>
+                <a:ea typeface="Trebuchet MS" pitchFamily="34" charset="-122"/>
+                <a:cs typeface="Trebuchet MS" pitchFamily="34" charset="-120"/>
+              </a:rPr>
+              <a:t>collect</a:t>
+            </a:r>
+            <a:endParaRPr lang="en-US" sz="1300" dirty="0"/>
+          </a:p>
+        </p:txBody>
+      </p:sp>
+      <p:sp>
+        <p:nvSpPr>
+          <p:cNvPr id="47" name="Shape 45"/>
+          <p:cNvSpPr/>
+          <p:nvPr/>
+        </p:nvSpPr>
+        <p:spPr>
+          <a:xfrm>
+            <a:off x="5943600" y="4041648"/>
+            <a:ext cx="1463040" cy="420624"/>
+          </a:xfrm>
+          <a:prstGeom prst="rect">
+            <a:avLst/>
+          </a:prstGeom>
+          <a:solidFill>
+            <a:srgbClr val="F1F5F9"/>
+          </a:solidFill>
+          <a:ln w="12700">
+            <a:solidFill>
+              <a:srgbClr val="E5E7EB"/>
+            </a:solidFill>
+            <a:prstDash val="solid"/>
+          </a:ln>
+        </p:spPr>
+      </p:sp>
+      <p:sp>
+        <p:nvSpPr>
+          <p:cNvPr id="48" name="Text 46"/>
+          <p:cNvSpPr/>
+          <p:nvPr/>
+        </p:nvSpPr>
+        <p:spPr>
+          <a:xfrm>
+            <a:off x="365760" y="4636008"/>
             <a:ext cx="1097280" cy="420624"/>
           </a:xfrm>
           <a:prstGeom prst="rect">
@@ -42273,13 +44952,13 @@
       </p:sp>
       <p:sp>
         <p:nvSpPr>
-          <p:cNvPr id="44" name="Shape 42"/>
-          <p:cNvSpPr/>
-          <p:nvPr/>
-        </p:nvSpPr>
-        <p:spPr>
-          <a:xfrm>
-            <a:off x="1508760" y="4178808"/>
+          <p:cNvPr id="49" name="Shape 47"/>
+          <p:cNvSpPr/>
+          <p:nvPr/>
+        </p:nvSpPr>
+        <p:spPr>
+          <a:xfrm>
+            <a:off x="1508760" y="4636008"/>
             <a:ext cx="822960" cy="420624"/>
           </a:xfrm>
           <a:prstGeom prst="rect">
@@ -42307,13 +44986,13 @@
       </p:sp>
       <p:sp>
         <p:nvSpPr>
-          <p:cNvPr id="45" name="Text 43"/>
-          <p:cNvSpPr/>
-          <p:nvPr/>
-        </p:nvSpPr>
-        <p:spPr>
-          <a:xfrm>
-            <a:off x="1508760" y="4178808"/>
+          <p:cNvPr id="50" name="Text 48"/>
+          <p:cNvSpPr/>
+          <p:nvPr/>
+        </p:nvSpPr>
+        <p:spPr>
+          <a:xfrm>
+            <a:off x="1508760" y="4636008"/>
             <a:ext cx="822960" cy="420624"/>
           </a:xfrm>
           <a:prstGeom prst="rect">
@@ -42338,7 +45017,7 @@
                 <a:ea typeface="Trebuchet MS" pitchFamily="34" charset="-122"/>
                 <a:cs typeface="Trebuchet MS" pitchFamily="34" charset="-120"/>
               </a:rPr>
-              <a:t>un-</a:t>
+              <a:t>ad-</a:t>
             </a:r>
             <a:endParaRPr lang="en-US" sz="1300" dirty="0"/>
           </a:p>
@@ -42346,13 +45025,13 @@
       </p:sp>
       <p:sp>
         <p:nvSpPr>
-          <p:cNvPr id="46" name="Text 44"/>
-          <p:cNvSpPr/>
-          <p:nvPr/>
-        </p:nvSpPr>
-        <p:spPr>
-          <a:xfrm>
-            <a:off x="2359152" y="4178808"/>
+          <p:cNvPr id="51" name="Text 49"/>
+          <p:cNvSpPr/>
+          <p:nvPr/>
+        </p:nvSpPr>
+        <p:spPr>
+          <a:xfrm>
+            <a:off x="2359152" y="4636008"/>
             <a:ext cx="320040" cy="420624"/>
           </a:xfrm>
           <a:prstGeom prst="rect">
@@ -42385,14 +45064,14 @@
       </p:sp>
       <p:sp>
         <p:nvSpPr>
-          <p:cNvPr id="47" name="Shape 45"/>
-          <p:cNvSpPr/>
-          <p:nvPr/>
-        </p:nvSpPr>
-        <p:spPr>
-          <a:xfrm>
-            <a:off x="2706624" y="4178808"/>
-            <a:ext cx="1097280" cy="420624"/>
+          <p:cNvPr id="52" name="Shape 50"/>
+          <p:cNvSpPr/>
+          <p:nvPr/>
+        </p:nvSpPr>
+        <p:spPr>
+          <a:xfrm>
+            <a:off x="2706624" y="4636008"/>
+            <a:ext cx="950976" cy="420624"/>
           </a:xfrm>
           <a:prstGeom prst="rect">
             <a:avLst>
@@ -42419,14 +45098,14 @@
       </p:sp>
       <p:sp>
         <p:nvSpPr>
-          <p:cNvPr id="48" name="Text 46"/>
-          <p:cNvSpPr/>
-          <p:nvPr/>
-        </p:nvSpPr>
-        <p:spPr>
-          <a:xfrm>
-            <a:off x="2706624" y="4178808"/>
-            <a:ext cx="1097280" cy="420624"/>
+          <p:cNvPr id="53" name="Text 51"/>
+          <p:cNvSpPr/>
+          <p:nvPr/>
+        </p:nvSpPr>
+        <p:spPr>
+          <a:xfrm>
+            <a:off x="2706624" y="4636008"/>
+            <a:ext cx="950976" cy="420624"/>
           </a:xfrm>
           <a:prstGeom prst="rect">
             <a:avLst/>
@@ -42450,7 +45129,7 @@
                 <a:ea typeface="Trebuchet MS" pitchFamily="34" charset="-122"/>
                 <a:cs typeface="Trebuchet MS" pitchFamily="34" charset="-120"/>
               </a:rPr>
-              <a:t>enjoy</a:t>
+              <a:t>cept</a:t>
             </a:r>
             <a:endParaRPr lang="en-US" sz="1300" dirty="0"/>
           </a:p>
@@ -42458,13 +45137,13 @@
       </p:sp>
       <p:sp>
         <p:nvSpPr>
-          <p:cNvPr id="49" name="Text 47"/>
-          <p:cNvSpPr/>
-          <p:nvPr/>
-        </p:nvSpPr>
-        <p:spPr>
-          <a:xfrm>
-            <a:off x="3831336" y="4178808"/>
+          <p:cNvPr id="54" name="Text 52"/>
+          <p:cNvSpPr/>
+          <p:nvPr/>
+        </p:nvSpPr>
+        <p:spPr>
+          <a:xfrm>
+            <a:off x="3685032" y="4636008"/>
             <a:ext cx="320040" cy="420624"/>
           </a:xfrm>
           <a:prstGeom prst="rect">
@@ -42497,13 +45176,13 @@
       </p:sp>
       <p:sp>
         <p:nvSpPr>
-          <p:cNvPr id="50" name="Shape 48"/>
-          <p:cNvSpPr/>
-          <p:nvPr/>
-        </p:nvSpPr>
-        <p:spPr>
-          <a:xfrm>
-            <a:off x="4178808" y="4178808"/>
+          <p:cNvPr id="55" name="Shape 53"/>
+          <p:cNvSpPr/>
+          <p:nvPr/>
+        </p:nvSpPr>
+        <p:spPr>
+          <a:xfrm>
+            <a:off x="4032504" y="4636008"/>
             <a:ext cx="1097280" cy="420624"/>
           </a:xfrm>
           <a:prstGeom prst="rect">
@@ -42531,13 +45210,13 @@
       </p:sp>
       <p:sp>
         <p:nvSpPr>
-          <p:cNvPr id="51" name="Text 49"/>
-          <p:cNvSpPr/>
-          <p:nvPr/>
-        </p:nvSpPr>
-        <p:spPr>
-          <a:xfrm>
-            <a:off x="4178808" y="4178808"/>
+          <p:cNvPr id="56" name="Text 54"/>
+          <p:cNvSpPr/>
+          <p:nvPr/>
+        </p:nvSpPr>
+        <p:spPr>
+          <a:xfrm>
+            <a:off x="4032504" y="4636008"/>
             <a:ext cx="1097280" cy="420624"/>
           </a:xfrm>
           <a:prstGeom prst="rect">
@@ -42570,13 +45249,13 @@
       </p:sp>
       <p:sp>
         <p:nvSpPr>
-          <p:cNvPr id="52" name="Text 50"/>
-          <p:cNvSpPr/>
-          <p:nvPr/>
-        </p:nvSpPr>
-        <p:spPr>
-          <a:xfrm>
-            <a:off x="5349240" y="4178808"/>
+          <p:cNvPr id="57" name="Text 55"/>
+          <p:cNvSpPr/>
+          <p:nvPr/>
+        </p:nvSpPr>
+        <p:spPr>
+          <a:xfrm>
+            <a:off x="5202936" y="4636008"/>
             <a:ext cx="365760" cy="420624"/>
           </a:xfrm>
           <a:prstGeom prst="rect">
@@ -42609,13 +45288,13 @@
       </p:sp>
       <p:sp>
         <p:nvSpPr>
-          <p:cNvPr id="53" name="Shape 51"/>
-          <p:cNvSpPr/>
-          <p:nvPr/>
-        </p:nvSpPr>
-        <p:spPr>
-          <a:xfrm>
-            <a:off x="5760720" y="4178808"/>
+          <p:cNvPr id="58" name="Shape 56"/>
+          <p:cNvSpPr/>
+          <p:nvPr/>
+        </p:nvSpPr>
+        <p:spPr>
+          <a:xfrm>
+            <a:off x="5614416" y="4636008"/>
             <a:ext cx="2194560" cy="420624"/>
           </a:xfrm>
           <a:prstGeom prst="rect">
@@ -42636,13 +45315,13 @@
       </p:sp>
       <p:sp>
         <p:nvSpPr>
-          <p:cNvPr id="54" name="Text 52"/>
-          <p:cNvSpPr/>
-          <p:nvPr/>
-        </p:nvSpPr>
-        <p:spPr>
-          <a:xfrm>
-            <a:off x="5760720" y="4178808"/>
+          <p:cNvPr id="59" name="Text 57"/>
+          <p:cNvSpPr/>
+          <p:nvPr/>
+        </p:nvSpPr>
+        <p:spPr>
+          <a:xfrm>
+            <a:off x="5614416" y="4636008"/>
             <a:ext cx="2194560" cy="420624"/>
           </a:xfrm>
           <a:prstGeom prst="rect">
@@ -42667,7 +45346,7 @@
                 <a:ea typeface="Trebuchet MS" pitchFamily="34" charset="-122"/>
                 <a:cs typeface="Trebuchet MS" pitchFamily="34" charset="-120"/>
               </a:rPr>
-              <a:t>enjoyable</a:t>
+              <a:t>usable</a:t>
             </a:r>
             <a:endParaRPr lang="en-US" sz="1400" dirty="0"/>
           </a:p>
@@ -42959,7 +45638,7 @@
                 <a:ea typeface="Calibri" pitchFamily="34" charset="-122"/>
                 <a:cs typeface="Calibri" pitchFamily="34" charset="-120"/>
               </a:rPr>
-              <a:t>Word Labs  •  wordlabs.app  •  Suffix: '-able' = can be done; capable of</a:t>
+              <a:t>Word Labs  •  wordlabs.app  •  Suffix: '-able' = able to</a:t>
             </a:r>
             <a:endParaRPr lang="en-US" sz="800" dirty="0"/>
           </a:p>
@@ -43071,7 +45750,7 @@
                 <a:ea typeface="Trebuchet MS" pitchFamily="34" charset="-122"/>
                 <a:cs typeface="Trebuchet MS" pitchFamily="34" charset="-120"/>
               </a:rPr>
-              <a:t>enjoyable</a:t>
+              <a:t>usable</a:t>
             </a:r>
             <a:endParaRPr lang="en-US" sz="1200" dirty="0"/>
           </a:p>
@@ -43137,7 +45816,7 @@
                 <a:ea typeface="Calibri" pitchFamily="34" charset="-122"/>
                 <a:cs typeface="Calibri" pitchFamily="34" charset="-120"/>
               </a:rPr>
-              <a:t>So surprising or amazing that it is hard to believe.</a:t>
+              <a:t>able to be disputed or questioned; open to debate</a:t>
             </a:r>
             <a:endParaRPr lang="en-US" sz="1200" dirty="0"/>
           </a:p>
@@ -43210,7 +45889,7 @@
                 <a:ea typeface="Trebuchet MS" pitchFamily="34" charset="-122"/>
                 <a:cs typeface="Trebuchet MS" pitchFamily="34" charset="-120"/>
               </a:rPr>
-              <a:t>remarkable</a:t>
+              <a:t>likable</a:t>
             </a:r>
             <a:endParaRPr lang="en-US" sz="1200" dirty="0"/>
           </a:p>
@@ -43276,7 +45955,7 @@
                 <a:ea typeface="Calibri" pitchFamily="34" charset="-122"/>
                 <a:cs typeface="Calibri" pitchFamily="34" charset="-120"/>
               </a:rPr>
-              <a:t>Can be washed without being damaged.</a:t>
+              <a:t>able to be paid, or required to be paid by a certain time</a:t>
             </a:r>
             <a:endParaRPr lang="en-US" sz="1200" dirty="0"/>
           </a:p>
@@ -43349,7 +46028,7 @@
                 <a:ea typeface="Trebuchet MS" pitchFamily="34" charset="-122"/>
                 <a:cs typeface="Trebuchet MS" pitchFamily="34" charset="-120"/>
               </a:rPr>
-              <a:t>comfortable</a:t>
+              <a:t>movable</a:t>
             </a:r>
             <a:endParaRPr lang="en-US" sz="1200" dirty="0"/>
           </a:p>
@@ -43415,7 +46094,7 @@
                 <a:ea typeface="Calibri" pitchFamily="34" charset="-122"/>
                 <a:cs typeface="Calibri" pitchFamily="34" charset="-120"/>
               </a:rPr>
-              <a:t>Likely to change often, like the weather on a cloudy day.</a:t>
+              <a:t>used to say that something can reasonably be argued or claimed</a:t>
             </a:r>
             <a:endParaRPr lang="en-US" sz="1200" dirty="0"/>
           </a:p>
@@ -43488,7 +46167,7 @@
                 <a:ea typeface="Trebuchet MS" pitchFamily="34" charset="-122"/>
                 <a:cs typeface="Trebuchet MS" pitchFamily="34" charset="-120"/>
               </a:rPr>
-              <a:t>washable</a:t>
+              <a:t>payable</a:t>
             </a:r>
             <a:endParaRPr lang="en-US" sz="1200" dirty="0"/>
           </a:p>
@@ -43554,7 +46233,7 @@
                 <a:ea typeface="Calibri" pitchFamily="34" charset="-122"/>
                 <a:cs typeface="Calibri" pitchFamily="34" charset="-120"/>
               </a:rPr>
-              <a:t>Feeling relaxed and at ease, with no pain or discomfort.</a:t>
+              <a:t>able to be moved from one place to another</a:t>
             </a:r>
             <a:endParaRPr lang="en-US" sz="1200" dirty="0"/>
           </a:p>
@@ -43627,7 +46306,7 @@
                 <a:ea typeface="Trebuchet MS" pitchFamily="34" charset="-122"/>
                 <a:cs typeface="Trebuchet MS" pitchFamily="34" charset="-120"/>
               </a:rPr>
-              <a:t>unbelievable</a:t>
+              <a:t>arguable</a:t>
             </a:r>
             <a:endParaRPr lang="en-US" sz="1200" dirty="0"/>
           </a:p>
@@ -43693,7 +46372,7 @@
                 <a:ea typeface="Calibri" pitchFamily="34" charset="-122"/>
                 <a:cs typeface="Calibri" pitchFamily="34" charset="-120"/>
               </a:rPr>
-              <a:t>Easy and pleasant to read.</a:t>
+              <a:t>able to be shaped or moulded into something</a:t>
             </a:r>
             <a:endParaRPr lang="en-US" sz="1200" dirty="0"/>
           </a:p>
@@ -43766,7 +46445,7 @@
                 <a:ea typeface="Trebuchet MS" pitchFamily="34" charset="-122"/>
                 <a:cs typeface="Trebuchet MS" pitchFamily="34" charset="-120"/>
               </a:rPr>
-              <a:t>changeable</a:t>
+              <a:t>arguably</a:t>
             </a:r>
             <a:endParaRPr lang="en-US" sz="1200" dirty="0"/>
           </a:p>
@@ -43832,7 +46511,7 @@
                 <a:ea typeface="Calibri" pitchFamily="34" charset="-122"/>
                 <a:cs typeface="Calibri" pitchFamily="34" charset="-120"/>
               </a:rPr>
-              <a:t>Something that gives you pleasure or is fun to do.</a:t>
+              <a:t>able to be used</a:t>
             </a:r>
             <a:endParaRPr lang="en-US" sz="1200" dirty="0"/>
           </a:p>
@@ -43905,7 +46584,7 @@
                 <a:ea typeface="Trebuchet MS" pitchFamily="34" charset="-122"/>
                 <a:cs typeface="Trebuchet MS" pitchFamily="34" charset="-120"/>
               </a:rPr>
-              <a:t>readable</a:t>
+              <a:t>formable</a:t>
             </a:r>
             <a:endParaRPr lang="en-US" sz="1200" dirty="0"/>
           </a:p>
@@ -43971,7 +46650,7 @@
                 <a:ea typeface="Calibri" pitchFamily="34" charset="-122"/>
                 <a:cs typeface="Calibri" pitchFamily="34" charset="-120"/>
               </a:rPr>
-              <a:t>Something so special or unusual that people notice it.</a:t>
+              <a:t>pleasant and easy to like</a:t>
             </a:r>
             <a:endParaRPr lang="en-US" sz="1200" dirty="0"/>
           </a:p>
@@ -44263,7 +46942,7 @@
                 <a:ea typeface="Calibri" pitchFamily="34" charset="-122"/>
                 <a:cs typeface="Calibri" pitchFamily="34" charset="-120"/>
               </a:rPr>
-              <a:t>Word Labs  •  wordlabs.app  •  Suffix: '-able' = can be done; capable of</a:t>
+              <a:t>Word Labs  •  wordlabs.app  •  Suffix: '-able' = able to</a:t>
             </a:r>
             <a:endParaRPr lang="en-US" sz="800" dirty="0"/>
           </a:p>
@@ -44466,7 +47145,7 @@
                 <a:ea typeface="Calibri" pitchFamily="34" charset="-122"/>
                 <a:cs typeface="Calibri" pitchFamily="34" charset="-120"/>
               </a:rPr>
-              <a:t>The view from the top of the mountain was absolutely remarkable.</a:t>
+              <a:t>After the repair, the old radio was usable again.</a:t>
             </a:r>
             <a:endParaRPr lang="en-US" sz="1500" dirty="0"/>
           </a:p>
@@ -44630,7 +47309,7 @@
                 <a:ea typeface="Calibri" pitchFamily="34" charset="-122"/>
                 <a:cs typeface="Calibri" pitchFamily="34" charset="-120"/>
               </a:rPr>
-              <a:t>Our teacher asked us to bring a washable water bottle to school every day.</a:t>
+              <a:t>Her likable personality made her popular with everyone.</a:t>
             </a:r>
             <a:endParaRPr lang="en-US" sz="1500" dirty="0"/>
           </a:p>
@@ -44794,7 +47473,7 @@
                 <a:ea typeface="Calibri" pitchFamily="34" charset="-122"/>
                 <a:cs typeface="Calibri" pitchFamily="34" charset="-120"/>
               </a:rPr>
-              <a:t>The book was so readable that I finished it in one afternoon.</a:t>
+              <a:t>The teacher arranged the movable desks into a circle for group work.</a:t>
             </a:r>
             <a:endParaRPr lang="en-US" sz="1500" dirty="0"/>
           </a:p>
